--- a/docs/SiteGuard-Pitch-Deck.pptx
+++ b/docs/SiteGuard-Pitch-Deck.pptx
@@ -2,22 +2,21 @@
 <file path=ppt/presentation.xml><?xml version="1.0" encoding="utf-8"?>
 <p:presentation xmlns:p="http://schemas.openxmlformats.org/presentationml/2006/main">
   <p:sldMasterIdLst>
-    <p:sldMasterId xmlns:r="http://schemas.openxmlformats.org/officeDocument/2006/relationships" id="2147483648" r:id="Re228f5b42e4040ba"/>
+    <p:sldMasterId xmlns:r="http://schemas.openxmlformats.org/officeDocument/2006/relationships" id="2147483648" r:id="R51e2070980154457"/>
   </p:sldMasterIdLst>
   <p:notesMasterIdLst>
-    <p:notesMasterId xmlns:r="http://schemas.openxmlformats.org/officeDocument/2006/relationships" r:id="R9c0295c0d1f24872"/>
+    <p:notesMasterId xmlns:r="http://schemas.openxmlformats.org/officeDocument/2006/relationships" r:id="R4a36bed9a7c64496"/>
   </p:notesMasterIdLst>
   <p:sldIdLst>
-    <p:sldId xmlns:r="http://schemas.openxmlformats.org/officeDocument/2006/relationships" id="256" r:id="R6909cbaaf43f4c4c"/>
-    <p:sldId xmlns:r="http://schemas.openxmlformats.org/officeDocument/2006/relationships" id="257" r:id="R0332c4f704154f3d"/>
-    <p:sldId xmlns:r="http://schemas.openxmlformats.org/officeDocument/2006/relationships" id="258" r:id="R073c75403cf44231"/>
-    <p:sldId xmlns:r="http://schemas.openxmlformats.org/officeDocument/2006/relationships" id="259" r:id="Rbffd0f452b94426a"/>
-    <p:sldId xmlns:r="http://schemas.openxmlformats.org/officeDocument/2006/relationships" id="260" r:id="R528d652da3ac40f3"/>
-    <p:sldId xmlns:r="http://schemas.openxmlformats.org/officeDocument/2006/relationships" id="261" r:id="Re01dc977a9104b94"/>
-    <p:sldId xmlns:r="http://schemas.openxmlformats.org/officeDocument/2006/relationships" id="262" r:id="Rcc00016fb2d74f97"/>
-    <p:sldId xmlns:r="http://schemas.openxmlformats.org/officeDocument/2006/relationships" id="263" r:id="Rf71dadf747be4af5"/>
-    <p:sldId xmlns:r="http://schemas.openxmlformats.org/officeDocument/2006/relationships" id="264" r:id="Rbef2e908919f4b89"/>
-    <p:sldId xmlns:r="http://schemas.openxmlformats.org/officeDocument/2006/relationships" id="265" r:id="Rdf5d14e6e8d64e0b"/>
+    <p:sldId xmlns:r="http://schemas.openxmlformats.org/officeDocument/2006/relationships" id="256" r:id="R2ed65384570d4b99"/>
+    <p:sldId xmlns:r="http://schemas.openxmlformats.org/officeDocument/2006/relationships" id="257" r:id="Rdae1edb0a94d4893"/>
+    <p:sldId xmlns:r="http://schemas.openxmlformats.org/officeDocument/2006/relationships" id="258" r:id="R58c0eb20d64e4d7d"/>
+    <p:sldId xmlns:r="http://schemas.openxmlformats.org/officeDocument/2006/relationships" id="259" r:id="R7f09f750829748e8"/>
+    <p:sldId xmlns:r="http://schemas.openxmlformats.org/officeDocument/2006/relationships" id="260" r:id="Rdbb7e2a966a14856"/>
+    <p:sldId xmlns:r="http://schemas.openxmlformats.org/officeDocument/2006/relationships" id="261" r:id="Rc7c78a973daa4b5f"/>
+    <p:sldId xmlns:r="http://schemas.openxmlformats.org/officeDocument/2006/relationships" id="262" r:id="R6ce0c28c75de4726"/>
+    <p:sldId xmlns:r="http://schemas.openxmlformats.org/officeDocument/2006/relationships" id="263" r:id="Rd09810a851f54985"/>
+    <p:sldId xmlns:r="http://schemas.openxmlformats.org/officeDocument/2006/relationships" id="264" r:id="Rdb10eddaf1094cc6"/>
   </p:sldIdLst>
   <p:sldSz cx="12192000" cy="6858000"/>
   <p:notesSz cx="6858000" cy="9144000"/>
@@ -451,7 +450,7 @@
           <a:lstStyle xmlns:a="http://schemas.openxmlformats.org/drawingml/2006/main"/>
           <a:p xmlns:a="http://schemas.openxmlformats.org/drawingml/2006/main">
             <a:r>
-              <a:t>Open with one sentence: A worker says, ‘I need five more minutes.’ SiteGuard connects that request to consented check-in context and a supervisor response. Then move directly into the problem.</a:t>
+              <a:t>Open with the worker, not the technology. A worker needs five more minutes. SiteGuard makes the request visible and helps the team respond without moving the protected break.</a:t>
             </a:r>
           </a:p>
           <a:p xmlns:a="http://schemas.openxmlformats.org/drawingml/2006/main">
@@ -472,96 +471,6 @@
           <a:p xmlns:a="http://schemas.openxmlformats.org/drawingml/2006/main">
             <a:r>
               <a:t>- docs/PROJECT_SPEC.md</a:t>
-            </a:r>
-          </a:p>
-        </p:txBody>
-      </p:sp>
-      <p:sp>
-        <p:nvSpPr>
-          <p:cNvPr id="4" name="Slide Number Placeholder 3"/>
-          <p:cNvSpPr>
-            <a:spLocks xmlns:a="http://schemas.openxmlformats.org/drawingml/2006/main" noGrp="1"/>
-          </p:cNvSpPr>
-          <p:nvPr>
-            <p:ph type="sldNum" idx="5"/>
-          </p:nvPr>
-        </p:nvSpPr>
-        <p:spPr/>
-        <p:txBody>
-          <a:bodyPr xmlns:a="http://schemas.openxmlformats.org/drawingml/2006/main"/>
-          <a:lstStyle xmlns:a="http://schemas.openxmlformats.org/drawingml/2006/main"/>
-          <a:p xmlns:a="http://schemas.openxmlformats.org/drawingml/2006/main"/>
-        </p:txBody>
-      </p:sp>
-    </p:spTree>
-  </p:cSld>
-  <p:clrMapOvr>
-    <a:masterClrMapping xmlns:a="http://schemas.openxmlformats.org/drawingml/2006/main"/>
-  </p:clrMapOvr>
-</p:notes>
-</file>
-
-<file path=ppt/notesSlides/notesSlide10.xml><?xml version="1.0" encoding="utf-8"?>
-<p:notes xmlns:p="http://schemas.openxmlformats.org/presentationml/2006/main">
-  <p:cSld>
-    <p:spTree>
-      <p:nvGrpSpPr>
-        <p:cNvPr id="1" name=""/>
-        <p:cNvGrpSpPr/>
-        <p:nvPr/>
-      </p:nvGrpSpPr>
-      <p:grpSpPr>
-        <a:xfrm xmlns:a="http://schemas.openxmlformats.org/drawingml/2006/main"/>
-      </p:grpSpPr>
-      <p:sp>
-        <p:nvSpPr>
-          <p:cNvPr id="2" name="Slide Image Placeholder 1"/>
-          <p:cNvSpPr>
-            <a:spLocks xmlns:a="http://schemas.openxmlformats.org/drawingml/2006/main" noGrp="1"/>
-          </p:cNvSpPr>
-          <p:nvPr>
-            <p:ph type="sldImg" idx="0"/>
-          </p:nvPr>
-        </p:nvSpPr>
-        <p:spPr/>
-      </p:sp>
-      <p:sp>
-        <p:nvSpPr>
-          <p:cNvPr id="3" name="Notes Placeholder 2"/>
-          <p:cNvSpPr>
-            <a:spLocks xmlns:a="http://schemas.openxmlformats.org/drawingml/2006/main" noGrp="1"/>
-          </p:cNvSpPr>
-          <p:nvPr>
-            <p:ph type="body" idx="1"/>
-          </p:nvPr>
-        </p:nvSpPr>
-        <p:spPr/>
-        <p:txBody>
-          <a:bodyPr xmlns:a="http://schemas.openxmlformats.org/drawingml/2006/main"/>
-          <a:lstStyle xmlns:a="http://schemas.openxmlformats.org/drawingml/2006/main"/>
-          <a:p xmlns:a="http://schemas.openxmlformats.org/drawingml/2006/main">
-            <a:r>
-              <a:t>Close on the outcome: SiteGuard turns ‘I need more rest’ into a coordinated response while worker choice and protected breaks remain intact. Then name the three sponsor categories and invite questions.</a:t>
-            </a:r>
-          </a:p>
-          <a:p xmlns:a="http://schemas.openxmlformats.org/drawingml/2006/main">
-            <a:r>
-              <a:t/>
-            </a:r>
-          </a:p>
-          <a:p xmlns:a="http://schemas.openxmlformats.org/drawingml/2006/main">
-            <a:r>
-              <a:t>Sources:</a:t>
-            </a:r>
-          </a:p>
-          <a:p xmlns:a="http://schemas.openxmlformats.org/drawingml/2006/main">
-            <a:r>
-              <a:t>- README.md</a:t>
-            </a:r>
-          </a:p>
-          <a:p xmlns:a="http://schemas.openxmlformats.org/drawingml/2006/main">
-            <a:r>
-              <a:t>- https://www.youtube.com/watch?v=CzoFM4OR6TA</a:t>
             </a:r>
           </a:p>
         </p:txBody>
@@ -631,7 +540,7 @@
           <a:lstStyle xmlns:a="http://schemas.openxmlformats.org/drawingml/2006/main"/>
           <a:p xmlns:a="http://schemas.openxmlformats.org/drawingml/2006/main">
             <a:r>
-              <a:t>Explain the operational gap. Avoid accident statistics. The product starts with a worker-controlled request and preserves the site’s protected break rules.</a:t>
+              <a:t>Let the quote breathe. The worker initiates the check-in and decides whether to ask for support. SiteGuard does not make a fitness-for-work decision.</a:t>
             </a:r>
           </a:p>
           <a:p xmlns:a="http://schemas.openxmlformats.org/drawingml/2006/main">
@@ -721,7 +630,7 @@
           <a:lstStyle xmlns:a="http://schemas.openxmlformats.org/drawingml/2006/main"/>
           <a:p xmlns:a="http://schemas.openxmlformats.org/drawingml/2006/main">
             <a:r>
-              <a:t>Walk left to right. Presage supplies observations. Tiger Data preserves history. Gemini explains server-approved facts. The worker chooses whether to ask. A supervisor reviews the request and adjusts coverage.</a:t>
+              <a:t>Show the live check-in. The worker can stop at any time. The screenshots in this deck use labeled synthetic readings. In a live environment, consented frames pass transiently through the Presage measurement path.</a:t>
             </a:r>
           </a:p>
           <a:p xmlns:a="http://schemas.openxmlformats.org/drawingml/2006/main">
@@ -736,17 +645,12 @@
           </a:p>
           <a:p xmlns:a="http://schemas.openxmlformats.org/drawingml/2006/main">
             <a:r>
-              <a:t>- README.md</a:t>
-            </a:r>
-          </a:p>
-          <a:p xmlns:a="http://schemas.openxmlformats.org/drawingml/2006/main">
-            <a:r>
-              <a:t>- docs/PROJECT_SPEC.md</a:t>
-            </a:r>
-          </a:p>
-          <a:p xmlns:a="http://schemas.openxmlformats.org/drawingml/2006/main">
-            <a:r>
-              <a:t>- docs/PRESENTATION_SCRIPT.md</a:t>
+              <a:t>- docs/DEMO_RUN_REPORT.md</a:t>
+            </a:r>
+          </a:p>
+          <a:p xmlns:a="http://schemas.openxmlformats.org/drawingml/2006/main">
+            <a:r>
+              <a:t>- docs/PRESAGE_CONTRACT.md</a:t>
             </a:r>
           </a:p>
         </p:txBody>
@@ -816,7 +720,7 @@
           <a:lstStyle xmlns:a="http://schemas.openxmlformats.org/drawingml/2006/main"/>
           <a:p xmlns:a="http://schemas.openxmlformats.org/drawingml/2006/main">
             <a:r>
-              <a:t>Call out that skipping a measurement does not block support. Sharing stays off unless the worker opts in. Missing or invalid readings remain visible as gaps rather than being filled in.</a:t>
+              <a:t>The product presents a plain-language next step and its evidence. It labels uncertainty and keeps the final choice with the worker. The demo result must remain clearly labeled when it uses synthetic data.</a:t>
             </a:r>
           </a:p>
           <a:p xmlns:a="http://schemas.openxmlformats.org/drawingml/2006/main">
@@ -831,7 +735,7 @@
           </a:p>
           <a:p xmlns:a="http://schemas.openxmlformats.org/drawingml/2006/main">
             <a:r>
-              <a:t>- docs/PRESENTATION_SCRIPT.md</a:t>
+              <a:t>- README.md</a:t>
             </a:r>
           </a:p>
           <a:p xmlns:a="http://schemas.openxmlformats.org/drawingml/2006/main">
@@ -906,7 +810,7 @@
           <a:lstStyle xmlns:a="http://schemas.openxmlformats.org/drawingml/2006/main"/>
           <a:p xmlns:a="http://schemas.openxmlformats.org/drawingml/2006/main">
             <a:r>
-              <a:t>This is the core proof point. Show the request, approval, preview, and committed coverage. Emphasize that the planner cannot shorten or move the protected break and leaves uncovered gaps visible.</a:t>
+              <a:t>This is the payoff. A worker asks for more rest. A supervisor reviews it. The planner updates coverage while protected time remains fixed.</a:t>
             </a:r>
           </a:p>
           <a:p xmlns:a="http://schemas.openxmlformats.org/drawingml/2006/main">
@@ -921,17 +825,12 @@
           </a:p>
           <a:p xmlns:a="http://schemas.openxmlformats.org/drawingml/2006/main">
             <a:r>
-              <a:t>- docs/PRESENTATION_SCRIPT.md</a:t>
+              <a:t>- docs/DEMO_RUN_REPORT.md</a:t>
             </a:r>
           </a:p>
           <a:p xmlns:a="http://schemas.openxmlformats.org/drawingml/2006/main">
             <a:r>
               <a:t>- docs/PROJECT_SPEC.md</a:t>
-            </a:r>
-          </a:p>
-          <a:p xmlns:a="http://schemas.openxmlformats.org/drawingml/2006/main">
-            <a:r>
-              <a:t>- docs/DEMO_RUN_REPORT.md</a:t>
             </a:r>
           </a:p>
         </p:txBody>
@@ -1001,7 +900,7 @@
           <a:lstStyle xmlns:a="http://schemas.openxmlformats.org/drawingml/2006/main"/>
           <a:p xmlns:a="http://schemas.openxmlformats.org/drawingml/2006/main">
             <a:r>
-              <a:t>Tie each sponsor to a visible job in the product. Presage supplies the camera observations. Tiger Data stores time-series history. Gemini explains only facts the server approved. Supabase verifies identity and the app assigns roles.</a:t>
+              <a:t>Frame this as a prototype workflow. The heuristic surfaces a possible person-down event. A human reviews and resolves it. Avoid claiming autonomous fall diagnosis.</a:t>
             </a:r>
           </a:p>
           <a:p xmlns:a="http://schemas.openxmlformats.org/drawingml/2006/main">
@@ -1016,27 +915,12 @@
           </a:p>
           <a:p xmlns:a="http://schemas.openxmlformats.org/drawingml/2006/main">
             <a:r>
-              <a:t>- README.md</a:t>
-            </a:r>
-          </a:p>
-          <a:p xmlns:a="http://schemas.openxmlformats.org/drawingml/2006/main">
-            <a:r>
-              <a:t>- docs/PRESAGE_CONTRACT.md</a:t>
-            </a:r>
-          </a:p>
-          <a:p xmlns:a="http://schemas.openxmlformats.org/drawingml/2006/main">
-            <a:r>
-              <a:t>- docs/TIGER_DATA_VERIFICATION.md</a:t>
-            </a:r>
-          </a:p>
-          <a:p xmlns:a="http://schemas.openxmlformats.org/drawingml/2006/main">
-            <a:r>
-              <a:t>- docs/SUPABASE_AUTH.md</a:t>
-            </a:r>
-          </a:p>
-          <a:p xmlns:a="http://schemas.openxmlformats.org/drawingml/2006/main">
-            <a:r>
-              <a:t>- apps/api/src/insights/explain.ts</a:t>
+              <a:t>- docs/PROJECT_SPEC.md</a:t>
+            </a:r>
+          </a:p>
+          <a:p xmlns:a="http://schemas.openxmlformats.org/drawingml/2006/main">
+            <a:r>
+              <a:t>- docs/DEMO_RUN_REPORT.md</a:t>
             </a:r>
           </a:p>
         </p:txBody>
@@ -1106,7 +990,7 @@
           <a:lstStyle xmlns:a="http://schemas.openxmlformats.org/drawingml/2006/main"/>
           <a:p xmlns:a="http://schemas.openxmlformats.org/drawingml/2006/main">
             <a:r>
-              <a:t>Use concrete controls. Do not call the product private by design without explaining consent, sharing defaults, source labels, transient frame processing, role checks, and explicit missing-data states.</a:t>
+              <a:t>Presage supplies observations. SiteGuard keeps the worker-facing flow. Tiger Data holds history. Gemini explains only approved facts. A human makes the operational decision.</a:t>
             </a:r>
           </a:p>
           <a:p xmlns:a="http://schemas.openxmlformats.org/drawingml/2006/main">
@@ -1121,17 +1005,17 @@
           </a:p>
           <a:p xmlns:a="http://schemas.openxmlformats.org/drawingml/2006/main">
             <a:r>
-              <a:t>- docs/PROJECT_SPEC.md</a:t>
-            </a:r>
-          </a:p>
-          <a:p xmlns:a="http://schemas.openxmlformats.org/drawingml/2006/main">
-            <a:r>
-              <a:t>- docs/PRESENTATION_SCRIPT.md</a:t>
-            </a:r>
-          </a:p>
-          <a:p xmlns:a="http://schemas.openxmlformats.org/drawingml/2006/main">
-            <a:r>
-              <a:t>- docs/SECURITY_REVIEW.md</a:t>
+              <a:t>- README.md</a:t>
+            </a:r>
+          </a:p>
+          <a:p xmlns:a="http://schemas.openxmlformats.org/drawingml/2006/main">
+            <a:r>
+              <a:t>- docs/PRESAGE_CONTRACT.md</a:t>
+            </a:r>
+          </a:p>
+          <a:p xmlns:a="http://schemas.openxmlformats.org/drawingml/2006/main">
+            <a:r>
+              <a:t>- docs/API_CONTRACT.md</a:t>
             </a:r>
           </a:p>
         </p:txBody>
@@ -1201,7 +1085,7 @@
           <a:lstStyle xmlns:a="http://schemas.openxmlformats.org/drawingml/2006/main"/>
           <a:p xmlns:a="http://schemas.openxmlformats.org/drawingml/2006/main">
             <a:r>
-              <a:t>Present this as a possible-person-down prototype, not verified fall detection. The interface raises an incident for human review. A supervisor acknowledges, investigates, and resolves it with a note.</a:t>
+              <a:t>Separate demonstrated evidence from the validation roadmap. The rehearsal passed every core step. Tiger Cloud verification passed. The fall prototype has 36 tests. Reliable mobile capture and labeled evaluation remain next.</a:t>
             </a:r>
           </a:p>
           <a:p xmlns:a="http://schemas.openxmlformats.org/drawingml/2006/main">
@@ -1216,17 +1100,17 @@
           </a:p>
           <a:p xmlns:a="http://schemas.openxmlformats.org/drawingml/2006/main">
             <a:r>
-              <a:t>- integrations/fall-detection/README.md</a:t>
-            </a:r>
-          </a:p>
-          <a:p xmlns:a="http://schemas.openxmlformats.org/drawingml/2006/main">
-            <a:r>
-              <a:t>- docs/FALL_DETECTION.md</a:t>
-            </a:r>
-          </a:p>
-          <a:p xmlns:a="http://schemas.openxmlformats.org/drawingml/2006/main">
-            <a:r>
               <a:t>- docs/DEMO_RUN_REPORT.md</a:t>
+            </a:r>
+          </a:p>
+          <a:p xmlns:a="http://schemas.openxmlformats.org/drawingml/2006/main">
+            <a:r>
+              <a:t>- docs/TIGER_DATA_VERIFICATION.md</a:t>
+            </a:r>
+          </a:p>
+          <a:p xmlns:a="http://schemas.openxmlformats.org/drawingml/2006/main">
+            <a:r>
+              <a:t>- docs/PRODUCTION_READINESS.md</a:t>
             </a:r>
           </a:p>
         </p:txBody>
@@ -1296,7 +1180,7 @@
           <a:lstStyle xmlns:a="http://schemas.openxmlformats.org/drawingml/2006/main"/>
           <a:p xmlns:a="http://schemas.openxmlformats.org/drawingml/2006/main">
             <a:r>
-              <a:t>Separate demonstrated evidence from future validation. The recorded rehearsal passed every core beat. Tiger Cloud verification passed. The fall prototype has 36 unit tests. Real Presage pulse remained only partially verified in the older report, so avoid claiming full live measurement unless today’s integration panel proves it.</a:t>
+              <a:t>Close with the worker again. SiteGuard helps a worker speak up and helps the team respond while protected breaks remain protected. Name the sponsor categories and invite questions.</a:t>
             </a:r>
           </a:p>
           <a:p xmlns:a="http://schemas.openxmlformats.org/drawingml/2006/main">
@@ -1311,22 +1195,12 @@
           </a:p>
           <a:p xmlns:a="http://schemas.openxmlformats.org/drawingml/2006/main">
             <a:r>
-              <a:t>- docs/DEMO_RUN_REPORT.md</a:t>
-            </a:r>
-          </a:p>
-          <a:p xmlns:a="http://schemas.openxmlformats.org/drawingml/2006/main">
-            <a:r>
-              <a:t>- docs/TIGER_DATA_VERIFICATION.md</a:t>
-            </a:r>
-          </a:p>
-          <a:p xmlns:a="http://schemas.openxmlformats.org/drawingml/2006/main">
-            <a:r>
-              <a:t>- docs/PRESENTATION_SCRIPT.md</a:t>
-            </a:r>
-          </a:p>
-          <a:p xmlns:a="http://schemas.openxmlformats.org/drawingml/2006/main">
-            <a:r>
-              <a:t>- docs/PRODUCTION_READINESS.md</a:t>
+              <a:t>- README.md</a:t>
+            </a:r>
+          </a:p>
+          <a:p xmlns:a="http://schemas.openxmlformats.org/drawingml/2006/main">
+            <a:r>
+              <a:t>- https://www.youtube.com/watch?v=CzoFM4OR6TA</a:t>
             </a:r>
           </a:p>
         </p:txBody>
@@ -1373,7 +1247,7 @@
           <p:cNvPr id="3" name="Title">
             <a:extLst xmlns:a="http://schemas.openxmlformats.org/drawingml/2006/main">
               <a:ext uri="{FF2B5EF4-FFF2-40B4-BE49-F238E27FC236}">
-                <a16:creationId xmlns:a16="http://schemas.microsoft.com/office/drawing/2014/main" id="{73D09F87-A218-41FC-8562-FE5FCFF1C7B0}"/>
+                <a16:creationId xmlns:a16="http://schemas.microsoft.com/office/drawing/2014/main" id="{3185B10A-546A-4A1E-9383-59FF838CDC2F}"/>
               </a:ext>
             </a:extLst>
           </p:cNvPr>
@@ -1530,7 +1404,7 @@
           <p:cNvPr id="2" name="Subtitle">
             <a:extLst xmlns:a="http://schemas.openxmlformats.org/drawingml/2006/main">
               <a:ext uri="{FF2B5EF4-FFF2-40B4-BE49-F238E27FC236}">
-                <a16:creationId xmlns:a16="http://schemas.microsoft.com/office/drawing/2014/main" id="{489352F9-354F-4038-8E06-CC8125926B6A}"/>
+                <a16:creationId xmlns:a16="http://schemas.microsoft.com/office/drawing/2014/main" id="{5793B0F9-42EE-4064-9140-368A47858173}"/>
               </a:ext>
             </a:extLst>
           </p:cNvPr>
@@ -1704,7 +1578,7 @@
           <p:cNvPr id="2" name="Section title">
             <a:extLst xmlns:a="http://schemas.openxmlformats.org/drawingml/2006/main">
               <a:ext uri="{FF2B5EF4-FFF2-40B4-BE49-F238E27FC236}">
-                <a16:creationId xmlns:a16="http://schemas.microsoft.com/office/drawing/2014/main" id="{D12ECEB3-AFE3-4788-8E81-5581D1C850C3}"/>
+                <a16:creationId xmlns:a16="http://schemas.microsoft.com/office/drawing/2014/main" id="{0E836AE9-5818-436C-999F-34A6F1227B43}"/>
               </a:ext>
             </a:extLst>
           </p:cNvPr>
@@ -1878,7 +1752,7 @@
           <p:cNvPr id="3" name="Title">
             <a:extLst xmlns:a="http://schemas.openxmlformats.org/drawingml/2006/main">
               <a:ext uri="{FF2B5EF4-FFF2-40B4-BE49-F238E27FC236}">
-                <a16:creationId xmlns:a16="http://schemas.microsoft.com/office/drawing/2014/main" id="{65E48A77-EA6E-4063-AF43-03FA244EE63D}"/>
+                <a16:creationId xmlns:a16="http://schemas.microsoft.com/office/drawing/2014/main" id="{25D329F8-2B8A-4FA6-8D05-A9A904A04515}"/>
               </a:ext>
             </a:extLst>
           </p:cNvPr>
@@ -2035,7 +1909,7 @@
           <p:cNvPr id="2" name="Body">
             <a:extLst xmlns:a="http://schemas.openxmlformats.org/drawingml/2006/main">
               <a:ext uri="{FF2B5EF4-FFF2-40B4-BE49-F238E27FC236}">
-                <a16:creationId xmlns:a16="http://schemas.microsoft.com/office/drawing/2014/main" id="{617B56BB-E49E-4C1D-955C-7C31F8F5728A}"/>
+                <a16:creationId xmlns:a16="http://schemas.microsoft.com/office/drawing/2014/main" id="{2581537E-DABB-46AF-8DD5-45BC3B4D37BB}"/>
               </a:ext>
             </a:extLst>
           </p:cNvPr>
@@ -2209,7 +2083,7 @@
           <p:cNvPr id="4" name="Title">
             <a:extLst xmlns:a="http://schemas.openxmlformats.org/drawingml/2006/main">
               <a:ext uri="{FF2B5EF4-FFF2-40B4-BE49-F238E27FC236}">
-                <a16:creationId xmlns:a16="http://schemas.microsoft.com/office/drawing/2014/main" id="{9223CAB8-2DD9-4993-8CD0-0A777DA3D861}"/>
+                <a16:creationId xmlns:a16="http://schemas.microsoft.com/office/drawing/2014/main" id="{D26D20A9-E196-4EE9-AE42-325C7971FB8F}"/>
               </a:ext>
             </a:extLst>
           </p:cNvPr>
@@ -2366,7 +2240,7 @@
           <p:cNvPr id="2" name="Left column">
             <a:extLst xmlns:a="http://schemas.openxmlformats.org/drawingml/2006/main">
               <a:ext uri="{FF2B5EF4-FFF2-40B4-BE49-F238E27FC236}">
-                <a16:creationId xmlns:a16="http://schemas.microsoft.com/office/drawing/2014/main" id="{6933AE8A-920B-4D47-B836-27768076B4C6}"/>
+                <a16:creationId xmlns:a16="http://schemas.microsoft.com/office/drawing/2014/main" id="{4B33B34B-8AE8-4D9F-9368-A71E8E21865F}"/>
               </a:ext>
             </a:extLst>
           </p:cNvPr>
@@ -2523,7 +2397,7 @@
           <p:cNvPr id="3" name="Right column">
             <a:extLst xmlns:a="http://schemas.openxmlformats.org/drawingml/2006/main">
               <a:ext uri="{FF2B5EF4-FFF2-40B4-BE49-F238E27FC236}">
-                <a16:creationId xmlns:a16="http://schemas.microsoft.com/office/drawing/2014/main" id="{0A387DF1-74A0-495B-8FAB-B5329D9CFDB0}"/>
+                <a16:creationId xmlns:a16="http://schemas.microsoft.com/office/drawing/2014/main" id="{E3375A1F-78D0-4047-B1DC-99287E8EE212}"/>
               </a:ext>
             </a:extLst>
           </p:cNvPr>
@@ -2697,7 +2571,7 @@
           <p:cNvPr id="3" name="Title">
             <a:extLst xmlns:a="http://schemas.openxmlformats.org/drawingml/2006/main">
               <a:ext uri="{FF2B5EF4-FFF2-40B4-BE49-F238E27FC236}">
-                <a16:creationId xmlns:a16="http://schemas.microsoft.com/office/drawing/2014/main" id="{CD4289B5-59D6-46E9-AE3D-B9AC80BED0DF}"/>
+                <a16:creationId xmlns:a16="http://schemas.microsoft.com/office/drawing/2014/main" id="{ABD7A30F-1486-4CA5-B1AF-3948B3D7CB6F}"/>
               </a:ext>
             </a:extLst>
           </p:cNvPr>
@@ -2854,7 +2728,7 @@
           <p:cNvPr id="2" name="Left column">
             <a:extLst xmlns:a="http://schemas.openxmlformats.org/drawingml/2006/main">
               <a:ext uri="{FF2B5EF4-FFF2-40B4-BE49-F238E27FC236}">
-                <a16:creationId xmlns:a16="http://schemas.microsoft.com/office/drawing/2014/main" id="{9D68CD79-BD2D-459D-B0DD-CDC568C325C3}"/>
+                <a16:creationId xmlns:a16="http://schemas.microsoft.com/office/drawing/2014/main" id="{6A7311F6-B136-4464-A759-F3D97EFFD2BF}"/>
               </a:ext>
             </a:extLst>
           </p:cNvPr>
@@ -3049,12 +2923,12 @@
   </p:cSld>
   <p:clrMap bg1="lt1" tx1="dk1" bg2="lt2" tx2="dk2" accent1="accent1" accent2="accent2" accent3="accent3" accent4="accent4" accent5="accent5" accent6="accent6" hlink="hlink" folHlink="folHlink"/>
   <p:sldLayoutIdLst>
-    <p:sldLayoutId xmlns:r="http://schemas.openxmlformats.org/officeDocument/2006/relationships" id="2147483649" r:id="Re21b4e2a5a594004"/>
-    <p:sldLayoutId xmlns:r="http://schemas.openxmlformats.org/officeDocument/2006/relationships" id="2147483650" r:id="Ra8fea87a198648fa"/>
-    <p:sldLayoutId xmlns:r="http://schemas.openxmlformats.org/officeDocument/2006/relationships" id="2147483651" r:id="R4acbe9f6082c415e"/>
-    <p:sldLayoutId xmlns:r="http://schemas.openxmlformats.org/officeDocument/2006/relationships" id="2147483652" r:id="R6eab2ad0621f45ef"/>
-    <p:sldLayoutId xmlns:r="http://schemas.openxmlformats.org/officeDocument/2006/relationships" id="2147483653" r:id="R5d8a1278ab814a64"/>
-    <p:sldLayoutId xmlns:r="http://schemas.openxmlformats.org/officeDocument/2006/relationships" id="2147483654" r:id="R459b747d889f47e7"/>
+    <p:sldLayoutId xmlns:r="http://schemas.openxmlformats.org/officeDocument/2006/relationships" id="2147483649" r:id="R7d2328e3262f46d0"/>
+    <p:sldLayoutId xmlns:r="http://schemas.openxmlformats.org/officeDocument/2006/relationships" id="2147483650" r:id="Rb2bc7d7353214000"/>
+    <p:sldLayoutId xmlns:r="http://schemas.openxmlformats.org/officeDocument/2006/relationships" id="2147483651" r:id="Rf971f0f0452441fb"/>
+    <p:sldLayoutId xmlns:r="http://schemas.openxmlformats.org/officeDocument/2006/relationships" id="2147483652" r:id="R0d85bad4405b4733"/>
+    <p:sldLayoutId xmlns:r="http://schemas.openxmlformats.org/officeDocument/2006/relationships" id="2147483653" r:id="Rc5e24d50b07249ea"/>
+    <p:sldLayoutId xmlns:r="http://schemas.openxmlformats.org/officeDocument/2006/relationships" id="2147483654" r:id="R6cdc3245fd7e44a0"/>
   </p:sldLayoutIdLst>
   <p:txStyles>
     <p:titleStyle>
@@ -3587,7 +3461,7 @@
     <p:bg>
       <p:bgPr>
         <a:solidFill xmlns:a="http://schemas.openxmlformats.org/drawingml/2006/main">
-          <a:srgbClr val="0B302A"/>
+          <a:srgbClr val="082B26"/>
         </a:solidFill>
       </p:bgPr>
     </p:bg>
@@ -3602,10 +3476,10 @@
       </p:grpSpPr>
       <p:sp>
         <p:nvSpPr>
-          <p:cNvPr id="9" name="">
-            <a:extLst xmlns:a="http://schemas.openxmlformats.org/drawingml/2006/main">
-              <a:ext uri="{FF2B5EF4-FFF2-40B4-BE49-F238E27FC236}">
-                <a16:creationId xmlns:a16="http://schemas.microsoft.com/office/drawing/2014/main" id="{F17C4712-2A8F-4D8F-B4AC-29F0898D0554}"/>
+          <p:cNvPr id="8" name="">
+            <a:extLst xmlns:a="http://schemas.openxmlformats.org/drawingml/2006/main">
+              <a:ext uri="{FF2B5EF4-FFF2-40B4-BE49-F238E27FC236}">
+                <a16:creationId xmlns:a16="http://schemas.microsoft.com/office/drawing/2014/main" id="{A05D0F0D-B91D-4F6F-BE2E-7C2ECF333A7D}"/>
               </a:ext>
             </a:extLst>
           </p:cNvPr>
@@ -3617,13 +3491,13 @@
         <p:spPr>
           <a:xfrm xmlns:a="http://schemas.openxmlformats.org/drawingml/2006/main">
             <a:off x="0" y="0"/>
-            <a:ext cx="152400" cy="6858000"/>
+            <a:ext cx="133350" cy="6858000"/>
           </a:xfrm>
           <a:prstGeom xmlns:a="http://schemas.openxmlformats.org/drawingml/2006/main" prst="rect">
             <a:avLst/>
           </a:prstGeom>
           <a:solidFill xmlns:a="http://schemas.openxmlformats.org/drawingml/2006/main">
-            <a:srgbClr val="C9FF65"/>
+            <a:srgbClr val="C8FF63"/>
           </a:solidFill>
           <a:ln xmlns:a="http://schemas.openxmlformats.org/drawingml/2006/main" w="0">
             <a:noFill/>
@@ -3636,7 +3510,7 @@
           <p:cNvPr id="2" name="">
             <a:extLst xmlns:a="http://schemas.openxmlformats.org/drawingml/2006/main">
               <a:ext uri="{FF2B5EF4-FFF2-40B4-BE49-F238E27FC236}">
-                <a16:creationId xmlns:a16="http://schemas.microsoft.com/office/drawing/2014/main" id="{A7B51FD3-DA80-4FCF-9865-F98DED3B96E2}"/>
+                <a16:creationId xmlns:a16="http://schemas.microsoft.com/office/drawing/2014/main" id="{42B9C54F-DAE1-4E26-A7B1-28B39C71BA4E}"/>
               </a:ext>
             </a:extLst>
           </p:cNvPr>
@@ -3647,16 +3521,16 @@
         </p:nvSpPr>
         <p:spPr>
           <a:xfrm xmlns:a="http://schemas.openxmlformats.org/drawingml/2006/main">
-            <a:off x="552450" y="419100"/>
-            <a:ext cx="2381250" cy="933450"/>
+            <a:off x="685800" y="495300"/>
+            <a:ext cx="2343150" cy="819150"/>
           </a:xfrm>
           <a:prstGeom xmlns:a="http://schemas.openxmlformats.org/drawingml/2006/main" prst="roundRect">
             <a:avLst>
-              <a:gd name="adj" fmla="val 18367"/>
+              <a:gd name="adj" fmla="val 20930"/>
             </a:avLst>
           </a:prstGeom>
           <a:solidFill xmlns:a="http://schemas.openxmlformats.org/drawingml/2006/main">
-            <a:srgbClr val="F4F7F2"/>
+            <a:srgbClr val="F5F7F2"/>
           </a:solidFill>
           <a:ln xmlns:a="http://schemas.openxmlformats.org/drawingml/2006/main" w="0">
             <a:noFill/>
@@ -3669,7 +3543,7 @@
           <p:cNvPr id="3" name="">
             <a:extLst xmlns:a="http://schemas.openxmlformats.org/drawingml/2006/main">
               <a:ext uri="{FF2B5EF4-FFF2-40B4-BE49-F238E27FC236}">
-                <a16:creationId xmlns:a16="http://schemas.microsoft.com/office/drawing/2014/main" id="{A50931D0-D9AE-4484-9DC8-E725151956C3}"/>
+                <a16:creationId xmlns:a16="http://schemas.microsoft.com/office/drawing/2014/main" id="{2D4FDF44-999A-4672-977B-A607951B132C}"/>
               </a:ext>
             </a:extLst>
           </p:cNvPr>
@@ -3679,13 +3553,13 @@
           <p:nvPr/>
         </p:nvPicPr>
         <p:blipFill>
-          <a:blip xmlns:r="http://schemas.openxmlformats.org/officeDocument/2006/relationships" xmlns:a="http://schemas.openxmlformats.org/drawingml/2006/main" r:embed="Rfd872b5962a842c6"/>
+          <a:blip xmlns:r="http://schemas.openxmlformats.org/officeDocument/2006/relationships" xmlns:a="http://schemas.openxmlformats.org/drawingml/2006/main" r:embed="Rdede0652f61c428f"/>
           <a:stretch xmlns:a="http://schemas.openxmlformats.org/drawingml/2006/main"/>
         </p:blipFill>
         <p:spPr>
           <a:xfrm xmlns:a="http://schemas.openxmlformats.org/drawingml/2006/main">
-            <a:off x="647700" y="520700"/>
-            <a:ext cx="2190750" cy="730250"/>
+            <a:off x="971550" y="609600"/>
+            <a:ext cx="1771650" cy="590550"/>
           </a:xfrm>
           <a:prstGeom xmlns:a="http://schemas.openxmlformats.org/drawingml/2006/main" prst="rect">
             <a:avLst/>
@@ -3697,7 +3571,7 @@
           <p:cNvPr id="4" name="">
             <a:extLst xmlns:a="http://schemas.openxmlformats.org/drawingml/2006/main">
               <a:ext uri="{FF2B5EF4-FFF2-40B4-BE49-F238E27FC236}">
-                <a16:creationId xmlns:a16="http://schemas.microsoft.com/office/drawing/2014/main" id="{2623D490-CE80-4023-AC4E-02269F678FB4}"/>
+                <a16:creationId xmlns:a16="http://schemas.microsoft.com/office/drawing/2014/main" id="{A7FC6730-140F-438E-B324-97212DE4602E}"/>
               </a:ext>
             </a:extLst>
           </p:cNvPr>
@@ -3708,8 +3582,8 @@
         </p:nvSpPr>
         <p:spPr>
           <a:xfrm xmlns:a="http://schemas.openxmlformats.org/drawingml/2006/main">
-            <a:off x="666750" y="1809750"/>
-            <a:ext cx="6286500" cy="2095500"/>
+            <a:off x="685800" y="1952625"/>
+            <a:ext cx="7429500" cy="1809750"/>
           </a:xfrm>
           <a:prstGeom xmlns:a="http://schemas.openxmlformats.org/drawingml/2006/main" prst="rect">
             <a:avLst/>
@@ -3724,7 +3598,7 @@
           <a:bodyPr xmlns:a="http://schemas.openxmlformats.org/drawingml/2006/main" anchor="t"/>
           <a:lstStyle xmlns:a="http://schemas.openxmlformats.org/drawingml/2006/main">
             <a:defPPr>
-              <a:defRPr sz="3600" b="1" i="0">
+              <a:defRPr sz="4500" b="1">
                 <a:solidFill>
                   <a:srgbClr val="FFFFFF"/>
                 </a:solidFill>
@@ -3733,14 +3607,14 @@
           </a:lstStyle>
           <a:p xmlns:a="http://schemas.openxmlformats.org/drawingml/2006/main">
             <a:pPr>
-              <a:defRPr sz="3600" b="1" i="0">
+              <a:defRPr sz="4500" b="1">
                 <a:solidFill>
                   <a:srgbClr val="FFFFFF"/>
                 </a:solidFill>
               </a:defRPr>
             </a:pPr>
             <a:r>
-              <a:rPr sz="3600" b="1" i="0">
+              <a:rPr sz="4500" b="1">
                 <a:solidFill>
                   <a:srgbClr val="FFFFFF"/>
                 </a:solidFill>
@@ -3750,14 +3624,14 @@
           </a:p>
           <a:p xmlns:a="http://schemas.openxmlformats.org/drawingml/2006/main">
             <a:pPr>
-              <a:defRPr sz="3600" b="1" i="0">
+              <a:defRPr sz="4500" b="1">
                 <a:solidFill>
                   <a:srgbClr val="FFFFFF"/>
                 </a:solidFill>
               </a:defRPr>
             </a:pPr>
             <a:r>
-              <a:rPr sz="3600" b="1" i="0">
+              <a:rPr sz="4500" b="1">
                 <a:solidFill>
                   <a:srgbClr val="FFFFFF"/>
                 </a:solidFill>
@@ -3772,7 +3646,7 @@
           <p:cNvPr id="5" name="">
             <a:extLst xmlns:a="http://schemas.openxmlformats.org/drawingml/2006/main">
               <a:ext uri="{FF2B5EF4-FFF2-40B4-BE49-F238E27FC236}">
-                <a16:creationId xmlns:a16="http://schemas.microsoft.com/office/drawing/2014/main" id="{5A8D956F-C332-4707-AC5A-53A08CA69DC1}"/>
+                <a16:creationId xmlns:a16="http://schemas.microsoft.com/office/drawing/2014/main" id="{77010134-F515-47E2-A03E-4DAC59B3A92B}"/>
               </a:ext>
             </a:extLst>
           </p:cNvPr>
@@ -3783,8 +3657,8 @@
         </p:nvSpPr>
         <p:spPr>
           <a:xfrm xmlns:a="http://schemas.openxmlformats.org/drawingml/2006/main">
-            <a:off x="704850" y="4095750"/>
-            <a:ext cx="5619750" cy="857250"/>
+            <a:off x="723900" y="4114800"/>
+            <a:ext cx="6191250" cy="523875"/>
           </a:xfrm>
           <a:prstGeom xmlns:a="http://schemas.openxmlformats.org/drawingml/2006/main" prst="rect">
             <a:avLst/>
@@ -3799,28 +3673,28 @@
           <a:bodyPr xmlns:a="http://schemas.openxmlformats.org/drawingml/2006/main" anchor="t"/>
           <a:lstStyle xmlns:a="http://schemas.openxmlformats.org/drawingml/2006/main">
             <a:defPPr>
-              <a:defRPr sz="1575" b="0" i="0">
-                <a:solidFill>
-                  <a:srgbClr val="DDE9E4"/>
+              <a:defRPr sz="1875" b="0">
+                <a:solidFill>
+                  <a:srgbClr val="DCE9E3"/>
                 </a:solidFill>
               </a:defRPr>
             </a:defPPr>
           </a:lstStyle>
           <a:p xmlns:a="http://schemas.openxmlformats.org/drawingml/2006/main">
             <a:pPr>
-              <a:defRPr sz="1575" b="0" i="0">
-                <a:solidFill>
-                  <a:srgbClr val="DDE9E4"/>
+              <a:defRPr sz="1875" b="0">
+                <a:solidFill>
+                  <a:srgbClr val="DCE9E3"/>
                 </a:solidFill>
               </a:defRPr>
             </a:pPr>
             <a:r>
-              <a:rPr sz="1575" b="0" i="0">
-                <a:solidFill>
-                  <a:srgbClr val="DDE9E4"/>
+              <a:rPr sz="1875" b="0">
+                <a:solidFill>
+                  <a:srgbClr val="DCE9E3"/>
                 </a:solidFill>
               </a:rPr>
-              <a:t>SiteGuard connects a voluntary check-in to a human response while protected breaks stay protected.</a:t>
+              <a:t>SiteGuard turns that request into a safe, staffed response.</a:t>
             </a:r>
           </a:p>
         </p:txBody>
@@ -3830,7 +3704,7 @@
           <p:cNvPr id="6" name="">
             <a:extLst xmlns:a="http://schemas.openxmlformats.org/drawingml/2006/main">
               <a:ext uri="{FF2B5EF4-FFF2-40B4-BE49-F238E27FC236}">
-                <a16:creationId xmlns:a16="http://schemas.microsoft.com/office/drawing/2014/main" id="{3196B0C1-336C-493F-8600-30D16703A15D}"/>
+                <a16:creationId xmlns:a16="http://schemas.microsoft.com/office/drawing/2014/main" id="{02ACBCBF-B7EB-4D53-8C34-C3137FD10729}"/>
               </a:ext>
             </a:extLst>
           </p:cNvPr>
@@ -3841,41 +3715,8 @@
         </p:nvSpPr>
         <p:spPr>
           <a:xfrm xmlns:a="http://schemas.openxmlformats.org/drawingml/2006/main">
-            <a:off x="704850" y="5314950"/>
-            <a:ext cx="3219450" cy="457200"/>
-          </a:xfrm>
-          <a:prstGeom xmlns:a="http://schemas.openxmlformats.org/drawingml/2006/main" prst="roundRect">
-            <a:avLst>
-              <a:gd name="adj" fmla="val 50000"/>
-            </a:avLst>
-          </a:prstGeom>
-          <a:solidFill xmlns:a="http://schemas.openxmlformats.org/drawingml/2006/main">
-            <a:srgbClr val="C9FF65"/>
-          </a:solidFill>
-          <a:ln xmlns:a="http://schemas.openxmlformats.org/drawingml/2006/main" w="0">
-            <a:noFill/>
-            <a:prstDash val="solid"/>
-          </a:ln>
-        </p:spPr>
-      </p:sp>
-      <p:sp>
-        <p:nvSpPr>
-          <p:cNvPr id="7" name="">
-            <a:extLst xmlns:a="http://schemas.openxmlformats.org/drawingml/2006/main">
-              <a:ext uri="{FF2B5EF4-FFF2-40B4-BE49-F238E27FC236}">
-                <a16:creationId xmlns:a16="http://schemas.microsoft.com/office/drawing/2014/main" id="{D7AFD3CE-F16B-443D-936B-93D1ED5AD735}"/>
-              </a:ext>
-            </a:extLst>
-          </p:cNvPr>
-          <p:cNvSpPr>
-            <a:spLocks xmlns:a="http://schemas.openxmlformats.org/drawingml/2006/main" noGrp="1"/>
-          </p:cNvSpPr>
-          <p:nvPr/>
-        </p:nvSpPr>
-        <p:spPr>
-          <a:xfrm xmlns:a="http://schemas.openxmlformats.org/drawingml/2006/main">
-            <a:off x="904875" y="5457825"/>
-            <a:ext cx="2819400" cy="228600"/>
+            <a:off x="742950" y="5810250"/>
+            <a:ext cx="4000500" cy="247650"/>
           </a:xfrm>
           <a:prstGeom xmlns:a="http://schemas.openxmlformats.org/drawingml/2006/main" prst="rect">
             <a:avLst/>
@@ -3890,25 +3731,25 @@
           <a:bodyPr xmlns:a="http://schemas.openxmlformats.org/drawingml/2006/main" anchor="t"/>
           <a:lstStyle xmlns:a="http://schemas.openxmlformats.org/drawingml/2006/main">
             <a:defPPr>
-              <a:defRPr sz="1050" b="1" i="0">
-                <a:solidFill>
-                  <a:srgbClr val="0B302A"/>
+              <a:defRPr sz="1050" b="1">
+                <a:solidFill>
+                  <a:srgbClr val="C8FF63"/>
                 </a:solidFill>
               </a:defRPr>
             </a:defPPr>
           </a:lstStyle>
           <a:p xmlns:a="http://schemas.openxmlformats.org/drawingml/2006/main">
             <a:pPr>
-              <a:defRPr sz="1050" b="1" i="0">
-                <a:solidFill>
-                  <a:srgbClr val="0B302A"/>
+              <a:defRPr sz="1050" b="1">
+                <a:solidFill>
+                  <a:srgbClr val="C8FF63"/>
                 </a:solidFill>
               </a:defRPr>
             </a:pPr>
             <a:r>
-              <a:rPr sz="1050" b="1" i="0">
-                <a:solidFill>
-                  <a:srgbClr val="0B302A"/>
+              <a:rPr sz="1050" b="1">
+                <a:solidFill>
+                  <a:srgbClr val="C8FF63"/>
                 </a:solidFill>
               </a:rPr>
               <a:t>PEOPLE FIRST. EVERY SHIFT.</a:t>
@@ -3918,10 +3759,10 @@
       </p:sp>
       <p:pic>
         <p:nvPicPr>
-          <p:cNvPr id="8" name="">
-            <a:extLst xmlns:a="http://schemas.openxmlformats.org/drawingml/2006/main">
-              <a:ext uri="{FF2B5EF4-FFF2-40B4-BE49-F238E27FC236}">
-                <a16:creationId xmlns:a16="http://schemas.microsoft.com/office/drawing/2014/main" id="{3D36E355-3486-42C5-91F2-559908D40082}"/>
+          <p:cNvPr id="7" name="">
+            <a:extLst xmlns:a="http://schemas.openxmlformats.org/drawingml/2006/main">
+              <a:ext uri="{FF2B5EF4-FFF2-40B4-BE49-F238E27FC236}">
+                <a16:creationId xmlns:a16="http://schemas.microsoft.com/office/drawing/2014/main" id="{8A98D2DE-672C-46CE-B91B-17B97DC0C1E8}"/>
               </a:ext>
             </a:extLst>
           </p:cNvPr>
@@ -3931,18 +3772,18 @@
           <p:nvPr/>
         </p:nvPicPr>
         <p:blipFill>
-          <a:blip xmlns:r="http://schemas.openxmlformats.org/officeDocument/2006/relationships" xmlns:a="http://schemas.openxmlformats.org/drawingml/2006/main" r:embed="R648fe00516304598"/>
-          <a:srcRect xmlns:a="http://schemas.openxmlformats.org/drawingml/2006/main" l="12000" t="0" r="8000" b="0"/>
+          <a:blip xmlns:r="http://schemas.openxmlformats.org/officeDocument/2006/relationships" xmlns:a="http://schemas.openxmlformats.org/drawingml/2006/main" r:embed="Rba196b2911234d3a"/>
+          <a:srcRect xmlns:a="http://schemas.openxmlformats.org/drawingml/2006/main" l="16000" t="1000" r="3000" b="1000"/>
           <a:stretch xmlns:a="http://schemas.openxmlformats.org/drawingml/2006/main"/>
         </p:blipFill>
         <p:spPr>
           <a:xfrm xmlns:a="http://schemas.openxmlformats.org/drawingml/2006/main">
-            <a:off x="7239000" y="819150"/>
-            <a:ext cx="4333875" cy="5219700"/>
+            <a:off x="8334375" y="762000"/>
+            <a:ext cx="3238500" cy="5238750"/>
           </a:xfrm>
           <a:prstGeom xmlns:a="http://schemas.openxmlformats.org/drawingml/2006/main" prst="roundRect">
             <a:avLst>
-              <a:gd name="adj" fmla="val 6154"/>
+              <a:gd name="adj" fmla="val 8235"/>
             </a:avLst>
           </a:prstGeom>
         </p:spPr>
@@ -3950,20 +3791,20 @@
     </p:spTree>
     <p:extLst>
       <p:ext uri="{BB962C8B-B14F-4D97-AF65-F5344CB8AC3E}">
-        <p14:creationId xmlns:p14="http://schemas.microsoft.com/office/powerpoint/2010/main" val="1757566935"/>
+        <p14:creationId xmlns:p14="http://schemas.microsoft.com/office/powerpoint/2010/main" val="1915710849"/>
       </p:ext>
     </p:extLst>
   </p:cSld>
 </p:sld>
 </file>
 
-<file path=ppt/slides/slide10.xml><?xml version="1.0" encoding="utf-8"?>
+<file path=ppt/slides/slide2.xml><?xml version="1.0" encoding="utf-8"?>
 <p:sld xmlns:p="http://schemas.openxmlformats.org/presentationml/2006/main">
   <p:cSld>
     <p:bg>
       <p:bgPr>
         <a:solidFill xmlns:a="http://schemas.openxmlformats.org/drawingml/2006/main">
-          <a:srgbClr val="0B302A"/>
+          <a:srgbClr val="F5F7F2"/>
         </a:solidFill>
       </p:bgPr>
     </p:bg>
@@ -3978,10 +3819,10 @@
       </p:grpSpPr>
       <p:sp>
         <p:nvSpPr>
-          <p:cNvPr id="8" name="">
-            <a:extLst xmlns:a="http://schemas.openxmlformats.org/drawingml/2006/main">
-              <a:ext uri="{FF2B5EF4-FFF2-40B4-BE49-F238E27FC236}">
-                <a16:creationId xmlns:a16="http://schemas.microsoft.com/office/drawing/2014/main" id="{8FDD3FB0-508E-4DC8-9A33-BFB5CE77EED4}"/>
+          <p:cNvPr id="7" name="">
+            <a:extLst xmlns:a="http://schemas.openxmlformats.org/drawingml/2006/main">
+              <a:ext uri="{FF2B5EF4-FFF2-40B4-BE49-F238E27FC236}">
+                <a16:creationId xmlns:a16="http://schemas.microsoft.com/office/drawing/2014/main" id="{AC9384FC-BC5E-48BE-83C4-8C22B281494D}"/>
               </a:ext>
             </a:extLst>
           </p:cNvPr>
@@ -3992,69 +3833,8 @@
         </p:nvSpPr>
         <p:spPr>
           <a:xfrm xmlns:a="http://schemas.openxmlformats.org/drawingml/2006/main">
-            <a:off x="4648200" y="476250"/>
-            <a:ext cx="2895600" cy="1143000"/>
-          </a:xfrm>
-          <a:prstGeom xmlns:a="http://schemas.openxmlformats.org/drawingml/2006/main" prst="roundRect">
-            <a:avLst>
-              <a:gd name="adj" fmla="val 18333"/>
-            </a:avLst>
-          </a:prstGeom>
-          <a:solidFill xmlns:a="http://schemas.openxmlformats.org/drawingml/2006/main">
-            <a:srgbClr val="F4F7F2"/>
-          </a:solidFill>
-          <a:ln xmlns:a="http://schemas.openxmlformats.org/drawingml/2006/main" w="0">
-            <a:noFill/>
-            <a:prstDash val="solid"/>
-          </a:ln>
-        </p:spPr>
-      </p:sp>
-      <p:pic>
-        <p:nvPicPr>
-          <p:cNvPr id="2" name="">
-            <a:extLst xmlns:a="http://schemas.openxmlformats.org/drawingml/2006/main">
-              <a:ext uri="{FF2B5EF4-FFF2-40B4-BE49-F238E27FC236}">
-                <a16:creationId xmlns:a16="http://schemas.microsoft.com/office/drawing/2014/main" id="{F7DB187D-4BEF-4291-AA1B-E6A4D96AD29C}"/>
-              </a:ext>
-            </a:extLst>
-          </p:cNvPr>
-          <p:cNvPicPr>
-            <a:picLocks xmlns:a="http://schemas.openxmlformats.org/drawingml/2006/main" noChangeAspect="1"/>
-          </p:cNvPicPr>
-          <p:nvPr/>
-        </p:nvPicPr>
-        <p:blipFill>
-          <a:blip xmlns:r="http://schemas.openxmlformats.org/officeDocument/2006/relationships" xmlns:a="http://schemas.openxmlformats.org/drawingml/2006/main" r:embed="R673c5097afa149fb"/>
-          <a:stretch xmlns:a="http://schemas.openxmlformats.org/drawingml/2006/main"/>
-        </p:blipFill>
-        <p:spPr>
-          <a:xfrm xmlns:a="http://schemas.openxmlformats.org/drawingml/2006/main">
-            <a:off x="4819650" y="622300"/>
-            <a:ext cx="2552700" cy="850900"/>
-          </a:xfrm>
-          <a:prstGeom xmlns:a="http://schemas.openxmlformats.org/drawingml/2006/main" prst="rect">
-            <a:avLst/>
-          </a:prstGeom>
-        </p:spPr>
-      </p:pic>
-      <p:sp>
-        <p:nvSpPr>
-          <p:cNvPr id="3" name="">
-            <a:extLst xmlns:a="http://schemas.openxmlformats.org/drawingml/2006/main">
-              <a:ext uri="{FF2B5EF4-FFF2-40B4-BE49-F238E27FC236}">
-                <a16:creationId xmlns:a16="http://schemas.microsoft.com/office/drawing/2014/main" id="{FA07CEF2-7D6B-4AA3-9919-11538E436930}"/>
-              </a:ext>
-            </a:extLst>
-          </p:cNvPr>
-          <p:cNvSpPr>
-            <a:spLocks xmlns:a="http://schemas.openxmlformats.org/drawingml/2006/main" noGrp="1"/>
-          </p:cNvSpPr>
-          <p:nvPr/>
-        </p:nvSpPr>
-        <p:spPr>
-          <a:xfrm xmlns:a="http://schemas.openxmlformats.org/drawingml/2006/main">
-            <a:off x="1238250" y="2152650"/>
-            <a:ext cx="9715500" cy="819150"/>
+            <a:off x="11410950" y="285750"/>
+            <a:ext cx="342900" cy="209550"/>
           </a:xfrm>
           <a:prstGeom xmlns:a="http://schemas.openxmlformats.org/drawingml/2006/main" prst="rect">
             <a:avLst/>
@@ -4069,38 +3849,38 @@
           <a:bodyPr xmlns:a="http://schemas.openxmlformats.org/drawingml/2006/main" anchor="t"/>
           <a:lstStyle xmlns:a="http://schemas.openxmlformats.org/drawingml/2006/main">
             <a:defPPr>
-              <a:defRPr sz="3600" b="1" i="0">
-                <a:solidFill>
-                  <a:srgbClr val="FFFFFF"/>
+              <a:defRPr sz="825" b="1">
+                <a:solidFill>
+                  <a:srgbClr val="61756C"/>
                 </a:solidFill>
               </a:defRPr>
             </a:defPPr>
           </a:lstStyle>
           <a:p xmlns:a="http://schemas.openxmlformats.org/drawingml/2006/main">
             <a:pPr>
-              <a:defRPr sz="3600" b="1" i="0">
-                <a:solidFill>
-                  <a:srgbClr val="FFFFFF"/>
+              <a:defRPr sz="825" b="1">
+                <a:solidFill>
+                  <a:srgbClr val="61756C"/>
                 </a:solidFill>
               </a:defRPr>
             </a:pPr>
             <a:r>
-              <a:rPr sz="3600" b="1" i="0">
-                <a:solidFill>
-                  <a:srgbClr val="FFFFFF"/>
+              <a:rPr sz="825" b="1">
+                <a:solidFill>
+                  <a:srgbClr val="61756C"/>
                 </a:solidFill>
               </a:rPr>
-              <a:t>People first. Every shift.</a:t>
-            </a:r>
-          </a:p>
-        </p:txBody>
-      </p:sp>
-      <p:sp>
-        <p:nvSpPr>
-          <p:cNvPr id="4" name="">
-            <a:extLst xmlns:a="http://schemas.openxmlformats.org/drawingml/2006/main">
-              <a:ext uri="{FF2B5EF4-FFF2-40B4-BE49-F238E27FC236}">
-                <a16:creationId xmlns:a16="http://schemas.microsoft.com/office/drawing/2014/main" id="{2B9237AA-B72E-4AC6-AA70-CF4E5EE9F2C8}"/>
+              <a:t>02</a:t>
+            </a:r>
+          </a:p>
+        </p:txBody>
+      </p:sp>
+      <p:sp>
+        <p:nvSpPr>
+          <p:cNvPr id="2" name="">
+            <a:extLst xmlns:a="http://schemas.openxmlformats.org/drawingml/2006/main">
+              <a:ext uri="{FF2B5EF4-FFF2-40B4-BE49-F238E27FC236}">
+                <a16:creationId xmlns:a16="http://schemas.microsoft.com/office/drawing/2014/main" id="{62E76758-2C3B-495A-80BC-D1436E8EECB6}"/>
               </a:ext>
             </a:extLst>
           </p:cNvPr>
@@ -4111,8 +3891,8 @@
         </p:nvSpPr>
         <p:spPr>
           <a:xfrm xmlns:a="http://schemas.openxmlformats.org/drawingml/2006/main">
-            <a:off x="1866900" y="3105150"/>
-            <a:ext cx="8458200" cy="419100"/>
+            <a:off x="647700" y="552450"/>
+            <a:ext cx="8572500" cy="609600"/>
           </a:xfrm>
           <a:prstGeom xmlns:a="http://schemas.openxmlformats.org/drawingml/2006/main" prst="rect">
             <a:avLst/>
@@ -4127,38 +3907,38 @@
           <a:bodyPr xmlns:a="http://schemas.openxmlformats.org/drawingml/2006/main" anchor="t"/>
           <a:lstStyle xmlns:a="http://schemas.openxmlformats.org/drawingml/2006/main">
             <a:defPPr>
-              <a:defRPr sz="1650" b="0" i="0">
-                <a:solidFill>
-                  <a:srgbClr val="DDE9E4"/>
+              <a:defRPr sz="3150" b="1">
+                <a:solidFill>
+                  <a:srgbClr val="082B26"/>
                 </a:solidFill>
               </a:defRPr>
             </a:defPPr>
           </a:lstStyle>
           <a:p xmlns:a="http://schemas.openxmlformats.org/drawingml/2006/main">
             <a:pPr>
-              <a:defRPr sz="1650" b="0" i="0">
-                <a:solidFill>
-                  <a:srgbClr val="DDE9E4"/>
+              <a:defRPr sz="3150" b="1">
+                <a:solidFill>
+                  <a:srgbClr val="082B26"/>
                 </a:solidFill>
               </a:defRPr>
             </a:pPr>
             <a:r>
-              <a:rPr sz="1650" b="0" i="0">
-                <a:solidFill>
-                  <a:srgbClr val="DDE9E4"/>
+              <a:rPr sz="3150" b="1">
+                <a:solidFill>
+                  <a:srgbClr val="082B26"/>
                 </a:solidFill>
               </a:rPr>
-              <a:t>A worker-controlled check-in. A request path. A human response.</a:t>
-            </a:r>
-          </a:p>
-        </p:txBody>
-      </p:sp>
-      <p:sp>
-        <p:nvSpPr>
-          <p:cNvPr id="5" name="">
-            <a:extLst xmlns:a="http://schemas.openxmlformats.org/drawingml/2006/main">
-              <a:ext uri="{FF2B5EF4-FFF2-40B4-BE49-F238E27FC236}">
-                <a16:creationId xmlns:a16="http://schemas.microsoft.com/office/drawing/2014/main" id="{44284D82-E6F1-4C9B-A7F1-2334131E765D}"/>
+              <a:t>The worker knows first</a:t>
+            </a:r>
+          </a:p>
+        </p:txBody>
+      </p:sp>
+      <p:sp>
+        <p:nvSpPr>
+          <p:cNvPr id="3" name="">
+            <a:extLst xmlns:a="http://schemas.openxmlformats.org/drawingml/2006/main">
+              <a:ext uri="{FF2B5EF4-FFF2-40B4-BE49-F238E27FC236}">
+                <a16:creationId xmlns:a16="http://schemas.microsoft.com/office/drawing/2014/main" id="{D8093642-4EC5-4B59-9EB6-B58E7AEC1DFE}"/>
               </a:ext>
             </a:extLst>
           </p:cNvPr>
@@ -4169,8 +3949,8 @@
         </p:nvSpPr>
         <p:spPr>
           <a:xfrm xmlns:a="http://schemas.openxmlformats.org/drawingml/2006/main">
-            <a:off x="4019550" y="4114800"/>
-            <a:ext cx="4152900" cy="266700"/>
+            <a:off x="647700" y="1905000"/>
+            <a:ext cx="9906000" cy="1047750"/>
           </a:xfrm>
           <a:prstGeom xmlns:a="http://schemas.openxmlformats.org/drawingml/2006/main" prst="rect">
             <a:avLst/>
@@ -4185,38 +3965,38 @@
           <a:bodyPr xmlns:a="http://schemas.openxmlformats.org/drawingml/2006/main" anchor="t"/>
           <a:lstStyle xmlns:a="http://schemas.openxmlformats.org/drawingml/2006/main">
             <a:defPPr>
-              <a:defRPr sz="1050" b="1" i="0">
-                <a:solidFill>
-                  <a:srgbClr val="C9FF65"/>
+              <a:defRPr sz="4350" b="1">
+                <a:solidFill>
+                  <a:srgbClr val="0D4D40"/>
                 </a:solidFill>
               </a:defRPr>
             </a:defPPr>
           </a:lstStyle>
           <a:p xmlns:a="http://schemas.openxmlformats.org/drawingml/2006/main">
             <a:pPr>
-              <a:defRPr sz="1050" b="1" i="0">
-                <a:solidFill>
-                  <a:srgbClr val="C9FF65"/>
+              <a:defRPr sz="4350" b="1">
+                <a:solidFill>
+                  <a:srgbClr val="0D4D40"/>
                 </a:solidFill>
               </a:defRPr>
             </a:pPr>
             <a:r>
-              <a:rPr sz="1050" b="1" i="0">
-                <a:solidFill>
-                  <a:srgbClr val="C9FF65"/>
+              <a:rPr sz="4350" b="1">
+                <a:solidFill>
+                  <a:srgbClr val="0D4D40"/>
                 </a:solidFill>
               </a:rPr>
-              <a:t>OUR MLH CATEGORIES</a:t>
-            </a:r>
-          </a:p>
-        </p:txBody>
-      </p:sp>
-      <p:sp>
-        <p:nvSpPr>
-          <p:cNvPr id="6" name="">
-            <a:extLst xmlns:a="http://schemas.openxmlformats.org/drawingml/2006/main">
-              <a:ext uri="{FF2B5EF4-FFF2-40B4-BE49-F238E27FC236}">
-                <a16:creationId xmlns:a16="http://schemas.microsoft.com/office/drawing/2014/main" id="{CBFAF7FF-5A9F-4249-94BF-283CDFCBF47B}"/>
+              <a:t>“I need five more minutes.”</a:t>
+            </a:r>
+          </a:p>
+        </p:txBody>
+      </p:sp>
+      <p:sp>
+        <p:nvSpPr>
+          <p:cNvPr id="4" name="">
+            <a:extLst xmlns:a="http://schemas.openxmlformats.org/drawingml/2006/main">
+              <a:ext uri="{FF2B5EF4-FFF2-40B4-BE49-F238E27FC236}">
+                <a16:creationId xmlns:a16="http://schemas.microsoft.com/office/drawing/2014/main" id="{ACB3AA7E-DE54-45C7-9A81-59820E912495}"/>
               </a:ext>
             </a:extLst>
           </p:cNvPr>
@@ -4227,8 +4007,39 @@
         </p:nvSpPr>
         <p:spPr>
           <a:xfrm xmlns:a="http://schemas.openxmlformats.org/drawingml/2006/main">
-            <a:off x="3238500" y="4591050"/>
-            <a:ext cx="5715000" cy="1066800"/>
+            <a:off x="647700" y="3448050"/>
+            <a:ext cx="7810500" cy="28575"/>
+          </a:xfrm>
+          <a:prstGeom xmlns:a="http://schemas.openxmlformats.org/drawingml/2006/main" prst="rect">
+            <a:avLst/>
+          </a:prstGeom>
+          <a:solidFill xmlns:a="http://schemas.openxmlformats.org/drawingml/2006/main">
+            <a:srgbClr val="C8FF63"/>
+          </a:solidFill>
+          <a:ln xmlns:a="http://schemas.openxmlformats.org/drawingml/2006/main" w="0">
+            <a:noFill/>
+            <a:prstDash val="solid"/>
+          </a:ln>
+        </p:spPr>
+      </p:sp>
+      <p:sp>
+        <p:nvSpPr>
+          <p:cNvPr id="5" name="">
+            <a:extLst xmlns:a="http://schemas.openxmlformats.org/drawingml/2006/main">
+              <a:ext uri="{FF2B5EF4-FFF2-40B4-BE49-F238E27FC236}">
+                <a16:creationId xmlns:a16="http://schemas.microsoft.com/office/drawing/2014/main" id="{E1D30F50-7EC6-466B-9A3C-CC01AC033D0E}"/>
+              </a:ext>
+            </a:extLst>
+          </p:cNvPr>
+          <p:cNvSpPr>
+            <a:spLocks xmlns:a="http://schemas.openxmlformats.org/drawingml/2006/main" noGrp="1"/>
+          </p:cNvSpPr>
+          <p:nvPr/>
+        </p:nvSpPr>
+        <p:spPr>
+          <a:xfrm xmlns:a="http://schemas.openxmlformats.org/drawingml/2006/main">
+            <a:off x="647700" y="3886200"/>
+            <a:ext cx="8286750" cy="1143000"/>
           </a:xfrm>
           <a:prstGeom xmlns:a="http://schemas.openxmlformats.org/drawingml/2006/main" prst="rect">
             <a:avLst/>
@@ -4243,72 +4054,38 @@
           <a:bodyPr xmlns:a="http://schemas.openxmlformats.org/drawingml/2006/main" anchor="t"/>
           <a:lstStyle xmlns:a="http://schemas.openxmlformats.org/drawingml/2006/main">
             <a:defPPr>
-              <a:defRPr sz="1950" b="1" i="0">
-                <a:solidFill>
-                  <a:srgbClr val="FFFFFF"/>
+              <a:defRPr sz="2025" b="0">
+                <a:solidFill>
+                  <a:srgbClr val="082B26"/>
                 </a:solidFill>
               </a:defRPr>
             </a:defPPr>
           </a:lstStyle>
           <a:p xmlns:a="http://schemas.openxmlformats.org/drawingml/2006/main">
             <a:pPr>
-              <a:defRPr sz="1950" b="1" i="0">
-                <a:solidFill>
-                  <a:srgbClr val="FFFFFF"/>
+              <a:defRPr sz="2025" b="0">
+                <a:solidFill>
+                  <a:srgbClr val="082B26"/>
                 </a:solidFill>
               </a:defRPr>
             </a:pPr>
             <a:r>
-              <a:rPr sz="1950" b="1" i="0">
-                <a:solidFill>
-                  <a:srgbClr val="FFFFFF"/>
+              <a:rPr sz="2025" b="0">
+                <a:solidFill>
+                  <a:srgbClr val="082B26"/>
                 </a:solidFill>
               </a:rPr>
-              <a:t>Best Use of Presage</a:t>
-            </a:r>
-          </a:p>
-          <a:p xmlns:a="http://schemas.openxmlformats.org/drawingml/2006/main">
-            <a:pPr>
-              <a:defRPr sz="1950" b="1" i="0">
-                <a:solidFill>
-                  <a:srgbClr val="FFFFFF"/>
-                </a:solidFill>
-              </a:defRPr>
-            </a:pPr>
-            <a:r>
-              <a:rPr sz="1950" b="1" i="0">
-                <a:solidFill>
-                  <a:srgbClr val="FFFFFF"/>
-                </a:solidFill>
-              </a:rPr>
-              <a:t>Best Use of the Gemini API</a:t>
-            </a:r>
-          </a:p>
-          <a:p xmlns:a="http://schemas.openxmlformats.org/drawingml/2006/main">
-            <a:pPr>
-              <a:defRPr sz="1950" b="1" i="0">
-                <a:solidFill>
-                  <a:srgbClr val="FFFFFF"/>
-                </a:solidFill>
-              </a:defRPr>
-            </a:pPr>
-            <a:r>
-              <a:rPr sz="1950" b="1" i="0">
-                <a:solidFill>
-                  <a:srgbClr val="FFFFFF"/>
-                </a:solidFill>
-              </a:rPr>
-              <a:t>Best Use of Tiger Data</a:t>
-            </a:r>
-          </a:p>
-        </p:txBody>
-      </p:sp>
-      <p:sp>
-        <p:nvSpPr>
-          <p:cNvPr id="7" name="">
-            <a:extLst xmlns:a="http://schemas.openxmlformats.org/drawingml/2006/main">
-              <a:ext uri="{FF2B5EF4-FFF2-40B4-BE49-F238E27FC236}">
-                <a16:creationId xmlns:a16="http://schemas.microsoft.com/office/drawing/2014/main" id="{A52C9F90-B1E0-46AA-81DD-58BF5A05C924}"/>
+              <a:t>A fixed schedule protects the break. It cannot show what changed during rest or whether the worker wants help.</a:t>
+            </a:r>
+          </a:p>
+        </p:txBody>
+      </p:sp>
+      <p:sp>
+        <p:nvSpPr>
+          <p:cNvPr id="6" name="">
+            <a:extLst xmlns:a="http://schemas.openxmlformats.org/drawingml/2006/main">
+              <a:ext uri="{FF2B5EF4-FFF2-40B4-BE49-F238E27FC236}">
+                <a16:creationId xmlns:a16="http://schemas.microsoft.com/office/drawing/2014/main" id="{E1AF4051-A70E-44A9-9D35-ED1B89E736F4}"/>
               </a:ext>
             </a:extLst>
           </p:cNvPr>
@@ -4319,8 +4096,8 @@
         </p:nvSpPr>
         <p:spPr>
           <a:xfrm xmlns:a="http://schemas.openxmlformats.org/drawingml/2006/main">
-            <a:off x="3733800" y="6210300"/>
-            <a:ext cx="4724400" cy="228600"/>
+            <a:off x="647700" y="5448300"/>
+            <a:ext cx="8572500" cy="647700"/>
           </a:xfrm>
           <a:prstGeom xmlns:a="http://schemas.openxmlformats.org/drawingml/2006/main" prst="rect">
             <a:avLst/>
@@ -4335,28 +4112,28 @@
           <a:bodyPr xmlns:a="http://schemas.openxmlformats.org/drawingml/2006/main" anchor="t"/>
           <a:lstStyle xmlns:a="http://schemas.openxmlformats.org/drawingml/2006/main">
             <a:defPPr>
-              <a:defRPr sz="1050" b="1" i="0">
-                <a:solidFill>
-                  <a:srgbClr val="FFCE73"/>
+              <a:defRPr sz="1725" b="0">
+                <a:solidFill>
+                  <a:srgbClr val="61756C"/>
                 </a:solidFill>
               </a:defRPr>
             </a:defPPr>
           </a:lstStyle>
           <a:p xmlns:a="http://schemas.openxmlformats.org/drawingml/2006/main">
             <a:pPr>
-              <a:defRPr sz="1050" b="1" i="0">
-                <a:solidFill>
-                  <a:srgbClr val="FFCE73"/>
+              <a:defRPr sz="1725" b="0">
+                <a:solidFill>
+                  <a:srgbClr val="61756C"/>
                 </a:solidFill>
               </a:defRPr>
             </a:pPr>
             <a:r>
-              <a:rPr sz="1050" b="1" i="0">
-                <a:solidFill>
-                  <a:srgbClr val="FFCE73"/>
+              <a:rPr sz="1725" b="0">
+                <a:solidFill>
+                  <a:srgbClr val="61756C"/>
                 </a:solidFill>
               </a:rPr>
-              <a:t>youtube.com/watch?v=CzoFM4OR6TA</a:t>
+              <a:t>SiteGuard keeps the person in control and gives the safety team enough context to act.</a:t>
             </a:r>
           </a:p>
         </p:txBody>
@@ -4364,20 +4141,20 @@
     </p:spTree>
     <p:extLst>
       <p:ext uri="{BB962C8B-B14F-4D97-AF65-F5344CB8AC3E}">
-        <p14:creationId xmlns:p14="http://schemas.microsoft.com/office/powerpoint/2010/main" val="1395450416"/>
+        <p14:creationId xmlns:p14="http://schemas.microsoft.com/office/powerpoint/2010/main" val="1777896721"/>
       </p:ext>
     </p:extLst>
   </p:cSld>
 </p:sld>
 </file>
 
-<file path=ppt/slides/slide2.xml><?xml version="1.0" encoding="utf-8"?>
+<file path=ppt/slides/slide3.xml><?xml version="1.0" encoding="utf-8"?>
 <p:sld xmlns:p="http://schemas.openxmlformats.org/presentationml/2006/main">
   <p:cSld>
     <p:bg>
       <p:bgPr>
         <a:solidFill xmlns:a="http://schemas.openxmlformats.org/drawingml/2006/main">
-          <a:srgbClr val="F4F7F2"/>
+          <a:srgbClr val="07110F"/>
         </a:solidFill>
       </p:bgPr>
     </p:bg>
@@ -4395,7 +4172,7 @@
           <p:cNvPr id="7" name="">
             <a:extLst xmlns:a="http://schemas.openxmlformats.org/drawingml/2006/main">
               <a:ext uri="{FF2B5EF4-FFF2-40B4-BE49-F238E27FC236}">
-                <a16:creationId xmlns:a16="http://schemas.microsoft.com/office/drawing/2014/main" id="{8F7054DD-6736-42E7-85C8-EF7F74F9E669}"/>
+                <a16:creationId xmlns:a16="http://schemas.microsoft.com/office/drawing/2014/main" id="{B2ACED75-F850-454D-AB61-F5C2A3A8C7D3}"/>
               </a:ext>
             </a:extLst>
           </p:cNvPr>
@@ -4406,8 +4183,8 @@
         </p:nvSpPr>
         <p:spPr>
           <a:xfrm xmlns:a="http://schemas.openxmlformats.org/drawingml/2006/main">
-            <a:off x="11334750" y="266700"/>
-            <a:ext cx="400050" cy="228600"/>
+            <a:off x="11410950" y="285750"/>
+            <a:ext cx="342900" cy="209550"/>
           </a:xfrm>
           <a:prstGeom xmlns:a="http://schemas.openxmlformats.org/drawingml/2006/main" prst="rect">
             <a:avLst/>
@@ -4422,28 +4199,28 @@
           <a:bodyPr xmlns:a="http://schemas.openxmlformats.org/drawingml/2006/main" anchor="t"/>
           <a:lstStyle xmlns:a="http://schemas.openxmlformats.org/drawingml/2006/main">
             <a:defPPr>
-              <a:defRPr sz="825" b="1" i="0">
-                <a:solidFill>
-                  <a:srgbClr val="65786F"/>
+              <a:defRPr sz="825" b="1">
+                <a:solidFill>
+                  <a:srgbClr val="DCE9E3"/>
                 </a:solidFill>
               </a:defRPr>
             </a:defPPr>
           </a:lstStyle>
           <a:p xmlns:a="http://schemas.openxmlformats.org/drawingml/2006/main">
             <a:pPr>
-              <a:defRPr sz="825" b="1" i="0">
-                <a:solidFill>
-                  <a:srgbClr val="65786F"/>
+              <a:defRPr sz="825" b="1">
+                <a:solidFill>
+                  <a:srgbClr val="DCE9E3"/>
                 </a:solidFill>
               </a:defRPr>
             </a:pPr>
             <a:r>
-              <a:rPr sz="825" b="1" i="0">
-                <a:solidFill>
-                  <a:srgbClr val="65786F"/>
+              <a:rPr sz="825" b="1">
+                <a:solidFill>
+                  <a:srgbClr val="DCE9E3"/>
                 </a:solidFill>
               </a:rPr>
-              <a:t>02</a:t>
+              <a:t>03</a:t>
             </a:r>
           </a:p>
         </p:txBody>
@@ -4453,7 +4230,7 @@
           <p:cNvPr id="2" name="">
             <a:extLst xmlns:a="http://schemas.openxmlformats.org/drawingml/2006/main">
               <a:ext uri="{FF2B5EF4-FFF2-40B4-BE49-F238E27FC236}">
-                <a16:creationId xmlns:a16="http://schemas.microsoft.com/office/drawing/2014/main" id="{213F6606-4457-4AF8-857D-46179D74DB7B}"/>
+                <a16:creationId xmlns:a16="http://schemas.microsoft.com/office/drawing/2014/main" id="{3375F113-9227-4B47-8973-513EC6C32A3B}"/>
               </a:ext>
             </a:extLst>
           </p:cNvPr>
@@ -4464,8 +4241,8 @@
         </p:nvSpPr>
         <p:spPr>
           <a:xfrm xmlns:a="http://schemas.openxmlformats.org/drawingml/2006/main">
-            <a:off x="628650" y="514350"/>
-            <a:ext cx="8001000" cy="552450"/>
+            <a:off x="628650" y="457200"/>
+            <a:ext cx="7429500" cy="609600"/>
           </a:xfrm>
           <a:prstGeom xmlns:a="http://schemas.openxmlformats.org/drawingml/2006/main" prst="rect">
             <a:avLst/>
@@ -4480,28 +4257,28 @@
           <a:bodyPr xmlns:a="http://schemas.openxmlformats.org/drawingml/2006/main" anchor="t"/>
           <a:lstStyle xmlns:a="http://schemas.openxmlformats.org/drawingml/2006/main">
             <a:defPPr>
-              <a:defRPr sz="2400" b="1" i="0">
-                <a:solidFill>
-                  <a:srgbClr val="0B302A"/>
+              <a:defRPr sz="3150" b="1">
+                <a:solidFill>
+                  <a:srgbClr val="FFFFFF"/>
                 </a:solidFill>
               </a:defRPr>
             </a:defPPr>
           </a:lstStyle>
           <a:p xmlns:a="http://schemas.openxmlformats.org/drawingml/2006/main">
             <a:pPr>
-              <a:defRPr sz="2400" b="1" i="0">
-                <a:solidFill>
-                  <a:srgbClr val="0B302A"/>
+              <a:defRPr sz="3150" b="1">
+                <a:solidFill>
+                  <a:srgbClr val="FFFFFF"/>
                 </a:solidFill>
               </a:defRPr>
             </a:pPr>
             <a:r>
-              <a:rPr sz="2400" b="1" i="0">
-                <a:solidFill>
-                  <a:srgbClr val="0B302A"/>
+              <a:rPr sz="3150" b="1">
+                <a:solidFill>
+                  <a:srgbClr val="FFFFFF"/>
                 </a:solidFill>
               </a:rPr>
-              <a:t>The gap between a break and a response</a:t>
+              <a:t>A 90-second check-in</a:t>
             </a:r>
           </a:p>
         </p:txBody>
@@ -4511,7 +4288,7 @@
           <p:cNvPr id="3" name="">
             <a:extLst xmlns:a="http://schemas.openxmlformats.org/drawingml/2006/main">
               <a:ext uri="{FF2B5EF4-FFF2-40B4-BE49-F238E27FC236}">
-                <a16:creationId xmlns:a16="http://schemas.microsoft.com/office/drawing/2014/main" id="{E918E57B-57E8-447C-9F37-F794791323BB}"/>
+                <a16:creationId xmlns:a16="http://schemas.microsoft.com/office/drawing/2014/main" id="{52954C5F-447D-4CDC-8E76-E835BA1585F8}"/>
               </a:ext>
             </a:extLst>
           </p:cNvPr>
@@ -4522,8 +4299,8 @@
         </p:nvSpPr>
         <p:spPr>
           <a:xfrm xmlns:a="http://schemas.openxmlformats.org/drawingml/2006/main">
-            <a:off x="647700" y="1409700"/>
-            <a:ext cx="5905500" cy="1466850"/>
+            <a:off x="647700" y="1066800"/>
+            <a:ext cx="7810500" cy="400050"/>
           </a:xfrm>
           <a:prstGeom xmlns:a="http://schemas.openxmlformats.org/drawingml/2006/main" prst="rect">
             <a:avLst/>
@@ -4538,96 +4315,38 @@
           <a:bodyPr xmlns:a="http://schemas.openxmlformats.org/drawingml/2006/main" anchor="t"/>
           <a:lstStyle xmlns:a="http://schemas.openxmlformats.org/drawingml/2006/main">
             <a:defPPr>
-              <a:defRPr sz="2325" b="0" i="0">
-                <a:solidFill>
-                  <a:srgbClr val="0B302A"/>
+              <a:defRPr sz="1650" b="0">
+                <a:solidFill>
+                  <a:srgbClr val="DCE9E3"/>
                 </a:solidFill>
               </a:defRPr>
             </a:defPPr>
           </a:lstStyle>
           <a:p xmlns:a="http://schemas.openxmlformats.org/drawingml/2006/main">
             <a:pPr>
-              <a:defRPr sz="2325" b="0" i="0">
-                <a:solidFill>
-                  <a:srgbClr val="0B302A"/>
+              <a:defRPr sz="1650" b="0">
+                <a:solidFill>
+                  <a:srgbClr val="DCE9E3"/>
                 </a:solidFill>
               </a:defRPr>
             </a:pPr>
             <a:r>
-              <a:rPr sz="2325" b="0" i="0">
-                <a:solidFill>
-                  <a:srgbClr val="0B302A"/>
+              <a:rPr sz="1650" b="0">
+                <a:solidFill>
+                  <a:srgbClr val="DCE9E3"/>
                 </a:solidFill>
               </a:rPr>
-              <a:t>A schedule protects time. It cannot show what changed during rest, whether the worker wants support, or how the team should cover the work.</a:t>
-            </a:r>
-          </a:p>
-        </p:txBody>
-      </p:sp>
-      <p:sp>
-        <p:nvSpPr>
-          <p:cNvPr id="4" name="">
-            <a:extLst xmlns:a="http://schemas.openxmlformats.org/drawingml/2006/main">
-              <a:ext uri="{FF2B5EF4-FFF2-40B4-BE49-F238E27FC236}">
-                <a16:creationId xmlns:a16="http://schemas.microsoft.com/office/drawing/2014/main" id="{71DAEDAA-B18D-4242-BF8F-FE4D2CBD50CB}"/>
-              </a:ext>
-            </a:extLst>
-          </p:cNvPr>
-          <p:cNvSpPr>
-            <a:spLocks xmlns:a="http://schemas.openxmlformats.org/drawingml/2006/main" noGrp="1"/>
-          </p:cNvSpPr>
-          <p:nvPr/>
-        </p:nvSpPr>
-        <p:spPr>
-          <a:xfrm xmlns:a="http://schemas.openxmlformats.org/drawingml/2006/main">
-            <a:off x="666750" y="3333750"/>
-            <a:ext cx="5143500" cy="895350"/>
-          </a:xfrm>
-          <a:prstGeom xmlns:a="http://schemas.openxmlformats.org/drawingml/2006/main" prst="rect">
-            <a:avLst/>
-          </a:prstGeom>
-          <a:noFill xmlns:a="http://schemas.openxmlformats.org/drawingml/2006/main"/>
-          <a:ln xmlns:a="http://schemas.openxmlformats.org/drawingml/2006/main" w="0">
-            <a:noFill/>
-            <a:prstDash val="solid"/>
-          </a:ln>
-        </p:spPr>
-        <p:txBody>
-          <a:bodyPr xmlns:a="http://schemas.openxmlformats.org/drawingml/2006/main" anchor="t"/>
-          <a:lstStyle xmlns:a="http://schemas.openxmlformats.org/drawingml/2006/main">
-            <a:defPPr>
-              <a:defRPr sz="1500" b="0" i="0">
-                <a:solidFill>
-                  <a:srgbClr val="65786F"/>
-                </a:solidFill>
-              </a:defRPr>
-            </a:defPPr>
-          </a:lstStyle>
-          <a:p xmlns:a="http://schemas.openxmlformats.org/drawingml/2006/main">
-            <a:pPr>
-              <a:defRPr sz="1500" b="0" i="0">
-                <a:solidFill>
-                  <a:srgbClr val="65786F"/>
-                </a:solidFill>
-              </a:defRPr>
-            </a:pPr>
-            <a:r>
-              <a:rPr sz="1500" b="0" i="0">
-                <a:solidFill>
-                  <a:srgbClr val="65786F"/>
-                </a:solidFill>
-              </a:rPr>
-              <a:t>SiteGuard links the worker’s request to a staffing decision without moving or shrinking the protected break.</a:t>
+              <a:t>Camera observations become pulse and breathing trends.</a:t>
             </a:r>
           </a:p>
         </p:txBody>
       </p:sp>
       <p:pic>
         <p:nvPicPr>
-          <p:cNvPr id="5" name="">
-            <a:extLst xmlns:a="http://schemas.openxmlformats.org/drawingml/2006/main">
-              <a:ext uri="{FF2B5EF4-FFF2-40B4-BE49-F238E27FC236}">
-                <a16:creationId xmlns:a16="http://schemas.microsoft.com/office/drawing/2014/main" id="{59B82E68-D3DA-4579-896E-0FC9FB7A1EEC}"/>
+          <p:cNvPr id="4" name="">
+            <a:extLst xmlns:a="http://schemas.openxmlformats.org/drawingml/2006/main">
+              <a:ext uri="{FF2B5EF4-FFF2-40B4-BE49-F238E27FC236}">
+                <a16:creationId xmlns:a16="http://schemas.microsoft.com/office/drawing/2014/main" id="{1BFF1A23-9514-4706-BAC2-DF87B7484182}"/>
               </a:ext>
             </a:extLst>
           </p:cNvPr>
@@ -4637,28 +4356,28 @@
           <p:nvPr/>
         </p:nvPicPr>
         <p:blipFill>
-          <a:blip xmlns:r="http://schemas.openxmlformats.org/officeDocument/2006/relationships" xmlns:a="http://schemas.openxmlformats.org/drawingml/2006/main" r:embed="R548af247bda14bc9"/>
-          <a:srcRect xmlns:a="http://schemas.openxmlformats.org/drawingml/2006/main" l="11000" t="8000" r="2000" b="3000"/>
+          <a:blip xmlns:r="http://schemas.openxmlformats.org/officeDocument/2006/relationships" xmlns:a="http://schemas.openxmlformats.org/drawingml/2006/main" r:embed="Rf734f484917a449e"/>
+          <a:srcRect xmlns:a="http://schemas.openxmlformats.org/drawingml/2006/main" l="8000" t="4000" r="4000" b="3000"/>
           <a:stretch xmlns:a="http://schemas.openxmlformats.org/drawingml/2006/main"/>
         </p:blipFill>
         <p:spPr>
           <a:xfrm xmlns:a="http://schemas.openxmlformats.org/drawingml/2006/main">
-            <a:off x="6572250" y="1219200"/>
-            <a:ext cx="4953000" cy="4686300"/>
+            <a:off x="666750" y="1733550"/>
+            <a:ext cx="10858500" cy="4381500"/>
           </a:xfrm>
           <a:prstGeom xmlns:a="http://schemas.openxmlformats.org/drawingml/2006/main" prst="roundRect">
             <a:avLst>
-              <a:gd name="adj" fmla="val 4878"/>
+              <a:gd name="adj" fmla="val 6087"/>
             </a:avLst>
           </a:prstGeom>
         </p:spPr>
       </p:pic>
       <p:sp>
         <p:nvSpPr>
-          <p:cNvPr id="6" name="">
-            <a:extLst xmlns:a="http://schemas.openxmlformats.org/drawingml/2006/main">
-              <a:ext uri="{FF2B5EF4-FFF2-40B4-BE49-F238E27FC236}">
-                <a16:creationId xmlns:a16="http://schemas.microsoft.com/office/drawing/2014/main" id="{805D46E2-85CE-4662-B8F5-2E1520EBB09A}"/>
+          <p:cNvPr id="5" name="">
+            <a:extLst xmlns:a="http://schemas.openxmlformats.org/drawingml/2006/main">
+              <a:ext uri="{FF2B5EF4-FFF2-40B4-BE49-F238E27FC236}">
+                <a16:creationId xmlns:a16="http://schemas.microsoft.com/office/drawing/2014/main" id="{5022B0D1-02C0-4A4A-A28F-FE7E5DB291AD}"/>
               </a:ext>
             </a:extLst>
           </p:cNvPr>
@@ -4669,377 +4388,8 @@
         </p:nvSpPr>
         <p:spPr>
           <a:xfrm xmlns:a="http://schemas.openxmlformats.org/drawingml/2006/main">
-            <a:off x="6496050" y="5753100"/>
-            <a:ext cx="5105400" cy="66675"/>
-          </a:xfrm>
-          <a:prstGeom xmlns:a="http://schemas.openxmlformats.org/drawingml/2006/main" prst="roundRect">
-            <a:avLst>
-              <a:gd name="adj" fmla="val 42857"/>
-            </a:avLst>
-          </a:prstGeom>
-          <a:solidFill xmlns:a="http://schemas.openxmlformats.org/drawingml/2006/main">
-            <a:srgbClr val="C9FF65"/>
-          </a:solidFill>
-          <a:ln xmlns:a="http://schemas.openxmlformats.org/drawingml/2006/main" w="0">
-            <a:noFill/>
-            <a:prstDash val="solid"/>
-          </a:ln>
-        </p:spPr>
-      </p:sp>
-    </p:spTree>
-    <p:extLst>
-      <p:ext uri="{BB962C8B-B14F-4D97-AF65-F5344CB8AC3E}">
-        <p14:creationId xmlns:p14="http://schemas.microsoft.com/office/powerpoint/2010/main" val="1422847248"/>
-      </p:ext>
-    </p:extLst>
-  </p:cSld>
-</p:sld>
-</file>
-
-<file path=ppt/slides/slide3.xml><?xml version="1.0" encoding="utf-8"?>
-<p:sld xmlns:p="http://schemas.openxmlformats.org/presentationml/2006/main">
-  <p:cSld>
-    <p:bg>
-      <p:bgPr>
-        <a:solidFill xmlns:a="http://schemas.openxmlformats.org/drawingml/2006/main">
-          <a:srgbClr val="0B302A"/>
-        </a:solidFill>
-      </p:bgPr>
-    </p:bg>
-    <p:spTree>
-      <p:nvGrpSpPr>
-        <p:cNvPr id="1" name=""/>
-        <p:cNvGrpSpPr/>
-        <p:nvPr/>
-      </p:nvGrpSpPr>
-      <p:grpSpPr>
-        <a:xfrm xmlns:a="http://schemas.openxmlformats.org/drawingml/2006/main"/>
-      </p:grpSpPr>
-      <p:sp>
-        <p:nvSpPr>
-          <p:cNvPr id="25" name="">
-            <a:extLst xmlns:a="http://schemas.openxmlformats.org/drawingml/2006/main">
-              <a:ext uri="{FF2B5EF4-FFF2-40B4-BE49-F238E27FC236}">
-                <a16:creationId xmlns:a16="http://schemas.microsoft.com/office/drawing/2014/main" id="{1503350C-E712-4B93-96E1-DBFB9DAC91D5}"/>
-              </a:ext>
-            </a:extLst>
-          </p:cNvPr>
-          <p:cNvSpPr>
-            <a:spLocks xmlns:a="http://schemas.openxmlformats.org/drawingml/2006/main" noGrp="1"/>
-          </p:cNvSpPr>
-          <p:nvPr/>
-        </p:nvSpPr>
-        <p:spPr>
-          <a:xfrm xmlns:a="http://schemas.openxmlformats.org/drawingml/2006/main">
-            <a:off x="11334750" y="266700"/>
-            <a:ext cx="400050" cy="228600"/>
-          </a:xfrm>
-          <a:prstGeom xmlns:a="http://schemas.openxmlformats.org/drawingml/2006/main" prst="rect">
-            <a:avLst/>
-          </a:prstGeom>
-          <a:noFill xmlns:a="http://schemas.openxmlformats.org/drawingml/2006/main"/>
-          <a:ln xmlns:a="http://schemas.openxmlformats.org/drawingml/2006/main" w="0">
-            <a:noFill/>
-            <a:prstDash val="solid"/>
-          </a:ln>
-        </p:spPr>
-        <p:txBody>
-          <a:bodyPr xmlns:a="http://schemas.openxmlformats.org/drawingml/2006/main" anchor="t"/>
-          <a:lstStyle xmlns:a="http://schemas.openxmlformats.org/drawingml/2006/main">
-            <a:defPPr>
-              <a:defRPr sz="825" b="1" i="0">
-                <a:solidFill>
-                  <a:srgbClr val="DDE9E4"/>
-                </a:solidFill>
-              </a:defRPr>
-            </a:defPPr>
-          </a:lstStyle>
-          <a:p xmlns:a="http://schemas.openxmlformats.org/drawingml/2006/main">
-            <a:pPr>
-              <a:defRPr sz="825" b="1" i="0">
-                <a:solidFill>
-                  <a:srgbClr val="DDE9E4"/>
-                </a:solidFill>
-              </a:defRPr>
-            </a:pPr>
-            <a:r>
-              <a:rPr sz="825" b="1" i="0">
-                <a:solidFill>
-                  <a:srgbClr val="DDE9E4"/>
-                </a:solidFill>
-              </a:rPr>
-              <a:t>03</a:t>
-            </a:r>
-          </a:p>
-        </p:txBody>
-      </p:sp>
-      <p:sp>
-        <p:nvSpPr>
-          <p:cNvPr id="2" name="">
-            <a:extLst xmlns:a="http://schemas.openxmlformats.org/drawingml/2006/main">
-              <a:ext uri="{FF2B5EF4-FFF2-40B4-BE49-F238E27FC236}">
-                <a16:creationId xmlns:a16="http://schemas.microsoft.com/office/drawing/2014/main" id="{58C27B20-9410-41CC-A568-0FAA24DA5902}"/>
-              </a:ext>
-            </a:extLst>
-          </p:cNvPr>
-          <p:cNvSpPr>
-            <a:spLocks xmlns:a="http://schemas.openxmlformats.org/drawingml/2006/main" noGrp="1"/>
-          </p:cNvSpPr>
-          <p:nvPr/>
-        </p:nvSpPr>
-        <p:spPr>
-          <a:xfrm xmlns:a="http://schemas.openxmlformats.org/drawingml/2006/main">
-            <a:off x="609600" y="457200"/>
-            <a:ext cx="6858000" cy="552450"/>
-          </a:xfrm>
-          <a:prstGeom xmlns:a="http://schemas.openxmlformats.org/drawingml/2006/main" prst="rect">
-            <a:avLst/>
-          </a:prstGeom>
-          <a:noFill xmlns:a="http://schemas.openxmlformats.org/drawingml/2006/main"/>
-          <a:ln xmlns:a="http://schemas.openxmlformats.org/drawingml/2006/main" w="0">
-            <a:noFill/>
-            <a:prstDash val="solid"/>
-          </a:ln>
-        </p:spPr>
-        <p:txBody>
-          <a:bodyPr xmlns:a="http://schemas.openxmlformats.org/drawingml/2006/main" anchor="t"/>
-          <a:lstStyle xmlns:a="http://schemas.openxmlformats.org/drawingml/2006/main">
-            <a:defPPr>
-              <a:defRPr sz="2550" b="1" i="0">
-                <a:solidFill>
-                  <a:srgbClr val="FFFFFF"/>
-                </a:solidFill>
-              </a:defRPr>
-            </a:defPPr>
-          </a:lstStyle>
-          <a:p xmlns:a="http://schemas.openxmlformats.org/drawingml/2006/main">
-            <a:pPr>
-              <a:defRPr sz="2550" b="1" i="0">
-                <a:solidFill>
-                  <a:srgbClr val="FFFFFF"/>
-                </a:solidFill>
-              </a:defRPr>
-            </a:pPr>
-            <a:r>
-              <a:rPr sz="2550" b="1" i="0">
-                <a:solidFill>
-                  <a:srgbClr val="FFFFFF"/>
-                </a:solidFill>
-              </a:rPr>
-              <a:t>One connected safety loop</a:t>
-            </a:r>
-          </a:p>
-        </p:txBody>
-      </p:sp>
-      <p:sp>
-        <p:nvSpPr>
-          <p:cNvPr id="3" name="">
-            <a:extLst xmlns:a="http://schemas.openxmlformats.org/drawingml/2006/main">
-              <a:ext uri="{FF2B5EF4-FFF2-40B4-BE49-F238E27FC236}">
-                <a16:creationId xmlns:a16="http://schemas.microsoft.com/office/drawing/2014/main" id="{66F88C62-F1A9-48C3-B142-BE0674C7CD9F}"/>
-              </a:ext>
-            </a:extLst>
-          </p:cNvPr>
-          <p:cNvSpPr>
-            <a:spLocks xmlns:a="http://schemas.openxmlformats.org/drawingml/2006/main" noGrp="1"/>
-          </p:cNvSpPr>
-          <p:nvPr/>
-        </p:nvSpPr>
-        <p:spPr>
-          <a:xfrm xmlns:a="http://schemas.openxmlformats.org/drawingml/2006/main">
-            <a:off x="628650" y="1047750"/>
-            <a:ext cx="7048500" cy="342900"/>
-          </a:xfrm>
-          <a:prstGeom xmlns:a="http://schemas.openxmlformats.org/drawingml/2006/main" prst="rect">
-            <a:avLst/>
-          </a:prstGeom>
-          <a:noFill xmlns:a="http://schemas.openxmlformats.org/drawingml/2006/main"/>
-          <a:ln xmlns:a="http://schemas.openxmlformats.org/drawingml/2006/main" w="0">
-            <a:noFill/>
-            <a:prstDash val="solid"/>
-          </a:ln>
-        </p:spPr>
-        <p:txBody>
-          <a:bodyPr xmlns:a="http://schemas.openxmlformats.org/drawingml/2006/main" anchor="t"/>
-          <a:lstStyle xmlns:a="http://schemas.openxmlformats.org/drawingml/2006/main">
-            <a:defPPr>
-              <a:defRPr sz="1350" b="0" i="0">
-                <a:solidFill>
-                  <a:srgbClr val="DDE9E4"/>
-                </a:solidFill>
-              </a:defRPr>
-            </a:defPPr>
-          </a:lstStyle>
-          <a:p xmlns:a="http://schemas.openxmlformats.org/drawingml/2006/main">
-            <a:pPr>
-              <a:defRPr sz="1350" b="0" i="0">
-                <a:solidFill>
-                  <a:srgbClr val="DDE9E4"/>
-                </a:solidFill>
-              </a:defRPr>
-            </a:pPr>
-            <a:r>
-              <a:rPr sz="1350" b="0" i="0">
-                <a:solidFill>
-                  <a:srgbClr val="DDE9E4"/>
-                </a:solidFill>
-              </a:rPr>
-              <a:t>The technology earns its place by helping a person make the next decision.</a:t>
-            </a:r>
-          </a:p>
-        </p:txBody>
-      </p:sp>
-      <p:sp>
-        <p:nvSpPr>
-          <p:cNvPr id="4" name="">
-            <a:extLst xmlns:a="http://schemas.openxmlformats.org/drawingml/2006/main">
-              <a:ext uri="{FF2B5EF4-FFF2-40B4-BE49-F238E27FC236}">
-                <a16:creationId xmlns:a16="http://schemas.microsoft.com/office/drawing/2014/main" id="{6A165CF1-FE43-4FA3-BD48-A2611EEFE46D}"/>
-              </a:ext>
-            </a:extLst>
-          </p:cNvPr>
-          <p:cNvSpPr>
-            <a:spLocks xmlns:a="http://schemas.openxmlformats.org/drawingml/2006/main" noGrp="1"/>
-          </p:cNvSpPr>
-          <p:nvPr/>
-        </p:nvSpPr>
-        <p:spPr>
-          <a:xfrm xmlns:a="http://schemas.openxmlformats.org/drawingml/2006/main">
-            <a:off x="609600" y="2266950"/>
-            <a:ext cx="1905000" cy="266700"/>
-          </a:xfrm>
-          <a:prstGeom xmlns:a="http://schemas.openxmlformats.org/drawingml/2006/main" prst="rect">
-            <a:avLst/>
-          </a:prstGeom>
-          <a:noFill xmlns:a="http://schemas.openxmlformats.org/drawingml/2006/main"/>
-          <a:ln xmlns:a="http://schemas.openxmlformats.org/drawingml/2006/main" w="0">
-            <a:noFill/>
-            <a:prstDash val="solid"/>
-          </a:ln>
-        </p:spPr>
-        <p:txBody>
-          <a:bodyPr xmlns:a="http://schemas.openxmlformats.org/drawingml/2006/main" anchor="t"/>
-          <a:lstStyle xmlns:a="http://schemas.openxmlformats.org/drawingml/2006/main">
-            <a:defPPr>
-              <a:defRPr sz="1050" b="1" i="0">
-                <a:solidFill>
-                  <a:srgbClr val="C9FF65"/>
-                </a:solidFill>
-              </a:defRPr>
-            </a:defPPr>
-          </a:lstStyle>
-          <a:p xmlns:a="http://schemas.openxmlformats.org/drawingml/2006/main">
-            <a:pPr>
-              <a:defRPr sz="1050" b="1" i="0">
-                <a:solidFill>
-                  <a:srgbClr val="C9FF65"/>
-                </a:solidFill>
-              </a:defRPr>
-            </a:pPr>
-            <a:r>
-              <a:rPr sz="1050" b="1" i="0">
-                <a:solidFill>
-                  <a:srgbClr val="C9FF65"/>
-                </a:solidFill>
-              </a:rPr>
-              <a:t>OBSERVE</a:t>
-            </a:r>
-          </a:p>
-        </p:txBody>
-      </p:sp>
-      <p:sp>
-        <p:nvSpPr>
-          <p:cNvPr id="5" name="">
-            <a:extLst xmlns:a="http://schemas.openxmlformats.org/drawingml/2006/main">
-              <a:ext uri="{FF2B5EF4-FFF2-40B4-BE49-F238E27FC236}">
-                <a16:creationId xmlns:a16="http://schemas.microsoft.com/office/drawing/2014/main" id="{95ADB9DA-81E5-4E95-B615-27246CFD0E7A}"/>
-              </a:ext>
-            </a:extLst>
-          </p:cNvPr>
-          <p:cNvSpPr>
-            <a:spLocks xmlns:a="http://schemas.openxmlformats.org/drawingml/2006/main" noGrp="1"/>
-          </p:cNvSpPr>
-          <p:nvPr/>
-        </p:nvSpPr>
-        <p:spPr>
-          <a:xfrm xmlns:a="http://schemas.openxmlformats.org/drawingml/2006/main">
-            <a:off x="609600" y="2667000"/>
-            <a:ext cx="1847850" cy="781050"/>
-          </a:xfrm>
-          <a:prstGeom xmlns:a="http://schemas.openxmlformats.org/drawingml/2006/main" prst="rect">
-            <a:avLst/>
-          </a:prstGeom>
-          <a:noFill xmlns:a="http://schemas.openxmlformats.org/drawingml/2006/main"/>
-          <a:ln xmlns:a="http://schemas.openxmlformats.org/drawingml/2006/main" w="0">
-            <a:noFill/>
-            <a:prstDash val="solid"/>
-          </a:ln>
-        </p:spPr>
-        <p:txBody>
-          <a:bodyPr xmlns:a="http://schemas.openxmlformats.org/drawingml/2006/main" anchor="t"/>
-          <a:lstStyle xmlns:a="http://schemas.openxmlformats.org/drawingml/2006/main">
-            <a:defPPr>
-              <a:defRPr sz="1575" b="1" i="0">
-                <a:solidFill>
-                  <a:srgbClr val="FFFFFF"/>
-                </a:solidFill>
-              </a:defRPr>
-            </a:defPPr>
-          </a:lstStyle>
-          <a:p xmlns:a="http://schemas.openxmlformats.org/drawingml/2006/main">
-            <a:pPr>
-              <a:defRPr sz="1575" b="1" i="0">
-                <a:solidFill>
-                  <a:srgbClr val="FFFFFF"/>
-                </a:solidFill>
-              </a:defRPr>
-            </a:pPr>
-            <a:r>
-              <a:rPr sz="1575" b="1" i="0">
-                <a:solidFill>
-                  <a:srgbClr val="FFFFFF"/>
-                </a:solidFill>
-              </a:rPr>
-              <a:t>Pulse and breathing</a:t>
-            </a:r>
-          </a:p>
-          <a:p xmlns:a="http://schemas.openxmlformats.org/drawingml/2006/main">
-            <a:pPr>
-              <a:defRPr sz="1575" b="1" i="0">
-                <a:solidFill>
-                  <a:srgbClr val="FFFFFF"/>
-                </a:solidFill>
-              </a:defRPr>
-            </a:pPr>
-            <a:r>
-              <a:rPr sz="1575" b="1" i="0">
-                <a:solidFill>
-                  <a:srgbClr val="FFFFFF"/>
-                </a:solidFill>
-              </a:rPr>
-              <a:t>from Presage</a:t>
-            </a:r>
-          </a:p>
-        </p:txBody>
-      </p:sp>
-      <p:sp>
-        <p:nvSpPr>
-          <p:cNvPr id="6" name="">
-            <a:extLst xmlns:a="http://schemas.openxmlformats.org/drawingml/2006/main">
-              <a:ext uri="{FF2B5EF4-FFF2-40B4-BE49-F238E27FC236}">
-                <a16:creationId xmlns:a16="http://schemas.microsoft.com/office/drawing/2014/main" id="{875A43F8-657D-4D06-ACD6-910F64625920}"/>
-              </a:ext>
-            </a:extLst>
-          </p:cNvPr>
-          <p:cNvSpPr>
-            <a:spLocks xmlns:a="http://schemas.openxmlformats.org/drawingml/2006/main" noGrp="1"/>
-          </p:cNvSpPr>
-          <p:nvPr/>
-        </p:nvSpPr>
-        <p:spPr>
-          <a:xfrm xmlns:a="http://schemas.openxmlformats.org/drawingml/2006/main">
-            <a:off x="2476500" y="2781300"/>
-            <a:ext cx="285750" cy="38100"/>
+            <a:off x="685800" y="6286500"/>
+            <a:ext cx="4286250" cy="285750"/>
           </a:xfrm>
           <a:prstGeom xmlns:a="http://schemas.openxmlformats.org/drawingml/2006/main" prst="roundRect">
             <a:avLst>
@@ -5047,7 +4397,7 @@
             </a:avLst>
           </a:prstGeom>
           <a:solidFill xmlns:a="http://schemas.openxmlformats.org/drawingml/2006/main">
-            <a:srgbClr val="65786F"/>
+            <a:srgbClr val="FFD278"/>
           </a:solidFill>
           <a:ln xmlns:a="http://schemas.openxmlformats.org/drawingml/2006/main" w="0">
             <a:noFill/>
@@ -5057,10 +4407,10 @@
       </p:sp>
       <p:sp>
         <p:nvSpPr>
-          <p:cNvPr id="7" name="">
-            <a:extLst xmlns:a="http://schemas.openxmlformats.org/drawingml/2006/main">
-              <a:ext uri="{FF2B5EF4-FFF2-40B4-BE49-F238E27FC236}">
-                <a16:creationId xmlns:a16="http://schemas.microsoft.com/office/drawing/2014/main" id="{86575B04-11FB-4E51-AB2D-792CCC4B98DE}"/>
+          <p:cNvPr id="6" name="">
+            <a:extLst xmlns:a="http://schemas.openxmlformats.org/drawingml/2006/main">
+              <a:ext uri="{FF2B5EF4-FFF2-40B4-BE49-F238E27FC236}">
+                <a16:creationId xmlns:a16="http://schemas.microsoft.com/office/drawing/2014/main" id="{AC52C2AD-7441-4E1D-8AFD-22354B146FD1}"/>
               </a:ext>
             </a:extLst>
           </p:cNvPr>
@@ -5071,8 +4421,8 @@
         </p:nvSpPr>
         <p:spPr>
           <a:xfrm xmlns:a="http://schemas.openxmlformats.org/drawingml/2006/main">
-            <a:off x="2590800" y="2571750"/>
-            <a:ext cx="228600" cy="400050"/>
+            <a:off x="838200" y="6362700"/>
+            <a:ext cx="3981450" cy="152400"/>
           </a:xfrm>
           <a:prstGeom xmlns:a="http://schemas.openxmlformats.org/drawingml/2006/main" prst="rect">
             <a:avLst/>
@@ -5087,980 +4437,28 @@
           <a:bodyPr xmlns:a="http://schemas.openxmlformats.org/drawingml/2006/main" anchor="t"/>
           <a:lstStyle xmlns:a="http://schemas.openxmlformats.org/drawingml/2006/main">
             <a:defPPr>
-              <a:defRPr sz="2100" b="1" i="0">
-                <a:solidFill>
-                  <a:srgbClr val="C9FF65"/>
+              <a:defRPr sz="900" b="1">
+                <a:solidFill>
+                  <a:srgbClr val="07110F"/>
                 </a:solidFill>
               </a:defRPr>
             </a:defPPr>
           </a:lstStyle>
           <a:p xmlns:a="http://schemas.openxmlformats.org/drawingml/2006/main">
             <a:pPr>
-              <a:defRPr sz="2100" b="1" i="0">
-                <a:solidFill>
-                  <a:srgbClr val="C9FF65"/>
+              <a:defRPr sz="900" b="1">
+                <a:solidFill>
+                  <a:srgbClr val="07110F"/>
                 </a:solidFill>
               </a:defRPr>
             </a:pPr>
             <a:r>
-              <a:rPr sz="2100" b="1" i="0">
-                <a:solidFill>
-                  <a:srgbClr val="C9FF65"/>
+              <a:rPr sz="900" b="1">
+                <a:solidFill>
+                  <a:srgbClr val="07110F"/>
                 </a:solidFill>
               </a:rPr>
-              <a:t>›</a:t>
-            </a:r>
-          </a:p>
-        </p:txBody>
-      </p:sp>
-      <p:sp>
-        <p:nvSpPr>
-          <p:cNvPr id="8" name="">
-            <a:extLst xmlns:a="http://schemas.openxmlformats.org/drawingml/2006/main">
-              <a:ext uri="{FF2B5EF4-FFF2-40B4-BE49-F238E27FC236}">
-                <a16:creationId xmlns:a16="http://schemas.microsoft.com/office/drawing/2014/main" id="{983548FE-F757-4B04-9273-F3B81457067A}"/>
-              </a:ext>
-            </a:extLst>
-          </p:cNvPr>
-          <p:cNvSpPr>
-            <a:spLocks xmlns:a="http://schemas.openxmlformats.org/drawingml/2006/main" noGrp="1"/>
-          </p:cNvSpPr>
-          <p:nvPr/>
-        </p:nvSpPr>
-        <p:spPr>
-          <a:xfrm xmlns:a="http://schemas.openxmlformats.org/drawingml/2006/main">
-            <a:off x="2895600" y="2266950"/>
-            <a:ext cx="1905000" cy="266700"/>
-          </a:xfrm>
-          <a:prstGeom xmlns:a="http://schemas.openxmlformats.org/drawingml/2006/main" prst="rect">
-            <a:avLst/>
-          </a:prstGeom>
-          <a:noFill xmlns:a="http://schemas.openxmlformats.org/drawingml/2006/main"/>
-          <a:ln xmlns:a="http://schemas.openxmlformats.org/drawingml/2006/main" w="0">
-            <a:noFill/>
-            <a:prstDash val="solid"/>
-          </a:ln>
-        </p:spPr>
-        <p:txBody>
-          <a:bodyPr xmlns:a="http://schemas.openxmlformats.org/drawingml/2006/main" anchor="t"/>
-          <a:lstStyle xmlns:a="http://schemas.openxmlformats.org/drawingml/2006/main">
-            <a:defPPr>
-              <a:defRPr sz="1050" b="1" i="0">
-                <a:solidFill>
-                  <a:srgbClr val="C9FF65"/>
-                </a:solidFill>
-              </a:defRPr>
-            </a:defPPr>
-          </a:lstStyle>
-          <a:p xmlns:a="http://schemas.openxmlformats.org/drawingml/2006/main">
-            <a:pPr>
-              <a:defRPr sz="1050" b="1" i="0">
-                <a:solidFill>
-                  <a:srgbClr val="C9FF65"/>
-                </a:solidFill>
-              </a:defRPr>
-            </a:pPr>
-            <a:r>
-              <a:rPr sz="1050" b="1" i="0">
-                <a:solidFill>
-                  <a:srgbClr val="C9FF65"/>
-                </a:solidFill>
-              </a:rPr>
-              <a:t>REMEMBER</a:t>
-            </a:r>
-          </a:p>
-        </p:txBody>
-      </p:sp>
-      <p:sp>
-        <p:nvSpPr>
-          <p:cNvPr id="9" name="">
-            <a:extLst xmlns:a="http://schemas.openxmlformats.org/drawingml/2006/main">
-              <a:ext uri="{FF2B5EF4-FFF2-40B4-BE49-F238E27FC236}">
-                <a16:creationId xmlns:a16="http://schemas.microsoft.com/office/drawing/2014/main" id="{6ED2A8D5-8062-43B6-A065-9F1B82477B37}"/>
-              </a:ext>
-            </a:extLst>
-          </p:cNvPr>
-          <p:cNvSpPr>
-            <a:spLocks xmlns:a="http://schemas.openxmlformats.org/drawingml/2006/main" noGrp="1"/>
-          </p:cNvSpPr>
-          <p:nvPr/>
-        </p:nvSpPr>
-        <p:spPr>
-          <a:xfrm xmlns:a="http://schemas.openxmlformats.org/drawingml/2006/main">
-            <a:off x="2895600" y="2667000"/>
-            <a:ext cx="1847850" cy="781050"/>
-          </a:xfrm>
-          <a:prstGeom xmlns:a="http://schemas.openxmlformats.org/drawingml/2006/main" prst="rect">
-            <a:avLst/>
-          </a:prstGeom>
-          <a:noFill xmlns:a="http://schemas.openxmlformats.org/drawingml/2006/main"/>
-          <a:ln xmlns:a="http://schemas.openxmlformats.org/drawingml/2006/main" w="0">
-            <a:noFill/>
-            <a:prstDash val="solid"/>
-          </a:ln>
-        </p:spPr>
-        <p:txBody>
-          <a:bodyPr xmlns:a="http://schemas.openxmlformats.org/drawingml/2006/main" anchor="t"/>
-          <a:lstStyle xmlns:a="http://schemas.openxmlformats.org/drawingml/2006/main">
-            <a:defPPr>
-              <a:defRPr sz="1575" b="1" i="0">
-                <a:solidFill>
-                  <a:srgbClr val="FFFFFF"/>
-                </a:solidFill>
-              </a:defRPr>
-            </a:defPPr>
-          </a:lstStyle>
-          <a:p xmlns:a="http://schemas.openxmlformats.org/drawingml/2006/main">
-            <a:pPr>
-              <a:defRPr sz="1575" b="1" i="0">
-                <a:solidFill>
-                  <a:srgbClr val="FFFFFF"/>
-                </a:solidFill>
-              </a:defRPr>
-            </a:pPr>
-            <a:r>
-              <a:rPr sz="1575" b="1" i="0">
-                <a:solidFill>
-                  <a:srgbClr val="FFFFFF"/>
-                </a:solidFill>
-              </a:rPr>
-              <a:t>Worker history</a:t>
-            </a:r>
-          </a:p>
-          <a:p xmlns:a="http://schemas.openxmlformats.org/drawingml/2006/main">
-            <a:pPr>
-              <a:defRPr sz="1575" b="1" i="0">
-                <a:solidFill>
-                  <a:srgbClr val="FFFFFF"/>
-                </a:solidFill>
-              </a:defRPr>
-            </a:pPr>
-            <a:r>
-              <a:rPr sz="1575" b="1" i="0">
-                <a:solidFill>
-                  <a:srgbClr val="FFFFFF"/>
-                </a:solidFill>
-              </a:rPr>
-              <a:t>in Tiger Data</a:t>
-            </a:r>
-          </a:p>
-        </p:txBody>
-      </p:sp>
-      <p:sp>
-        <p:nvSpPr>
-          <p:cNvPr id="10" name="">
-            <a:extLst xmlns:a="http://schemas.openxmlformats.org/drawingml/2006/main">
-              <a:ext uri="{FF2B5EF4-FFF2-40B4-BE49-F238E27FC236}">
-                <a16:creationId xmlns:a16="http://schemas.microsoft.com/office/drawing/2014/main" id="{3614E5B3-4605-4B6B-8FDD-138C8226E152}"/>
-              </a:ext>
-            </a:extLst>
-          </p:cNvPr>
-          <p:cNvSpPr>
-            <a:spLocks xmlns:a="http://schemas.openxmlformats.org/drawingml/2006/main" noGrp="1"/>
-          </p:cNvSpPr>
-          <p:nvPr/>
-        </p:nvSpPr>
-        <p:spPr>
-          <a:xfrm xmlns:a="http://schemas.openxmlformats.org/drawingml/2006/main">
-            <a:off x="4762500" y="2781300"/>
-            <a:ext cx="285750" cy="38100"/>
-          </a:xfrm>
-          <a:prstGeom xmlns:a="http://schemas.openxmlformats.org/drawingml/2006/main" prst="roundRect">
-            <a:avLst>
-              <a:gd name="adj" fmla="val 50000"/>
-            </a:avLst>
-          </a:prstGeom>
-          <a:solidFill xmlns:a="http://schemas.openxmlformats.org/drawingml/2006/main">
-            <a:srgbClr val="65786F"/>
-          </a:solidFill>
-          <a:ln xmlns:a="http://schemas.openxmlformats.org/drawingml/2006/main" w="0">
-            <a:noFill/>
-            <a:prstDash val="solid"/>
-          </a:ln>
-        </p:spPr>
-      </p:sp>
-      <p:sp>
-        <p:nvSpPr>
-          <p:cNvPr id="11" name="">
-            <a:extLst xmlns:a="http://schemas.openxmlformats.org/drawingml/2006/main">
-              <a:ext uri="{FF2B5EF4-FFF2-40B4-BE49-F238E27FC236}">
-                <a16:creationId xmlns:a16="http://schemas.microsoft.com/office/drawing/2014/main" id="{5D655F13-EAC9-4048-B6F3-298DCEE188D0}"/>
-              </a:ext>
-            </a:extLst>
-          </p:cNvPr>
-          <p:cNvSpPr>
-            <a:spLocks xmlns:a="http://schemas.openxmlformats.org/drawingml/2006/main" noGrp="1"/>
-          </p:cNvSpPr>
-          <p:nvPr/>
-        </p:nvSpPr>
-        <p:spPr>
-          <a:xfrm xmlns:a="http://schemas.openxmlformats.org/drawingml/2006/main">
-            <a:off x="4876800" y="2571750"/>
-            <a:ext cx="228600" cy="400050"/>
-          </a:xfrm>
-          <a:prstGeom xmlns:a="http://schemas.openxmlformats.org/drawingml/2006/main" prst="rect">
-            <a:avLst/>
-          </a:prstGeom>
-          <a:noFill xmlns:a="http://schemas.openxmlformats.org/drawingml/2006/main"/>
-          <a:ln xmlns:a="http://schemas.openxmlformats.org/drawingml/2006/main" w="0">
-            <a:noFill/>
-            <a:prstDash val="solid"/>
-          </a:ln>
-        </p:spPr>
-        <p:txBody>
-          <a:bodyPr xmlns:a="http://schemas.openxmlformats.org/drawingml/2006/main" anchor="t"/>
-          <a:lstStyle xmlns:a="http://schemas.openxmlformats.org/drawingml/2006/main">
-            <a:defPPr>
-              <a:defRPr sz="2100" b="1" i="0">
-                <a:solidFill>
-                  <a:srgbClr val="C9FF65"/>
-                </a:solidFill>
-              </a:defRPr>
-            </a:defPPr>
-          </a:lstStyle>
-          <a:p xmlns:a="http://schemas.openxmlformats.org/drawingml/2006/main">
-            <a:pPr>
-              <a:defRPr sz="2100" b="1" i="0">
-                <a:solidFill>
-                  <a:srgbClr val="C9FF65"/>
-                </a:solidFill>
-              </a:defRPr>
-            </a:pPr>
-            <a:r>
-              <a:rPr sz="2100" b="1" i="0">
-                <a:solidFill>
-                  <a:srgbClr val="C9FF65"/>
-                </a:solidFill>
-              </a:rPr>
-              <a:t>›</a:t>
-            </a:r>
-          </a:p>
-        </p:txBody>
-      </p:sp>
-      <p:sp>
-        <p:nvSpPr>
-          <p:cNvPr id="12" name="">
-            <a:extLst xmlns:a="http://schemas.openxmlformats.org/drawingml/2006/main">
-              <a:ext uri="{FF2B5EF4-FFF2-40B4-BE49-F238E27FC236}">
-                <a16:creationId xmlns:a16="http://schemas.microsoft.com/office/drawing/2014/main" id="{00C5D113-DD4F-4B07-9FDF-AC2CEE494481}"/>
-              </a:ext>
-            </a:extLst>
-          </p:cNvPr>
-          <p:cNvSpPr>
-            <a:spLocks xmlns:a="http://schemas.openxmlformats.org/drawingml/2006/main" noGrp="1"/>
-          </p:cNvSpPr>
-          <p:nvPr/>
-        </p:nvSpPr>
-        <p:spPr>
-          <a:xfrm xmlns:a="http://schemas.openxmlformats.org/drawingml/2006/main">
-            <a:off x="5181600" y="2266950"/>
-            <a:ext cx="1905000" cy="266700"/>
-          </a:xfrm>
-          <a:prstGeom xmlns:a="http://schemas.openxmlformats.org/drawingml/2006/main" prst="rect">
-            <a:avLst/>
-          </a:prstGeom>
-          <a:noFill xmlns:a="http://schemas.openxmlformats.org/drawingml/2006/main"/>
-          <a:ln xmlns:a="http://schemas.openxmlformats.org/drawingml/2006/main" w="0">
-            <a:noFill/>
-            <a:prstDash val="solid"/>
-          </a:ln>
-        </p:spPr>
-        <p:txBody>
-          <a:bodyPr xmlns:a="http://schemas.openxmlformats.org/drawingml/2006/main" anchor="t"/>
-          <a:lstStyle xmlns:a="http://schemas.openxmlformats.org/drawingml/2006/main">
-            <a:defPPr>
-              <a:defRPr sz="1050" b="1" i="0">
-                <a:solidFill>
-                  <a:srgbClr val="C9FF65"/>
-                </a:solidFill>
-              </a:defRPr>
-            </a:defPPr>
-          </a:lstStyle>
-          <a:p xmlns:a="http://schemas.openxmlformats.org/drawingml/2006/main">
-            <a:pPr>
-              <a:defRPr sz="1050" b="1" i="0">
-                <a:solidFill>
-                  <a:srgbClr val="C9FF65"/>
-                </a:solidFill>
-              </a:defRPr>
-            </a:pPr>
-            <a:r>
-              <a:rPr sz="1050" b="1" i="0">
-                <a:solidFill>
-                  <a:srgbClr val="C9FF65"/>
-                </a:solidFill>
-              </a:rPr>
-              <a:t>EXPLAIN</a:t>
-            </a:r>
-          </a:p>
-        </p:txBody>
-      </p:sp>
-      <p:sp>
-        <p:nvSpPr>
-          <p:cNvPr id="13" name="">
-            <a:extLst xmlns:a="http://schemas.openxmlformats.org/drawingml/2006/main">
-              <a:ext uri="{FF2B5EF4-FFF2-40B4-BE49-F238E27FC236}">
-                <a16:creationId xmlns:a16="http://schemas.microsoft.com/office/drawing/2014/main" id="{14237929-5015-47AB-B879-A5688C9E3E97}"/>
-              </a:ext>
-            </a:extLst>
-          </p:cNvPr>
-          <p:cNvSpPr>
-            <a:spLocks xmlns:a="http://schemas.openxmlformats.org/drawingml/2006/main" noGrp="1"/>
-          </p:cNvSpPr>
-          <p:nvPr/>
-        </p:nvSpPr>
-        <p:spPr>
-          <a:xfrm xmlns:a="http://schemas.openxmlformats.org/drawingml/2006/main">
-            <a:off x="5181600" y="2667000"/>
-            <a:ext cx="1847850" cy="781050"/>
-          </a:xfrm>
-          <a:prstGeom xmlns:a="http://schemas.openxmlformats.org/drawingml/2006/main" prst="rect">
-            <a:avLst/>
-          </a:prstGeom>
-          <a:noFill xmlns:a="http://schemas.openxmlformats.org/drawingml/2006/main"/>
-          <a:ln xmlns:a="http://schemas.openxmlformats.org/drawingml/2006/main" w="0">
-            <a:noFill/>
-            <a:prstDash val="solid"/>
-          </a:ln>
-        </p:spPr>
-        <p:txBody>
-          <a:bodyPr xmlns:a="http://schemas.openxmlformats.org/drawingml/2006/main" anchor="t"/>
-          <a:lstStyle xmlns:a="http://schemas.openxmlformats.org/drawingml/2006/main">
-            <a:defPPr>
-              <a:defRPr sz="1575" b="1" i="0">
-                <a:solidFill>
-                  <a:srgbClr val="FFFFFF"/>
-                </a:solidFill>
-              </a:defRPr>
-            </a:defPPr>
-          </a:lstStyle>
-          <a:p xmlns:a="http://schemas.openxmlformats.org/drawingml/2006/main">
-            <a:pPr>
-              <a:defRPr sz="1575" b="1" i="0">
-                <a:solidFill>
-                  <a:srgbClr val="FFFFFF"/>
-                </a:solidFill>
-              </a:defRPr>
-            </a:pPr>
-            <a:r>
-              <a:rPr sz="1575" b="1" i="0">
-                <a:solidFill>
-                  <a:srgbClr val="FFFFFF"/>
-                </a:solidFill>
-              </a:rPr>
-              <a:t>Approved facts</a:t>
-            </a:r>
-          </a:p>
-          <a:p xmlns:a="http://schemas.openxmlformats.org/drawingml/2006/main">
-            <a:pPr>
-              <a:defRPr sz="1575" b="1" i="0">
-                <a:solidFill>
-                  <a:srgbClr val="FFFFFF"/>
-                </a:solidFill>
-              </a:defRPr>
-            </a:pPr>
-            <a:r>
-              <a:rPr sz="1575" b="1" i="0">
-                <a:solidFill>
-                  <a:srgbClr val="FFFFFF"/>
-                </a:solidFill>
-              </a:rPr>
-              <a:t>through Gemini</a:t>
-            </a:r>
-          </a:p>
-        </p:txBody>
-      </p:sp>
-      <p:sp>
-        <p:nvSpPr>
-          <p:cNvPr id="14" name="">
-            <a:extLst xmlns:a="http://schemas.openxmlformats.org/drawingml/2006/main">
-              <a:ext uri="{FF2B5EF4-FFF2-40B4-BE49-F238E27FC236}">
-                <a16:creationId xmlns:a16="http://schemas.microsoft.com/office/drawing/2014/main" id="{2ACAF4CE-0667-4057-9379-90B0CC9216F0}"/>
-              </a:ext>
-            </a:extLst>
-          </p:cNvPr>
-          <p:cNvSpPr>
-            <a:spLocks xmlns:a="http://schemas.openxmlformats.org/drawingml/2006/main" noGrp="1"/>
-          </p:cNvSpPr>
-          <p:nvPr/>
-        </p:nvSpPr>
-        <p:spPr>
-          <a:xfrm xmlns:a="http://schemas.openxmlformats.org/drawingml/2006/main">
-            <a:off x="7048500" y="2781300"/>
-            <a:ext cx="285750" cy="38100"/>
-          </a:xfrm>
-          <a:prstGeom xmlns:a="http://schemas.openxmlformats.org/drawingml/2006/main" prst="roundRect">
-            <a:avLst>
-              <a:gd name="adj" fmla="val 50000"/>
-            </a:avLst>
-          </a:prstGeom>
-          <a:solidFill xmlns:a="http://schemas.openxmlformats.org/drawingml/2006/main">
-            <a:srgbClr val="65786F"/>
-          </a:solidFill>
-          <a:ln xmlns:a="http://schemas.openxmlformats.org/drawingml/2006/main" w="0">
-            <a:noFill/>
-            <a:prstDash val="solid"/>
-          </a:ln>
-        </p:spPr>
-      </p:sp>
-      <p:sp>
-        <p:nvSpPr>
-          <p:cNvPr id="15" name="">
-            <a:extLst xmlns:a="http://schemas.openxmlformats.org/drawingml/2006/main">
-              <a:ext uri="{FF2B5EF4-FFF2-40B4-BE49-F238E27FC236}">
-                <a16:creationId xmlns:a16="http://schemas.microsoft.com/office/drawing/2014/main" id="{1650BE8C-636C-40FF-AA54-D490084CAF06}"/>
-              </a:ext>
-            </a:extLst>
-          </p:cNvPr>
-          <p:cNvSpPr>
-            <a:spLocks xmlns:a="http://schemas.openxmlformats.org/drawingml/2006/main" noGrp="1"/>
-          </p:cNvSpPr>
-          <p:nvPr/>
-        </p:nvSpPr>
-        <p:spPr>
-          <a:xfrm xmlns:a="http://schemas.openxmlformats.org/drawingml/2006/main">
-            <a:off x="7162800" y="2571750"/>
-            <a:ext cx="228600" cy="400050"/>
-          </a:xfrm>
-          <a:prstGeom xmlns:a="http://schemas.openxmlformats.org/drawingml/2006/main" prst="rect">
-            <a:avLst/>
-          </a:prstGeom>
-          <a:noFill xmlns:a="http://schemas.openxmlformats.org/drawingml/2006/main"/>
-          <a:ln xmlns:a="http://schemas.openxmlformats.org/drawingml/2006/main" w="0">
-            <a:noFill/>
-            <a:prstDash val="solid"/>
-          </a:ln>
-        </p:spPr>
-        <p:txBody>
-          <a:bodyPr xmlns:a="http://schemas.openxmlformats.org/drawingml/2006/main" anchor="t"/>
-          <a:lstStyle xmlns:a="http://schemas.openxmlformats.org/drawingml/2006/main">
-            <a:defPPr>
-              <a:defRPr sz="2100" b="1" i="0">
-                <a:solidFill>
-                  <a:srgbClr val="C9FF65"/>
-                </a:solidFill>
-              </a:defRPr>
-            </a:defPPr>
-          </a:lstStyle>
-          <a:p xmlns:a="http://schemas.openxmlformats.org/drawingml/2006/main">
-            <a:pPr>
-              <a:defRPr sz="2100" b="1" i="0">
-                <a:solidFill>
-                  <a:srgbClr val="C9FF65"/>
-                </a:solidFill>
-              </a:defRPr>
-            </a:pPr>
-            <a:r>
-              <a:rPr sz="2100" b="1" i="0">
-                <a:solidFill>
-                  <a:srgbClr val="C9FF65"/>
-                </a:solidFill>
-              </a:rPr>
-              <a:t>›</a:t>
-            </a:r>
-          </a:p>
-        </p:txBody>
-      </p:sp>
-      <p:sp>
-        <p:nvSpPr>
-          <p:cNvPr id="16" name="">
-            <a:extLst xmlns:a="http://schemas.openxmlformats.org/drawingml/2006/main">
-              <a:ext uri="{FF2B5EF4-FFF2-40B4-BE49-F238E27FC236}">
-                <a16:creationId xmlns:a16="http://schemas.microsoft.com/office/drawing/2014/main" id="{CECC855E-36D0-4B57-8291-97EADE5D3941}"/>
-              </a:ext>
-            </a:extLst>
-          </p:cNvPr>
-          <p:cNvSpPr>
-            <a:spLocks xmlns:a="http://schemas.openxmlformats.org/drawingml/2006/main" noGrp="1"/>
-          </p:cNvSpPr>
-          <p:nvPr/>
-        </p:nvSpPr>
-        <p:spPr>
-          <a:xfrm xmlns:a="http://schemas.openxmlformats.org/drawingml/2006/main">
-            <a:off x="7467600" y="2266950"/>
-            <a:ext cx="1905000" cy="266700"/>
-          </a:xfrm>
-          <a:prstGeom xmlns:a="http://schemas.openxmlformats.org/drawingml/2006/main" prst="rect">
-            <a:avLst/>
-          </a:prstGeom>
-          <a:noFill xmlns:a="http://schemas.openxmlformats.org/drawingml/2006/main"/>
-          <a:ln xmlns:a="http://schemas.openxmlformats.org/drawingml/2006/main" w="0">
-            <a:noFill/>
-            <a:prstDash val="solid"/>
-          </a:ln>
-        </p:spPr>
-        <p:txBody>
-          <a:bodyPr xmlns:a="http://schemas.openxmlformats.org/drawingml/2006/main" anchor="t"/>
-          <a:lstStyle xmlns:a="http://schemas.openxmlformats.org/drawingml/2006/main">
-            <a:defPPr>
-              <a:defRPr sz="1050" b="1" i="0">
-                <a:solidFill>
-                  <a:srgbClr val="FFCE73"/>
-                </a:solidFill>
-              </a:defRPr>
-            </a:defPPr>
-          </a:lstStyle>
-          <a:p xmlns:a="http://schemas.openxmlformats.org/drawingml/2006/main">
-            <a:pPr>
-              <a:defRPr sz="1050" b="1" i="0">
-                <a:solidFill>
-                  <a:srgbClr val="FFCE73"/>
-                </a:solidFill>
-              </a:defRPr>
-            </a:pPr>
-            <a:r>
-              <a:rPr sz="1050" b="1" i="0">
-                <a:solidFill>
-                  <a:srgbClr val="FFCE73"/>
-                </a:solidFill>
-              </a:rPr>
-              <a:t>CHOOSE</a:t>
-            </a:r>
-          </a:p>
-        </p:txBody>
-      </p:sp>
-      <p:sp>
-        <p:nvSpPr>
-          <p:cNvPr id="17" name="">
-            <a:extLst xmlns:a="http://schemas.openxmlformats.org/drawingml/2006/main">
-              <a:ext uri="{FF2B5EF4-FFF2-40B4-BE49-F238E27FC236}">
-                <a16:creationId xmlns:a16="http://schemas.microsoft.com/office/drawing/2014/main" id="{C14F28E9-EFEC-4CFE-BB1E-36F390D21266}"/>
-              </a:ext>
-            </a:extLst>
-          </p:cNvPr>
-          <p:cNvSpPr>
-            <a:spLocks xmlns:a="http://schemas.openxmlformats.org/drawingml/2006/main" noGrp="1"/>
-          </p:cNvSpPr>
-          <p:nvPr/>
-        </p:nvSpPr>
-        <p:spPr>
-          <a:xfrm xmlns:a="http://schemas.openxmlformats.org/drawingml/2006/main">
-            <a:off x="7467600" y="2667000"/>
-            <a:ext cx="1847850" cy="781050"/>
-          </a:xfrm>
-          <a:prstGeom xmlns:a="http://schemas.openxmlformats.org/drawingml/2006/main" prst="rect">
-            <a:avLst/>
-          </a:prstGeom>
-          <a:noFill xmlns:a="http://schemas.openxmlformats.org/drawingml/2006/main"/>
-          <a:ln xmlns:a="http://schemas.openxmlformats.org/drawingml/2006/main" w="0">
-            <a:noFill/>
-            <a:prstDash val="solid"/>
-          </a:ln>
-        </p:spPr>
-        <p:txBody>
-          <a:bodyPr xmlns:a="http://schemas.openxmlformats.org/drawingml/2006/main" anchor="t"/>
-          <a:lstStyle xmlns:a="http://schemas.openxmlformats.org/drawingml/2006/main">
-            <a:defPPr>
-              <a:defRPr sz="1575" b="1" i="0">
-                <a:solidFill>
-                  <a:srgbClr val="FFFFFF"/>
-                </a:solidFill>
-              </a:defRPr>
-            </a:defPPr>
-          </a:lstStyle>
-          <a:p xmlns:a="http://schemas.openxmlformats.org/drawingml/2006/main">
-            <a:pPr>
-              <a:defRPr sz="1575" b="1" i="0">
-                <a:solidFill>
-                  <a:srgbClr val="FFFFFF"/>
-                </a:solidFill>
-              </a:defRPr>
-            </a:pPr>
-            <a:r>
-              <a:rPr sz="1575" b="1" i="0">
-                <a:solidFill>
-                  <a:srgbClr val="FFFFFF"/>
-                </a:solidFill>
-              </a:rPr>
-              <a:t>The worker requests</a:t>
-            </a:r>
-          </a:p>
-          <a:p xmlns:a="http://schemas.openxmlformats.org/drawingml/2006/main">
-            <a:pPr>
-              <a:defRPr sz="1575" b="1" i="0">
-                <a:solidFill>
-                  <a:srgbClr val="FFFFFF"/>
-                </a:solidFill>
-              </a:defRPr>
-            </a:pPr>
-            <a:r>
-              <a:rPr sz="1575" b="1" i="0">
-                <a:solidFill>
-                  <a:srgbClr val="FFFFFF"/>
-                </a:solidFill>
-              </a:rPr>
-              <a:t>rest or assistance</a:t>
-            </a:r>
-          </a:p>
-        </p:txBody>
-      </p:sp>
-      <p:sp>
-        <p:nvSpPr>
-          <p:cNvPr id="18" name="">
-            <a:extLst xmlns:a="http://schemas.openxmlformats.org/drawingml/2006/main">
-              <a:ext uri="{FF2B5EF4-FFF2-40B4-BE49-F238E27FC236}">
-                <a16:creationId xmlns:a16="http://schemas.microsoft.com/office/drawing/2014/main" id="{FC339CFB-3A46-4085-921C-7A5744D6C4C5}"/>
-              </a:ext>
-            </a:extLst>
-          </p:cNvPr>
-          <p:cNvSpPr>
-            <a:spLocks xmlns:a="http://schemas.openxmlformats.org/drawingml/2006/main" noGrp="1"/>
-          </p:cNvSpPr>
-          <p:nvPr/>
-        </p:nvSpPr>
-        <p:spPr>
-          <a:xfrm xmlns:a="http://schemas.openxmlformats.org/drawingml/2006/main">
-            <a:off x="9334500" y="2781300"/>
-            <a:ext cx="285750" cy="38100"/>
-          </a:xfrm>
-          <a:prstGeom xmlns:a="http://schemas.openxmlformats.org/drawingml/2006/main" prst="roundRect">
-            <a:avLst>
-              <a:gd name="adj" fmla="val 50000"/>
-            </a:avLst>
-          </a:prstGeom>
-          <a:solidFill xmlns:a="http://schemas.openxmlformats.org/drawingml/2006/main">
-            <a:srgbClr val="65786F"/>
-          </a:solidFill>
-          <a:ln xmlns:a="http://schemas.openxmlformats.org/drawingml/2006/main" w="0">
-            <a:noFill/>
-            <a:prstDash val="solid"/>
-          </a:ln>
-        </p:spPr>
-      </p:sp>
-      <p:sp>
-        <p:nvSpPr>
-          <p:cNvPr id="19" name="">
-            <a:extLst xmlns:a="http://schemas.openxmlformats.org/drawingml/2006/main">
-              <a:ext uri="{FF2B5EF4-FFF2-40B4-BE49-F238E27FC236}">
-                <a16:creationId xmlns:a16="http://schemas.microsoft.com/office/drawing/2014/main" id="{D3E265DB-DA4B-431E-9F33-1F4BDB1A7B51}"/>
-              </a:ext>
-            </a:extLst>
-          </p:cNvPr>
-          <p:cNvSpPr>
-            <a:spLocks xmlns:a="http://schemas.openxmlformats.org/drawingml/2006/main" noGrp="1"/>
-          </p:cNvSpPr>
-          <p:nvPr/>
-        </p:nvSpPr>
-        <p:spPr>
-          <a:xfrm xmlns:a="http://schemas.openxmlformats.org/drawingml/2006/main">
-            <a:off x="9448800" y="2571750"/>
-            <a:ext cx="228600" cy="400050"/>
-          </a:xfrm>
-          <a:prstGeom xmlns:a="http://schemas.openxmlformats.org/drawingml/2006/main" prst="rect">
-            <a:avLst/>
-          </a:prstGeom>
-          <a:noFill xmlns:a="http://schemas.openxmlformats.org/drawingml/2006/main"/>
-          <a:ln xmlns:a="http://schemas.openxmlformats.org/drawingml/2006/main" w="0">
-            <a:noFill/>
-            <a:prstDash val="solid"/>
-          </a:ln>
-        </p:spPr>
-        <p:txBody>
-          <a:bodyPr xmlns:a="http://schemas.openxmlformats.org/drawingml/2006/main" anchor="t"/>
-          <a:lstStyle xmlns:a="http://schemas.openxmlformats.org/drawingml/2006/main">
-            <a:defPPr>
-              <a:defRPr sz="2100" b="1" i="0">
-                <a:solidFill>
-                  <a:srgbClr val="C9FF65"/>
-                </a:solidFill>
-              </a:defRPr>
-            </a:defPPr>
-          </a:lstStyle>
-          <a:p xmlns:a="http://schemas.openxmlformats.org/drawingml/2006/main">
-            <a:pPr>
-              <a:defRPr sz="2100" b="1" i="0">
-                <a:solidFill>
-                  <a:srgbClr val="C9FF65"/>
-                </a:solidFill>
-              </a:defRPr>
-            </a:pPr>
-            <a:r>
-              <a:rPr sz="2100" b="1" i="0">
-                <a:solidFill>
-                  <a:srgbClr val="C9FF65"/>
-                </a:solidFill>
-              </a:rPr>
-              <a:t>›</a:t>
-            </a:r>
-          </a:p>
-        </p:txBody>
-      </p:sp>
-      <p:sp>
-        <p:nvSpPr>
-          <p:cNvPr id="20" name="">
-            <a:extLst xmlns:a="http://schemas.openxmlformats.org/drawingml/2006/main">
-              <a:ext uri="{FF2B5EF4-FFF2-40B4-BE49-F238E27FC236}">
-                <a16:creationId xmlns:a16="http://schemas.microsoft.com/office/drawing/2014/main" id="{4CC61E1E-1B0D-4826-848B-2AB16196DFB9}"/>
-              </a:ext>
-            </a:extLst>
-          </p:cNvPr>
-          <p:cNvSpPr>
-            <a:spLocks xmlns:a="http://schemas.openxmlformats.org/drawingml/2006/main" noGrp="1"/>
-          </p:cNvSpPr>
-          <p:nvPr/>
-        </p:nvSpPr>
-        <p:spPr>
-          <a:xfrm xmlns:a="http://schemas.openxmlformats.org/drawingml/2006/main">
-            <a:off x="9753600" y="2266950"/>
-            <a:ext cx="1905000" cy="266700"/>
-          </a:xfrm>
-          <a:prstGeom xmlns:a="http://schemas.openxmlformats.org/drawingml/2006/main" prst="rect">
-            <a:avLst/>
-          </a:prstGeom>
-          <a:noFill xmlns:a="http://schemas.openxmlformats.org/drawingml/2006/main"/>
-          <a:ln xmlns:a="http://schemas.openxmlformats.org/drawingml/2006/main" w="0">
-            <a:noFill/>
-            <a:prstDash val="solid"/>
-          </a:ln>
-        </p:spPr>
-        <p:txBody>
-          <a:bodyPr xmlns:a="http://schemas.openxmlformats.org/drawingml/2006/main" anchor="t"/>
-          <a:lstStyle xmlns:a="http://schemas.openxmlformats.org/drawingml/2006/main">
-            <a:defPPr>
-              <a:defRPr sz="1050" b="1" i="0">
-                <a:solidFill>
-                  <a:srgbClr val="C9FF65"/>
-                </a:solidFill>
-              </a:defRPr>
-            </a:defPPr>
-          </a:lstStyle>
-          <a:p xmlns:a="http://schemas.openxmlformats.org/drawingml/2006/main">
-            <a:pPr>
-              <a:defRPr sz="1050" b="1" i="0">
-                <a:solidFill>
-                  <a:srgbClr val="C9FF65"/>
-                </a:solidFill>
-              </a:defRPr>
-            </a:pPr>
-            <a:r>
-              <a:rPr sz="1050" b="1" i="0">
-                <a:solidFill>
-                  <a:srgbClr val="C9FF65"/>
-                </a:solidFill>
-              </a:rPr>
-              <a:t>RESPOND</a:t>
-            </a:r>
-          </a:p>
-        </p:txBody>
-      </p:sp>
-      <p:sp>
-        <p:nvSpPr>
-          <p:cNvPr id="21" name="">
-            <a:extLst xmlns:a="http://schemas.openxmlformats.org/drawingml/2006/main">
-              <a:ext uri="{FF2B5EF4-FFF2-40B4-BE49-F238E27FC236}">
-                <a16:creationId xmlns:a16="http://schemas.microsoft.com/office/drawing/2014/main" id="{5D0D2BA5-1998-45B4-815B-F7A019E32A46}"/>
-              </a:ext>
-            </a:extLst>
-          </p:cNvPr>
-          <p:cNvSpPr>
-            <a:spLocks xmlns:a="http://schemas.openxmlformats.org/drawingml/2006/main" noGrp="1"/>
-          </p:cNvSpPr>
-          <p:nvPr/>
-        </p:nvSpPr>
-        <p:spPr>
-          <a:xfrm xmlns:a="http://schemas.openxmlformats.org/drawingml/2006/main">
-            <a:off x="9753600" y="2667000"/>
-            <a:ext cx="1847850" cy="781050"/>
-          </a:xfrm>
-          <a:prstGeom xmlns:a="http://schemas.openxmlformats.org/drawingml/2006/main" prst="rect">
-            <a:avLst/>
-          </a:prstGeom>
-          <a:noFill xmlns:a="http://schemas.openxmlformats.org/drawingml/2006/main"/>
-          <a:ln xmlns:a="http://schemas.openxmlformats.org/drawingml/2006/main" w="0">
-            <a:noFill/>
-            <a:prstDash val="solid"/>
-          </a:ln>
-        </p:spPr>
-        <p:txBody>
-          <a:bodyPr xmlns:a="http://schemas.openxmlformats.org/drawingml/2006/main" anchor="t"/>
-          <a:lstStyle xmlns:a="http://schemas.openxmlformats.org/drawingml/2006/main">
-            <a:defPPr>
-              <a:defRPr sz="1575" b="1" i="0">
-                <a:solidFill>
-                  <a:srgbClr val="FFFFFF"/>
-                </a:solidFill>
-              </a:defRPr>
-            </a:defPPr>
-          </a:lstStyle>
-          <a:p xmlns:a="http://schemas.openxmlformats.org/drawingml/2006/main">
-            <a:pPr>
-              <a:defRPr sz="1575" b="1" i="0">
-                <a:solidFill>
-                  <a:srgbClr val="FFFFFF"/>
-                </a:solidFill>
-              </a:defRPr>
-            </a:pPr>
-            <a:r>
-              <a:rPr sz="1575" b="1" i="0">
-                <a:solidFill>
-                  <a:srgbClr val="FFFFFF"/>
-                </a:solidFill>
-              </a:rPr>
-              <a:t>A human adjusts</a:t>
-            </a:r>
-          </a:p>
-          <a:p xmlns:a="http://schemas.openxmlformats.org/drawingml/2006/main">
-            <a:pPr>
-              <a:defRPr sz="1575" b="1" i="0">
-                <a:solidFill>
-                  <a:srgbClr val="FFFFFF"/>
-                </a:solidFill>
-              </a:defRPr>
-            </a:pPr>
-            <a:r>
-              <a:rPr sz="1575" b="1" i="0">
-                <a:solidFill>
-                  <a:srgbClr val="FFFFFF"/>
-                </a:solidFill>
-              </a:rPr>
-              <a:t>coverage</a:t>
-            </a:r>
-          </a:p>
-        </p:txBody>
-      </p:sp>
-      <p:sp>
-        <p:nvSpPr>
-          <p:cNvPr id="22" name="">
-            <a:extLst xmlns:a="http://schemas.openxmlformats.org/drawingml/2006/main">
-              <a:ext uri="{FF2B5EF4-FFF2-40B4-BE49-F238E27FC236}">
-                <a16:creationId xmlns:a16="http://schemas.microsoft.com/office/drawing/2014/main" id="{919EF57D-5369-40BD-91BF-D6E41BDF9F0A}"/>
-              </a:ext>
-            </a:extLst>
-          </p:cNvPr>
-          <p:cNvSpPr>
-            <a:spLocks xmlns:a="http://schemas.openxmlformats.org/drawingml/2006/main" noGrp="1"/>
-          </p:cNvSpPr>
-          <p:nvPr/>
-        </p:nvSpPr>
-        <p:spPr>
-          <a:xfrm xmlns:a="http://schemas.openxmlformats.org/drawingml/2006/main">
-            <a:off x="609600" y="4476750"/>
-            <a:ext cx="10972800" cy="9525"/>
-          </a:xfrm>
-          <a:prstGeom xmlns:a="http://schemas.openxmlformats.org/drawingml/2006/main" prst="rect">
-            <a:avLst/>
-          </a:prstGeom>
-          <a:solidFill xmlns:a="http://schemas.openxmlformats.org/drawingml/2006/main">
-            <a:srgbClr val="41655D"/>
-          </a:solidFill>
-          <a:ln xmlns:a="http://schemas.openxmlformats.org/drawingml/2006/main" w="0">
-            <a:noFill/>
-            <a:prstDash val="solid"/>
-          </a:ln>
-        </p:spPr>
-      </p:sp>
-      <p:sp>
-        <p:nvSpPr>
-          <p:cNvPr id="23" name="">
-            <a:extLst xmlns:a="http://schemas.openxmlformats.org/drawingml/2006/main">
-              <a:ext uri="{FF2B5EF4-FFF2-40B4-BE49-F238E27FC236}">
-                <a16:creationId xmlns:a16="http://schemas.microsoft.com/office/drawing/2014/main" id="{6F79B313-BC20-461A-AD4F-AE29453878A5}"/>
-              </a:ext>
-            </a:extLst>
-          </p:cNvPr>
-          <p:cNvSpPr>
-            <a:spLocks xmlns:a="http://schemas.openxmlformats.org/drawingml/2006/main" noGrp="1"/>
-          </p:cNvSpPr>
-          <p:nvPr/>
-        </p:nvSpPr>
-        <p:spPr>
-          <a:xfrm xmlns:a="http://schemas.openxmlformats.org/drawingml/2006/main">
-            <a:off x="609600" y="4876800"/>
-            <a:ext cx="10477500" cy="609600"/>
-          </a:xfrm>
-          <a:prstGeom xmlns:a="http://schemas.openxmlformats.org/drawingml/2006/main" prst="rect">
-            <a:avLst/>
-          </a:prstGeom>
-          <a:noFill xmlns:a="http://schemas.openxmlformats.org/drawingml/2006/main"/>
-          <a:ln xmlns:a="http://schemas.openxmlformats.org/drawingml/2006/main" w="0">
-            <a:noFill/>
-            <a:prstDash val="solid"/>
-          </a:ln>
-        </p:spPr>
-        <p:txBody>
-          <a:bodyPr xmlns:a="http://schemas.openxmlformats.org/drawingml/2006/main" anchor="t"/>
-          <a:lstStyle xmlns:a="http://schemas.openxmlformats.org/drawingml/2006/main">
-            <a:defPPr>
-              <a:defRPr sz="2025" b="1" i="0">
-                <a:solidFill>
-                  <a:srgbClr val="DDE9E4"/>
-                </a:solidFill>
-              </a:defRPr>
-            </a:defPPr>
-          </a:lstStyle>
-          <a:p xmlns:a="http://schemas.openxmlformats.org/drawingml/2006/main">
-            <a:pPr>
-              <a:defRPr sz="2025" b="1" i="0">
-                <a:solidFill>
-                  <a:srgbClr val="DDE9E4"/>
-                </a:solidFill>
-              </a:defRPr>
-            </a:pPr>
-            <a:r>
-              <a:rPr sz="2025" b="1" i="0">
-                <a:solidFill>
-                  <a:srgbClr val="DDE9E4"/>
-                </a:solidFill>
-              </a:rPr>
-              <a:t>No diagnosis. No automatic clearance. The system surfaces evidence and preserves worker choice.</a:t>
-            </a:r>
-          </a:p>
-        </p:txBody>
-      </p:sp>
-      <p:sp>
-        <p:nvSpPr>
-          <p:cNvPr id="24" name="">
-            <a:extLst xmlns:a="http://schemas.openxmlformats.org/drawingml/2006/main">
-              <a:ext uri="{FF2B5EF4-FFF2-40B4-BE49-F238E27FC236}">
-                <a16:creationId xmlns:a16="http://schemas.microsoft.com/office/drawing/2014/main" id="{C4A022B1-2A0E-4B26-94CB-717A7E2763EA}"/>
-              </a:ext>
-            </a:extLst>
-          </p:cNvPr>
-          <p:cNvSpPr>
-            <a:spLocks xmlns:a="http://schemas.openxmlformats.org/drawingml/2006/main" noGrp="1"/>
-          </p:cNvSpPr>
-          <p:nvPr/>
-        </p:nvSpPr>
-        <p:spPr>
-          <a:xfrm xmlns:a="http://schemas.openxmlformats.org/drawingml/2006/main">
-            <a:off x="628650" y="5829300"/>
-            <a:ext cx="7429500" cy="247650"/>
-          </a:xfrm>
-          <a:prstGeom xmlns:a="http://schemas.openxmlformats.org/drawingml/2006/main" prst="rect">
-            <a:avLst/>
-          </a:prstGeom>
-          <a:noFill xmlns:a="http://schemas.openxmlformats.org/drawingml/2006/main"/>
-          <a:ln xmlns:a="http://schemas.openxmlformats.org/drawingml/2006/main" w="0">
-            <a:noFill/>
-            <a:prstDash val="solid"/>
-          </a:ln>
-        </p:spPr>
-        <p:txBody>
-          <a:bodyPr xmlns:a="http://schemas.openxmlformats.org/drawingml/2006/main" anchor="t"/>
-          <a:lstStyle xmlns:a="http://schemas.openxmlformats.org/drawingml/2006/main">
-            <a:defPPr>
-              <a:defRPr sz="1125" b="1" i="0">
-                <a:solidFill>
-                  <a:srgbClr val="C9FF65"/>
-                </a:solidFill>
-              </a:defRPr>
-            </a:defPPr>
-          </a:lstStyle>
-          <a:p xmlns:a="http://schemas.openxmlformats.org/drawingml/2006/main">
-            <a:pPr>
-              <a:defRPr sz="1125" b="1" i="0">
-                <a:solidFill>
-                  <a:srgbClr val="C9FF65"/>
-                </a:solidFill>
-              </a:defRPr>
-            </a:pPr>
-            <a:r>
-              <a:rPr sz="1125" b="1" i="0">
-                <a:solidFill>
-                  <a:srgbClr val="C9FF65"/>
-                </a:solidFill>
-              </a:rPr>
-              <a:t>A worker request becomes an approved coverage adjustment.</a:t>
+              <a:t>SYNTHETIC READINGS SHOWN</a:t>
             </a:r>
           </a:p>
         </p:txBody>
@@ -6068,7 +4466,7 @@
     </p:spTree>
     <p:extLst>
       <p:ext uri="{BB962C8B-B14F-4D97-AF65-F5344CB8AC3E}">
-        <p14:creationId xmlns:p14="http://schemas.microsoft.com/office/powerpoint/2010/main" val="601647167"/>
+        <p14:creationId xmlns:p14="http://schemas.microsoft.com/office/powerpoint/2010/main" val="537024887"/>
       </p:ext>
     </p:extLst>
   </p:cSld>
@@ -6076,564 +4474,6 @@
 </file>
 
 <file path=ppt/slides/slide4.xml><?xml version="1.0" encoding="utf-8"?>
-<p:sld xmlns:p="http://schemas.openxmlformats.org/presentationml/2006/main">
-  <p:cSld>
-    <p:bg>
-      <p:bgPr>
-        <a:solidFill xmlns:a="http://schemas.openxmlformats.org/drawingml/2006/main">
-          <a:srgbClr val="F4F7F2"/>
-        </a:solidFill>
-      </p:bgPr>
-    </p:bg>
-    <p:spTree>
-      <p:nvGrpSpPr>
-        <p:cNvPr id="1" name=""/>
-        <p:cNvGrpSpPr/>
-        <p:nvPr/>
-      </p:nvGrpSpPr>
-      <p:grpSpPr>
-        <a:xfrm xmlns:a="http://schemas.openxmlformats.org/drawingml/2006/main"/>
-      </p:grpSpPr>
-      <p:sp>
-        <p:nvSpPr>
-          <p:cNvPr id="12" name="">
-            <a:extLst xmlns:a="http://schemas.openxmlformats.org/drawingml/2006/main">
-              <a:ext uri="{FF2B5EF4-FFF2-40B4-BE49-F238E27FC236}">
-                <a16:creationId xmlns:a16="http://schemas.microsoft.com/office/drawing/2014/main" id="{790197B6-B582-4B58-9EC8-76F0D1518E34}"/>
-              </a:ext>
-            </a:extLst>
-          </p:cNvPr>
-          <p:cNvSpPr>
-            <a:spLocks xmlns:a="http://schemas.openxmlformats.org/drawingml/2006/main" noGrp="1"/>
-          </p:cNvSpPr>
-          <p:nvPr/>
-        </p:nvSpPr>
-        <p:spPr>
-          <a:xfrm xmlns:a="http://schemas.openxmlformats.org/drawingml/2006/main">
-            <a:off x="11334750" y="266700"/>
-            <a:ext cx="400050" cy="228600"/>
-          </a:xfrm>
-          <a:prstGeom xmlns:a="http://schemas.openxmlformats.org/drawingml/2006/main" prst="rect">
-            <a:avLst/>
-          </a:prstGeom>
-          <a:noFill xmlns:a="http://schemas.openxmlformats.org/drawingml/2006/main"/>
-          <a:ln xmlns:a="http://schemas.openxmlformats.org/drawingml/2006/main" w="0">
-            <a:noFill/>
-            <a:prstDash val="solid"/>
-          </a:ln>
-        </p:spPr>
-        <p:txBody>
-          <a:bodyPr xmlns:a="http://schemas.openxmlformats.org/drawingml/2006/main" anchor="t"/>
-          <a:lstStyle xmlns:a="http://schemas.openxmlformats.org/drawingml/2006/main">
-            <a:defPPr>
-              <a:defRPr sz="825" b="1" i="0">
-                <a:solidFill>
-                  <a:srgbClr val="65786F"/>
-                </a:solidFill>
-              </a:defRPr>
-            </a:defPPr>
-          </a:lstStyle>
-          <a:p xmlns:a="http://schemas.openxmlformats.org/drawingml/2006/main">
-            <a:pPr>
-              <a:defRPr sz="825" b="1" i="0">
-                <a:solidFill>
-                  <a:srgbClr val="65786F"/>
-                </a:solidFill>
-              </a:defRPr>
-            </a:pPr>
-            <a:r>
-              <a:rPr sz="825" b="1" i="0">
-                <a:solidFill>
-                  <a:srgbClr val="65786F"/>
-                </a:solidFill>
-              </a:rPr>
-              <a:t>04</a:t>
-            </a:r>
-          </a:p>
-        </p:txBody>
-      </p:sp>
-      <p:sp>
-        <p:nvSpPr>
-          <p:cNvPr id="2" name="">
-            <a:extLst xmlns:a="http://schemas.openxmlformats.org/drawingml/2006/main">
-              <a:ext uri="{FF2B5EF4-FFF2-40B4-BE49-F238E27FC236}">
-                <a16:creationId xmlns:a16="http://schemas.microsoft.com/office/drawing/2014/main" id="{2AA84411-9998-4930-B6AE-636A6D7C0F3E}"/>
-              </a:ext>
-            </a:extLst>
-          </p:cNvPr>
-          <p:cNvSpPr>
-            <a:spLocks xmlns:a="http://schemas.openxmlformats.org/drawingml/2006/main" noGrp="1"/>
-          </p:cNvSpPr>
-          <p:nvPr/>
-        </p:nvSpPr>
-        <p:spPr>
-          <a:xfrm xmlns:a="http://schemas.openxmlformats.org/drawingml/2006/main">
-            <a:off x="609600" y="438150"/>
-            <a:ext cx="7620000" cy="552450"/>
-          </a:xfrm>
-          <a:prstGeom xmlns:a="http://schemas.openxmlformats.org/drawingml/2006/main" prst="rect">
-            <a:avLst/>
-          </a:prstGeom>
-          <a:noFill xmlns:a="http://schemas.openxmlformats.org/drawingml/2006/main"/>
-          <a:ln xmlns:a="http://schemas.openxmlformats.org/drawingml/2006/main" w="0">
-            <a:noFill/>
-            <a:prstDash val="solid"/>
-          </a:ln>
-        </p:spPr>
-        <p:txBody>
-          <a:bodyPr xmlns:a="http://schemas.openxmlformats.org/drawingml/2006/main" anchor="t"/>
-          <a:lstStyle xmlns:a="http://schemas.openxmlformats.org/drawingml/2006/main">
-            <a:defPPr>
-              <a:defRPr sz="2550" b="1" i="0">
-                <a:solidFill>
-                  <a:srgbClr val="0B302A"/>
-                </a:solidFill>
-              </a:defRPr>
-            </a:defPPr>
-          </a:lstStyle>
-          <a:p xmlns:a="http://schemas.openxmlformats.org/drawingml/2006/main">
-            <a:pPr>
-              <a:defRPr sz="2550" b="1" i="0">
-                <a:solidFill>
-                  <a:srgbClr val="0B302A"/>
-                </a:solidFill>
-              </a:defRPr>
-            </a:pPr>
-            <a:r>
-              <a:rPr sz="2550" b="1" i="0">
-                <a:solidFill>
-                  <a:srgbClr val="0B302A"/>
-                </a:solidFill>
-              </a:rPr>
-              <a:t>The worker controls the check-in</a:t>
-            </a:r>
-          </a:p>
-        </p:txBody>
-      </p:sp>
-      <p:sp>
-        <p:nvSpPr>
-          <p:cNvPr id="3" name="">
-            <a:extLst xmlns:a="http://schemas.openxmlformats.org/drawingml/2006/main">
-              <a:ext uri="{FF2B5EF4-FFF2-40B4-BE49-F238E27FC236}">
-                <a16:creationId xmlns:a16="http://schemas.microsoft.com/office/drawing/2014/main" id="{2BDDDB81-083E-43F1-A9F5-94101CFB63C8}"/>
-              </a:ext>
-            </a:extLst>
-          </p:cNvPr>
-          <p:cNvSpPr>
-            <a:spLocks xmlns:a="http://schemas.openxmlformats.org/drawingml/2006/main" noGrp="1"/>
-          </p:cNvSpPr>
-          <p:nvPr/>
-        </p:nvSpPr>
-        <p:spPr>
-          <a:xfrm xmlns:a="http://schemas.openxmlformats.org/drawingml/2006/main">
-            <a:off x="628650" y="1028700"/>
-            <a:ext cx="10001250" cy="342900"/>
-          </a:xfrm>
-          <a:prstGeom xmlns:a="http://schemas.openxmlformats.org/drawingml/2006/main" prst="rect">
-            <a:avLst/>
-          </a:prstGeom>
-          <a:noFill xmlns:a="http://schemas.openxmlformats.org/drawingml/2006/main"/>
-          <a:ln xmlns:a="http://schemas.openxmlformats.org/drawingml/2006/main" w="0">
-            <a:noFill/>
-            <a:prstDash val="solid"/>
-          </a:ln>
-        </p:spPr>
-        <p:txBody>
-          <a:bodyPr xmlns:a="http://schemas.openxmlformats.org/drawingml/2006/main" anchor="t"/>
-          <a:lstStyle xmlns:a="http://schemas.openxmlformats.org/drawingml/2006/main">
-            <a:defPPr>
-              <a:defRPr sz="1350" b="0" i="0">
-                <a:solidFill>
-                  <a:srgbClr val="65786F"/>
-                </a:solidFill>
-              </a:defRPr>
-            </a:defPPr>
-          </a:lstStyle>
-          <a:p xmlns:a="http://schemas.openxmlformats.org/drawingml/2006/main">
-            <a:pPr>
-              <a:defRPr sz="1350" b="0" i="0">
-                <a:solidFill>
-                  <a:srgbClr val="65786F"/>
-                </a:solidFill>
-              </a:defRPr>
-            </a:pPr>
-            <a:r>
-              <a:rPr sz="1350" b="0" i="0">
-                <a:solidFill>
-                  <a:srgbClr val="65786F"/>
-                </a:solidFill>
-              </a:rPr>
-              <a:t>Fresh consent, source-labelled observations, and an explicit stop button keep the experience understandable.</a:t>
-            </a:r>
-          </a:p>
-        </p:txBody>
-      </p:sp>
-      <p:sp>
-        <p:nvSpPr>
-          <p:cNvPr id="4" name="">
-            <a:extLst xmlns:a="http://schemas.openxmlformats.org/drawingml/2006/main">
-              <a:ext uri="{FF2B5EF4-FFF2-40B4-BE49-F238E27FC236}">
-                <a16:creationId xmlns:a16="http://schemas.microsoft.com/office/drawing/2014/main" id="{EEDA79FA-EB9C-456E-AFFE-CEFE4C945952}"/>
-              </a:ext>
-            </a:extLst>
-          </p:cNvPr>
-          <p:cNvSpPr>
-            <a:spLocks xmlns:a="http://schemas.openxmlformats.org/drawingml/2006/main" noGrp="1"/>
-          </p:cNvSpPr>
-          <p:nvPr/>
-        </p:nvSpPr>
-        <p:spPr>
-          <a:xfrm xmlns:a="http://schemas.openxmlformats.org/drawingml/2006/main">
-            <a:off x="628650" y="1409700"/>
-            <a:ext cx="3333750" cy="266700"/>
-          </a:xfrm>
-          <a:prstGeom xmlns:a="http://schemas.openxmlformats.org/drawingml/2006/main" prst="roundRect">
-            <a:avLst>
-              <a:gd name="adj" fmla="val 50000"/>
-            </a:avLst>
-          </a:prstGeom>
-          <a:ln xmlns:a="http://schemas.openxmlformats.org/drawingml/2006/main" w="0">
-            <a:noFill/>
-            <a:prstDash val="solid"/>
-          </a:ln>
-        </p:spPr>
-      </p:sp>
-      <p:sp>
-        <p:nvSpPr>
-          <p:cNvPr id="5" name="">
-            <a:extLst xmlns:a="http://schemas.openxmlformats.org/drawingml/2006/main">
-              <a:ext uri="{FF2B5EF4-FFF2-40B4-BE49-F238E27FC236}">
-                <a16:creationId xmlns:a16="http://schemas.microsoft.com/office/drawing/2014/main" id="{4C140D5F-3511-419A-9EB1-E91F711B420D}"/>
-              </a:ext>
-            </a:extLst>
-          </p:cNvPr>
-          <p:cNvSpPr>
-            <a:spLocks xmlns:a="http://schemas.openxmlformats.org/drawingml/2006/main" noGrp="1"/>
-          </p:cNvSpPr>
-          <p:nvPr/>
-        </p:nvSpPr>
-        <p:spPr>
-          <a:xfrm xmlns:a="http://schemas.openxmlformats.org/drawingml/2006/main">
-            <a:off x="762000" y="1476375"/>
-            <a:ext cx="3067050" cy="152400"/>
-          </a:xfrm>
-          <a:prstGeom xmlns:a="http://schemas.openxmlformats.org/drawingml/2006/main" prst="rect">
-            <a:avLst/>
-          </a:prstGeom>
-          <a:noFill xmlns:a="http://schemas.openxmlformats.org/drawingml/2006/main"/>
-          <a:ln xmlns:a="http://schemas.openxmlformats.org/drawingml/2006/main" w="0">
-            <a:noFill/>
-            <a:prstDash val="solid"/>
-          </a:ln>
-        </p:spPr>
-        <p:txBody>
-          <a:bodyPr xmlns:a="http://schemas.openxmlformats.org/drawingml/2006/main" anchor="t"/>
-          <a:lstStyle xmlns:a="http://schemas.openxmlformats.org/drawingml/2006/main">
-            <a:defPPr>
-              <a:defRPr sz="825" b="1" i="0">
-                <a:solidFill>
-                  <a:srgbClr val="FFCE73"/>
-                </a:solidFill>
-              </a:defRPr>
-            </a:defPPr>
-          </a:lstStyle>
-          <a:p xmlns:a="http://schemas.openxmlformats.org/drawingml/2006/main">
-            <a:pPr>
-              <a:defRPr sz="825" b="1" i="0">
-                <a:solidFill>
-                  <a:srgbClr val="FFCE73"/>
-                </a:solidFill>
-              </a:defRPr>
-            </a:pPr>
-            <a:r>
-              <a:rPr sz="825" b="1" i="0">
-                <a:solidFill>
-                  <a:srgbClr val="FFCE73"/>
-                </a:solidFill>
-              </a:rPr>
-              <a:t>SCREENSHOTS SHOW SYNTHETIC DEMO READINGS</a:t>
-            </a:r>
-          </a:p>
-        </p:txBody>
-      </p:sp>
-      <p:pic>
-        <p:nvPicPr>
-          <p:cNvPr id="6" name="">
-            <a:extLst xmlns:a="http://schemas.openxmlformats.org/drawingml/2006/main">
-              <a:ext uri="{FF2B5EF4-FFF2-40B4-BE49-F238E27FC236}">
-                <a16:creationId xmlns:a16="http://schemas.microsoft.com/office/drawing/2014/main" id="{2B38D543-E0C5-43F7-80C7-D6EBF76BDCE3}"/>
-              </a:ext>
-            </a:extLst>
-          </p:cNvPr>
-          <p:cNvPicPr>
-            <a:picLocks xmlns:a="http://schemas.openxmlformats.org/drawingml/2006/main" noChangeAspect="1"/>
-          </p:cNvPicPr>
-          <p:nvPr/>
-        </p:nvPicPr>
-        <p:blipFill>
-          <a:blip xmlns:r="http://schemas.openxmlformats.org/officeDocument/2006/relationships" xmlns:a="http://schemas.openxmlformats.org/drawingml/2006/main" r:embed="R80e29a3f9b664eb3"/>
-          <a:srcRect xmlns:a="http://schemas.openxmlformats.org/drawingml/2006/main" l="6000" t="5000" r="6000" b="3000"/>
-          <a:stretch xmlns:a="http://schemas.openxmlformats.org/drawingml/2006/main"/>
-        </p:blipFill>
-        <p:spPr>
-          <a:xfrm xmlns:a="http://schemas.openxmlformats.org/drawingml/2006/main">
-            <a:off x="609600" y="1714500"/>
-            <a:ext cx="3333750" cy="4229100"/>
-          </a:xfrm>
-          <a:prstGeom xmlns:a="http://schemas.openxmlformats.org/drawingml/2006/main" prst="roundRect">
-            <a:avLst>
-              <a:gd name="adj" fmla="val 6857"/>
-            </a:avLst>
-          </a:prstGeom>
-        </p:spPr>
-      </p:pic>
-      <p:pic>
-        <p:nvPicPr>
-          <p:cNvPr id="7" name="">
-            <a:extLst xmlns:a="http://schemas.openxmlformats.org/drawingml/2006/main">
-              <a:ext uri="{FF2B5EF4-FFF2-40B4-BE49-F238E27FC236}">
-                <a16:creationId xmlns:a16="http://schemas.microsoft.com/office/drawing/2014/main" id="{29A49448-C1D1-40B9-9B84-A85FE1584FC2}"/>
-              </a:ext>
-            </a:extLst>
-          </p:cNvPr>
-          <p:cNvPicPr>
-            <a:picLocks xmlns:a="http://schemas.openxmlformats.org/drawingml/2006/main" noChangeAspect="1"/>
-          </p:cNvPicPr>
-          <p:nvPr/>
-        </p:nvPicPr>
-        <p:blipFill>
-          <a:blip xmlns:r="http://schemas.openxmlformats.org/officeDocument/2006/relationships" xmlns:a="http://schemas.openxmlformats.org/drawingml/2006/main" r:embed="Rf250351f53bc417c"/>
-          <a:srcRect xmlns:a="http://schemas.openxmlformats.org/drawingml/2006/main" l="8000" t="3000" r="4000" b="5000"/>
-          <a:stretch xmlns:a="http://schemas.openxmlformats.org/drawingml/2006/main"/>
-        </p:blipFill>
-        <p:spPr>
-          <a:xfrm xmlns:a="http://schemas.openxmlformats.org/drawingml/2006/main">
-            <a:off x="4286250" y="1714500"/>
-            <a:ext cx="3333750" cy="4229100"/>
-          </a:xfrm>
-          <a:prstGeom xmlns:a="http://schemas.openxmlformats.org/drawingml/2006/main" prst="roundRect">
-            <a:avLst>
-              <a:gd name="adj" fmla="val 6857"/>
-            </a:avLst>
-          </a:prstGeom>
-        </p:spPr>
-      </p:pic>
-      <p:pic>
-        <p:nvPicPr>
-          <p:cNvPr id="8" name="">
-            <a:extLst xmlns:a="http://schemas.openxmlformats.org/drawingml/2006/main">
-              <a:ext uri="{FF2B5EF4-FFF2-40B4-BE49-F238E27FC236}">
-                <a16:creationId xmlns:a16="http://schemas.microsoft.com/office/drawing/2014/main" id="{693F55DA-936A-43CB-A61D-91A126597C83}"/>
-              </a:ext>
-            </a:extLst>
-          </p:cNvPr>
-          <p:cNvPicPr>
-            <a:picLocks xmlns:a="http://schemas.openxmlformats.org/drawingml/2006/main" noChangeAspect="1"/>
-          </p:cNvPicPr>
-          <p:nvPr/>
-        </p:nvPicPr>
-        <p:blipFill>
-          <a:blip xmlns:r="http://schemas.openxmlformats.org/officeDocument/2006/relationships" xmlns:a="http://schemas.openxmlformats.org/drawingml/2006/main" r:embed="R25e65d7f88154d86"/>
-          <a:srcRect xmlns:a="http://schemas.openxmlformats.org/drawingml/2006/main" l="5000" t="3000" r="4000" b="5000"/>
-          <a:stretch xmlns:a="http://schemas.openxmlformats.org/drawingml/2006/main"/>
-        </p:blipFill>
-        <p:spPr>
-          <a:xfrm xmlns:a="http://schemas.openxmlformats.org/drawingml/2006/main">
-            <a:off x="7962900" y="1714500"/>
-            <a:ext cx="3619500" cy="4229100"/>
-          </a:xfrm>
-          <a:prstGeom xmlns:a="http://schemas.openxmlformats.org/drawingml/2006/main" prst="roundRect">
-            <a:avLst>
-              <a:gd name="adj" fmla="val 6316"/>
-            </a:avLst>
-          </a:prstGeom>
-        </p:spPr>
-      </p:pic>
-      <p:sp>
-        <p:nvSpPr>
-          <p:cNvPr id="9" name="">
-            <a:extLst xmlns:a="http://schemas.openxmlformats.org/drawingml/2006/main">
-              <a:ext uri="{FF2B5EF4-FFF2-40B4-BE49-F238E27FC236}">
-                <a16:creationId xmlns:a16="http://schemas.microsoft.com/office/drawing/2014/main" id="{2368EECB-3A1E-44BC-B738-B1A16A712D93}"/>
-              </a:ext>
-            </a:extLst>
-          </p:cNvPr>
-          <p:cNvSpPr>
-            <a:spLocks xmlns:a="http://schemas.openxmlformats.org/drawingml/2006/main" noGrp="1"/>
-          </p:cNvSpPr>
-          <p:nvPr/>
-        </p:nvSpPr>
-        <p:spPr>
-          <a:xfrm xmlns:a="http://schemas.openxmlformats.org/drawingml/2006/main">
-            <a:off x="742950" y="6153150"/>
-            <a:ext cx="1524000" cy="228600"/>
-          </a:xfrm>
-          <a:prstGeom xmlns:a="http://schemas.openxmlformats.org/drawingml/2006/main" prst="rect">
-            <a:avLst/>
-          </a:prstGeom>
-          <a:noFill xmlns:a="http://schemas.openxmlformats.org/drawingml/2006/main"/>
-          <a:ln xmlns:a="http://schemas.openxmlformats.org/drawingml/2006/main" w="0">
-            <a:noFill/>
-            <a:prstDash val="solid"/>
-          </a:ln>
-        </p:spPr>
-        <p:txBody>
-          <a:bodyPr xmlns:a="http://schemas.openxmlformats.org/drawingml/2006/main" anchor="t"/>
-          <a:lstStyle xmlns:a="http://schemas.openxmlformats.org/drawingml/2006/main">
-            <a:defPPr>
-              <a:defRPr sz="900" b="1" i="0">
-                <a:solidFill>
-                  <a:srgbClr val="174C3F"/>
-                </a:solidFill>
-              </a:defRPr>
-            </a:defPPr>
-          </a:lstStyle>
-          <a:p xmlns:a="http://schemas.openxmlformats.org/drawingml/2006/main">
-            <a:pPr>
-              <a:defRPr sz="900" b="1" i="0">
-                <a:solidFill>
-                  <a:srgbClr val="174C3F"/>
-                </a:solidFill>
-              </a:defRPr>
-            </a:pPr>
-            <a:r>
-              <a:rPr sz="900" b="1" i="0">
-                <a:solidFill>
-                  <a:srgbClr val="174C3F"/>
-                </a:solidFill>
-              </a:rPr>
-              <a:t>CONSENT</a:t>
-            </a:r>
-          </a:p>
-        </p:txBody>
-      </p:sp>
-      <p:sp>
-        <p:nvSpPr>
-          <p:cNvPr id="10" name="">
-            <a:extLst xmlns:a="http://schemas.openxmlformats.org/drawingml/2006/main">
-              <a:ext uri="{FF2B5EF4-FFF2-40B4-BE49-F238E27FC236}">
-                <a16:creationId xmlns:a16="http://schemas.microsoft.com/office/drawing/2014/main" id="{DF17AF54-A556-4780-81A5-D088786613BE}"/>
-              </a:ext>
-            </a:extLst>
-          </p:cNvPr>
-          <p:cNvSpPr>
-            <a:spLocks xmlns:a="http://schemas.openxmlformats.org/drawingml/2006/main" noGrp="1"/>
-          </p:cNvSpPr>
-          <p:nvPr/>
-        </p:nvSpPr>
-        <p:spPr>
-          <a:xfrm xmlns:a="http://schemas.openxmlformats.org/drawingml/2006/main">
-            <a:off x="4419600" y="6153150"/>
-            <a:ext cx="1809750" cy="228600"/>
-          </a:xfrm>
-          <a:prstGeom xmlns:a="http://schemas.openxmlformats.org/drawingml/2006/main" prst="rect">
-            <a:avLst/>
-          </a:prstGeom>
-          <a:noFill xmlns:a="http://schemas.openxmlformats.org/drawingml/2006/main"/>
-          <a:ln xmlns:a="http://schemas.openxmlformats.org/drawingml/2006/main" w="0">
-            <a:noFill/>
-            <a:prstDash val="solid"/>
-          </a:ln>
-        </p:spPr>
-        <p:txBody>
-          <a:bodyPr xmlns:a="http://schemas.openxmlformats.org/drawingml/2006/main" anchor="t"/>
-          <a:lstStyle xmlns:a="http://schemas.openxmlformats.org/drawingml/2006/main">
-            <a:defPPr>
-              <a:defRPr sz="900" b="1" i="0">
-                <a:solidFill>
-                  <a:srgbClr val="174C3F"/>
-                </a:solidFill>
-              </a:defRPr>
-            </a:defPPr>
-          </a:lstStyle>
-          <a:p xmlns:a="http://schemas.openxmlformats.org/drawingml/2006/main">
-            <a:pPr>
-              <a:defRPr sz="900" b="1" i="0">
-                <a:solidFill>
-                  <a:srgbClr val="174C3F"/>
-                </a:solidFill>
-              </a:defRPr>
-            </a:pPr>
-            <a:r>
-              <a:rPr sz="900" b="1" i="0">
-                <a:solidFill>
-                  <a:srgbClr val="174C3F"/>
-                </a:solidFill>
-              </a:rPr>
-              <a:t>OBSERVATIONS</a:t>
-            </a:r>
-          </a:p>
-        </p:txBody>
-      </p:sp>
-      <p:sp>
-        <p:nvSpPr>
-          <p:cNvPr id="11" name="">
-            <a:extLst xmlns:a="http://schemas.openxmlformats.org/drawingml/2006/main">
-              <a:ext uri="{FF2B5EF4-FFF2-40B4-BE49-F238E27FC236}">
-                <a16:creationId xmlns:a16="http://schemas.microsoft.com/office/drawing/2014/main" id="{DE87605D-5D9B-4DCC-8E3F-B92DD03C2364}"/>
-              </a:ext>
-            </a:extLst>
-          </p:cNvPr>
-          <p:cNvSpPr>
-            <a:spLocks xmlns:a="http://schemas.openxmlformats.org/drawingml/2006/main" noGrp="1"/>
-          </p:cNvSpPr>
-          <p:nvPr/>
-        </p:nvSpPr>
-        <p:spPr>
-          <a:xfrm xmlns:a="http://schemas.openxmlformats.org/drawingml/2006/main">
-            <a:off x="8096250" y="6153150"/>
-            <a:ext cx="1524000" cy="228600"/>
-          </a:xfrm>
-          <a:prstGeom xmlns:a="http://schemas.openxmlformats.org/drawingml/2006/main" prst="rect">
-            <a:avLst/>
-          </a:prstGeom>
-          <a:noFill xmlns:a="http://schemas.openxmlformats.org/drawingml/2006/main"/>
-          <a:ln xmlns:a="http://schemas.openxmlformats.org/drawingml/2006/main" w="0">
-            <a:noFill/>
-            <a:prstDash val="solid"/>
-          </a:ln>
-        </p:spPr>
-        <p:txBody>
-          <a:bodyPr xmlns:a="http://schemas.openxmlformats.org/drawingml/2006/main" anchor="t"/>
-          <a:lstStyle xmlns:a="http://schemas.openxmlformats.org/drawingml/2006/main">
-            <a:defPPr>
-              <a:defRPr sz="900" b="1" i="0">
-                <a:solidFill>
-                  <a:srgbClr val="174C3F"/>
-                </a:solidFill>
-              </a:defRPr>
-            </a:defPPr>
-          </a:lstStyle>
-          <a:p xmlns:a="http://schemas.openxmlformats.org/drawingml/2006/main">
-            <a:pPr>
-              <a:defRPr sz="900" b="1" i="0">
-                <a:solidFill>
-                  <a:srgbClr val="174C3F"/>
-                </a:solidFill>
-              </a:defRPr>
-            </a:pPr>
-            <a:r>
-              <a:rPr sz="900" b="1" i="0">
-                <a:solidFill>
-                  <a:srgbClr val="174C3F"/>
-                </a:solidFill>
-              </a:rPr>
-              <a:t>CONTEXT</a:t>
-            </a:r>
-          </a:p>
-        </p:txBody>
-      </p:sp>
-    </p:spTree>
-    <p:extLst>
-      <p:ext uri="{BB962C8B-B14F-4D97-AF65-F5344CB8AC3E}">
-        <p14:creationId xmlns:p14="http://schemas.microsoft.com/office/powerpoint/2010/main" val="1786321978"/>
-      </p:ext>
-    </p:extLst>
-  </p:cSld>
-</p:sld>
-</file>
-
-<file path=ppt/slides/slide5.xml><?xml version="1.0" encoding="utf-8"?>
 <p:sld xmlns:p="http://schemas.openxmlformats.org/presentationml/2006/main">
   <p:cSld>
     <p:bg>
@@ -6654,10 +4494,10 @@
       </p:grpSpPr>
       <p:sp>
         <p:nvSpPr>
-          <p:cNvPr id="15" name="">
-            <a:extLst xmlns:a="http://schemas.openxmlformats.org/drawingml/2006/main">
-              <a:ext uri="{FF2B5EF4-FFF2-40B4-BE49-F238E27FC236}">
-                <a16:creationId xmlns:a16="http://schemas.microsoft.com/office/drawing/2014/main" id="{3584FA5B-0A18-42F0-A059-D9EB5C2E4A83}"/>
+          <p:cNvPr id="8" name="">
+            <a:extLst xmlns:a="http://schemas.openxmlformats.org/drawingml/2006/main">
+              <a:ext uri="{FF2B5EF4-FFF2-40B4-BE49-F238E27FC236}">
+                <a16:creationId xmlns:a16="http://schemas.microsoft.com/office/drawing/2014/main" id="{C22603D7-F571-43F5-AA53-9E2419B89D2C}"/>
               </a:ext>
             </a:extLst>
           </p:cNvPr>
@@ -6668,8 +4508,8 @@
         </p:nvSpPr>
         <p:spPr>
           <a:xfrm xmlns:a="http://schemas.openxmlformats.org/drawingml/2006/main">
-            <a:off x="11334750" y="266700"/>
-            <a:ext cx="400050" cy="228600"/>
+            <a:off x="11410950" y="285750"/>
+            <a:ext cx="342900" cy="209550"/>
           </a:xfrm>
           <a:prstGeom xmlns:a="http://schemas.openxmlformats.org/drawingml/2006/main" prst="rect">
             <a:avLst/>
@@ -6684,28 +4524,28 @@
           <a:bodyPr xmlns:a="http://schemas.openxmlformats.org/drawingml/2006/main" anchor="t"/>
           <a:lstStyle xmlns:a="http://schemas.openxmlformats.org/drawingml/2006/main">
             <a:defPPr>
-              <a:defRPr sz="825" b="1" i="0">
-                <a:solidFill>
-                  <a:srgbClr val="65786F"/>
+              <a:defRPr sz="825" b="1">
+                <a:solidFill>
+                  <a:srgbClr val="61756C"/>
                 </a:solidFill>
               </a:defRPr>
             </a:defPPr>
           </a:lstStyle>
           <a:p xmlns:a="http://schemas.openxmlformats.org/drawingml/2006/main">
             <a:pPr>
-              <a:defRPr sz="825" b="1" i="0">
-                <a:solidFill>
-                  <a:srgbClr val="65786F"/>
+              <a:defRPr sz="825" b="1">
+                <a:solidFill>
+                  <a:srgbClr val="61756C"/>
                 </a:solidFill>
               </a:defRPr>
             </a:pPr>
             <a:r>
-              <a:rPr sz="825" b="1" i="0">
-                <a:solidFill>
-                  <a:srgbClr val="65786F"/>
+              <a:rPr sz="825" b="1">
+                <a:solidFill>
+                  <a:srgbClr val="61756C"/>
                 </a:solidFill>
               </a:rPr>
-              <a:t>05</a:t>
+              <a:t>04</a:t>
             </a:r>
           </a:p>
         </p:txBody>
@@ -6715,7 +4555,7 @@
           <p:cNvPr id="2" name="">
             <a:extLst xmlns:a="http://schemas.openxmlformats.org/drawingml/2006/main">
               <a:ext uri="{FF2B5EF4-FFF2-40B4-BE49-F238E27FC236}">
-                <a16:creationId xmlns:a16="http://schemas.microsoft.com/office/drawing/2014/main" id="{48AF6254-02C2-46FB-BB15-ECA99BF0BBE0}"/>
+                <a16:creationId xmlns:a16="http://schemas.microsoft.com/office/drawing/2014/main" id="{43EC9A21-4252-4850-BB10-A4790D89D7C7}"/>
               </a:ext>
             </a:extLst>
           </p:cNvPr>
@@ -6726,8 +4566,8 @@
         </p:nvSpPr>
         <p:spPr>
           <a:xfrm xmlns:a="http://schemas.openxmlformats.org/drawingml/2006/main">
-            <a:off x="609600" y="457200"/>
-            <a:ext cx="8572500" cy="552450"/>
+            <a:off x="609600" y="438150"/>
+            <a:ext cx="7239000" cy="590550"/>
           </a:xfrm>
           <a:prstGeom xmlns:a="http://schemas.openxmlformats.org/drawingml/2006/main" prst="rect">
             <a:avLst/>
@@ -6742,28 +4582,28 @@
           <a:bodyPr xmlns:a="http://schemas.openxmlformats.org/drawingml/2006/main" anchor="t"/>
           <a:lstStyle xmlns:a="http://schemas.openxmlformats.org/drawingml/2006/main">
             <a:defPPr>
-              <a:defRPr sz="2550" b="1" i="0">
-                <a:solidFill>
-                  <a:srgbClr val="0B302A"/>
+              <a:defRPr sz="3150" b="1">
+                <a:solidFill>
+                  <a:srgbClr val="082B26"/>
                 </a:solidFill>
               </a:defRPr>
             </a:defPPr>
           </a:lstStyle>
           <a:p xmlns:a="http://schemas.openxmlformats.org/drawingml/2006/main">
             <a:pPr>
-              <a:defRPr sz="2550" b="1" i="0">
-                <a:solidFill>
-                  <a:srgbClr val="0B302A"/>
+              <a:defRPr sz="3150" b="1">
+                <a:solidFill>
+                  <a:srgbClr val="082B26"/>
                 </a:solidFill>
               </a:defRPr>
             </a:pPr>
             <a:r>
-              <a:rPr sz="2550" b="1" i="0">
-                <a:solidFill>
-                  <a:srgbClr val="0B302A"/>
+              <a:rPr sz="3150" b="1">
+                <a:solidFill>
+                  <a:srgbClr val="082B26"/>
                 </a:solidFill>
               </a:rPr>
-              <a:t>A rest request becomes coordinated action</a:t>
+              <a:t>One clear next step</a:t>
             </a:r>
           </a:p>
         </p:txBody>
@@ -6773,7 +4613,7 @@
           <p:cNvPr id="3" name="">
             <a:extLst xmlns:a="http://schemas.openxmlformats.org/drawingml/2006/main">
               <a:ext uri="{FF2B5EF4-FFF2-40B4-BE49-F238E27FC236}">
-                <a16:creationId xmlns:a16="http://schemas.microsoft.com/office/drawing/2014/main" id="{D445080A-FE2B-4BA9-8B02-88FB7EB27344}"/>
+                <a16:creationId xmlns:a16="http://schemas.microsoft.com/office/drawing/2014/main" id="{76401C19-EC86-4D65-965E-B1F75107193E}"/>
               </a:ext>
             </a:extLst>
           </p:cNvPr>
@@ -6784,8 +4624,8 @@
         </p:nvSpPr>
         <p:spPr>
           <a:xfrm xmlns:a="http://schemas.openxmlformats.org/drawingml/2006/main">
-            <a:off x="628650" y="1047750"/>
-            <a:ext cx="8763000" cy="457200"/>
+            <a:off x="628650" y="1066800"/>
+            <a:ext cx="9906000" cy="400050"/>
           </a:xfrm>
           <a:prstGeom xmlns:a="http://schemas.openxmlformats.org/drawingml/2006/main" prst="rect">
             <a:avLst/>
@@ -6800,543 +4640,38 @@
           <a:bodyPr xmlns:a="http://schemas.openxmlformats.org/drawingml/2006/main" anchor="t"/>
           <a:lstStyle xmlns:a="http://schemas.openxmlformats.org/drawingml/2006/main">
             <a:defPPr>
-              <a:defRPr sz="1425" b="0" i="0">
-                <a:solidFill>
-                  <a:srgbClr val="65786F"/>
+              <a:defRPr sz="1650" b="0">
+                <a:solidFill>
+                  <a:srgbClr val="61756C"/>
                 </a:solidFill>
               </a:defRPr>
             </a:defPPr>
           </a:lstStyle>
           <a:p xmlns:a="http://schemas.openxmlformats.org/drawingml/2006/main">
             <a:pPr>
-              <a:defRPr sz="1425" b="0" i="0">
-                <a:solidFill>
-                  <a:srgbClr val="65786F"/>
+              <a:defRPr sz="1650" b="0">
+                <a:solidFill>
+                  <a:srgbClr val="61756C"/>
                 </a:solidFill>
               </a:defRPr>
             </a:pPr>
             <a:r>
-              <a:rPr sz="1425" b="0" i="0">
-                <a:solidFill>
-                  <a:srgbClr val="65786F"/>
+              <a:rPr sz="1650" b="0">
+                <a:solidFill>
+                  <a:srgbClr val="61756C"/>
                 </a:solidFill>
               </a:rPr>
-              <a:t>The protected break remains fixed. Additional rest becomes a separate request that a supervisor can review and staff around.</a:t>
-            </a:r>
-          </a:p>
-        </p:txBody>
-      </p:sp>
-      <p:sp>
-        <p:nvSpPr>
-          <p:cNvPr id="4" name="">
-            <a:extLst xmlns:a="http://schemas.openxmlformats.org/drawingml/2006/main">
-              <a:ext uri="{FF2B5EF4-FFF2-40B4-BE49-F238E27FC236}">
-                <a16:creationId xmlns:a16="http://schemas.microsoft.com/office/drawing/2014/main" id="{4A062DDF-51E7-446A-B76E-46C232186130}"/>
-              </a:ext>
-            </a:extLst>
-          </p:cNvPr>
-          <p:cNvSpPr>
-            <a:spLocks xmlns:a="http://schemas.openxmlformats.org/drawingml/2006/main" noGrp="1"/>
-          </p:cNvSpPr>
-          <p:nvPr/>
-        </p:nvSpPr>
-        <p:spPr>
-          <a:xfrm xmlns:a="http://schemas.openxmlformats.org/drawingml/2006/main">
-            <a:off x="685800" y="2133600"/>
-            <a:ext cx="476250" cy="304800"/>
-          </a:xfrm>
-          <a:prstGeom xmlns:a="http://schemas.openxmlformats.org/drawingml/2006/main" prst="rect">
-            <a:avLst/>
-          </a:prstGeom>
-          <a:noFill xmlns:a="http://schemas.openxmlformats.org/drawingml/2006/main"/>
-          <a:ln xmlns:a="http://schemas.openxmlformats.org/drawingml/2006/main" w="0">
-            <a:noFill/>
-            <a:prstDash val="solid"/>
-          </a:ln>
-        </p:spPr>
-        <p:txBody>
-          <a:bodyPr xmlns:a="http://schemas.openxmlformats.org/drawingml/2006/main" anchor="t"/>
-          <a:lstStyle xmlns:a="http://schemas.openxmlformats.org/drawingml/2006/main">
-            <a:defPPr>
-              <a:defRPr sz="1200" b="1" i="0">
-                <a:solidFill>
-                  <a:srgbClr val="0B302A"/>
-                </a:solidFill>
-              </a:defRPr>
-            </a:defPPr>
-          </a:lstStyle>
-          <a:p xmlns:a="http://schemas.openxmlformats.org/drawingml/2006/main">
-            <a:pPr>
-              <a:defRPr sz="1200" b="1" i="0">
-                <a:solidFill>
-                  <a:srgbClr val="0B302A"/>
-                </a:solidFill>
-              </a:defRPr>
-            </a:pPr>
-            <a:r>
-              <a:rPr sz="1200" b="1" i="0">
-                <a:solidFill>
-                  <a:srgbClr val="0B302A"/>
-                </a:solidFill>
-              </a:rPr>
-              <a:t>01</a:t>
-            </a:r>
-          </a:p>
-        </p:txBody>
-      </p:sp>
-      <p:sp>
-        <p:nvSpPr>
-          <p:cNvPr id="5" name="">
-            <a:extLst xmlns:a="http://schemas.openxmlformats.org/drawingml/2006/main">
-              <a:ext uri="{FF2B5EF4-FFF2-40B4-BE49-F238E27FC236}">
-                <a16:creationId xmlns:a16="http://schemas.microsoft.com/office/drawing/2014/main" id="{062EE422-5A86-4227-9318-307D1ED4ACF2}"/>
-              </a:ext>
-            </a:extLst>
-          </p:cNvPr>
-          <p:cNvSpPr>
-            <a:spLocks xmlns:a="http://schemas.openxmlformats.org/drawingml/2006/main" noGrp="1"/>
-          </p:cNvSpPr>
-          <p:nvPr/>
-        </p:nvSpPr>
-        <p:spPr>
-          <a:xfrm xmlns:a="http://schemas.openxmlformats.org/drawingml/2006/main">
-            <a:off x="685800" y="2533650"/>
-            <a:ext cx="1352550" cy="47625"/>
-          </a:xfrm>
-          <a:prstGeom xmlns:a="http://schemas.openxmlformats.org/drawingml/2006/main" prst="roundRect">
-            <a:avLst>
-              <a:gd name="adj" fmla="val 40000"/>
-            </a:avLst>
-          </a:prstGeom>
-          <a:solidFill xmlns:a="http://schemas.openxmlformats.org/drawingml/2006/main">
-            <a:srgbClr val="C9FF65"/>
-          </a:solidFill>
-          <a:ln xmlns:a="http://schemas.openxmlformats.org/drawingml/2006/main" w="0">
-            <a:noFill/>
-            <a:prstDash val="solid"/>
-          </a:ln>
-        </p:spPr>
-      </p:sp>
-      <p:sp>
-        <p:nvSpPr>
-          <p:cNvPr id="6" name="">
-            <a:extLst xmlns:a="http://schemas.openxmlformats.org/drawingml/2006/main">
-              <a:ext uri="{FF2B5EF4-FFF2-40B4-BE49-F238E27FC236}">
-                <a16:creationId xmlns:a16="http://schemas.microsoft.com/office/drawing/2014/main" id="{E1E2207B-7CBB-4AA0-92B5-A8F126580E0B}"/>
-              </a:ext>
-            </a:extLst>
-          </p:cNvPr>
-          <p:cNvSpPr>
-            <a:spLocks xmlns:a="http://schemas.openxmlformats.org/drawingml/2006/main" noGrp="1"/>
-          </p:cNvSpPr>
-          <p:nvPr/>
-        </p:nvSpPr>
-        <p:spPr>
-          <a:xfrm xmlns:a="http://schemas.openxmlformats.org/drawingml/2006/main">
-            <a:off x="685800" y="2781300"/>
-            <a:ext cx="1524000" cy="685800"/>
-          </a:xfrm>
-          <a:prstGeom xmlns:a="http://schemas.openxmlformats.org/drawingml/2006/main" prst="rect">
-            <a:avLst/>
-          </a:prstGeom>
-          <a:noFill xmlns:a="http://schemas.openxmlformats.org/drawingml/2006/main"/>
-          <a:ln xmlns:a="http://schemas.openxmlformats.org/drawingml/2006/main" w="0">
-            <a:noFill/>
-            <a:prstDash val="solid"/>
-          </a:ln>
-        </p:spPr>
-        <p:txBody>
-          <a:bodyPr xmlns:a="http://schemas.openxmlformats.org/drawingml/2006/main" anchor="t"/>
-          <a:lstStyle xmlns:a="http://schemas.openxmlformats.org/drawingml/2006/main">
-            <a:defPPr>
-              <a:defRPr sz="1650" b="1" i="0">
-                <a:solidFill>
-                  <a:srgbClr val="0B302A"/>
-                </a:solidFill>
-              </a:defRPr>
-            </a:defPPr>
-          </a:lstStyle>
-          <a:p xmlns:a="http://schemas.openxmlformats.org/drawingml/2006/main">
-            <a:pPr>
-              <a:defRPr sz="1650" b="1" i="0">
-                <a:solidFill>
-                  <a:srgbClr val="0B302A"/>
-                </a:solidFill>
-              </a:defRPr>
-            </a:pPr>
-            <a:r>
-              <a:rPr sz="1650" b="1" i="0">
-                <a:solidFill>
-                  <a:srgbClr val="0B302A"/>
-                </a:solidFill>
-              </a:rPr>
-              <a:t>Worker asks</a:t>
-            </a:r>
-          </a:p>
-        </p:txBody>
-      </p:sp>
-      <p:sp>
-        <p:nvSpPr>
-          <p:cNvPr id="7" name="">
-            <a:extLst xmlns:a="http://schemas.openxmlformats.org/drawingml/2006/main">
-              <a:ext uri="{FF2B5EF4-FFF2-40B4-BE49-F238E27FC236}">
-                <a16:creationId xmlns:a16="http://schemas.microsoft.com/office/drawing/2014/main" id="{3E1A957E-63DF-4E30-9404-8C93AAEFECCE}"/>
-              </a:ext>
-            </a:extLst>
-          </p:cNvPr>
-          <p:cNvSpPr>
-            <a:spLocks xmlns:a="http://schemas.openxmlformats.org/drawingml/2006/main" noGrp="1"/>
-          </p:cNvSpPr>
-          <p:nvPr/>
-        </p:nvSpPr>
-        <p:spPr>
-          <a:xfrm xmlns:a="http://schemas.openxmlformats.org/drawingml/2006/main">
-            <a:off x="2495550" y="2133600"/>
-            <a:ext cx="476250" cy="304800"/>
-          </a:xfrm>
-          <a:prstGeom xmlns:a="http://schemas.openxmlformats.org/drawingml/2006/main" prst="rect">
-            <a:avLst/>
-          </a:prstGeom>
-          <a:noFill xmlns:a="http://schemas.openxmlformats.org/drawingml/2006/main"/>
-          <a:ln xmlns:a="http://schemas.openxmlformats.org/drawingml/2006/main" w="0">
-            <a:noFill/>
-            <a:prstDash val="solid"/>
-          </a:ln>
-        </p:spPr>
-        <p:txBody>
-          <a:bodyPr xmlns:a="http://schemas.openxmlformats.org/drawingml/2006/main" anchor="t"/>
-          <a:lstStyle xmlns:a="http://schemas.openxmlformats.org/drawingml/2006/main">
-            <a:defPPr>
-              <a:defRPr sz="1200" b="1" i="0">
-                <a:solidFill>
-                  <a:srgbClr val="0B302A"/>
-                </a:solidFill>
-              </a:defRPr>
-            </a:defPPr>
-          </a:lstStyle>
-          <a:p xmlns:a="http://schemas.openxmlformats.org/drawingml/2006/main">
-            <a:pPr>
-              <a:defRPr sz="1200" b="1" i="0">
-                <a:solidFill>
-                  <a:srgbClr val="0B302A"/>
-                </a:solidFill>
-              </a:defRPr>
-            </a:pPr>
-            <a:r>
-              <a:rPr sz="1200" b="1" i="0">
-                <a:solidFill>
-                  <a:srgbClr val="0B302A"/>
-                </a:solidFill>
-              </a:rPr>
-              <a:t>02</a:t>
-            </a:r>
-          </a:p>
-        </p:txBody>
-      </p:sp>
-      <p:sp>
-        <p:nvSpPr>
-          <p:cNvPr id="8" name="">
-            <a:extLst xmlns:a="http://schemas.openxmlformats.org/drawingml/2006/main">
-              <a:ext uri="{FF2B5EF4-FFF2-40B4-BE49-F238E27FC236}">
-                <a16:creationId xmlns:a16="http://schemas.microsoft.com/office/drawing/2014/main" id="{31AF8698-21F5-4A06-B295-33FDC57B1EAC}"/>
-              </a:ext>
-            </a:extLst>
-          </p:cNvPr>
-          <p:cNvSpPr>
-            <a:spLocks xmlns:a="http://schemas.openxmlformats.org/drawingml/2006/main" noGrp="1"/>
-          </p:cNvSpPr>
-          <p:nvPr/>
-        </p:nvSpPr>
-        <p:spPr>
-          <a:xfrm xmlns:a="http://schemas.openxmlformats.org/drawingml/2006/main">
-            <a:off x="2495550" y="2533650"/>
-            <a:ext cx="1352550" cy="47625"/>
-          </a:xfrm>
-          <a:prstGeom xmlns:a="http://schemas.openxmlformats.org/drawingml/2006/main" prst="roundRect">
-            <a:avLst>
-              <a:gd name="adj" fmla="val 40000"/>
-            </a:avLst>
-          </a:prstGeom>
-          <a:solidFill xmlns:a="http://schemas.openxmlformats.org/drawingml/2006/main">
-            <a:srgbClr val="FFCE73"/>
-          </a:solidFill>
-          <a:ln xmlns:a="http://schemas.openxmlformats.org/drawingml/2006/main" w="0">
-            <a:noFill/>
-            <a:prstDash val="solid"/>
-          </a:ln>
-        </p:spPr>
-      </p:sp>
-      <p:sp>
-        <p:nvSpPr>
-          <p:cNvPr id="9" name="">
-            <a:extLst xmlns:a="http://schemas.openxmlformats.org/drawingml/2006/main">
-              <a:ext uri="{FF2B5EF4-FFF2-40B4-BE49-F238E27FC236}">
-                <a16:creationId xmlns:a16="http://schemas.microsoft.com/office/drawing/2014/main" id="{F9B59D19-31C8-42FE-B911-C0DC4AA8EA87}"/>
-              </a:ext>
-            </a:extLst>
-          </p:cNvPr>
-          <p:cNvSpPr>
-            <a:spLocks xmlns:a="http://schemas.openxmlformats.org/drawingml/2006/main" noGrp="1"/>
-          </p:cNvSpPr>
-          <p:nvPr/>
-        </p:nvSpPr>
-        <p:spPr>
-          <a:xfrm xmlns:a="http://schemas.openxmlformats.org/drawingml/2006/main">
-            <a:off x="2495550" y="2781300"/>
-            <a:ext cx="1524000" cy="685800"/>
-          </a:xfrm>
-          <a:prstGeom xmlns:a="http://schemas.openxmlformats.org/drawingml/2006/main" prst="rect">
-            <a:avLst/>
-          </a:prstGeom>
-          <a:noFill xmlns:a="http://schemas.openxmlformats.org/drawingml/2006/main"/>
-          <a:ln xmlns:a="http://schemas.openxmlformats.org/drawingml/2006/main" w="0">
-            <a:noFill/>
-            <a:prstDash val="solid"/>
-          </a:ln>
-        </p:spPr>
-        <p:txBody>
-          <a:bodyPr xmlns:a="http://schemas.openxmlformats.org/drawingml/2006/main" anchor="t"/>
-          <a:lstStyle xmlns:a="http://schemas.openxmlformats.org/drawingml/2006/main">
-            <a:defPPr>
-              <a:defRPr sz="1650" b="1" i="0">
-                <a:solidFill>
-                  <a:srgbClr val="0B302A"/>
-                </a:solidFill>
-              </a:defRPr>
-            </a:defPPr>
-          </a:lstStyle>
-          <a:p xmlns:a="http://schemas.openxmlformats.org/drawingml/2006/main">
-            <a:pPr>
-              <a:defRPr sz="1650" b="1" i="0">
-                <a:solidFill>
-                  <a:srgbClr val="0B302A"/>
-                </a:solidFill>
-              </a:defRPr>
-            </a:pPr>
-            <a:r>
-              <a:rPr sz="1650" b="1" i="0">
-                <a:solidFill>
-                  <a:srgbClr val="0B302A"/>
-                </a:solidFill>
-              </a:rPr>
-              <a:t>Supervisor approves</a:t>
-            </a:r>
-          </a:p>
-        </p:txBody>
-      </p:sp>
-      <p:sp>
-        <p:nvSpPr>
-          <p:cNvPr id="10" name="">
-            <a:extLst xmlns:a="http://schemas.openxmlformats.org/drawingml/2006/main">
-              <a:ext uri="{FF2B5EF4-FFF2-40B4-BE49-F238E27FC236}">
-                <a16:creationId xmlns:a16="http://schemas.microsoft.com/office/drawing/2014/main" id="{ACE6425B-A3AF-4AAA-A20C-FA9BF68A436B}"/>
-              </a:ext>
-            </a:extLst>
-          </p:cNvPr>
-          <p:cNvSpPr>
-            <a:spLocks xmlns:a="http://schemas.openxmlformats.org/drawingml/2006/main" noGrp="1"/>
-          </p:cNvSpPr>
-          <p:nvPr/>
-        </p:nvSpPr>
-        <p:spPr>
-          <a:xfrm xmlns:a="http://schemas.openxmlformats.org/drawingml/2006/main">
-            <a:off x="4305300" y="2133600"/>
-            <a:ext cx="476250" cy="304800"/>
-          </a:xfrm>
-          <a:prstGeom xmlns:a="http://schemas.openxmlformats.org/drawingml/2006/main" prst="rect">
-            <a:avLst/>
-          </a:prstGeom>
-          <a:noFill xmlns:a="http://schemas.openxmlformats.org/drawingml/2006/main"/>
-          <a:ln xmlns:a="http://schemas.openxmlformats.org/drawingml/2006/main" w="0">
-            <a:noFill/>
-            <a:prstDash val="solid"/>
-          </a:ln>
-        </p:spPr>
-        <p:txBody>
-          <a:bodyPr xmlns:a="http://schemas.openxmlformats.org/drawingml/2006/main" anchor="t"/>
-          <a:lstStyle xmlns:a="http://schemas.openxmlformats.org/drawingml/2006/main">
-            <a:defPPr>
-              <a:defRPr sz="1200" b="1" i="0">
-                <a:solidFill>
-                  <a:srgbClr val="0B302A"/>
-                </a:solidFill>
-              </a:defRPr>
-            </a:defPPr>
-          </a:lstStyle>
-          <a:p xmlns:a="http://schemas.openxmlformats.org/drawingml/2006/main">
-            <a:pPr>
-              <a:defRPr sz="1200" b="1" i="0">
-                <a:solidFill>
-                  <a:srgbClr val="0B302A"/>
-                </a:solidFill>
-              </a:defRPr>
-            </a:pPr>
-            <a:r>
-              <a:rPr sz="1200" b="1" i="0">
-                <a:solidFill>
-                  <a:srgbClr val="0B302A"/>
-                </a:solidFill>
-              </a:rPr>
-              <a:t>03</a:t>
-            </a:r>
-          </a:p>
-        </p:txBody>
-      </p:sp>
-      <p:sp>
-        <p:nvSpPr>
-          <p:cNvPr id="11" name="">
-            <a:extLst xmlns:a="http://schemas.openxmlformats.org/drawingml/2006/main">
-              <a:ext uri="{FF2B5EF4-FFF2-40B4-BE49-F238E27FC236}">
-                <a16:creationId xmlns:a16="http://schemas.microsoft.com/office/drawing/2014/main" id="{8FD188E6-53C6-4D09-9DE2-90A6C7CD23C3}"/>
-              </a:ext>
-            </a:extLst>
-          </p:cNvPr>
-          <p:cNvSpPr>
-            <a:spLocks xmlns:a="http://schemas.openxmlformats.org/drawingml/2006/main" noGrp="1"/>
-          </p:cNvSpPr>
-          <p:nvPr/>
-        </p:nvSpPr>
-        <p:spPr>
-          <a:xfrm xmlns:a="http://schemas.openxmlformats.org/drawingml/2006/main">
-            <a:off x="4305300" y="2533650"/>
-            <a:ext cx="1352550" cy="47625"/>
-          </a:xfrm>
-          <a:prstGeom xmlns:a="http://schemas.openxmlformats.org/drawingml/2006/main" prst="roundRect">
-            <a:avLst>
-              <a:gd name="adj" fmla="val 40000"/>
-            </a:avLst>
-          </a:prstGeom>
-          <a:solidFill xmlns:a="http://schemas.openxmlformats.org/drawingml/2006/main">
-            <a:srgbClr val="C9FF65"/>
-          </a:solidFill>
-          <a:ln xmlns:a="http://schemas.openxmlformats.org/drawingml/2006/main" w="0">
-            <a:noFill/>
-            <a:prstDash val="solid"/>
-          </a:ln>
-        </p:spPr>
-      </p:sp>
-      <p:sp>
-        <p:nvSpPr>
-          <p:cNvPr id="12" name="">
-            <a:extLst xmlns:a="http://schemas.openxmlformats.org/drawingml/2006/main">
-              <a:ext uri="{FF2B5EF4-FFF2-40B4-BE49-F238E27FC236}">
-                <a16:creationId xmlns:a16="http://schemas.microsoft.com/office/drawing/2014/main" id="{B6345142-13D3-4016-9B6C-A26DD014E767}"/>
-              </a:ext>
-            </a:extLst>
-          </p:cNvPr>
-          <p:cNvSpPr>
-            <a:spLocks xmlns:a="http://schemas.openxmlformats.org/drawingml/2006/main" noGrp="1"/>
-          </p:cNvSpPr>
-          <p:nvPr/>
-        </p:nvSpPr>
-        <p:spPr>
-          <a:xfrm xmlns:a="http://schemas.openxmlformats.org/drawingml/2006/main">
-            <a:off x="4305300" y="2781300"/>
-            <a:ext cx="1524000" cy="685800"/>
-          </a:xfrm>
-          <a:prstGeom xmlns:a="http://schemas.openxmlformats.org/drawingml/2006/main" prst="rect">
-            <a:avLst/>
-          </a:prstGeom>
-          <a:noFill xmlns:a="http://schemas.openxmlformats.org/drawingml/2006/main"/>
-          <a:ln xmlns:a="http://schemas.openxmlformats.org/drawingml/2006/main" w="0">
-            <a:noFill/>
-            <a:prstDash val="solid"/>
-          </a:ln>
-        </p:spPr>
-        <p:txBody>
-          <a:bodyPr xmlns:a="http://schemas.openxmlformats.org/drawingml/2006/main" anchor="t"/>
-          <a:lstStyle xmlns:a="http://schemas.openxmlformats.org/drawingml/2006/main">
-            <a:defPPr>
-              <a:defRPr sz="1650" b="1" i="0">
-                <a:solidFill>
-                  <a:srgbClr val="0B302A"/>
-                </a:solidFill>
-              </a:defRPr>
-            </a:defPPr>
-          </a:lstStyle>
-          <a:p xmlns:a="http://schemas.openxmlformats.org/drawingml/2006/main">
-            <a:pPr>
-              <a:defRPr sz="1650" b="1" i="0">
-                <a:solidFill>
-                  <a:srgbClr val="0B302A"/>
-                </a:solidFill>
-              </a:defRPr>
-            </a:pPr>
-            <a:r>
-              <a:rPr sz="1650" b="1" i="0">
-                <a:solidFill>
-                  <a:srgbClr val="0B302A"/>
-                </a:solidFill>
-              </a:rPr>
-              <a:t>Coverage updates</a:t>
-            </a:r>
-          </a:p>
-        </p:txBody>
-      </p:sp>
-      <p:sp>
-        <p:nvSpPr>
-          <p:cNvPr id="13" name="">
-            <a:extLst xmlns:a="http://schemas.openxmlformats.org/drawingml/2006/main">
-              <a:ext uri="{FF2B5EF4-FFF2-40B4-BE49-F238E27FC236}">
-                <a16:creationId xmlns:a16="http://schemas.microsoft.com/office/drawing/2014/main" id="{A82E4E99-A8AB-44C7-8381-089C200692AE}"/>
-              </a:ext>
-            </a:extLst>
-          </p:cNvPr>
-          <p:cNvSpPr>
-            <a:spLocks xmlns:a="http://schemas.openxmlformats.org/drawingml/2006/main" noGrp="1"/>
-          </p:cNvSpPr>
-          <p:nvPr/>
-        </p:nvSpPr>
-        <p:spPr>
-          <a:xfrm xmlns:a="http://schemas.openxmlformats.org/drawingml/2006/main">
-            <a:off x="685800" y="4476750"/>
-            <a:ext cx="4476750" cy="876300"/>
-          </a:xfrm>
-          <a:prstGeom xmlns:a="http://schemas.openxmlformats.org/drawingml/2006/main" prst="rect">
-            <a:avLst/>
-          </a:prstGeom>
-          <a:noFill xmlns:a="http://schemas.openxmlformats.org/drawingml/2006/main"/>
-          <a:ln xmlns:a="http://schemas.openxmlformats.org/drawingml/2006/main" w="0">
-            <a:noFill/>
-            <a:prstDash val="solid"/>
-          </a:ln>
-        </p:spPr>
-        <p:txBody>
-          <a:bodyPr xmlns:a="http://schemas.openxmlformats.org/drawingml/2006/main" anchor="t"/>
-          <a:lstStyle xmlns:a="http://schemas.openxmlformats.org/drawingml/2006/main">
-            <a:defPPr>
-              <a:defRPr sz="2175" b="1" i="0">
-                <a:solidFill>
-                  <a:srgbClr val="0B302A"/>
-                </a:solidFill>
-              </a:defRPr>
-            </a:defPPr>
-          </a:lstStyle>
-          <a:p xmlns:a="http://schemas.openxmlformats.org/drawingml/2006/main">
-            <a:pPr>
-              <a:defRPr sz="2175" b="1" i="0">
-                <a:solidFill>
-                  <a:srgbClr val="0B302A"/>
-                </a:solidFill>
-              </a:defRPr>
-            </a:pPr>
-            <a:r>
-              <a:rPr sz="2175" b="1" i="0">
-                <a:solidFill>
-                  <a:srgbClr val="0B302A"/>
-                </a:solidFill>
-              </a:rPr>
-              <a:t>Protected time is a constraint, not a suggestion.</a:t>
+              <a:t>The model surfaces evidence. Gemini explains approved facts. The worker decides.</a:t>
             </a:r>
           </a:p>
         </p:txBody>
       </p:sp>
       <p:pic>
         <p:nvPicPr>
-          <p:cNvPr id="14" name="">
-            <a:extLst xmlns:a="http://schemas.openxmlformats.org/drawingml/2006/main">
-              <a:ext uri="{FF2B5EF4-FFF2-40B4-BE49-F238E27FC236}">
-                <a16:creationId xmlns:a16="http://schemas.microsoft.com/office/drawing/2014/main" id="{7177CA9E-0491-4285-9CB6-F8F9F435B3EF}"/>
+          <p:cNvPr id="4" name="">
+            <a:extLst xmlns:a="http://schemas.openxmlformats.org/drawingml/2006/main">
+              <a:ext uri="{FF2B5EF4-FFF2-40B4-BE49-F238E27FC236}">
+                <a16:creationId xmlns:a16="http://schemas.microsoft.com/office/drawing/2014/main" id="{3F56EDFB-E6E1-43CC-8E9E-3A1CDAA56411}"/>
               </a:ext>
             </a:extLst>
           </p:cNvPr>
@@ -7346,26 +4681,581 @@
           <p:nvPr/>
         </p:nvPicPr>
         <p:blipFill>
-          <a:blip xmlns:r="http://schemas.openxmlformats.org/officeDocument/2006/relationships" xmlns:a="http://schemas.openxmlformats.org/drawingml/2006/main" r:embed="Rd133106b111c402b"/>
-          <a:srcRect xmlns:a="http://schemas.openxmlformats.org/drawingml/2006/main" l="10000" t="8000" r="2000" b="2000"/>
+          <a:blip xmlns:r="http://schemas.openxmlformats.org/officeDocument/2006/relationships" xmlns:a="http://schemas.openxmlformats.org/drawingml/2006/main" r:embed="Ra68bbf12684b42e4"/>
+          <a:srcRect xmlns:a="http://schemas.openxmlformats.org/drawingml/2006/main" l="4000" t="3000" r="3000" b="4000"/>
           <a:stretch xmlns:a="http://schemas.openxmlformats.org/drawingml/2006/main"/>
         </p:blipFill>
         <p:spPr>
           <a:xfrm xmlns:a="http://schemas.openxmlformats.org/drawingml/2006/main">
-            <a:off x="6191250" y="1790700"/>
-            <a:ext cx="5391150" cy="4267200"/>
+            <a:off x="628650" y="1695450"/>
+            <a:ext cx="10934700" cy="4476750"/>
           </a:xfrm>
           <a:prstGeom xmlns:a="http://schemas.openxmlformats.org/drawingml/2006/main" prst="roundRect">
             <a:avLst>
-              <a:gd name="adj" fmla="val 5357"/>
+              <a:gd name="adj" fmla="val 5957"/>
             </a:avLst>
           </a:prstGeom>
         </p:spPr>
       </p:pic>
+      <p:sp>
+        <p:nvSpPr>
+          <p:cNvPr id="5" name="">
+            <a:extLst xmlns:a="http://schemas.openxmlformats.org/drawingml/2006/main">
+              <a:ext uri="{FF2B5EF4-FFF2-40B4-BE49-F238E27FC236}">
+                <a16:creationId xmlns:a16="http://schemas.microsoft.com/office/drawing/2014/main" id="{BDA1C4AB-440E-4A26-9E13-BA3FAB710775}"/>
+              </a:ext>
+            </a:extLst>
+          </p:cNvPr>
+          <p:cNvSpPr>
+            <a:spLocks xmlns:a="http://schemas.openxmlformats.org/drawingml/2006/main" noGrp="1"/>
+          </p:cNvSpPr>
+          <p:nvPr/>
+        </p:nvSpPr>
+        <p:spPr>
+          <a:xfrm xmlns:a="http://schemas.openxmlformats.org/drawingml/2006/main">
+            <a:off x="857250" y="5791200"/>
+            <a:ext cx="1619250" cy="419100"/>
+          </a:xfrm>
+          <a:prstGeom xmlns:a="http://schemas.openxmlformats.org/drawingml/2006/main" prst="rect">
+            <a:avLst/>
+          </a:prstGeom>
+          <a:noFill xmlns:a="http://schemas.openxmlformats.org/drawingml/2006/main"/>
+          <a:ln xmlns:a="http://schemas.openxmlformats.org/drawingml/2006/main" w="0">
+            <a:noFill/>
+            <a:prstDash val="solid"/>
+          </a:ln>
+        </p:spPr>
+        <p:txBody>
+          <a:bodyPr xmlns:a="http://schemas.openxmlformats.org/drawingml/2006/main" anchor="t"/>
+          <a:lstStyle xmlns:a="http://schemas.openxmlformats.org/drawingml/2006/main">
+            <a:defPPr>
+              <a:defRPr sz="2175" b="1">
+                <a:solidFill>
+                  <a:srgbClr val="0D4D40"/>
+                </a:solidFill>
+              </a:defRPr>
+            </a:defPPr>
+          </a:lstStyle>
+          <a:p xmlns:a="http://schemas.openxmlformats.org/drawingml/2006/main">
+            <a:pPr>
+              <a:defRPr sz="2175" b="1">
+                <a:solidFill>
+                  <a:srgbClr val="0D4D40"/>
+                </a:solidFill>
+              </a:defRPr>
+            </a:pPr>
+            <a:r>
+              <a:rPr sz="2175" b="1">
+                <a:solidFill>
+                  <a:srgbClr val="0D4D40"/>
+                </a:solidFill>
+              </a:rPr>
+              <a:t>REST</a:t>
+            </a:r>
+          </a:p>
+        </p:txBody>
+      </p:sp>
+      <p:sp>
+        <p:nvSpPr>
+          <p:cNvPr id="6" name="">
+            <a:extLst xmlns:a="http://schemas.openxmlformats.org/drawingml/2006/main">
+              <a:ext uri="{FF2B5EF4-FFF2-40B4-BE49-F238E27FC236}">
+                <a16:creationId xmlns:a16="http://schemas.microsoft.com/office/drawing/2014/main" id="{FB89C00F-0563-4A0A-B61C-C55FE40ECAAB}"/>
+              </a:ext>
+            </a:extLst>
+          </p:cNvPr>
+          <p:cNvSpPr>
+            <a:spLocks xmlns:a="http://schemas.openxmlformats.org/drawingml/2006/main" noGrp="1"/>
+          </p:cNvSpPr>
+          <p:nvPr/>
+        </p:nvSpPr>
+        <p:spPr>
+          <a:xfrm xmlns:a="http://schemas.openxmlformats.org/drawingml/2006/main">
+            <a:off x="2857500" y="5791200"/>
+            <a:ext cx="2190750" cy="419100"/>
+          </a:xfrm>
+          <a:prstGeom xmlns:a="http://schemas.openxmlformats.org/drawingml/2006/main" prst="rect">
+            <a:avLst/>
+          </a:prstGeom>
+          <a:noFill xmlns:a="http://schemas.openxmlformats.org/drawingml/2006/main"/>
+          <a:ln xmlns:a="http://schemas.openxmlformats.org/drawingml/2006/main" w="0">
+            <a:noFill/>
+            <a:prstDash val="solid"/>
+          </a:ln>
+        </p:spPr>
+        <p:txBody>
+          <a:bodyPr xmlns:a="http://schemas.openxmlformats.org/drawingml/2006/main" anchor="t"/>
+          <a:lstStyle xmlns:a="http://schemas.openxmlformats.org/drawingml/2006/main">
+            <a:defPPr>
+              <a:defRPr sz="2175" b="1">
+                <a:solidFill>
+                  <a:srgbClr val="0D4D40"/>
+                </a:solidFill>
+              </a:defRPr>
+            </a:defPPr>
+          </a:lstStyle>
+          <a:p xmlns:a="http://schemas.openxmlformats.org/drawingml/2006/main">
+            <a:pPr>
+              <a:defRPr sz="2175" b="1">
+                <a:solidFill>
+                  <a:srgbClr val="0D4D40"/>
+                </a:solidFill>
+              </a:defRPr>
+            </a:pPr>
+            <a:r>
+              <a:rPr sz="2175" b="1">
+                <a:solidFill>
+                  <a:srgbClr val="0D4D40"/>
+                </a:solidFill>
+              </a:rPr>
+              <a:t>TRY AGAIN</a:t>
+            </a:r>
+          </a:p>
+        </p:txBody>
+      </p:sp>
+      <p:sp>
+        <p:nvSpPr>
+          <p:cNvPr id="7" name="">
+            <a:extLst xmlns:a="http://schemas.openxmlformats.org/drawingml/2006/main">
+              <a:ext uri="{FF2B5EF4-FFF2-40B4-BE49-F238E27FC236}">
+                <a16:creationId xmlns:a16="http://schemas.microsoft.com/office/drawing/2014/main" id="{50C8EE3E-DF50-456D-AB27-DAAD46BE001C}"/>
+              </a:ext>
+            </a:extLst>
+          </p:cNvPr>
+          <p:cNvSpPr>
+            <a:spLocks xmlns:a="http://schemas.openxmlformats.org/drawingml/2006/main" noGrp="1"/>
+          </p:cNvSpPr>
+          <p:nvPr/>
+        </p:nvSpPr>
+        <p:spPr>
+          <a:xfrm xmlns:a="http://schemas.openxmlformats.org/drawingml/2006/main">
+            <a:off x="5476875" y="5791200"/>
+            <a:ext cx="2190750" cy="419100"/>
+          </a:xfrm>
+          <a:prstGeom xmlns:a="http://schemas.openxmlformats.org/drawingml/2006/main" prst="rect">
+            <a:avLst/>
+          </a:prstGeom>
+          <a:noFill xmlns:a="http://schemas.openxmlformats.org/drawingml/2006/main"/>
+          <a:ln xmlns:a="http://schemas.openxmlformats.org/drawingml/2006/main" w="0">
+            <a:noFill/>
+            <a:prstDash val="solid"/>
+          </a:ln>
+        </p:spPr>
+        <p:txBody>
+          <a:bodyPr xmlns:a="http://schemas.openxmlformats.org/drawingml/2006/main" anchor="t"/>
+          <a:lstStyle xmlns:a="http://schemas.openxmlformats.org/drawingml/2006/main">
+            <a:defPPr>
+              <a:defRPr sz="2175" b="1">
+                <a:solidFill>
+                  <a:srgbClr val="0D4D40"/>
+                </a:solidFill>
+              </a:defRPr>
+            </a:defPPr>
+          </a:lstStyle>
+          <a:p xmlns:a="http://schemas.openxmlformats.org/drawingml/2006/main">
+            <a:pPr>
+              <a:defRPr sz="2175" b="1">
+                <a:solidFill>
+                  <a:srgbClr val="0D4D40"/>
+                </a:solidFill>
+              </a:defRPr>
+            </a:pPr>
+            <a:r>
+              <a:rPr sz="2175" b="1">
+                <a:solidFill>
+                  <a:srgbClr val="0D4D40"/>
+                </a:solidFill>
+              </a:rPr>
+              <a:t>CONTINUE</a:t>
+            </a:r>
+          </a:p>
+        </p:txBody>
+      </p:sp>
     </p:spTree>
     <p:extLst>
       <p:ext uri="{BB962C8B-B14F-4D97-AF65-F5344CB8AC3E}">
-        <p14:creationId xmlns:p14="http://schemas.microsoft.com/office/powerpoint/2010/main" val="2096713321"/>
+        <p14:creationId xmlns:p14="http://schemas.microsoft.com/office/powerpoint/2010/main" val="590165973"/>
+      </p:ext>
+    </p:extLst>
+  </p:cSld>
+</p:sld>
+</file>
+
+<file path=ppt/slides/slide5.xml><?xml version="1.0" encoding="utf-8"?>
+<p:sld xmlns:p="http://schemas.openxmlformats.org/presentationml/2006/main">
+  <p:cSld>
+    <p:bg>
+      <p:bgPr>
+        <a:solidFill xmlns:a="http://schemas.openxmlformats.org/drawingml/2006/main">
+          <a:srgbClr val="F5F7F2"/>
+        </a:solidFill>
+      </p:bgPr>
+    </p:bg>
+    <p:spTree>
+      <p:nvGrpSpPr>
+        <p:cNvPr id="1" name=""/>
+        <p:cNvGrpSpPr/>
+        <p:nvPr/>
+      </p:nvGrpSpPr>
+      <p:grpSpPr>
+        <a:xfrm xmlns:a="http://schemas.openxmlformats.org/drawingml/2006/main"/>
+      </p:grpSpPr>
+      <p:sp>
+        <p:nvSpPr>
+          <p:cNvPr id="8" name="">
+            <a:extLst xmlns:a="http://schemas.openxmlformats.org/drawingml/2006/main">
+              <a:ext uri="{FF2B5EF4-FFF2-40B4-BE49-F238E27FC236}">
+                <a16:creationId xmlns:a16="http://schemas.microsoft.com/office/drawing/2014/main" id="{8BE885AC-1D22-4E20-8B8F-EC7F0F5DA140}"/>
+              </a:ext>
+            </a:extLst>
+          </p:cNvPr>
+          <p:cNvSpPr>
+            <a:spLocks xmlns:a="http://schemas.openxmlformats.org/drawingml/2006/main" noGrp="1"/>
+          </p:cNvSpPr>
+          <p:nvPr/>
+        </p:nvSpPr>
+        <p:spPr>
+          <a:xfrm xmlns:a="http://schemas.openxmlformats.org/drawingml/2006/main">
+            <a:off x="11410950" y="285750"/>
+            <a:ext cx="342900" cy="209550"/>
+          </a:xfrm>
+          <a:prstGeom xmlns:a="http://schemas.openxmlformats.org/drawingml/2006/main" prst="rect">
+            <a:avLst/>
+          </a:prstGeom>
+          <a:noFill xmlns:a="http://schemas.openxmlformats.org/drawingml/2006/main"/>
+          <a:ln xmlns:a="http://schemas.openxmlformats.org/drawingml/2006/main" w="0">
+            <a:noFill/>
+            <a:prstDash val="solid"/>
+          </a:ln>
+        </p:spPr>
+        <p:txBody>
+          <a:bodyPr xmlns:a="http://schemas.openxmlformats.org/drawingml/2006/main" anchor="t"/>
+          <a:lstStyle xmlns:a="http://schemas.openxmlformats.org/drawingml/2006/main">
+            <a:defPPr>
+              <a:defRPr sz="825" b="1">
+                <a:solidFill>
+                  <a:srgbClr val="61756C"/>
+                </a:solidFill>
+              </a:defRPr>
+            </a:defPPr>
+          </a:lstStyle>
+          <a:p xmlns:a="http://schemas.openxmlformats.org/drawingml/2006/main">
+            <a:pPr>
+              <a:defRPr sz="825" b="1">
+                <a:solidFill>
+                  <a:srgbClr val="61756C"/>
+                </a:solidFill>
+              </a:defRPr>
+            </a:pPr>
+            <a:r>
+              <a:rPr sz="825" b="1">
+                <a:solidFill>
+                  <a:srgbClr val="61756C"/>
+                </a:solidFill>
+              </a:rPr>
+              <a:t>05</a:t>
+            </a:r>
+          </a:p>
+        </p:txBody>
+      </p:sp>
+      <p:sp>
+        <p:nvSpPr>
+          <p:cNvPr id="2" name="">
+            <a:extLst xmlns:a="http://schemas.openxmlformats.org/drawingml/2006/main">
+              <a:ext uri="{FF2B5EF4-FFF2-40B4-BE49-F238E27FC236}">
+                <a16:creationId xmlns:a16="http://schemas.microsoft.com/office/drawing/2014/main" id="{8B5D42D1-9351-4ADE-B5A7-1941BE26278B}"/>
+              </a:ext>
+            </a:extLst>
+          </p:cNvPr>
+          <p:cNvSpPr>
+            <a:spLocks xmlns:a="http://schemas.openxmlformats.org/drawingml/2006/main" noGrp="1"/>
+          </p:cNvSpPr>
+          <p:nvPr/>
+        </p:nvSpPr>
+        <p:spPr>
+          <a:xfrm xmlns:a="http://schemas.openxmlformats.org/drawingml/2006/main">
+            <a:off x="609600" y="457200"/>
+            <a:ext cx="7810500" cy="609600"/>
+          </a:xfrm>
+          <a:prstGeom xmlns:a="http://schemas.openxmlformats.org/drawingml/2006/main" prst="rect">
+            <a:avLst/>
+          </a:prstGeom>
+          <a:noFill xmlns:a="http://schemas.openxmlformats.org/drawingml/2006/main"/>
+          <a:ln xmlns:a="http://schemas.openxmlformats.org/drawingml/2006/main" w="0">
+            <a:noFill/>
+            <a:prstDash val="solid"/>
+          </a:ln>
+        </p:spPr>
+        <p:txBody>
+          <a:bodyPr xmlns:a="http://schemas.openxmlformats.org/drawingml/2006/main" anchor="t"/>
+          <a:lstStyle xmlns:a="http://schemas.openxmlformats.org/drawingml/2006/main">
+            <a:defPPr>
+              <a:defRPr sz="3150" b="1">
+                <a:solidFill>
+                  <a:srgbClr val="082B26"/>
+                </a:solidFill>
+              </a:defRPr>
+            </a:defPPr>
+          </a:lstStyle>
+          <a:p xmlns:a="http://schemas.openxmlformats.org/drawingml/2006/main">
+            <a:pPr>
+              <a:defRPr sz="3150" b="1">
+                <a:solidFill>
+                  <a:srgbClr val="082B26"/>
+                </a:solidFill>
+              </a:defRPr>
+            </a:pPr>
+            <a:r>
+              <a:rPr sz="3150" b="1">
+                <a:solidFill>
+                  <a:srgbClr val="082B26"/>
+                </a:solidFill>
+              </a:rPr>
+              <a:t>One request. One decision.</a:t>
+            </a:r>
+          </a:p>
+        </p:txBody>
+      </p:sp>
+      <p:sp>
+        <p:nvSpPr>
+          <p:cNvPr id="3" name="">
+            <a:extLst xmlns:a="http://schemas.openxmlformats.org/drawingml/2006/main">
+              <a:ext uri="{FF2B5EF4-FFF2-40B4-BE49-F238E27FC236}">
+                <a16:creationId xmlns:a16="http://schemas.microsoft.com/office/drawing/2014/main" id="{5733F01B-432E-4E7C-B1A3-FA2996430ED5}"/>
+              </a:ext>
+            </a:extLst>
+          </p:cNvPr>
+          <p:cNvSpPr>
+            <a:spLocks xmlns:a="http://schemas.openxmlformats.org/drawingml/2006/main" noGrp="1"/>
+          </p:cNvSpPr>
+          <p:nvPr/>
+        </p:nvSpPr>
+        <p:spPr>
+          <a:xfrm xmlns:a="http://schemas.openxmlformats.org/drawingml/2006/main">
+            <a:off x="628650" y="1085850"/>
+            <a:ext cx="8096250" cy="400050"/>
+          </a:xfrm>
+          <a:prstGeom xmlns:a="http://schemas.openxmlformats.org/drawingml/2006/main" prst="rect">
+            <a:avLst/>
+          </a:prstGeom>
+          <a:noFill xmlns:a="http://schemas.openxmlformats.org/drawingml/2006/main"/>
+          <a:ln xmlns:a="http://schemas.openxmlformats.org/drawingml/2006/main" w="0">
+            <a:noFill/>
+            <a:prstDash val="solid"/>
+          </a:ln>
+        </p:spPr>
+        <p:txBody>
+          <a:bodyPr xmlns:a="http://schemas.openxmlformats.org/drawingml/2006/main" anchor="t"/>
+          <a:lstStyle xmlns:a="http://schemas.openxmlformats.org/drawingml/2006/main">
+            <a:defPPr>
+              <a:defRPr sz="1725" b="0">
+                <a:solidFill>
+                  <a:srgbClr val="61756C"/>
+                </a:solidFill>
+              </a:defRPr>
+            </a:defPPr>
+          </a:lstStyle>
+          <a:p xmlns:a="http://schemas.openxmlformats.org/drawingml/2006/main">
+            <a:pPr>
+              <a:defRPr sz="1725" b="0">
+                <a:solidFill>
+                  <a:srgbClr val="61756C"/>
+                </a:solidFill>
+              </a:defRPr>
+            </a:pPr>
+            <a:r>
+              <a:rPr sz="1725" b="0">
+                <a:solidFill>
+                  <a:srgbClr val="61756C"/>
+                </a:solidFill>
+              </a:rPr>
+              <a:t>The break stays fixed. Coverage adapts around the worker.</a:t>
+            </a:r>
+          </a:p>
+        </p:txBody>
+      </p:sp>
+      <p:pic>
+        <p:nvPicPr>
+          <p:cNvPr id="4" name="">
+            <a:extLst xmlns:a="http://schemas.openxmlformats.org/drawingml/2006/main">
+              <a:ext uri="{FF2B5EF4-FFF2-40B4-BE49-F238E27FC236}">
+                <a16:creationId xmlns:a16="http://schemas.microsoft.com/office/drawing/2014/main" id="{C047A7C7-2B30-4449-902E-E008B2EA424C}"/>
+              </a:ext>
+            </a:extLst>
+          </p:cNvPr>
+          <p:cNvPicPr>
+            <a:picLocks xmlns:a="http://schemas.openxmlformats.org/drawingml/2006/main" noChangeAspect="1"/>
+          </p:cNvPicPr>
+          <p:nvPr/>
+        </p:nvPicPr>
+        <p:blipFill>
+          <a:blip xmlns:r="http://schemas.openxmlformats.org/officeDocument/2006/relationships" xmlns:a="http://schemas.openxmlformats.org/drawingml/2006/main" r:embed="Rbce19265f8cf445c"/>
+          <a:srcRect xmlns:a="http://schemas.openxmlformats.org/drawingml/2006/main" l="8000" t="5000" r="3000" b="3000"/>
+          <a:stretch xmlns:a="http://schemas.openxmlformats.org/drawingml/2006/main"/>
+        </p:blipFill>
+        <p:spPr>
+          <a:xfrm xmlns:a="http://schemas.openxmlformats.org/drawingml/2006/main">
+            <a:off x="628650" y="1790700"/>
+            <a:ext cx="5219700" cy="3905250"/>
+          </a:xfrm>
+          <a:prstGeom xmlns:a="http://schemas.openxmlformats.org/drawingml/2006/main" prst="roundRect">
+            <a:avLst>
+              <a:gd name="adj" fmla="val 6829"/>
+            </a:avLst>
+          </a:prstGeom>
+        </p:spPr>
+      </p:pic>
+      <p:pic>
+        <p:nvPicPr>
+          <p:cNvPr id="5" name="">
+            <a:extLst xmlns:a="http://schemas.openxmlformats.org/drawingml/2006/main">
+              <a:ext uri="{FF2B5EF4-FFF2-40B4-BE49-F238E27FC236}">
+                <a16:creationId xmlns:a16="http://schemas.microsoft.com/office/drawing/2014/main" id="{707F2918-66A6-41AD-B087-49FBFBB3F118}"/>
+              </a:ext>
+            </a:extLst>
+          </p:cNvPr>
+          <p:cNvPicPr>
+            <a:picLocks xmlns:a="http://schemas.openxmlformats.org/drawingml/2006/main" noChangeAspect="1"/>
+          </p:cNvPicPr>
+          <p:nvPr/>
+        </p:nvPicPr>
+        <p:blipFill>
+          <a:blip xmlns:r="http://schemas.openxmlformats.org/officeDocument/2006/relationships" xmlns:a="http://schemas.openxmlformats.org/drawingml/2006/main" r:embed="R0bccfef516c04912"/>
+          <a:srcRect xmlns:a="http://schemas.openxmlformats.org/drawingml/2006/main" l="8000" t="5000" r="2000" b="3000"/>
+          <a:stretch xmlns:a="http://schemas.openxmlformats.org/drawingml/2006/main"/>
+        </p:blipFill>
+        <p:spPr>
+          <a:xfrm xmlns:a="http://schemas.openxmlformats.org/drawingml/2006/main">
+            <a:off x="6343650" y="1790700"/>
+            <a:ext cx="5219700" cy="3905250"/>
+          </a:xfrm>
+          <a:prstGeom xmlns:a="http://schemas.openxmlformats.org/drawingml/2006/main" prst="roundRect">
+            <a:avLst>
+              <a:gd name="adj" fmla="val 6829"/>
+            </a:avLst>
+          </a:prstGeom>
+        </p:spPr>
+      </p:pic>
+      <p:sp>
+        <p:nvSpPr>
+          <p:cNvPr id="6" name="">
+            <a:extLst xmlns:a="http://schemas.openxmlformats.org/drawingml/2006/main">
+              <a:ext uri="{FF2B5EF4-FFF2-40B4-BE49-F238E27FC236}">
+                <a16:creationId xmlns:a16="http://schemas.microsoft.com/office/drawing/2014/main" id="{532E4CEE-C1C8-4331-B086-A45E7056C945}"/>
+              </a:ext>
+            </a:extLst>
+          </p:cNvPr>
+          <p:cNvSpPr>
+            <a:spLocks xmlns:a="http://schemas.openxmlformats.org/drawingml/2006/main" noGrp="1"/>
+          </p:cNvSpPr>
+          <p:nvPr/>
+        </p:nvSpPr>
+        <p:spPr>
+          <a:xfrm xmlns:a="http://schemas.openxmlformats.org/drawingml/2006/main">
+            <a:off x="666750" y="5962650"/>
+            <a:ext cx="4000500" cy="247650"/>
+          </a:xfrm>
+          <a:prstGeom xmlns:a="http://schemas.openxmlformats.org/drawingml/2006/main" prst="rect">
+            <a:avLst/>
+          </a:prstGeom>
+          <a:noFill xmlns:a="http://schemas.openxmlformats.org/drawingml/2006/main"/>
+          <a:ln xmlns:a="http://schemas.openxmlformats.org/drawingml/2006/main" w="0">
+            <a:noFill/>
+            <a:prstDash val="solid"/>
+          </a:ln>
+        </p:spPr>
+        <p:txBody>
+          <a:bodyPr xmlns:a="http://schemas.openxmlformats.org/drawingml/2006/main" anchor="t"/>
+          <a:lstStyle xmlns:a="http://schemas.openxmlformats.org/drawingml/2006/main">
+            <a:defPPr>
+              <a:defRPr sz="1050" b="1">
+                <a:solidFill>
+                  <a:srgbClr val="0D4D40"/>
+                </a:solidFill>
+              </a:defRPr>
+            </a:defPPr>
+          </a:lstStyle>
+          <a:p xmlns:a="http://schemas.openxmlformats.org/drawingml/2006/main">
+            <a:pPr>
+              <a:defRPr sz="1050" b="1">
+                <a:solidFill>
+                  <a:srgbClr val="0D4D40"/>
+                </a:solidFill>
+              </a:defRPr>
+            </a:pPr>
+            <a:r>
+              <a:rPr sz="1050" b="1">
+                <a:solidFill>
+                  <a:srgbClr val="0D4D40"/>
+                </a:solidFill>
+              </a:rPr>
+              <a:t>SUPERVISOR APPROVES</a:t>
+            </a:r>
+          </a:p>
+        </p:txBody>
+      </p:sp>
+      <p:sp>
+        <p:nvSpPr>
+          <p:cNvPr id="7" name="">
+            <a:extLst xmlns:a="http://schemas.openxmlformats.org/drawingml/2006/main">
+              <a:ext uri="{FF2B5EF4-FFF2-40B4-BE49-F238E27FC236}">
+                <a16:creationId xmlns:a16="http://schemas.microsoft.com/office/drawing/2014/main" id="{8EC31F0E-8A2D-4DFD-B0CE-B4EBCD7785A8}"/>
+              </a:ext>
+            </a:extLst>
+          </p:cNvPr>
+          <p:cNvSpPr>
+            <a:spLocks xmlns:a="http://schemas.openxmlformats.org/drawingml/2006/main" noGrp="1"/>
+          </p:cNvSpPr>
+          <p:nvPr/>
+        </p:nvSpPr>
+        <p:spPr>
+          <a:xfrm xmlns:a="http://schemas.openxmlformats.org/drawingml/2006/main">
+            <a:off x="6381750" y="5962650"/>
+            <a:ext cx="4000500" cy="247650"/>
+          </a:xfrm>
+          <a:prstGeom xmlns:a="http://schemas.openxmlformats.org/drawingml/2006/main" prst="rect">
+            <a:avLst/>
+          </a:prstGeom>
+          <a:noFill xmlns:a="http://schemas.openxmlformats.org/drawingml/2006/main"/>
+          <a:ln xmlns:a="http://schemas.openxmlformats.org/drawingml/2006/main" w="0">
+            <a:noFill/>
+            <a:prstDash val="solid"/>
+          </a:ln>
+        </p:spPr>
+        <p:txBody>
+          <a:bodyPr xmlns:a="http://schemas.openxmlformats.org/drawingml/2006/main" anchor="t"/>
+          <a:lstStyle xmlns:a="http://schemas.openxmlformats.org/drawingml/2006/main">
+            <a:defPPr>
+              <a:defRPr sz="1050" b="1">
+                <a:solidFill>
+                  <a:srgbClr val="0D4D40"/>
+                </a:solidFill>
+              </a:defRPr>
+            </a:defPPr>
+          </a:lstStyle>
+          <a:p xmlns:a="http://schemas.openxmlformats.org/drawingml/2006/main">
+            <a:pPr>
+              <a:defRPr sz="1050" b="1">
+                <a:solidFill>
+                  <a:srgbClr val="0D4D40"/>
+                </a:solidFill>
+              </a:defRPr>
+            </a:pPr>
+            <a:r>
+              <a:rPr sz="1050" b="1">
+                <a:solidFill>
+                  <a:srgbClr val="0D4D40"/>
+                </a:solidFill>
+              </a:rPr>
+              <a:t>COVERAGE UPDATES</a:t>
+            </a:r>
+          </a:p>
+        </p:txBody>
+      </p:sp>
+    </p:spTree>
+    <p:extLst>
+      <p:ext uri="{BB962C8B-B14F-4D97-AF65-F5344CB8AC3E}">
+        <p14:creationId xmlns:p14="http://schemas.microsoft.com/office/powerpoint/2010/main" val="1714910665"/>
       </p:ext>
     </p:extLst>
   </p:cSld>
@@ -7378,7 +5268,7 @@
     <p:bg>
       <p:bgPr>
         <a:solidFill xmlns:a="http://schemas.openxmlformats.org/drawingml/2006/main">
-          <a:srgbClr val="0B302A"/>
+          <a:srgbClr val="07110F"/>
         </a:solidFill>
       </p:bgPr>
     </p:bg>
@@ -7393,10 +5283,10 @@
       </p:grpSpPr>
       <p:sp>
         <p:nvSpPr>
-          <p:cNvPr id="25" name="">
-            <a:extLst xmlns:a="http://schemas.openxmlformats.org/drawingml/2006/main">
-              <a:ext uri="{FF2B5EF4-FFF2-40B4-BE49-F238E27FC236}">
-                <a16:creationId xmlns:a16="http://schemas.microsoft.com/office/drawing/2014/main" id="{83C8B912-3E1E-41BD-9415-25AB45129434}"/>
+          <p:cNvPr id="9" name="">
+            <a:extLst xmlns:a="http://schemas.openxmlformats.org/drawingml/2006/main">
+              <a:ext uri="{FF2B5EF4-FFF2-40B4-BE49-F238E27FC236}">
+                <a16:creationId xmlns:a16="http://schemas.microsoft.com/office/drawing/2014/main" id="{0D8E08F8-A282-4CA9-AB43-BD2DB37E75B0}"/>
               </a:ext>
             </a:extLst>
           </p:cNvPr>
@@ -7407,8 +5297,8 @@
         </p:nvSpPr>
         <p:spPr>
           <a:xfrm xmlns:a="http://schemas.openxmlformats.org/drawingml/2006/main">
-            <a:off x="11334750" y="266700"/>
-            <a:ext cx="400050" cy="228600"/>
+            <a:off x="11410950" y="285750"/>
+            <a:ext cx="342900" cy="209550"/>
           </a:xfrm>
           <a:prstGeom xmlns:a="http://schemas.openxmlformats.org/drawingml/2006/main" prst="rect">
             <a:avLst/>
@@ -7423,25 +5313,25 @@
           <a:bodyPr xmlns:a="http://schemas.openxmlformats.org/drawingml/2006/main" anchor="t"/>
           <a:lstStyle xmlns:a="http://schemas.openxmlformats.org/drawingml/2006/main">
             <a:defPPr>
-              <a:defRPr sz="825" b="1" i="0">
-                <a:solidFill>
-                  <a:srgbClr val="DDE9E4"/>
+              <a:defRPr sz="825" b="1">
+                <a:solidFill>
+                  <a:srgbClr val="DCE9E3"/>
                 </a:solidFill>
               </a:defRPr>
             </a:defPPr>
           </a:lstStyle>
           <a:p xmlns:a="http://schemas.openxmlformats.org/drawingml/2006/main">
             <a:pPr>
-              <a:defRPr sz="825" b="1" i="0">
-                <a:solidFill>
-                  <a:srgbClr val="DDE9E4"/>
+              <a:defRPr sz="825" b="1">
+                <a:solidFill>
+                  <a:srgbClr val="DCE9E3"/>
                 </a:solidFill>
               </a:defRPr>
             </a:pPr>
             <a:r>
-              <a:rPr sz="825" b="1" i="0">
-                <a:solidFill>
-                  <a:srgbClr val="DDE9E4"/>
+              <a:rPr sz="825" b="1">
+                <a:solidFill>
+                  <a:srgbClr val="DCE9E3"/>
                 </a:solidFill>
               </a:rPr>
               <a:t>06</a:t>
@@ -7454,7 +5344,7 @@
           <p:cNvPr id="2" name="">
             <a:extLst xmlns:a="http://schemas.openxmlformats.org/drawingml/2006/main">
               <a:ext uri="{FF2B5EF4-FFF2-40B4-BE49-F238E27FC236}">
-                <a16:creationId xmlns:a16="http://schemas.microsoft.com/office/drawing/2014/main" id="{2E3CEA5F-92F7-43D4-BCF4-184256F60043}"/>
+                <a16:creationId xmlns:a16="http://schemas.microsoft.com/office/drawing/2014/main" id="{2988335D-41E9-4B06-A2C2-ABF318B1E353}"/>
               </a:ext>
             </a:extLst>
           </p:cNvPr>
@@ -7466,7 +5356,7 @@
         <p:spPr>
           <a:xfrm xmlns:a="http://schemas.openxmlformats.org/drawingml/2006/main">
             <a:off x="609600" y="457200"/>
-            <a:ext cx="8096250" cy="552450"/>
+            <a:ext cx="8572500" cy="609600"/>
           </a:xfrm>
           <a:prstGeom xmlns:a="http://schemas.openxmlformats.org/drawingml/2006/main" prst="rect">
             <a:avLst/>
@@ -7481,7 +5371,7 @@
           <a:bodyPr xmlns:a="http://schemas.openxmlformats.org/drawingml/2006/main" anchor="t"/>
           <a:lstStyle xmlns:a="http://schemas.openxmlformats.org/drawingml/2006/main">
             <a:defPPr>
-              <a:defRPr sz="2550" b="1" i="0">
+              <a:defRPr sz="3150" b="1">
                 <a:solidFill>
                   <a:srgbClr val="FFFFFF"/>
                 </a:solidFill>
@@ -7490,19 +5380,19 @@
           </a:lstStyle>
           <a:p xmlns:a="http://schemas.openxmlformats.org/drawingml/2006/main">
             <a:pPr>
-              <a:defRPr sz="2550" b="1" i="0">
+              <a:defRPr sz="3150" b="1">
                 <a:solidFill>
                   <a:srgbClr val="FFFFFF"/>
                 </a:solidFill>
               </a:defRPr>
             </a:pPr>
             <a:r>
-              <a:rPr sz="2550" b="1" i="0">
+              <a:rPr sz="3150" b="1">
                 <a:solidFill>
                   <a:srgbClr val="FFFFFF"/>
                 </a:solidFill>
               </a:rPr>
-              <a:t>Every integration has one clear job</a:t>
+              <a:t>A possible person-down alert</a:t>
             </a:r>
           </a:p>
         </p:txBody>
@@ -7512,7 +5402,7 @@
           <p:cNvPr id="3" name="">
             <a:extLst xmlns:a="http://schemas.openxmlformats.org/drawingml/2006/main">
               <a:ext uri="{FF2B5EF4-FFF2-40B4-BE49-F238E27FC236}">
-                <a16:creationId xmlns:a16="http://schemas.microsoft.com/office/drawing/2014/main" id="{6A1B03C1-09D6-409B-9891-34453FCF101D}"/>
+                <a16:creationId xmlns:a16="http://schemas.microsoft.com/office/drawing/2014/main" id="{CD88DA6F-91EF-42FF-9165-380944335DCD}"/>
               </a:ext>
             </a:extLst>
           </p:cNvPr>
@@ -7524,7 +5414,7 @@
         <p:spPr>
           <a:xfrm xmlns:a="http://schemas.openxmlformats.org/drawingml/2006/main">
             <a:off x="628650" y="1066800"/>
-            <a:ext cx="7620000" cy="342900"/>
+            <a:ext cx="8572500" cy="400050"/>
           </a:xfrm>
           <a:prstGeom xmlns:a="http://schemas.openxmlformats.org/drawingml/2006/main" prst="rect">
             <a:avLst/>
@@ -7539,85 +5429,112 @@
           <a:bodyPr xmlns:a="http://schemas.openxmlformats.org/drawingml/2006/main" anchor="t"/>
           <a:lstStyle xmlns:a="http://schemas.openxmlformats.org/drawingml/2006/main">
             <a:defPPr>
-              <a:defRPr sz="1350" b="0" i="0">
-                <a:solidFill>
-                  <a:srgbClr val="DDE9E4"/>
+              <a:defRPr sz="1650" b="0">
+                <a:solidFill>
+                  <a:srgbClr val="DCE9E3"/>
                 </a:solidFill>
               </a:defRPr>
             </a:defPPr>
           </a:lstStyle>
           <a:p xmlns:a="http://schemas.openxmlformats.org/drawingml/2006/main">
             <a:pPr>
-              <a:defRPr sz="1350" b="0" i="0">
-                <a:solidFill>
-                  <a:srgbClr val="DDE9E4"/>
+              <a:defRPr sz="1650" b="0">
+                <a:solidFill>
+                  <a:srgbClr val="DCE9E3"/>
                 </a:solidFill>
               </a:defRPr>
             </a:pPr>
             <a:r>
-              <a:rPr sz="1350" b="0" i="0">
-                <a:solidFill>
-                  <a:srgbClr val="DDE9E4"/>
+              <a:rPr sz="1650" b="0">
+                <a:solidFill>
+                  <a:srgbClr val="DCE9E3"/>
                 </a:solidFill>
               </a:rPr>
-              <a:t>A traceable path from camera observations to a human decision</a:t>
-            </a:r>
-          </a:p>
-        </p:txBody>
-      </p:sp>
-      <p:sp>
-        <p:nvSpPr>
+              <a:t>A possible person-down event reaches a human reviewer.</a:t>
+            </a:r>
+          </a:p>
+        </p:txBody>
+      </p:sp>
+      <p:pic>
+        <p:nvPicPr>
           <p:cNvPr id="4" name="">
             <a:extLst xmlns:a="http://schemas.openxmlformats.org/drawingml/2006/main">
               <a:ext uri="{FF2B5EF4-FFF2-40B4-BE49-F238E27FC236}">
-                <a16:creationId xmlns:a16="http://schemas.microsoft.com/office/drawing/2014/main" id="{C2659F8F-49D7-4C46-AB27-26075972B32F}"/>
-              </a:ext>
-            </a:extLst>
-          </p:cNvPr>
-          <p:cNvSpPr>
-            <a:spLocks xmlns:a="http://schemas.openxmlformats.org/drawingml/2006/main" noGrp="1"/>
-          </p:cNvSpPr>
+                <a16:creationId xmlns:a16="http://schemas.microsoft.com/office/drawing/2014/main" id="{26555D0E-E66F-47FC-9D67-909B5C66C2D0}"/>
+              </a:ext>
+            </a:extLst>
+          </p:cNvPr>
+          <p:cNvPicPr>
+            <a:picLocks xmlns:a="http://schemas.openxmlformats.org/drawingml/2006/main" noChangeAspect="1"/>
+          </p:cNvPicPr>
           <p:nvPr/>
-        </p:nvSpPr>
-        <p:spPr>
-          <a:xfrm xmlns:a="http://schemas.openxmlformats.org/drawingml/2006/main">
-            <a:off x="571500" y="2266950"/>
-            <a:ext cx="1962150" cy="2190750"/>
+        </p:nvPicPr>
+        <p:blipFill>
+          <a:blip xmlns:r="http://schemas.openxmlformats.org/officeDocument/2006/relationships" xmlns:a="http://schemas.openxmlformats.org/drawingml/2006/main" r:embed="R48c21b09fcd34d32"/>
+          <a:srcRect xmlns:a="http://schemas.openxmlformats.org/drawingml/2006/main" l="3000" t="3000" r="2000" b="3000"/>
+          <a:stretch xmlns:a="http://schemas.openxmlformats.org/drawingml/2006/main"/>
+        </p:blipFill>
+        <p:spPr>
+          <a:xfrm xmlns:a="http://schemas.openxmlformats.org/drawingml/2006/main">
+            <a:off x="609600" y="1714500"/>
+            <a:ext cx="6953250" cy="4362450"/>
           </a:xfrm>
           <a:prstGeom xmlns:a="http://schemas.openxmlformats.org/drawingml/2006/main" prst="roundRect">
             <a:avLst>
-              <a:gd name="adj" fmla="val 10680"/>
+              <a:gd name="adj" fmla="val 6114"/>
             </a:avLst>
           </a:prstGeom>
-          <a:solidFill xmlns:a="http://schemas.openxmlformats.org/drawingml/2006/main">
-            <a:srgbClr val="174C3F"/>
-          </a:solidFill>
-          <a:ln xmlns:a="http://schemas.openxmlformats.org/drawingml/2006/main" w="9525">
-            <a:solidFill>
-              <a:srgbClr val="41655D"/>
-            </a:solidFill>
-            <a:prstDash val="solid"/>
-          </a:ln>
-        </p:spPr>
-      </p:sp>
-      <p:sp>
-        <p:nvSpPr>
+        </p:spPr>
+      </p:pic>
+      <p:pic>
+        <p:nvPicPr>
           <p:cNvPr id="5" name="">
             <a:extLst xmlns:a="http://schemas.openxmlformats.org/drawingml/2006/main">
               <a:ext uri="{FF2B5EF4-FFF2-40B4-BE49-F238E27FC236}">
-                <a16:creationId xmlns:a16="http://schemas.microsoft.com/office/drawing/2014/main" id="{867B9385-F086-4E71-BF87-951CCCCACCD6}"/>
-              </a:ext>
-            </a:extLst>
-          </p:cNvPr>
-          <p:cNvSpPr>
-            <a:spLocks xmlns:a="http://schemas.openxmlformats.org/drawingml/2006/main" noGrp="1"/>
-          </p:cNvSpPr>
+                <a16:creationId xmlns:a16="http://schemas.microsoft.com/office/drawing/2014/main" id="{74E1383D-4A7A-486B-B7EA-DF91A3EAD759}"/>
+              </a:ext>
+            </a:extLst>
+          </p:cNvPr>
+          <p:cNvPicPr>
+            <a:picLocks xmlns:a="http://schemas.openxmlformats.org/drawingml/2006/main" noChangeAspect="1"/>
+          </p:cNvPicPr>
           <p:nvPr/>
-        </p:nvSpPr>
-        <p:spPr>
-          <a:xfrm xmlns:a="http://schemas.openxmlformats.org/drawingml/2006/main">
-            <a:off x="742950" y="2590800"/>
-            <a:ext cx="1619250" cy="285750"/>
+        </p:nvPicPr>
+        <p:blipFill>
+          <a:blip xmlns:r="http://schemas.openxmlformats.org/officeDocument/2006/relationships" xmlns:a="http://schemas.openxmlformats.org/drawingml/2006/main" r:embed="R6eb35bcaf3854426"/>
+          <a:srcRect xmlns:a="http://schemas.openxmlformats.org/drawingml/2006/main" l="5000" t="5000" r="3000" b="4000"/>
+          <a:stretch xmlns:a="http://schemas.openxmlformats.org/drawingml/2006/main"/>
+        </p:blipFill>
+        <p:spPr>
+          <a:xfrm xmlns:a="http://schemas.openxmlformats.org/drawingml/2006/main">
+            <a:off x="7943850" y="2190750"/>
+            <a:ext cx="3600450" cy="2857500"/>
+          </a:xfrm>
+          <a:prstGeom xmlns:a="http://schemas.openxmlformats.org/drawingml/2006/main" prst="roundRect">
+            <a:avLst>
+              <a:gd name="adj" fmla="val 9333"/>
+            </a:avLst>
+          </a:prstGeom>
+        </p:spPr>
+      </p:pic>
+      <p:sp>
+        <p:nvSpPr>
+          <p:cNvPr id="6" name="">
+            <a:extLst xmlns:a="http://schemas.openxmlformats.org/drawingml/2006/main">
+              <a:ext uri="{FF2B5EF4-FFF2-40B4-BE49-F238E27FC236}">
+                <a16:creationId xmlns:a16="http://schemas.microsoft.com/office/drawing/2014/main" id="{0D098627-3253-4AA0-801D-53B3C730133C}"/>
+              </a:ext>
+            </a:extLst>
+          </p:cNvPr>
+          <p:cNvSpPr>
+            <a:spLocks xmlns:a="http://schemas.openxmlformats.org/drawingml/2006/main" noGrp="1"/>
+          </p:cNvSpPr>
+          <p:nvPr/>
+        </p:nvSpPr>
+        <p:spPr>
+          <a:xfrm xmlns:a="http://schemas.openxmlformats.org/drawingml/2006/main">
+            <a:off x="8020050" y="5334000"/>
+            <a:ext cx="1428750" cy="266700"/>
           </a:xfrm>
           <a:prstGeom xmlns:a="http://schemas.openxmlformats.org/drawingml/2006/main" prst="rect">
             <a:avLst/>
@@ -7632,38 +5549,38 @@
           <a:bodyPr xmlns:a="http://schemas.openxmlformats.org/drawingml/2006/main" anchor="t"/>
           <a:lstStyle xmlns:a="http://schemas.openxmlformats.org/drawingml/2006/main">
             <a:defPPr>
-              <a:defRPr sz="1050" b="1" i="0">
-                <a:solidFill>
-                  <a:srgbClr val="C9FF65"/>
+              <a:defRPr sz="1125" b="1">
+                <a:solidFill>
+                  <a:srgbClr val="FFD278"/>
                 </a:solidFill>
               </a:defRPr>
             </a:defPPr>
           </a:lstStyle>
           <a:p xmlns:a="http://schemas.openxmlformats.org/drawingml/2006/main">
             <a:pPr>
-              <a:defRPr sz="1050" b="1" i="0">
-                <a:solidFill>
-                  <a:srgbClr val="C9FF65"/>
+              <a:defRPr sz="1125" b="1">
+                <a:solidFill>
+                  <a:srgbClr val="FFD278"/>
                 </a:solidFill>
               </a:defRPr>
             </a:pPr>
             <a:r>
-              <a:rPr sz="1050" b="1" i="0">
-                <a:solidFill>
-                  <a:srgbClr val="C9FF65"/>
+              <a:rPr sz="1125" b="1">
+                <a:solidFill>
+                  <a:srgbClr val="FFD278"/>
                 </a:solidFill>
               </a:rPr>
-              <a:t>PRESAGE</a:t>
-            </a:r>
-          </a:p>
-        </p:txBody>
-      </p:sp>
-      <p:sp>
-        <p:nvSpPr>
-          <p:cNvPr id="6" name="">
-            <a:extLst xmlns:a="http://schemas.openxmlformats.org/drawingml/2006/main">
-              <a:ext uri="{FF2B5EF4-FFF2-40B4-BE49-F238E27FC236}">
-                <a16:creationId xmlns:a16="http://schemas.microsoft.com/office/drawing/2014/main" id="{8FC3372B-5025-4EB0-8669-830ACD5B190F}"/>
+              <a:t>DETECT</a:t>
+            </a:r>
+          </a:p>
+        </p:txBody>
+      </p:sp>
+      <p:sp>
+        <p:nvSpPr>
+          <p:cNvPr id="7" name="">
+            <a:extLst xmlns:a="http://schemas.openxmlformats.org/drawingml/2006/main">
+              <a:ext uri="{FF2B5EF4-FFF2-40B4-BE49-F238E27FC236}">
+                <a16:creationId xmlns:a16="http://schemas.microsoft.com/office/drawing/2014/main" id="{FA0F5F2B-7F64-4058-A23C-0A4066088A9C}"/>
               </a:ext>
             </a:extLst>
           </p:cNvPr>
@@ -7674,8 +5591,8 @@
         </p:nvSpPr>
         <p:spPr>
           <a:xfrm xmlns:a="http://schemas.openxmlformats.org/drawingml/2006/main">
-            <a:off x="762000" y="3162300"/>
-            <a:ext cx="1581150" cy="819150"/>
+            <a:off x="9525000" y="5334000"/>
+            <a:ext cx="1428750" cy="266700"/>
           </a:xfrm>
           <a:prstGeom xmlns:a="http://schemas.openxmlformats.org/drawingml/2006/main" prst="rect">
             <a:avLst/>
@@ -7690,55 +5607,38 @@
           <a:bodyPr xmlns:a="http://schemas.openxmlformats.org/drawingml/2006/main" anchor="t"/>
           <a:lstStyle xmlns:a="http://schemas.openxmlformats.org/drawingml/2006/main">
             <a:defPPr>
-              <a:defRPr sz="1725" b="1" i="0">
-                <a:solidFill>
-                  <a:srgbClr val="FFFFFF"/>
+              <a:defRPr sz="1125" b="1">
+                <a:solidFill>
+                  <a:srgbClr val="C8FF63"/>
                 </a:solidFill>
               </a:defRPr>
             </a:defPPr>
           </a:lstStyle>
           <a:p xmlns:a="http://schemas.openxmlformats.org/drawingml/2006/main">
             <a:pPr>
-              <a:defRPr sz="1725" b="1" i="0">
-                <a:solidFill>
-                  <a:srgbClr val="FFFFFF"/>
+              <a:defRPr sz="1125" b="1">
+                <a:solidFill>
+                  <a:srgbClr val="C8FF63"/>
                 </a:solidFill>
               </a:defRPr>
             </a:pPr>
             <a:r>
-              <a:rPr sz="1725" b="1" i="0">
-                <a:solidFill>
-                  <a:srgbClr val="FFFFFF"/>
+              <a:rPr sz="1125" b="1">
+                <a:solidFill>
+                  <a:srgbClr val="C8FF63"/>
                 </a:solidFill>
               </a:rPr>
-              <a:t>Contactless</a:t>
-            </a:r>
-          </a:p>
-          <a:p xmlns:a="http://schemas.openxmlformats.org/drawingml/2006/main">
-            <a:pPr>
-              <a:defRPr sz="1725" b="1" i="0">
-                <a:solidFill>
-                  <a:srgbClr val="FFFFFF"/>
-                </a:solidFill>
-              </a:defRPr>
-            </a:pPr>
-            <a:r>
-              <a:rPr sz="1725" b="1" i="0">
-                <a:solidFill>
-                  <a:srgbClr val="FFFFFF"/>
-                </a:solidFill>
-              </a:rPr>
-              <a:t>observations</a:t>
-            </a:r>
-          </a:p>
-        </p:txBody>
-      </p:sp>
-      <p:sp>
-        <p:nvSpPr>
-          <p:cNvPr id="7" name="">
-            <a:extLst xmlns:a="http://schemas.openxmlformats.org/drawingml/2006/main">
-              <a:ext uri="{FF2B5EF4-FFF2-40B4-BE49-F238E27FC236}">
-                <a16:creationId xmlns:a16="http://schemas.microsoft.com/office/drawing/2014/main" id="{AF91C5F6-851D-46B4-81CE-895324D2AF3D}"/>
+              <a:t>REVIEW</a:t>
+            </a:r>
+          </a:p>
+        </p:txBody>
+      </p:sp>
+      <p:sp>
+        <p:nvSpPr>
+          <p:cNvPr id="8" name="">
+            <a:extLst xmlns:a="http://schemas.openxmlformats.org/drawingml/2006/main">
+              <a:ext uri="{FF2B5EF4-FFF2-40B4-BE49-F238E27FC236}">
+                <a16:creationId xmlns:a16="http://schemas.microsoft.com/office/drawing/2014/main" id="{2146C573-53F3-414C-B272-D9E40C7A697A}"/>
               </a:ext>
             </a:extLst>
           </p:cNvPr>
@@ -7749,8 +5649,8 @@
         </p:nvSpPr>
         <p:spPr>
           <a:xfrm xmlns:a="http://schemas.openxmlformats.org/drawingml/2006/main">
-            <a:off x="2543175" y="3048000"/>
-            <a:ext cx="342900" cy="476250"/>
+            <a:off x="7962900" y="5715000"/>
+            <a:ext cx="3429000" cy="476250"/>
           </a:xfrm>
           <a:prstGeom xmlns:a="http://schemas.openxmlformats.org/drawingml/2006/main" prst="rect">
             <a:avLst/>
@@ -7765,988 +5665,28 @@
           <a:bodyPr xmlns:a="http://schemas.openxmlformats.org/drawingml/2006/main" anchor="t"/>
           <a:lstStyle xmlns:a="http://schemas.openxmlformats.org/drawingml/2006/main">
             <a:defPPr>
-              <a:defRPr sz="2400" b="1" i="0">
-                <a:solidFill>
-                  <a:srgbClr val="FFCE73"/>
+              <a:defRPr sz="1425" b="1">
+                <a:solidFill>
+                  <a:srgbClr val="FFFFFF"/>
                 </a:solidFill>
               </a:defRPr>
             </a:defPPr>
           </a:lstStyle>
           <a:p xmlns:a="http://schemas.openxmlformats.org/drawingml/2006/main">
             <a:pPr>
-              <a:defRPr sz="2400" b="1" i="0">
-                <a:solidFill>
-                  <a:srgbClr val="FFCE73"/>
+              <a:defRPr sz="1425" b="1">
+                <a:solidFill>
+                  <a:srgbClr val="FFFFFF"/>
                 </a:solidFill>
               </a:defRPr>
             </a:pPr>
             <a:r>
-              <a:rPr sz="2400" b="1" i="0">
-                <a:solidFill>
-                  <a:srgbClr val="FFCE73"/>
+              <a:rPr sz="1425" b="1">
+                <a:solidFill>
+                  <a:srgbClr val="FFFFFF"/>
                 </a:solidFill>
               </a:rPr>
-              <a:t>›</a:t>
-            </a:r>
-          </a:p>
-        </p:txBody>
-      </p:sp>
-      <p:sp>
-        <p:nvSpPr>
-          <p:cNvPr id="8" name="">
-            <a:extLst xmlns:a="http://schemas.openxmlformats.org/drawingml/2006/main">
-              <a:ext uri="{FF2B5EF4-FFF2-40B4-BE49-F238E27FC236}">
-                <a16:creationId xmlns:a16="http://schemas.microsoft.com/office/drawing/2014/main" id="{D1504988-A296-4984-BE5B-28EAB82F9A36}"/>
-              </a:ext>
-            </a:extLst>
-          </p:cNvPr>
-          <p:cNvSpPr>
-            <a:spLocks xmlns:a="http://schemas.openxmlformats.org/drawingml/2006/main" noGrp="1"/>
-          </p:cNvSpPr>
-          <p:nvPr/>
-        </p:nvSpPr>
-        <p:spPr>
-          <a:xfrm xmlns:a="http://schemas.openxmlformats.org/drawingml/2006/main">
-            <a:off x="2895600" y="2266950"/>
-            <a:ext cx="1962150" cy="2190750"/>
-          </a:xfrm>
-          <a:prstGeom xmlns:a="http://schemas.openxmlformats.org/drawingml/2006/main" prst="roundRect">
-            <a:avLst>
-              <a:gd name="adj" fmla="val 10680"/>
-            </a:avLst>
-          </a:prstGeom>
-          <a:solidFill xmlns:a="http://schemas.openxmlformats.org/drawingml/2006/main">
-            <a:srgbClr val="174C3F"/>
-          </a:solidFill>
-          <a:ln xmlns:a="http://schemas.openxmlformats.org/drawingml/2006/main" w="9525">
-            <a:solidFill>
-              <a:srgbClr val="41655D"/>
-            </a:solidFill>
-            <a:prstDash val="solid"/>
-          </a:ln>
-        </p:spPr>
-      </p:sp>
-      <p:sp>
-        <p:nvSpPr>
-          <p:cNvPr id="9" name="">
-            <a:extLst xmlns:a="http://schemas.openxmlformats.org/drawingml/2006/main">
-              <a:ext uri="{FF2B5EF4-FFF2-40B4-BE49-F238E27FC236}">
-                <a16:creationId xmlns:a16="http://schemas.microsoft.com/office/drawing/2014/main" id="{6E688A48-FAC4-4FB8-9ABD-BC6E04F800FE}"/>
-              </a:ext>
-            </a:extLst>
-          </p:cNvPr>
-          <p:cNvSpPr>
-            <a:spLocks xmlns:a="http://schemas.openxmlformats.org/drawingml/2006/main" noGrp="1"/>
-          </p:cNvSpPr>
-          <p:nvPr/>
-        </p:nvSpPr>
-        <p:spPr>
-          <a:xfrm xmlns:a="http://schemas.openxmlformats.org/drawingml/2006/main">
-            <a:off x="3067050" y="2590800"/>
-            <a:ext cx="1619250" cy="285750"/>
-          </a:xfrm>
-          <a:prstGeom xmlns:a="http://schemas.openxmlformats.org/drawingml/2006/main" prst="rect">
-            <a:avLst/>
-          </a:prstGeom>
-          <a:noFill xmlns:a="http://schemas.openxmlformats.org/drawingml/2006/main"/>
-          <a:ln xmlns:a="http://schemas.openxmlformats.org/drawingml/2006/main" w="0">
-            <a:noFill/>
-            <a:prstDash val="solid"/>
-          </a:ln>
-        </p:spPr>
-        <p:txBody>
-          <a:bodyPr xmlns:a="http://schemas.openxmlformats.org/drawingml/2006/main" anchor="t"/>
-          <a:lstStyle xmlns:a="http://schemas.openxmlformats.org/drawingml/2006/main">
-            <a:defPPr>
-              <a:defRPr sz="1050" b="1" i="0">
-                <a:solidFill>
-                  <a:srgbClr val="C9FF65"/>
-                </a:solidFill>
-              </a:defRPr>
-            </a:defPPr>
-          </a:lstStyle>
-          <a:p xmlns:a="http://schemas.openxmlformats.org/drawingml/2006/main">
-            <a:pPr>
-              <a:defRPr sz="1050" b="1" i="0">
-                <a:solidFill>
-                  <a:srgbClr val="C9FF65"/>
-                </a:solidFill>
-              </a:defRPr>
-            </a:pPr>
-            <a:r>
-              <a:rPr sz="1050" b="1" i="0">
-                <a:solidFill>
-                  <a:srgbClr val="C9FF65"/>
-                </a:solidFill>
-              </a:rPr>
-              <a:t>FASTIFY</a:t>
-            </a:r>
-          </a:p>
-        </p:txBody>
-      </p:sp>
-      <p:sp>
-        <p:nvSpPr>
-          <p:cNvPr id="10" name="">
-            <a:extLst xmlns:a="http://schemas.openxmlformats.org/drawingml/2006/main">
-              <a:ext uri="{FF2B5EF4-FFF2-40B4-BE49-F238E27FC236}">
-                <a16:creationId xmlns:a16="http://schemas.microsoft.com/office/drawing/2014/main" id="{CC333F2B-F8D1-470E-ADAA-12387D7AA274}"/>
-              </a:ext>
-            </a:extLst>
-          </p:cNvPr>
-          <p:cNvSpPr>
-            <a:spLocks xmlns:a="http://schemas.openxmlformats.org/drawingml/2006/main" noGrp="1"/>
-          </p:cNvSpPr>
-          <p:nvPr/>
-        </p:nvSpPr>
-        <p:spPr>
-          <a:xfrm xmlns:a="http://schemas.openxmlformats.org/drawingml/2006/main">
-            <a:off x="3086100" y="3162300"/>
-            <a:ext cx="1581150" cy="819150"/>
-          </a:xfrm>
-          <a:prstGeom xmlns:a="http://schemas.openxmlformats.org/drawingml/2006/main" prst="rect">
-            <a:avLst/>
-          </a:prstGeom>
-          <a:noFill xmlns:a="http://schemas.openxmlformats.org/drawingml/2006/main"/>
-          <a:ln xmlns:a="http://schemas.openxmlformats.org/drawingml/2006/main" w="0">
-            <a:noFill/>
-            <a:prstDash val="solid"/>
-          </a:ln>
-        </p:spPr>
-        <p:txBody>
-          <a:bodyPr xmlns:a="http://schemas.openxmlformats.org/drawingml/2006/main" anchor="t"/>
-          <a:lstStyle xmlns:a="http://schemas.openxmlformats.org/drawingml/2006/main">
-            <a:defPPr>
-              <a:defRPr sz="1725" b="1" i="0">
-                <a:solidFill>
-                  <a:srgbClr val="FFFFFF"/>
-                </a:solidFill>
-              </a:defRPr>
-            </a:defPPr>
-          </a:lstStyle>
-          <a:p xmlns:a="http://schemas.openxmlformats.org/drawingml/2006/main">
-            <a:pPr>
-              <a:defRPr sz="1725" b="1" i="0">
-                <a:solidFill>
-                  <a:srgbClr val="FFFFFF"/>
-                </a:solidFill>
-              </a:defRPr>
-            </a:pPr>
-            <a:r>
-              <a:rPr sz="1725" b="1" i="0">
-                <a:solidFill>
-                  <a:srgbClr val="FFFFFF"/>
-                </a:solidFill>
-              </a:rPr>
-              <a:t>Validated</a:t>
-            </a:r>
-          </a:p>
-          <a:p xmlns:a="http://schemas.openxmlformats.org/drawingml/2006/main">
-            <a:pPr>
-              <a:defRPr sz="1725" b="1" i="0">
-                <a:solidFill>
-                  <a:srgbClr val="FFFFFF"/>
-                </a:solidFill>
-              </a:defRPr>
-            </a:pPr>
-            <a:r>
-              <a:rPr sz="1725" b="1" i="0">
-                <a:solidFill>
-                  <a:srgbClr val="FFFFFF"/>
-                </a:solidFill>
-              </a:rPr>
-              <a:t>API contracts</a:t>
-            </a:r>
-          </a:p>
-        </p:txBody>
-      </p:sp>
-      <p:sp>
-        <p:nvSpPr>
-          <p:cNvPr id="11" name="">
-            <a:extLst xmlns:a="http://schemas.openxmlformats.org/drawingml/2006/main">
-              <a:ext uri="{FF2B5EF4-FFF2-40B4-BE49-F238E27FC236}">
-                <a16:creationId xmlns:a16="http://schemas.microsoft.com/office/drawing/2014/main" id="{23EC8378-DDC8-488F-A430-FC20FE794654}"/>
-              </a:ext>
-            </a:extLst>
-          </p:cNvPr>
-          <p:cNvSpPr>
-            <a:spLocks xmlns:a="http://schemas.openxmlformats.org/drawingml/2006/main" noGrp="1"/>
-          </p:cNvSpPr>
-          <p:nvPr/>
-        </p:nvSpPr>
-        <p:spPr>
-          <a:xfrm xmlns:a="http://schemas.openxmlformats.org/drawingml/2006/main">
-            <a:off x="4867275" y="3048000"/>
-            <a:ext cx="342900" cy="476250"/>
-          </a:xfrm>
-          <a:prstGeom xmlns:a="http://schemas.openxmlformats.org/drawingml/2006/main" prst="rect">
-            <a:avLst/>
-          </a:prstGeom>
-          <a:noFill xmlns:a="http://schemas.openxmlformats.org/drawingml/2006/main"/>
-          <a:ln xmlns:a="http://schemas.openxmlformats.org/drawingml/2006/main" w="0">
-            <a:noFill/>
-            <a:prstDash val="solid"/>
-          </a:ln>
-        </p:spPr>
-        <p:txBody>
-          <a:bodyPr xmlns:a="http://schemas.openxmlformats.org/drawingml/2006/main" anchor="t"/>
-          <a:lstStyle xmlns:a="http://schemas.openxmlformats.org/drawingml/2006/main">
-            <a:defPPr>
-              <a:defRPr sz="2400" b="1" i="0">
-                <a:solidFill>
-                  <a:srgbClr val="FFCE73"/>
-                </a:solidFill>
-              </a:defRPr>
-            </a:defPPr>
-          </a:lstStyle>
-          <a:p xmlns:a="http://schemas.openxmlformats.org/drawingml/2006/main">
-            <a:pPr>
-              <a:defRPr sz="2400" b="1" i="0">
-                <a:solidFill>
-                  <a:srgbClr val="FFCE73"/>
-                </a:solidFill>
-              </a:defRPr>
-            </a:pPr>
-            <a:r>
-              <a:rPr sz="2400" b="1" i="0">
-                <a:solidFill>
-                  <a:srgbClr val="FFCE73"/>
-                </a:solidFill>
-              </a:rPr>
-              <a:t>›</a:t>
-            </a:r>
-          </a:p>
-        </p:txBody>
-      </p:sp>
-      <p:sp>
-        <p:nvSpPr>
-          <p:cNvPr id="12" name="">
-            <a:extLst xmlns:a="http://schemas.openxmlformats.org/drawingml/2006/main">
-              <a:ext uri="{FF2B5EF4-FFF2-40B4-BE49-F238E27FC236}">
-                <a16:creationId xmlns:a16="http://schemas.microsoft.com/office/drawing/2014/main" id="{211204AF-348A-4255-A3A3-9514C958CB02}"/>
-              </a:ext>
-            </a:extLst>
-          </p:cNvPr>
-          <p:cNvSpPr>
-            <a:spLocks xmlns:a="http://schemas.openxmlformats.org/drawingml/2006/main" noGrp="1"/>
-          </p:cNvSpPr>
-          <p:nvPr/>
-        </p:nvSpPr>
-        <p:spPr>
-          <a:xfrm xmlns:a="http://schemas.openxmlformats.org/drawingml/2006/main">
-            <a:off x="5219700" y="2266950"/>
-            <a:ext cx="1962150" cy="2190750"/>
-          </a:xfrm>
-          <a:prstGeom xmlns:a="http://schemas.openxmlformats.org/drawingml/2006/main" prst="roundRect">
-            <a:avLst>
-              <a:gd name="adj" fmla="val 10680"/>
-            </a:avLst>
-          </a:prstGeom>
-          <a:solidFill xmlns:a="http://schemas.openxmlformats.org/drawingml/2006/main">
-            <a:srgbClr val="174C3F"/>
-          </a:solidFill>
-          <a:ln xmlns:a="http://schemas.openxmlformats.org/drawingml/2006/main" w="9525">
-            <a:solidFill>
-              <a:srgbClr val="41655D"/>
-            </a:solidFill>
-            <a:prstDash val="solid"/>
-          </a:ln>
-        </p:spPr>
-      </p:sp>
-      <p:sp>
-        <p:nvSpPr>
-          <p:cNvPr id="13" name="">
-            <a:extLst xmlns:a="http://schemas.openxmlformats.org/drawingml/2006/main">
-              <a:ext uri="{FF2B5EF4-FFF2-40B4-BE49-F238E27FC236}">
-                <a16:creationId xmlns:a16="http://schemas.microsoft.com/office/drawing/2014/main" id="{451C15C7-41CD-4BB7-9D3C-F03F27B30626}"/>
-              </a:ext>
-            </a:extLst>
-          </p:cNvPr>
-          <p:cNvSpPr>
-            <a:spLocks xmlns:a="http://schemas.openxmlformats.org/drawingml/2006/main" noGrp="1"/>
-          </p:cNvSpPr>
-          <p:nvPr/>
-        </p:nvSpPr>
-        <p:spPr>
-          <a:xfrm xmlns:a="http://schemas.openxmlformats.org/drawingml/2006/main">
-            <a:off x="5391150" y="2590800"/>
-            <a:ext cx="1619250" cy="285750"/>
-          </a:xfrm>
-          <a:prstGeom xmlns:a="http://schemas.openxmlformats.org/drawingml/2006/main" prst="rect">
-            <a:avLst/>
-          </a:prstGeom>
-          <a:noFill xmlns:a="http://schemas.openxmlformats.org/drawingml/2006/main"/>
-          <a:ln xmlns:a="http://schemas.openxmlformats.org/drawingml/2006/main" w="0">
-            <a:noFill/>
-            <a:prstDash val="solid"/>
-          </a:ln>
-        </p:spPr>
-        <p:txBody>
-          <a:bodyPr xmlns:a="http://schemas.openxmlformats.org/drawingml/2006/main" anchor="t"/>
-          <a:lstStyle xmlns:a="http://schemas.openxmlformats.org/drawingml/2006/main">
-            <a:defPPr>
-              <a:defRPr sz="1050" b="1" i="0">
-                <a:solidFill>
-                  <a:srgbClr val="C9FF65"/>
-                </a:solidFill>
-              </a:defRPr>
-            </a:defPPr>
-          </a:lstStyle>
-          <a:p xmlns:a="http://schemas.openxmlformats.org/drawingml/2006/main">
-            <a:pPr>
-              <a:defRPr sz="1050" b="1" i="0">
-                <a:solidFill>
-                  <a:srgbClr val="C9FF65"/>
-                </a:solidFill>
-              </a:defRPr>
-            </a:pPr>
-            <a:r>
-              <a:rPr sz="1050" b="1" i="0">
-                <a:solidFill>
-                  <a:srgbClr val="C9FF65"/>
-                </a:solidFill>
-              </a:rPr>
-              <a:t>TIGER DATA</a:t>
-            </a:r>
-          </a:p>
-        </p:txBody>
-      </p:sp>
-      <p:sp>
-        <p:nvSpPr>
-          <p:cNvPr id="14" name="">
-            <a:extLst xmlns:a="http://schemas.openxmlformats.org/drawingml/2006/main">
-              <a:ext uri="{FF2B5EF4-FFF2-40B4-BE49-F238E27FC236}">
-                <a16:creationId xmlns:a16="http://schemas.microsoft.com/office/drawing/2014/main" id="{EC335706-D91D-4664-A61D-8647622DA003}"/>
-              </a:ext>
-            </a:extLst>
-          </p:cNvPr>
-          <p:cNvSpPr>
-            <a:spLocks xmlns:a="http://schemas.openxmlformats.org/drawingml/2006/main" noGrp="1"/>
-          </p:cNvSpPr>
-          <p:nvPr/>
-        </p:nvSpPr>
-        <p:spPr>
-          <a:xfrm xmlns:a="http://schemas.openxmlformats.org/drawingml/2006/main">
-            <a:off x="5410200" y="3162300"/>
-            <a:ext cx="1581150" cy="819150"/>
-          </a:xfrm>
-          <a:prstGeom xmlns:a="http://schemas.openxmlformats.org/drawingml/2006/main" prst="rect">
-            <a:avLst/>
-          </a:prstGeom>
-          <a:noFill xmlns:a="http://schemas.openxmlformats.org/drawingml/2006/main"/>
-          <a:ln xmlns:a="http://schemas.openxmlformats.org/drawingml/2006/main" w="0">
-            <a:noFill/>
-            <a:prstDash val="solid"/>
-          </a:ln>
-        </p:spPr>
-        <p:txBody>
-          <a:bodyPr xmlns:a="http://schemas.openxmlformats.org/drawingml/2006/main" anchor="t"/>
-          <a:lstStyle xmlns:a="http://schemas.openxmlformats.org/drawingml/2006/main">
-            <a:defPPr>
-              <a:defRPr sz="1725" b="1" i="0">
-                <a:solidFill>
-                  <a:srgbClr val="FFFFFF"/>
-                </a:solidFill>
-              </a:defRPr>
-            </a:defPPr>
-          </a:lstStyle>
-          <a:p xmlns:a="http://schemas.openxmlformats.org/drawingml/2006/main">
-            <a:pPr>
-              <a:defRPr sz="1725" b="1" i="0">
-                <a:solidFill>
-                  <a:srgbClr val="FFFFFF"/>
-                </a:solidFill>
-              </a:defRPr>
-            </a:pPr>
-            <a:r>
-              <a:rPr sz="1725" b="1" i="0">
-                <a:solidFill>
-                  <a:srgbClr val="FFFFFF"/>
-                </a:solidFill>
-              </a:rPr>
-              <a:t>Time-series</a:t>
-            </a:r>
-          </a:p>
-          <a:p xmlns:a="http://schemas.openxmlformats.org/drawingml/2006/main">
-            <a:pPr>
-              <a:defRPr sz="1725" b="1" i="0">
-                <a:solidFill>
-                  <a:srgbClr val="FFFFFF"/>
-                </a:solidFill>
-              </a:defRPr>
-            </a:pPr>
-            <a:r>
-              <a:rPr sz="1725" b="1" i="0">
-                <a:solidFill>
-                  <a:srgbClr val="FFFFFF"/>
-                </a:solidFill>
-              </a:rPr>
-              <a:t>history</a:t>
-            </a:r>
-          </a:p>
-        </p:txBody>
-      </p:sp>
-      <p:sp>
-        <p:nvSpPr>
-          <p:cNvPr id="15" name="">
-            <a:extLst xmlns:a="http://schemas.openxmlformats.org/drawingml/2006/main">
-              <a:ext uri="{FF2B5EF4-FFF2-40B4-BE49-F238E27FC236}">
-                <a16:creationId xmlns:a16="http://schemas.microsoft.com/office/drawing/2014/main" id="{65107C66-5D03-4E99-9EC7-2FF20CF7BF75}"/>
-              </a:ext>
-            </a:extLst>
-          </p:cNvPr>
-          <p:cNvSpPr>
-            <a:spLocks xmlns:a="http://schemas.openxmlformats.org/drawingml/2006/main" noGrp="1"/>
-          </p:cNvSpPr>
-          <p:nvPr/>
-        </p:nvSpPr>
-        <p:spPr>
-          <a:xfrm xmlns:a="http://schemas.openxmlformats.org/drawingml/2006/main">
-            <a:off x="7191375" y="3048000"/>
-            <a:ext cx="342900" cy="476250"/>
-          </a:xfrm>
-          <a:prstGeom xmlns:a="http://schemas.openxmlformats.org/drawingml/2006/main" prst="rect">
-            <a:avLst/>
-          </a:prstGeom>
-          <a:noFill xmlns:a="http://schemas.openxmlformats.org/drawingml/2006/main"/>
-          <a:ln xmlns:a="http://schemas.openxmlformats.org/drawingml/2006/main" w="0">
-            <a:noFill/>
-            <a:prstDash val="solid"/>
-          </a:ln>
-        </p:spPr>
-        <p:txBody>
-          <a:bodyPr xmlns:a="http://schemas.openxmlformats.org/drawingml/2006/main" anchor="t"/>
-          <a:lstStyle xmlns:a="http://schemas.openxmlformats.org/drawingml/2006/main">
-            <a:defPPr>
-              <a:defRPr sz="2400" b="1" i="0">
-                <a:solidFill>
-                  <a:srgbClr val="FFCE73"/>
-                </a:solidFill>
-              </a:defRPr>
-            </a:defPPr>
-          </a:lstStyle>
-          <a:p xmlns:a="http://schemas.openxmlformats.org/drawingml/2006/main">
-            <a:pPr>
-              <a:defRPr sz="2400" b="1" i="0">
-                <a:solidFill>
-                  <a:srgbClr val="FFCE73"/>
-                </a:solidFill>
-              </a:defRPr>
-            </a:pPr>
-            <a:r>
-              <a:rPr sz="2400" b="1" i="0">
-                <a:solidFill>
-                  <a:srgbClr val="FFCE73"/>
-                </a:solidFill>
-              </a:rPr>
-              <a:t>›</a:t>
-            </a:r>
-          </a:p>
-        </p:txBody>
-      </p:sp>
-      <p:sp>
-        <p:nvSpPr>
-          <p:cNvPr id="16" name="">
-            <a:extLst xmlns:a="http://schemas.openxmlformats.org/drawingml/2006/main">
-              <a:ext uri="{FF2B5EF4-FFF2-40B4-BE49-F238E27FC236}">
-                <a16:creationId xmlns:a16="http://schemas.microsoft.com/office/drawing/2014/main" id="{9D8D7EDF-6136-46AB-94CB-44221A73541A}"/>
-              </a:ext>
-            </a:extLst>
-          </p:cNvPr>
-          <p:cNvSpPr>
-            <a:spLocks xmlns:a="http://schemas.openxmlformats.org/drawingml/2006/main" noGrp="1"/>
-          </p:cNvSpPr>
-          <p:nvPr/>
-        </p:nvSpPr>
-        <p:spPr>
-          <a:xfrm xmlns:a="http://schemas.openxmlformats.org/drawingml/2006/main">
-            <a:off x="7543800" y="2266950"/>
-            <a:ext cx="1962150" cy="2190750"/>
-          </a:xfrm>
-          <a:prstGeom xmlns:a="http://schemas.openxmlformats.org/drawingml/2006/main" prst="roundRect">
-            <a:avLst>
-              <a:gd name="adj" fmla="val 10680"/>
-            </a:avLst>
-          </a:prstGeom>
-          <a:solidFill xmlns:a="http://schemas.openxmlformats.org/drawingml/2006/main">
-            <a:srgbClr val="174C3F"/>
-          </a:solidFill>
-          <a:ln xmlns:a="http://schemas.openxmlformats.org/drawingml/2006/main" w="9525">
-            <a:solidFill>
-              <a:srgbClr val="41655D"/>
-            </a:solidFill>
-            <a:prstDash val="solid"/>
-          </a:ln>
-        </p:spPr>
-      </p:sp>
-      <p:sp>
-        <p:nvSpPr>
-          <p:cNvPr id="17" name="">
-            <a:extLst xmlns:a="http://schemas.openxmlformats.org/drawingml/2006/main">
-              <a:ext uri="{FF2B5EF4-FFF2-40B4-BE49-F238E27FC236}">
-                <a16:creationId xmlns:a16="http://schemas.microsoft.com/office/drawing/2014/main" id="{B396961C-966A-40A7-9726-A48F8D73BFE5}"/>
-              </a:ext>
-            </a:extLst>
-          </p:cNvPr>
-          <p:cNvSpPr>
-            <a:spLocks xmlns:a="http://schemas.openxmlformats.org/drawingml/2006/main" noGrp="1"/>
-          </p:cNvSpPr>
-          <p:nvPr/>
-        </p:nvSpPr>
-        <p:spPr>
-          <a:xfrm xmlns:a="http://schemas.openxmlformats.org/drawingml/2006/main">
-            <a:off x="7715250" y="2590800"/>
-            <a:ext cx="1619250" cy="285750"/>
-          </a:xfrm>
-          <a:prstGeom xmlns:a="http://schemas.openxmlformats.org/drawingml/2006/main" prst="rect">
-            <a:avLst/>
-          </a:prstGeom>
-          <a:noFill xmlns:a="http://schemas.openxmlformats.org/drawingml/2006/main"/>
-          <a:ln xmlns:a="http://schemas.openxmlformats.org/drawingml/2006/main" w="0">
-            <a:noFill/>
-            <a:prstDash val="solid"/>
-          </a:ln>
-        </p:spPr>
-        <p:txBody>
-          <a:bodyPr xmlns:a="http://schemas.openxmlformats.org/drawingml/2006/main" anchor="t"/>
-          <a:lstStyle xmlns:a="http://schemas.openxmlformats.org/drawingml/2006/main">
-            <a:defPPr>
-              <a:defRPr sz="1050" b="1" i="0">
-                <a:solidFill>
-                  <a:srgbClr val="C9FF65"/>
-                </a:solidFill>
-              </a:defRPr>
-            </a:defPPr>
-          </a:lstStyle>
-          <a:p xmlns:a="http://schemas.openxmlformats.org/drawingml/2006/main">
-            <a:pPr>
-              <a:defRPr sz="1050" b="1" i="0">
-                <a:solidFill>
-                  <a:srgbClr val="C9FF65"/>
-                </a:solidFill>
-              </a:defRPr>
-            </a:pPr>
-            <a:r>
-              <a:rPr sz="1050" b="1" i="0">
-                <a:solidFill>
-                  <a:srgbClr val="C9FF65"/>
-                </a:solidFill>
-              </a:rPr>
-              <a:t>GEMINI</a:t>
-            </a:r>
-          </a:p>
-        </p:txBody>
-      </p:sp>
-      <p:sp>
-        <p:nvSpPr>
-          <p:cNvPr id="18" name="">
-            <a:extLst xmlns:a="http://schemas.openxmlformats.org/drawingml/2006/main">
-              <a:ext uri="{FF2B5EF4-FFF2-40B4-BE49-F238E27FC236}">
-                <a16:creationId xmlns:a16="http://schemas.microsoft.com/office/drawing/2014/main" id="{A1EFBFC9-68E0-45C2-B56D-55B671DDEBA4}"/>
-              </a:ext>
-            </a:extLst>
-          </p:cNvPr>
-          <p:cNvSpPr>
-            <a:spLocks xmlns:a="http://schemas.openxmlformats.org/drawingml/2006/main" noGrp="1"/>
-          </p:cNvSpPr>
-          <p:nvPr/>
-        </p:nvSpPr>
-        <p:spPr>
-          <a:xfrm xmlns:a="http://schemas.openxmlformats.org/drawingml/2006/main">
-            <a:off x="7734300" y="3162300"/>
-            <a:ext cx="1581150" cy="819150"/>
-          </a:xfrm>
-          <a:prstGeom xmlns:a="http://schemas.openxmlformats.org/drawingml/2006/main" prst="rect">
-            <a:avLst/>
-          </a:prstGeom>
-          <a:noFill xmlns:a="http://schemas.openxmlformats.org/drawingml/2006/main"/>
-          <a:ln xmlns:a="http://schemas.openxmlformats.org/drawingml/2006/main" w="0">
-            <a:noFill/>
-            <a:prstDash val="solid"/>
-          </a:ln>
-        </p:spPr>
-        <p:txBody>
-          <a:bodyPr xmlns:a="http://schemas.openxmlformats.org/drawingml/2006/main" anchor="t"/>
-          <a:lstStyle xmlns:a="http://schemas.openxmlformats.org/drawingml/2006/main">
-            <a:defPPr>
-              <a:defRPr sz="1725" b="1" i="0">
-                <a:solidFill>
-                  <a:srgbClr val="FFFFFF"/>
-                </a:solidFill>
-              </a:defRPr>
-            </a:defPPr>
-          </a:lstStyle>
-          <a:p xmlns:a="http://schemas.openxmlformats.org/drawingml/2006/main">
-            <a:pPr>
-              <a:defRPr sz="1725" b="1" i="0">
-                <a:solidFill>
-                  <a:srgbClr val="FFFFFF"/>
-                </a:solidFill>
-              </a:defRPr>
-            </a:pPr>
-            <a:r>
-              <a:rPr sz="1725" b="1" i="0">
-                <a:solidFill>
-                  <a:srgbClr val="FFFFFF"/>
-                </a:solidFill>
-              </a:rPr>
-              <a:t>Approved facts</a:t>
-            </a:r>
-          </a:p>
-          <a:p xmlns:a="http://schemas.openxmlformats.org/drawingml/2006/main">
-            <a:pPr>
-              <a:defRPr sz="1725" b="1" i="0">
-                <a:solidFill>
-                  <a:srgbClr val="FFFFFF"/>
-                </a:solidFill>
-              </a:defRPr>
-            </a:pPr>
-            <a:r>
-              <a:rPr sz="1725" b="1" i="0">
-                <a:solidFill>
-                  <a:srgbClr val="FFFFFF"/>
-                </a:solidFill>
-              </a:rPr>
-              <a:t>explained clearly</a:t>
-            </a:r>
-          </a:p>
-        </p:txBody>
-      </p:sp>
-      <p:sp>
-        <p:nvSpPr>
-          <p:cNvPr id="19" name="">
-            <a:extLst xmlns:a="http://schemas.openxmlformats.org/drawingml/2006/main">
-              <a:ext uri="{FF2B5EF4-FFF2-40B4-BE49-F238E27FC236}">
-                <a16:creationId xmlns:a16="http://schemas.microsoft.com/office/drawing/2014/main" id="{3B8A43DE-C351-433A-A444-F50276E64D84}"/>
-              </a:ext>
-            </a:extLst>
-          </p:cNvPr>
-          <p:cNvSpPr>
-            <a:spLocks xmlns:a="http://schemas.openxmlformats.org/drawingml/2006/main" noGrp="1"/>
-          </p:cNvSpPr>
-          <p:nvPr/>
-        </p:nvSpPr>
-        <p:spPr>
-          <a:xfrm xmlns:a="http://schemas.openxmlformats.org/drawingml/2006/main">
-            <a:off x="9515475" y="3048000"/>
-            <a:ext cx="342900" cy="476250"/>
-          </a:xfrm>
-          <a:prstGeom xmlns:a="http://schemas.openxmlformats.org/drawingml/2006/main" prst="rect">
-            <a:avLst/>
-          </a:prstGeom>
-          <a:noFill xmlns:a="http://schemas.openxmlformats.org/drawingml/2006/main"/>
-          <a:ln xmlns:a="http://schemas.openxmlformats.org/drawingml/2006/main" w="0">
-            <a:noFill/>
-            <a:prstDash val="solid"/>
-          </a:ln>
-        </p:spPr>
-        <p:txBody>
-          <a:bodyPr xmlns:a="http://schemas.openxmlformats.org/drawingml/2006/main" anchor="t"/>
-          <a:lstStyle xmlns:a="http://schemas.openxmlformats.org/drawingml/2006/main">
-            <a:defPPr>
-              <a:defRPr sz="2400" b="1" i="0">
-                <a:solidFill>
-                  <a:srgbClr val="FFCE73"/>
-                </a:solidFill>
-              </a:defRPr>
-            </a:defPPr>
-          </a:lstStyle>
-          <a:p xmlns:a="http://schemas.openxmlformats.org/drawingml/2006/main">
-            <a:pPr>
-              <a:defRPr sz="2400" b="1" i="0">
-                <a:solidFill>
-                  <a:srgbClr val="FFCE73"/>
-                </a:solidFill>
-              </a:defRPr>
-            </a:pPr>
-            <a:r>
-              <a:rPr sz="2400" b="1" i="0">
-                <a:solidFill>
-                  <a:srgbClr val="FFCE73"/>
-                </a:solidFill>
-              </a:rPr>
-              <a:t>›</a:t>
-            </a:r>
-          </a:p>
-        </p:txBody>
-      </p:sp>
-      <p:sp>
-        <p:nvSpPr>
-          <p:cNvPr id="20" name="">
-            <a:extLst xmlns:a="http://schemas.openxmlformats.org/drawingml/2006/main">
-              <a:ext uri="{FF2B5EF4-FFF2-40B4-BE49-F238E27FC236}">
-                <a16:creationId xmlns:a16="http://schemas.microsoft.com/office/drawing/2014/main" id="{74A1A78C-E7C2-405B-8509-6946AE556978}"/>
-              </a:ext>
-            </a:extLst>
-          </p:cNvPr>
-          <p:cNvSpPr>
-            <a:spLocks xmlns:a="http://schemas.openxmlformats.org/drawingml/2006/main" noGrp="1"/>
-          </p:cNvSpPr>
-          <p:nvPr/>
-        </p:nvSpPr>
-        <p:spPr>
-          <a:xfrm xmlns:a="http://schemas.openxmlformats.org/drawingml/2006/main">
-            <a:off x="9867900" y="2266950"/>
-            <a:ext cx="1962150" cy="2190750"/>
-          </a:xfrm>
-          <a:prstGeom xmlns:a="http://schemas.openxmlformats.org/drawingml/2006/main" prst="roundRect">
-            <a:avLst>
-              <a:gd name="adj" fmla="val 10680"/>
-            </a:avLst>
-          </a:prstGeom>
-          <a:solidFill xmlns:a="http://schemas.openxmlformats.org/drawingml/2006/main">
-            <a:srgbClr val="C9FF65"/>
-          </a:solidFill>
-          <a:ln xmlns:a="http://schemas.openxmlformats.org/drawingml/2006/main" w="0">
-            <a:noFill/>
-            <a:prstDash val="solid"/>
-          </a:ln>
-        </p:spPr>
-      </p:sp>
-      <p:sp>
-        <p:nvSpPr>
-          <p:cNvPr id="21" name="">
-            <a:extLst xmlns:a="http://schemas.openxmlformats.org/drawingml/2006/main">
-              <a:ext uri="{FF2B5EF4-FFF2-40B4-BE49-F238E27FC236}">
-                <a16:creationId xmlns:a16="http://schemas.microsoft.com/office/drawing/2014/main" id="{4B0CFF12-BB25-4BE9-9851-176C5B291FC5}"/>
-              </a:ext>
-            </a:extLst>
-          </p:cNvPr>
-          <p:cNvSpPr>
-            <a:spLocks xmlns:a="http://schemas.openxmlformats.org/drawingml/2006/main" noGrp="1"/>
-          </p:cNvSpPr>
-          <p:nvPr/>
-        </p:nvSpPr>
-        <p:spPr>
-          <a:xfrm xmlns:a="http://schemas.openxmlformats.org/drawingml/2006/main">
-            <a:off x="10039350" y="2590800"/>
-            <a:ext cx="1619250" cy="285750"/>
-          </a:xfrm>
-          <a:prstGeom xmlns:a="http://schemas.openxmlformats.org/drawingml/2006/main" prst="rect">
-            <a:avLst/>
-          </a:prstGeom>
-          <a:noFill xmlns:a="http://schemas.openxmlformats.org/drawingml/2006/main"/>
-          <a:ln xmlns:a="http://schemas.openxmlformats.org/drawingml/2006/main" w="0">
-            <a:noFill/>
-            <a:prstDash val="solid"/>
-          </a:ln>
-        </p:spPr>
-        <p:txBody>
-          <a:bodyPr xmlns:a="http://schemas.openxmlformats.org/drawingml/2006/main" anchor="t"/>
-          <a:lstStyle xmlns:a="http://schemas.openxmlformats.org/drawingml/2006/main">
-            <a:defPPr>
-              <a:defRPr sz="1050" b="1" i="0">
-                <a:solidFill>
-                  <a:srgbClr val="0B302A"/>
-                </a:solidFill>
-              </a:defRPr>
-            </a:defPPr>
-          </a:lstStyle>
-          <a:p xmlns:a="http://schemas.openxmlformats.org/drawingml/2006/main">
-            <a:pPr>
-              <a:defRPr sz="1050" b="1" i="0">
-                <a:solidFill>
-                  <a:srgbClr val="0B302A"/>
-                </a:solidFill>
-              </a:defRPr>
-            </a:pPr>
-            <a:r>
-              <a:rPr sz="1050" b="1" i="0">
-                <a:solidFill>
-                  <a:srgbClr val="0B302A"/>
-                </a:solidFill>
-              </a:rPr>
-              <a:t>HUMAN</a:t>
-            </a:r>
-          </a:p>
-        </p:txBody>
-      </p:sp>
-      <p:sp>
-        <p:nvSpPr>
-          <p:cNvPr id="22" name="">
-            <a:extLst xmlns:a="http://schemas.openxmlformats.org/drawingml/2006/main">
-              <a:ext uri="{FF2B5EF4-FFF2-40B4-BE49-F238E27FC236}">
-                <a16:creationId xmlns:a16="http://schemas.microsoft.com/office/drawing/2014/main" id="{E0A38D72-5E51-40D1-AC06-EAF1891B38B7}"/>
-              </a:ext>
-            </a:extLst>
-          </p:cNvPr>
-          <p:cNvSpPr>
-            <a:spLocks xmlns:a="http://schemas.openxmlformats.org/drawingml/2006/main" noGrp="1"/>
-          </p:cNvSpPr>
-          <p:nvPr/>
-        </p:nvSpPr>
-        <p:spPr>
-          <a:xfrm xmlns:a="http://schemas.openxmlformats.org/drawingml/2006/main">
-            <a:off x="10058400" y="3162300"/>
-            <a:ext cx="1581150" cy="819150"/>
-          </a:xfrm>
-          <a:prstGeom xmlns:a="http://schemas.openxmlformats.org/drawingml/2006/main" prst="rect">
-            <a:avLst/>
-          </a:prstGeom>
-          <a:noFill xmlns:a="http://schemas.openxmlformats.org/drawingml/2006/main"/>
-          <a:ln xmlns:a="http://schemas.openxmlformats.org/drawingml/2006/main" w="0">
-            <a:noFill/>
-            <a:prstDash val="solid"/>
-          </a:ln>
-        </p:spPr>
-        <p:txBody>
-          <a:bodyPr xmlns:a="http://schemas.openxmlformats.org/drawingml/2006/main" anchor="t"/>
-          <a:lstStyle xmlns:a="http://schemas.openxmlformats.org/drawingml/2006/main">
-            <a:defPPr>
-              <a:defRPr sz="1725" b="1" i="0">
-                <a:solidFill>
-                  <a:srgbClr val="0B302A"/>
-                </a:solidFill>
-              </a:defRPr>
-            </a:defPPr>
-          </a:lstStyle>
-          <a:p xmlns:a="http://schemas.openxmlformats.org/drawingml/2006/main">
-            <a:pPr>
-              <a:defRPr sz="1725" b="1" i="0">
-                <a:solidFill>
-                  <a:srgbClr val="0B302A"/>
-                </a:solidFill>
-              </a:defRPr>
-            </a:pPr>
-            <a:r>
-              <a:rPr sz="1725" b="1" i="0">
-                <a:solidFill>
-                  <a:srgbClr val="0B302A"/>
-                </a:solidFill>
-              </a:rPr>
-              <a:t>Worker choice</a:t>
-            </a:r>
-          </a:p>
-          <a:p xmlns:a="http://schemas.openxmlformats.org/drawingml/2006/main">
-            <a:pPr>
-              <a:defRPr sz="1725" b="1" i="0">
-                <a:solidFill>
-                  <a:srgbClr val="0B302A"/>
-                </a:solidFill>
-              </a:defRPr>
-            </a:pPr>
-            <a:r>
-              <a:rPr sz="1725" b="1" i="0">
-                <a:solidFill>
-                  <a:srgbClr val="0B302A"/>
-                </a:solidFill>
-              </a:rPr>
-              <a:t>human response</a:t>
-            </a:r>
-          </a:p>
-        </p:txBody>
-      </p:sp>
-      <p:sp>
-        <p:nvSpPr>
-          <p:cNvPr id="23" name="">
-            <a:extLst xmlns:a="http://schemas.openxmlformats.org/drawingml/2006/main">
-              <a:ext uri="{FF2B5EF4-FFF2-40B4-BE49-F238E27FC236}">
-                <a16:creationId xmlns:a16="http://schemas.microsoft.com/office/drawing/2014/main" id="{DC1CD5CF-544B-4FCB-A073-B6A505FC5142}"/>
-              </a:ext>
-            </a:extLst>
-          </p:cNvPr>
-          <p:cNvSpPr>
-            <a:spLocks xmlns:a="http://schemas.openxmlformats.org/drawingml/2006/main" noGrp="1"/>
-          </p:cNvSpPr>
-          <p:nvPr/>
-        </p:nvSpPr>
-        <p:spPr>
-          <a:xfrm xmlns:a="http://schemas.openxmlformats.org/drawingml/2006/main">
-            <a:off x="609600" y="5257800"/>
-            <a:ext cx="10001250" cy="419100"/>
-          </a:xfrm>
-          <a:prstGeom xmlns:a="http://schemas.openxmlformats.org/drawingml/2006/main" prst="rect">
-            <a:avLst/>
-          </a:prstGeom>
-          <a:noFill xmlns:a="http://schemas.openxmlformats.org/drawingml/2006/main"/>
-          <a:ln xmlns:a="http://schemas.openxmlformats.org/drawingml/2006/main" w="0">
-            <a:noFill/>
-            <a:prstDash val="solid"/>
-          </a:ln>
-        </p:spPr>
-        <p:txBody>
-          <a:bodyPr xmlns:a="http://schemas.openxmlformats.org/drawingml/2006/main" anchor="t"/>
-          <a:lstStyle xmlns:a="http://schemas.openxmlformats.org/drawingml/2006/main">
-            <a:defPPr>
-              <a:defRPr sz="1500" b="0" i="0">
-                <a:solidFill>
-                  <a:srgbClr val="DDE9E4"/>
-                </a:solidFill>
-              </a:defRPr>
-            </a:defPPr>
-          </a:lstStyle>
-          <a:p xmlns:a="http://schemas.openxmlformats.org/drawingml/2006/main">
-            <a:pPr>
-              <a:defRPr sz="1500" b="0" i="0">
-                <a:solidFill>
-                  <a:srgbClr val="DDE9E4"/>
-                </a:solidFill>
-              </a:defRPr>
-            </a:pPr>
-            <a:r>
-              <a:rPr sz="1500" b="0" i="0">
-                <a:solidFill>
-                  <a:srgbClr val="DDE9E4"/>
-                </a:solidFill>
-              </a:rPr>
-              <a:t>Supabase provides role-scoped authentication. Synthetic and Presage sessions stay separated.</a:t>
-            </a:r>
-          </a:p>
-        </p:txBody>
-      </p:sp>
-      <p:sp>
-        <p:nvSpPr>
-          <p:cNvPr id="24" name="">
-            <a:extLst xmlns:a="http://schemas.openxmlformats.org/drawingml/2006/main">
-              <a:ext uri="{FF2B5EF4-FFF2-40B4-BE49-F238E27FC236}">
-                <a16:creationId xmlns:a16="http://schemas.microsoft.com/office/drawing/2014/main" id="{5533A360-773E-4D53-AE31-37EFF49B8712}"/>
-              </a:ext>
-            </a:extLst>
-          </p:cNvPr>
-          <p:cNvSpPr>
-            <a:spLocks xmlns:a="http://schemas.openxmlformats.org/drawingml/2006/main" noGrp="1"/>
-          </p:cNvSpPr>
-          <p:nvPr/>
-        </p:nvSpPr>
-        <p:spPr>
-          <a:xfrm xmlns:a="http://schemas.openxmlformats.org/drawingml/2006/main">
-            <a:off x="609600" y="5981700"/>
-            <a:ext cx="7239000" cy="323850"/>
-          </a:xfrm>
-          <a:prstGeom xmlns:a="http://schemas.openxmlformats.org/drawingml/2006/main" prst="rect">
-            <a:avLst/>
-          </a:prstGeom>
-          <a:noFill xmlns:a="http://schemas.openxmlformats.org/drawingml/2006/main"/>
-          <a:ln xmlns:a="http://schemas.openxmlformats.org/drawingml/2006/main" w="0">
-            <a:noFill/>
-            <a:prstDash val="solid"/>
-          </a:ln>
-        </p:spPr>
-        <p:txBody>
-          <a:bodyPr xmlns:a="http://schemas.openxmlformats.org/drawingml/2006/main" anchor="t"/>
-          <a:lstStyle xmlns:a="http://schemas.openxmlformats.org/drawingml/2006/main">
-            <a:defPPr>
-              <a:defRPr sz="1500" b="1" i="0">
-                <a:solidFill>
-                  <a:srgbClr val="C9FF65"/>
-                </a:solidFill>
-              </a:defRPr>
-            </a:defPPr>
-          </a:lstStyle>
-          <a:p xmlns:a="http://schemas.openxmlformats.org/drawingml/2006/main">
-            <a:pPr>
-              <a:defRPr sz="1500" b="1" i="0">
-                <a:solidFill>
-                  <a:srgbClr val="C9FF65"/>
-                </a:solidFill>
-              </a:defRPr>
-            </a:pPr>
-            <a:r>
-              <a:rPr sz="1500" b="1" i="0">
-                <a:solidFill>
-                  <a:srgbClr val="C9FF65"/>
-                </a:solidFill>
-              </a:rPr>
-              <a:t>Models provide context. People make the decision.</a:t>
+              <a:t>A heuristic raises the event. A person closes it.</a:t>
             </a:r>
           </a:p>
         </p:txBody>
@@ -8754,7 +5694,7 @@
     </p:spTree>
     <p:extLst>
       <p:ext uri="{BB962C8B-B14F-4D97-AF65-F5344CB8AC3E}">
-        <p14:creationId xmlns:p14="http://schemas.microsoft.com/office/powerpoint/2010/main" val="24211247"/>
+        <p14:creationId xmlns:p14="http://schemas.microsoft.com/office/powerpoint/2010/main" val="1630261575"/>
       </p:ext>
     </p:extLst>
   </p:cSld>
@@ -8767,7 +5707,7 @@
     <p:bg>
       <p:bgPr>
         <a:solidFill xmlns:a="http://schemas.openxmlformats.org/drawingml/2006/main">
-          <a:srgbClr val="F4F7F2"/>
+          <a:srgbClr val="082B26"/>
         </a:solidFill>
       </p:bgPr>
     </p:bg>
@@ -8782,10 +5722,10 @@
       </p:grpSpPr>
       <p:sp>
         <p:nvSpPr>
-          <p:cNvPr id="20" name="">
-            <a:extLst xmlns:a="http://schemas.openxmlformats.org/drawingml/2006/main">
-              <a:ext uri="{FF2B5EF4-FFF2-40B4-BE49-F238E27FC236}">
-                <a16:creationId xmlns:a16="http://schemas.microsoft.com/office/drawing/2014/main" id="{741F8496-59CB-493F-82CC-5AF35E2CC9E1}"/>
+          <p:cNvPr id="25" name="">
+            <a:extLst xmlns:a="http://schemas.openxmlformats.org/drawingml/2006/main">
+              <a:ext uri="{FF2B5EF4-FFF2-40B4-BE49-F238E27FC236}">
+                <a16:creationId xmlns:a16="http://schemas.microsoft.com/office/drawing/2014/main" id="{B9C31B0D-0886-4813-A923-6A9502E00F5F}"/>
               </a:ext>
             </a:extLst>
           </p:cNvPr>
@@ -8796,8 +5736,8 @@
         </p:nvSpPr>
         <p:spPr>
           <a:xfrm xmlns:a="http://schemas.openxmlformats.org/drawingml/2006/main">
-            <a:off x="11334750" y="266700"/>
-            <a:ext cx="400050" cy="228600"/>
+            <a:off x="11410950" y="285750"/>
+            <a:ext cx="342900" cy="209550"/>
           </a:xfrm>
           <a:prstGeom xmlns:a="http://schemas.openxmlformats.org/drawingml/2006/main" prst="rect">
             <a:avLst/>
@@ -8812,25 +5752,25 @@
           <a:bodyPr xmlns:a="http://schemas.openxmlformats.org/drawingml/2006/main" anchor="t"/>
           <a:lstStyle xmlns:a="http://schemas.openxmlformats.org/drawingml/2006/main">
             <a:defPPr>
-              <a:defRPr sz="825" b="1" i="0">
-                <a:solidFill>
-                  <a:srgbClr val="65786F"/>
+              <a:defRPr sz="825" b="1">
+                <a:solidFill>
+                  <a:srgbClr val="DCE9E3"/>
                 </a:solidFill>
               </a:defRPr>
             </a:defPPr>
           </a:lstStyle>
           <a:p xmlns:a="http://schemas.openxmlformats.org/drawingml/2006/main">
             <a:pPr>
-              <a:defRPr sz="825" b="1" i="0">
-                <a:solidFill>
-                  <a:srgbClr val="65786F"/>
+              <a:defRPr sz="825" b="1">
+                <a:solidFill>
+                  <a:srgbClr val="DCE9E3"/>
                 </a:solidFill>
               </a:defRPr>
             </a:pPr>
             <a:r>
-              <a:rPr sz="825" b="1" i="0">
-                <a:solidFill>
-                  <a:srgbClr val="65786F"/>
+              <a:rPr sz="825" b="1">
+                <a:solidFill>
+                  <a:srgbClr val="DCE9E3"/>
                 </a:solidFill>
               </a:rPr>
               <a:t>07</a:t>
@@ -8843,7 +5783,7 @@
           <p:cNvPr id="2" name="">
             <a:extLst xmlns:a="http://schemas.openxmlformats.org/drawingml/2006/main">
               <a:ext uri="{FF2B5EF4-FFF2-40B4-BE49-F238E27FC236}">
-                <a16:creationId xmlns:a16="http://schemas.microsoft.com/office/drawing/2014/main" id="{25D35595-A86C-4879-A919-E82DC1E16562}"/>
+                <a16:creationId xmlns:a16="http://schemas.microsoft.com/office/drawing/2014/main" id="{5BDF021A-9599-49F6-9542-3D58188BB5E5}"/>
               </a:ext>
             </a:extLst>
           </p:cNvPr>
@@ -8855,7 +5795,7 @@
         <p:spPr>
           <a:xfrm xmlns:a="http://schemas.openxmlformats.org/drawingml/2006/main">
             <a:off x="609600" y="457200"/>
-            <a:ext cx="7239000" cy="552450"/>
+            <a:ext cx="6667500" cy="609600"/>
           </a:xfrm>
           <a:prstGeom xmlns:a="http://schemas.openxmlformats.org/drawingml/2006/main" prst="rect">
             <a:avLst/>
@@ -8870,28 +5810,28 @@
           <a:bodyPr xmlns:a="http://schemas.openxmlformats.org/drawingml/2006/main" anchor="t"/>
           <a:lstStyle xmlns:a="http://schemas.openxmlformats.org/drawingml/2006/main">
             <a:defPPr>
-              <a:defRPr sz="2550" b="1" i="0">
-                <a:solidFill>
-                  <a:srgbClr val="0B302A"/>
+              <a:defRPr sz="3150" b="1">
+                <a:solidFill>
+                  <a:srgbClr val="FFFFFF"/>
                 </a:solidFill>
               </a:defRPr>
             </a:defPPr>
           </a:lstStyle>
           <a:p xmlns:a="http://schemas.openxmlformats.org/drawingml/2006/main">
             <a:pPr>
-              <a:defRPr sz="2550" b="1" i="0">
-                <a:solidFill>
-                  <a:srgbClr val="0B302A"/>
+              <a:defRPr sz="3150" b="1">
+                <a:solidFill>
+                  <a:srgbClr val="FFFFFF"/>
                 </a:solidFill>
               </a:defRPr>
             </a:pPr>
             <a:r>
-              <a:rPr sz="2550" b="1" i="0">
-                <a:solidFill>
-                  <a:srgbClr val="0B302A"/>
+              <a:rPr sz="3150" b="1">
+                <a:solidFill>
+                  <a:srgbClr val="FFFFFF"/>
                 </a:solidFill>
               </a:rPr>
-              <a:t>Trust is part of the product</a:t>
+              <a:t>The safety loop</a:t>
             </a:r>
           </a:p>
         </p:txBody>
@@ -8901,7 +5841,7 @@
           <p:cNvPr id="3" name="">
             <a:extLst xmlns:a="http://schemas.openxmlformats.org/drawingml/2006/main">
               <a:ext uri="{FF2B5EF4-FFF2-40B4-BE49-F238E27FC236}">
-                <a16:creationId xmlns:a16="http://schemas.microsoft.com/office/drawing/2014/main" id="{7CDBBEB5-36BA-4D43-AAEE-E442A632D8AE}"/>
+                <a16:creationId xmlns:a16="http://schemas.microsoft.com/office/drawing/2014/main" id="{7C75B821-8E84-4F97-8B03-AE67A7D3F079}"/>
               </a:ext>
             </a:extLst>
           </p:cNvPr>
@@ -8912,8 +5852,8 @@
         </p:nvSpPr>
         <p:spPr>
           <a:xfrm xmlns:a="http://schemas.openxmlformats.org/drawingml/2006/main">
-            <a:off x="628650" y="1047750"/>
-            <a:ext cx="8763000" cy="342900"/>
+            <a:off x="628650" y="1066800"/>
+            <a:ext cx="6667500" cy="381000"/>
           </a:xfrm>
           <a:prstGeom xmlns:a="http://schemas.openxmlformats.org/drawingml/2006/main" prst="rect">
             <a:avLst/>
@@ -8928,28 +5868,28 @@
           <a:bodyPr xmlns:a="http://schemas.openxmlformats.org/drawingml/2006/main" anchor="t"/>
           <a:lstStyle xmlns:a="http://schemas.openxmlformats.org/drawingml/2006/main">
             <a:defPPr>
-              <a:defRPr sz="1350" b="0" i="0">
-                <a:solidFill>
-                  <a:srgbClr val="65786F"/>
+              <a:defRPr sz="1650" b="0">
+                <a:solidFill>
+                  <a:srgbClr val="DCE9E3"/>
                 </a:solidFill>
               </a:defRPr>
             </a:defPPr>
           </a:lstStyle>
           <a:p xmlns:a="http://schemas.openxmlformats.org/drawingml/2006/main">
             <a:pPr>
-              <a:defRPr sz="1350" b="0" i="0">
-                <a:solidFill>
-                  <a:srgbClr val="65786F"/>
+              <a:defRPr sz="1650" b="0">
+                <a:solidFill>
+                  <a:srgbClr val="DCE9E3"/>
                 </a:solidFill>
               </a:defRPr>
             </a:pPr>
             <a:r>
-              <a:rPr sz="1350" b="0" i="0">
-                <a:solidFill>
-                  <a:srgbClr val="65786F"/>
+              <a:rPr sz="1650" b="0">
+                <a:solidFill>
+                  <a:srgbClr val="DCE9E3"/>
                 </a:solidFill>
               </a:rPr>
-              <a:t>The product earns trust through specific controls rather than broad privacy claims.</a:t>
+              <a:t>Each integration has one job.</a:t>
             </a:r>
           </a:p>
         </p:txBody>
@@ -8959,7 +5899,7 @@
           <p:cNvPr id="4" name="">
             <a:extLst xmlns:a="http://schemas.openxmlformats.org/drawingml/2006/main">
               <a:ext uri="{FF2B5EF4-FFF2-40B4-BE49-F238E27FC236}">
-                <a16:creationId xmlns:a16="http://schemas.microsoft.com/office/drawing/2014/main" id="{429BD757-68A8-4B9A-A153-B6D4691C9586}"/>
+                <a16:creationId xmlns:a16="http://schemas.microsoft.com/office/drawing/2014/main" id="{ED59BE03-DBBF-458B-A446-2FF7A7C9C905}"/>
               </a:ext>
             </a:extLst>
           </p:cNvPr>
@@ -8970,8 +5910,41 @@
         </p:nvSpPr>
         <p:spPr>
           <a:xfrm xmlns:a="http://schemas.openxmlformats.org/drawingml/2006/main">
-            <a:off x="685800" y="1809750"/>
-            <a:ext cx="419100" cy="266700"/>
+            <a:off x="704850" y="2152650"/>
+            <a:ext cx="1790700" cy="2286000"/>
+          </a:xfrm>
+          <a:prstGeom xmlns:a="http://schemas.openxmlformats.org/drawingml/2006/main" prst="roundRect">
+            <a:avLst>
+              <a:gd name="adj" fmla="val 13830"/>
+            </a:avLst>
+          </a:prstGeom>
+          <a:solidFill xmlns:a="http://schemas.openxmlformats.org/drawingml/2006/main">
+            <a:srgbClr val="0D4D40"/>
+          </a:solidFill>
+          <a:ln xmlns:a="http://schemas.openxmlformats.org/drawingml/2006/main" w="0">
+            <a:noFill/>
+            <a:prstDash val="solid"/>
+          </a:ln>
+        </p:spPr>
+      </p:sp>
+      <p:sp>
+        <p:nvSpPr>
+          <p:cNvPr id="5" name="">
+            <a:extLst xmlns:a="http://schemas.openxmlformats.org/drawingml/2006/main">
+              <a:ext uri="{FF2B5EF4-FFF2-40B4-BE49-F238E27FC236}">
+                <a16:creationId xmlns:a16="http://schemas.microsoft.com/office/drawing/2014/main" id="{E84C2813-5E82-4FF2-83FA-748111CF2DAA}"/>
+              </a:ext>
+            </a:extLst>
+          </p:cNvPr>
+          <p:cNvSpPr>
+            <a:spLocks xmlns:a="http://schemas.openxmlformats.org/drawingml/2006/main" noGrp="1"/>
+          </p:cNvSpPr>
+          <p:nvPr/>
+        </p:nvSpPr>
+        <p:spPr>
+          <a:xfrm xmlns:a="http://schemas.openxmlformats.org/drawingml/2006/main">
+            <a:off x="895350" y="2419350"/>
+            <a:ext cx="1409700" cy="247650"/>
           </a:xfrm>
           <a:prstGeom xmlns:a="http://schemas.openxmlformats.org/drawingml/2006/main" prst="rect">
             <a:avLst/>
@@ -8986,38 +5959,38 @@
           <a:bodyPr xmlns:a="http://schemas.openxmlformats.org/drawingml/2006/main" anchor="t"/>
           <a:lstStyle xmlns:a="http://schemas.openxmlformats.org/drawingml/2006/main">
             <a:defPPr>
-              <a:defRPr sz="1050" b="1" i="0">
-                <a:solidFill>
-                  <a:srgbClr val="65786F"/>
+              <a:defRPr sz="1050" b="1">
+                <a:solidFill>
+                  <a:srgbClr val="C8FF63"/>
                 </a:solidFill>
               </a:defRPr>
             </a:defPPr>
           </a:lstStyle>
           <a:p xmlns:a="http://schemas.openxmlformats.org/drawingml/2006/main">
             <a:pPr>
-              <a:defRPr sz="1050" b="1" i="0">
-                <a:solidFill>
-                  <a:srgbClr val="65786F"/>
+              <a:defRPr sz="1050" b="1">
+                <a:solidFill>
+                  <a:srgbClr val="C8FF63"/>
                 </a:solidFill>
               </a:defRPr>
             </a:pPr>
             <a:r>
-              <a:rPr sz="1050" b="1" i="0">
-                <a:solidFill>
-                  <a:srgbClr val="65786F"/>
+              <a:rPr sz="1050" b="1">
+                <a:solidFill>
+                  <a:srgbClr val="C8FF63"/>
                 </a:solidFill>
               </a:rPr>
-              <a:t>01</a:t>
-            </a:r>
-          </a:p>
-        </p:txBody>
-      </p:sp>
-      <p:sp>
-        <p:nvSpPr>
-          <p:cNvPr id="5" name="">
-            <a:extLst xmlns:a="http://schemas.openxmlformats.org/drawingml/2006/main">
-              <a:ext uri="{FF2B5EF4-FFF2-40B4-BE49-F238E27FC236}">
-                <a16:creationId xmlns:a16="http://schemas.microsoft.com/office/drawing/2014/main" id="{55E16227-DF11-4E1A-A8B1-9B0F7D10FA76}"/>
+              <a:t>PRESAGE</a:t>
+            </a:r>
+          </a:p>
+        </p:txBody>
+      </p:sp>
+      <p:sp>
+        <p:nvSpPr>
+          <p:cNvPr id="6" name="">
+            <a:extLst xmlns:a="http://schemas.openxmlformats.org/drawingml/2006/main">
+              <a:ext uri="{FF2B5EF4-FFF2-40B4-BE49-F238E27FC236}">
+                <a16:creationId xmlns:a16="http://schemas.microsoft.com/office/drawing/2014/main" id="{281D234D-4DB8-4071-A6D5-6153E38EADC0}"/>
               </a:ext>
             </a:extLst>
           </p:cNvPr>
@@ -9028,8 +6001,8 @@
         </p:nvSpPr>
         <p:spPr>
           <a:xfrm xmlns:a="http://schemas.openxmlformats.org/drawingml/2006/main">
-            <a:off x="1257300" y="1771650"/>
-            <a:ext cx="5334000" cy="400050"/>
+            <a:off x="895350" y="3067050"/>
+            <a:ext cx="1409700" cy="857250"/>
           </a:xfrm>
           <a:prstGeom xmlns:a="http://schemas.openxmlformats.org/drawingml/2006/main" prst="rect">
             <a:avLst/>
@@ -9044,38 +6017,55 @@
           <a:bodyPr xmlns:a="http://schemas.openxmlformats.org/drawingml/2006/main" anchor="t"/>
           <a:lstStyle xmlns:a="http://schemas.openxmlformats.org/drawingml/2006/main">
             <a:defPPr>
-              <a:defRPr sz="1875" b="1" i="0">
-                <a:solidFill>
-                  <a:srgbClr val="0B302A"/>
+              <a:defRPr sz="1725" b="1">
+                <a:solidFill>
+                  <a:srgbClr val="FFFFFF"/>
                 </a:solidFill>
               </a:defRPr>
             </a:defPPr>
           </a:lstStyle>
           <a:p xmlns:a="http://schemas.openxmlformats.org/drawingml/2006/main">
             <a:pPr>
-              <a:defRPr sz="1875" b="1" i="0">
-                <a:solidFill>
-                  <a:srgbClr val="0B302A"/>
+              <a:defRPr sz="1725" b="1">
+                <a:solidFill>
+                  <a:srgbClr val="FFFFFF"/>
                 </a:solidFill>
               </a:defRPr>
             </a:pPr>
             <a:r>
-              <a:rPr sz="1875" b="1" i="0">
-                <a:solidFill>
-                  <a:srgbClr val="0B302A"/>
+              <a:rPr sz="1725" b="1">
+                <a:solidFill>
+                  <a:srgbClr val="FFFFFF"/>
                 </a:solidFill>
               </a:rPr>
-              <a:t>Check-ins are optional</a:t>
-            </a:r>
-          </a:p>
-        </p:txBody>
-      </p:sp>
-      <p:sp>
-        <p:nvSpPr>
-          <p:cNvPr id="6" name="">
-            <a:extLst xmlns:a="http://schemas.openxmlformats.org/drawingml/2006/main">
-              <a:ext uri="{FF2B5EF4-FFF2-40B4-BE49-F238E27FC236}">
-                <a16:creationId xmlns:a16="http://schemas.microsoft.com/office/drawing/2014/main" id="{EA188463-E39F-4EA9-A353-6D1BE4270707}"/>
+              <a:t>Contactless</a:t>
+            </a:r>
+          </a:p>
+          <a:p xmlns:a="http://schemas.openxmlformats.org/drawingml/2006/main">
+            <a:pPr>
+              <a:defRPr sz="1725" b="1">
+                <a:solidFill>
+                  <a:srgbClr val="FFFFFF"/>
+                </a:solidFill>
+              </a:defRPr>
+            </a:pPr>
+            <a:r>
+              <a:rPr sz="1725" b="1">
+                <a:solidFill>
+                  <a:srgbClr val="FFFFFF"/>
+                </a:solidFill>
+              </a:rPr>
+              <a:t>observations</a:t>
+            </a:r>
+          </a:p>
+        </p:txBody>
+      </p:sp>
+      <p:sp>
+        <p:nvSpPr>
+          <p:cNvPr id="7" name="">
+            <a:extLst xmlns:a="http://schemas.openxmlformats.org/drawingml/2006/main">
+              <a:ext uri="{FF2B5EF4-FFF2-40B4-BE49-F238E27FC236}">
+                <a16:creationId xmlns:a16="http://schemas.microsoft.com/office/drawing/2014/main" id="{D349E889-6418-43CB-A6F0-F596EECAC673}"/>
               </a:ext>
             </a:extLst>
           </p:cNvPr>
@@ -9086,39 +6076,8 @@
         </p:nvSpPr>
         <p:spPr>
           <a:xfrm xmlns:a="http://schemas.openxmlformats.org/drawingml/2006/main">
-            <a:off x="685800" y="2286000"/>
-            <a:ext cx="5334000" cy="9525"/>
-          </a:xfrm>
-          <a:prstGeom xmlns:a="http://schemas.openxmlformats.org/drawingml/2006/main" prst="rect">
-            <a:avLst/>
-          </a:prstGeom>
-          <a:solidFill xmlns:a="http://schemas.openxmlformats.org/drawingml/2006/main">
-            <a:srgbClr val="CCD9D3"/>
-          </a:solidFill>
-          <a:ln xmlns:a="http://schemas.openxmlformats.org/drawingml/2006/main" w="0">
-            <a:noFill/>
-            <a:prstDash val="solid"/>
-          </a:ln>
-        </p:spPr>
-      </p:sp>
-      <p:sp>
-        <p:nvSpPr>
-          <p:cNvPr id="7" name="">
-            <a:extLst xmlns:a="http://schemas.openxmlformats.org/drawingml/2006/main">
-              <a:ext uri="{FF2B5EF4-FFF2-40B4-BE49-F238E27FC236}">
-                <a16:creationId xmlns:a16="http://schemas.microsoft.com/office/drawing/2014/main" id="{01473DA1-2CF9-4D25-AE2D-F6D15DECE1CD}"/>
-              </a:ext>
-            </a:extLst>
-          </p:cNvPr>
-          <p:cNvSpPr>
-            <a:spLocks xmlns:a="http://schemas.openxmlformats.org/drawingml/2006/main" noGrp="1"/>
-          </p:cNvSpPr>
-          <p:nvPr/>
-        </p:nvSpPr>
-        <p:spPr>
-          <a:xfrm xmlns:a="http://schemas.openxmlformats.org/drawingml/2006/main">
-            <a:off x="685800" y="2647950"/>
-            <a:ext cx="419100" cy="266700"/>
+            <a:off x="2571750" y="2895600"/>
+            <a:ext cx="266700" cy="476250"/>
           </a:xfrm>
           <a:prstGeom xmlns:a="http://schemas.openxmlformats.org/drawingml/2006/main" prst="rect">
             <a:avLst/>
@@ -9133,28 +6092,28 @@
           <a:bodyPr xmlns:a="http://schemas.openxmlformats.org/drawingml/2006/main" anchor="t"/>
           <a:lstStyle xmlns:a="http://schemas.openxmlformats.org/drawingml/2006/main">
             <a:defPPr>
-              <a:defRPr sz="1050" b="1" i="0">
-                <a:solidFill>
-                  <a:srgbClr val="65786F"/>
+              <a:defRPr sz="2550" b="1">
+                <a:solidFill>
+                  <a:srgbClr val="C8FF63"/>
                 </a:solidFill>
               </a:defRPr>
             </a:defPPr>
           </a:lstStyle>
           <a:p xmlns:a="http://schemas.openxmlformats.org/drawingml/2006/main">
             <a:pPr>
-              <a:defRPr sz="1050" b="1" i="0">
-                <a:solidFill>
-                  <a:srgbClr val="65786F"/>
+              <a:defRPr sz="2550" b="1">
+                <a:solidFill>
+                  <a:srgbClr val="C8FF63"/>
                 </a:solidFill>
               </a:defRPr>
             </a:pPr>
             <a:r>
-              <a:rPr sz="1050" b="1" i="0">
-                <a:solidFill>
-                  <a:srgbClr val="65786F"/>
+              <a:rPr sz="2550" b="1">
+                <a:solidFill>
+                  <a:srgbClr val="C8FF63"/>
                 </a:solidFill>
               </a:rPr>
-              <a:t>02</a:t>
+              <a:t>›</a:t>
             </a:r>
           </a:p>
         </p:txBody>
@@ -9164,7 +6123,7 @@
           <p:cNvPr id="8" name="">
             <a:extLst xmlns:a="http://schemas.openxmlformats.org/drawingml/2006/main">
               <a:ext uri="{FF2B5EF4-FFF2-40B4-BE49-F238E27FC236}">
-                <a16:creationId xmlns:a16="http://schemas.microsoft.com/office/drawing/2014/main" id="{0C4BDAEA-DD8C-4482-8E5D-05A5CEAA7575}"/>
+                <a16:creationId xmlns:a16="http://schemas.microsoft.com/office/drawing/2014/main" id="{882C73E1-486E-406D-B9B4-FB22D7EF5CF5}"/>
               </a:ext>
             </a:extLst>
           </p:cNvPr>
@@ -9175,8 +6134,41 @@
         </p:nvSpPr>
         <p:spPr>
           <a:xfrm xmlns:a="http://schemas.openxmlformats.org/drawingml/2006/main">
-            <a:off x="1257300" y="2609850"/>
-            <a:ext cx="5334000" cy="400050"/>
+            <a:off x="2952750" y="2152650"/>
+            <a:ext cx="1790700" cy="2286000"/>
+          </a:xfrm>
+          <a:prstGeom xmlns:a="http://schemas.openxmlformats.org/drawingml/2006/main" prst="roundRect">
+            <a:avLst>
+              <a:gd name="adj" fmla="val 13830"/>
+            </a:avLst>
+          </a:prstGeom>
+          <a:solidFill xmlns:a="http://schemas.openxmlformats.org/drawingml/2006/main">
+            <a:srgbClr val="0D4D40"/>
+          </a:solidFill>
+          <a:ln xmlns:a="http://schemas.openxmlformats.org/drawingml/2006/main" w="0">
+            <a:noFill/>
+            <a:prstDash val="solid"/>
+          </a:ln>
+        </p:spPr>
+      </p:sp>
+      <p:sp>
+        <p:nvSpPr>
+          <p:cNvPr id="9" name="">
+            <a:extLst xmlns:a="http://schemas.openxmlformats.org/drawingml/2006/main">
+              <a:ext uri="{FF2B5EF4-FFF2-40B4-BE49-F238E27FC236}">
+                <a16:creationId xmlns:a16="http://schemas.microsoft.com/office/drawing/2014/main" id="{1A0BCA20-895F-4A64-A9F7-B23C0BCA7F73}"/>
+              </a:ext>
+            </a:extLst>
+          </p:cNvPr>
+          <p:cNvSpPr>
+            <a:spLocks xmlns:a="http://schemas.openxmlformats.org/drawingml/2006/main" noGrp="1"/>
+          </p:cNvSpPr>
+          <p:nvPr/>
+        </p:nvSpPr>
+        <p:spPr>
+          <a:xfrm xmlns:a="http://schemas.openxmlformats.org/drawingml/2006/main">
+            <a:off x="3143250" y="2419350"/>
+            <a:ext cx="1409700" cy="247650"/>
           </a:xfrm>
           <a:prstGeom xmlns:a="http://schemas.openxmlformats.org/drawingml/2006/main" prst="rect">
             <a:avLst/>
@@ -9191,38 +6183,38 @@
           <a:bodyPr xmlns:a="http://schemas.openxmlformats.org/drawingml/2006/main" anchor="t"/>
           <a:lstStyle xmlns:a="http://schemas.openxmlformats.org/drawingml/2006/main">
             <a:defPPr>
-              <a:defRPr sz="1875" b="1" i="0">
-                <a:solidFill>
-                  <a:srgbClr val="0B302A"/>
+              <a:defRPr sz="1050" b="1">
+                <a:solidFill>
+                  <a:srgbClr val="C8FF63"/>
                 </a:solidFill>
               </a:defRPr>
             </a:defPPr>
           </a:lstStyle>
           <a:p xmlns:a="http://schemas.openxmlformats.org/drawingml/2006/main">
             <a:pPr>
-              <a:defRPr sz="1875" b="1" i="0">
-                <a:solidFill>
-                  <a:srgbClr val="0B302A"/>
+              <a:defRPr sz="1050" b="1">
+                <a:solidFill>
+                  <a:srgbClr val="C8FF63"/>
                 </a:solidFill>
               </a:defRPr>
             </a:pPr>
             <a:r>
-              <a:rPr sz="1875" b="1" i="0">
-                <a:solidFill>
-                  <a:srgbClr val="0B302A"/>
+              <a:rPr sz="1050" b="1">
+                <a:solidFill>
+                  <a:srgbClr val="C8FF63"/>
                 </a:solidFill>
               </a:rPr>
-              <a:t>Sharing is off by default</a:t>
-            </a:r>
-          </a:p>
-        </p:txBody>
-      </p:sp>
-      <p:sp>
-        <p:nvSpPr>
-          <p:cNvPr id="9" name="">
-            <a:extLst xmlns:a="http://schemas.openxmlformats.org/drawingml/2006/main">
-              <a:ext uri="{FF2B5EF4-FFF2-40B4-BE49-F238E27FC236}">
-                <a16:creationId xmlns:a16="http://schemas.microsoft.com/office/drawing/2014/main" id="{B8CFA9FE-5CFE-4A9E-92C8-F5D31EA3CA52}"/>
+              <a:t>SITEGUARD</a:t>
+            </a:r>
+          </a:p>
+        </p:txBody>
+      </p:sp>
+      <p:sp>
+        <p:nvSpPr>
+          <p:cNvPr id="10" name="">
+            <a:extLst xmlns:a="http://schemas.openxmlformats.org/drawingml/2006/main">
+              <a:ext uri="{FF2B5EF4-FFF2-40B4-BE49-F238E27FC236}">
+                <a16:creationId xmlns:a16="http://schemas.microsoft.com/office/drawing/2014/main" id="{2FADB22F-907F-41E9-97E5-4FBBD94ED1D2}"/>
               </a:ext>
             </a:extLst>
           </p:cNvPr>
@@ -9233,39 +6225,8 @@
         </p:nvSpPr>
         <p:spPr>
           <a:xfrm xmlns:a="http://schemas.openxmlformats.org/drawingml/2006/main">
-            <a:off x="685800" y="3124200"/>
-            <a:ext cx="5334000" cy="9525"/>
-          </a:xfrm>
-          <a:prstGeom xmlns:a="http://schemas.openxmlformats.org/drawingml/2006/main" prst="rect">
-            <a:avLst/>
-          </a:prstGeom>
-          <a:solidFill xmlns:a="http://schemas.openxmlformats.org/drawingml/2006/main">
-            <a:srgbClr val="CCD9D3"/>
-          </a:solidFill>
-          <a:ln xmlns:a="http://schemas.openxmlformats.org/drawingml/2006/main" w="0">
-            <a:noFill/>
-            <a:prstDash val="solid"/>
-          </a:ln>
-        </p:spPr>
-      </p:sp>
-      <p:sp>
-        <p:nvSpPr>
-          <p:cNvPr id="10" name="">
-            <a:extLst xmlns:a="http://schemas.openxmlformats.org/drawingml/2006/main">
-              <a:ext uri="{FF2B5EF4-FFF2-40B4-BE49-F238E27FC236}">
-                <a16:creationId xmlns:a16="http://schemas.microsoft.com/office/drawing/2014/main" id="{D03F7A30-7187-4DAF-BD08-274810DFC9A2}"/>
-              </a:ext>
-            </a:extLst>
-          </p:cNvPr>
-          <p:cNvSpPr>
-            <a:spLocks xmlns:a="http://schemas.openxmlformats.org/drawingml/2006/main" noGrp="1"/>
-          </p:cNvSpPr>
-          <p:nvPr/>
-        </p:nvSpPr>
-        <p:spPr>
-          <a:xfrm xmlns:a="http://schemas.openxmlformats.org/drawingml/2006/main">
-            <a:off x="685800" y="3486150"/>
-            <a:ext cx="419100" cy="266700"/>
+            <a:off x="3143250" y="3067050"/>
+            <a:ext cx="1409700" cy="857250"/>
           </a:xfrm>
           <a:prstGeom xmlns:a="http://schemas.openxmlformats.org/drawingml/2006/main" prst="rect">
             <a:avLst/>
@@ -9280,28 +6241,45 @@
           <a:bodyPr xmlns:a="http://schemas.openxmlformats.org/drawingml/2006/main" anchor="t"/>
           <a:lstStyle xmlns:a="http://schemas.openxmlformats.org/drawingml/2006/main">
             <a:defPPr>
-              <a:defRPr sz="1050" b="1" i="0">
-                <a:solidFill>
-                  <a:srgbClr val="65786F"/>
+              <a:defRPr sz="1725" b="1">
+                <a:solidFill>
+                  <a:srgbClr val="FFFFFF"/>
                 </a:solidFill>
               </a:defRPr>
             </a:defPPr>
           </a:lstStyle>
           <a:p xmlns:a="http://schemas.openxmlformats.org/drawingml/2006/main">
             <a:pPr>
-              <a:defRPr sz="1050" b="1" i="0">
-                <a:solidFill>
-                  <a:srgbClr val="65786F"/>
+              <a:defRPr sz="1725" b="1">
+                <a:solidFill>
+                  <a:srgbClr val="FFFFFF"/>
                 </a:solidFill>
               </a:defRPr>
             </a:pPr>
             <a:r>
-              <a:rPr sz="1050" b="1" i="0">
-                <a:solidFill>
-                  <a:srgbClr val="65786F"/>
+              <a:rPr sz="1725" b="1">
+                <a:solidFill>
+                  <a:srgbClr val="FFFFFF"/>
                 </a:solidFill>
               </a:rPr>
-              <a:t>03</a:t>
+              <a:t>Worker choice</a:t>
+            </a:r>
+          </a:p>
+          <a:p xmlns:a="http://schemas.openxmlformats.org/drawingml/2006/main">
+            <a:pPr>
+              <a:defRPr sz="1725" b="1">
+                <a:solidFill>
+                  <a:srgbClr val="FFFFFF"/>
+                </a:solidFill>
+              </a:defRPr>
+            </a:pPr>
+            <a:r>
+              <a:rPr sz="1725" b="1">
+                <a:solidFill>
+                  <a:srgbClr val="FFFFFF"/>
+                </a:solidFill>
+              </a:rPr>
+              <a:t>and requests</a:t>
             </a:r>
           </a:p>
         </p:txBody>
@@ -9311,7 +6289,7 @@
           <p:cNvPr id="11" name="">
             <a:extLst xmlns:a="http://schemas.openxmlformats.org/drawingml/2006/main">
               <a:ext uri="{FF2B5EF4-FFF2-40B4-BE49-F238E27FC236}">
-                <a16:creationId xmlns:a16="http://schemas.microsoft.com/office/drawing/2014/main" id="{1564FDE3-A89D-4455-95E3-27BFB2F03D93}"/>
+                <a16:creationId xmlns:a16="http://schemas.microsoft.com/office/drawing/2014/main" id="{B12A5C4E-4DD3-41F5-A9F8-04B4D99CF494}"/>
               </a:ext>
             </a:extLst>
           </p:cNvPr>
@@ -9322,8 +6300,8 @@
         </p:nvSpPr>
         <p:spPr>
           <a:xfrm xmlns:a="http://schemas.openxmlformats.org/drawingml/2006/main">
-            <a:off x="1257300" y="3448050"/>
-            <a:ext cx="5334000" cy="400050"/>
+            <a:off x="4819650" y="2895600"/>
+            <a:ext cx="266700" cy="476250"/>
           </a:xfrm>
           <a:prstGeom xmlns:a="http://schemas.openxmlformats.org/drawingml/2006/main" prst="rect">
             <a:avLst/>
@@ -9338,28 +6316,28 @@
           <a:bodyPr xmlns:a="http://schemas.openxmlformats.org/drawingml/2006/main" anchor="t"/>
           <a:lstStyle xmlns:a="http://schemas.openxmlformats.org/drawingml/2006/main">
             <a:defPPr>
-              <a:defRPr sz="1875" b="1" i="0">
-                <a:solidFill>
-                  <a:srgbClr val="0B302A"/>
+              <a:defRPr sz="2550" b="1">
+                <a:solidFill>
+                  <a:srgbClr val="C8FF63"/>
                 </a:solidFill>
               </a:defRPr>
             </a:defPPr>
           </a:lstStyle>
           <a:p xmlns:a="http://schemas.openxmlformats.org/drawingml/2006/main">
             <a:pPr>
-              <a:defRPr sz="1875" b="1" i="0">
-                <a:solidFill>
-                  <a:srgbClr val="0B302A"/>
+              <a:defRPr sz="2550" b="1">
+                <a:solidFill>
+                  <a:srgbClr val="C8FF63"/>
                 </a:solidFill>
               </a:defRPr>
             </a:pPr>
             <a:r>
-              <a:rPr sz="1875" b="1" i="0">
-                <a:solidFill>
-                  <a:srgbClr val="0B302A"/>
+              <a:rPr sz="2550" b="1">
+                <a:solidFill>
+                  <a:srgbClr val="C8FF63"/>
                 </a:solidFill>
               </a:rPr>
-              <a:t>No footage stored; consented frames are processed transiently</a:t>
+              <a:t>›</a:t>
             </a:r>
           </a:p>
         </p:txBody>
@@ -9369,7 +6347,7 @@
           <p:cNvPr id="12" name="">
             <a:extLst xmlns:a="http://schemas.openxmlformats.org/drawingml/2006/main">
               <a:ext uri="{FF2B5EF4-FFF2-40B4-BE49-F238E27FC236}">
-                <a16:creationId xmlns:a16="http://schemas.microsoft.com/office/drawing/2014/main" id="{67632668-1BC2-432B-80D8-2765F313B78D}"/>
+                <a16:creationId xmlns:a16="http://schemas.microsoft.com/office/drawing/2014/main" id="{555BBFBD-33A2-444E-A072-90BA1B00F224}"/>
               </a:ext>
             </a:extLst>
           </p:cNvPr>
@@ -9380,14 +6358,16 @@
         </p:nvSpPr>
         <p:spPr>
           <a:xfrm xmlns:a="http://schemas.openxmlformats.org/drawingml/2006/main">
-            <a:off x="685800" y="3962400"/>
-            <a:ext cx="5334000" cy="9525"/>
-          </a:xfrm>
-          <a:prstGeom xmlns:a="http://schemas.openxmlformats.org/drawingml/2006/main" prst="rect">
-            <a:avLst/>
+            <a:off x="5200650" y="2152650"/>
+            <a:ext cx="1790700" cy="2286000"/>
+          </a:xfrm>
+          <a:prstGeom xmlns:a="http://schemas.openxmlformats.org/drawingml/2006/main" prst="roundRect">
+            <a:avLst>
+              <a:gd name="adj" fmla="val 13830"/>
+            </a:avLst>
           </a:prstGeom>
           <a:solidFill xmlns:a="http://schemas.openxmlformats.org/drawingml/2006/main">
-            <a:srgbClr val="CCD9D3"/>
+            <a:srgbClr val="0D4D40"/>
           </a:solidFill>
           <a:ln xmlns:a="http://schemas.openxmlformats.org/drawingml/2006/main" w="0">
             <a:noFill/>
@@ -9400,7 +6380,7 @@
           <p:cNvPr id="13" name="">
             <a:extLst xmlns:a="http://schemas.openxmlformats.org/drawingml/2006/main">
               <a:ext uri="{FF2B5EF4-FFF2-40B4-BE49-F238E27FC236}">
-                <a16:creationId xmlns:a16="http://schemas.microsoft.com/office/drawing/2014/main" id="{238BBCA9-6430-4D07-90D2-C21189C60A91}"/>
+                <a16:creationId xmlns:a16="http://schemas.microsoft.com/office/drawing/2014/main" id="{57D4B4EC-0A1E-42B0-B5B7-B0D74F94EEDA}"/>
               </a:ext>
             </a:extLst>
           </p:cNvPr>
@@ -9411,8 +6391,8 @@
         </p:nvSpPr>
         <p:spPr>
           <a:xfrm xmlns:a="http://schemas.openxmlformats.org/drawingml/2006/main">
-            <a:off x="685800" y="4324350"/>
-            <a:ext cx="419100" cy="266700"/>
+            <a:off x="5391150" y="2419350"/>
+            <a:ext cx="1409700" cy="247650"/>
           </a:xfrm>
           <a:prstGeom xmlns:a="http://schemas.openxmlformats.org/drawingml/2006/main" prst="rect">
             <a:avLst/>
@@ -9427,28 +6407,28 @@
           <a:bodyPr xmlns:a="http://schemas.openxmlformats.org/drawingml/2006/main" anchor="t"/>
           <a:lstStyle xmlns:a="http://schemas.openxmlformats.org/drawingml/2006/main">
             <a:defPPr>
-              <a:defRPr sz="1050" b="1" i="0">
-                <a:solidFill>
-                  <a:srgbClr val="65786F"/>
+              <a:defRPr sz="1050" b="1">
+                <a:solidFill>
+                  <a:srgbClr val="C8FF63"/>
                 </a:solidFill>
               </a:defRPr>
             </a:defPPr>
           </a:lstStyle>
           <a:p xmlns:a="http://schemas.openxmlformats.org/drawingml/2006/main">
             <a:pPr>
-              <a:defRPr sz="1050" b="1" i="0">
-                <a:solidFill>
-                  <a:srgbClr val="65786F"/>
+              <a:defRPr sz="1050" b="1">
+                <a:solidFill>
+                  <a:srgbClr val="C8FF63"/>
                 </a:solidFill>
               </a:defRPr>
             </a:pPr>
             <a:r>
-              <a:rPr sz="1050" b="1" i="0">
-                <a:solidFill>
-                  <a:srgbClr val="65786F"/>
+              <a:rPr sz="1050" b="1">
+                <a:solidFill>
+                  <a:srgbClr val="C8FF63"/>
                 </a:solidFill>
               </a:rPr>
-              <a:t>04</a:t>
+              <a:t>TIGER DATA</a:t>
             </a:r>
           </a:p>
         </p:txBody>
@@ -9458,7 +6438,7 @@
           <p:cNvPr id="14" name="">
             <a:extLst xmlns:a="http://schemas.openxmlformats.org/drawingml/2006/main">
               <a:ext uri="{FF2B5EF4-FFF2-40B4-BE49-F238E27FC236}">
-                <a16:creationId xmlns:a16="http://schemas.microsoft.com/office/drawing/2014/main" id="{6419952D-D70A-43FD-8F02-844F0E39BD63}"/>
+                <a16:creationId xmlns:a16="http://schemas.microsoft.com/office/drawing/2014/main" id="{AF1CA712-FEFA-4895-AF7B-74301C3B9043}"/>
               </a:ext>
             </a:extLst>
           </p:cNvPr>
@@ -9469,8 +6449,8 @@
         </p:nvSpPr>
         <p:spPr>
           <a:xfrm xmlns:a="http://schemas.openxmlformats.org/drawingml/2006/main">
-            <a:off x="1257300" y="4286250"/>
-            <a:ext cx="5334000" cy="400050"/>
+            <a:off x="5391150" y="3067050"/>
+            <a:ext cx="1409700" cy="857250"/>
           </a:xfrm>
           <a:prstGeom xmlns:a="http://schemas.openxmlformats.org/drawingml/2006/main" prst="rect">
             <a:avLst/>
@@ -9485,28 +6465,45 @@
           <a:bodyPr xmlns:a="http://schemas.openxmlformats.org/drawingml/2006/main" anchor="t"/>
           <a:lstStyle xmlns:a="http://schemas.openxmlformats.org/drawingml/2006/main">
             <a:defPPr>
-              <a:defRPr sz="1875" b="1" i="0">
-                <a:solidFill>
-                  <a:srgbClr val="0B302A"/>
+              <a:defRPr sz="1725" b="1">
+                <a:solidFill>
+                  <a:srgbClr val="FFFFFF"/>
                 </a:solidFill>
               </a:defRPr>
             </a:defPPr>
           </a:lstStyle>
           <a:p xmlns:a="http://schemas.openxmlformats.org/drawingml/2006/main">
             <a:pPr>
-              <a:defRPr sz="1875" b="1" i="0">
-                <a:solidFill>
-                  <a:srgbClr val="0B302A"/>
+              <a:defRPr sz="1725" b="1">
+                <a:solidFill>
+                  <a:srgbClr val="FFFFFF"/>
                 </a:solidFill>
               </a:defRPr>
             </a:pPr>
             <a:r>
-              <a:rPr sz="1875" b="1" i="0">
-                <a:solidFill>
-                  <a:srgbClr val="0B302A"/>
+              <a:rPr sz="1725" b="1">
+                <a:solidFill>
+                  <a:srgbClr val="FFFFFF"/>
                 </a:solidFill>
               </a:rPr>
-              <a:t>Support does not require a measurement</a:t>
+              <a:t>Time-series</a:t>
+            </a:r>
+          </a:p>
+          <a:p xmlns:a="http://schemas.openxmlformats.org/drawingml/2006/main">
+            <a:pPr>
+              <a:defRPr sz="1725" b="1">
+                <a:solidFill>
+                  <a:srgbClr val="FFFFFF"/>
+                </a:solidFill>
+              </a:defRPr>
+            </a:pPr>
+            <a:r>
+              <a:rPr sz="1725" b="1">
+                <a:solidFill>
+                  <a:srgbClr val="FFFFFF"/>
+                </a:solidFill>
+              </a:rPr>
+              <a:t>history</a:t>
             </a:r>
           </a:p>
         </p:txBody>
@@ -9516,7 +6513,7 @@
           <p:cNvPr id="15" name="">
             <a:extLst xmlns:a="http://schemas.openxmlformats.org/drawingml/2006/main">
               <a:ext uri="{FF2B5EF4-FFF2-40B4-BE49-F238E27FC236}">
-                <a16:creationId xmlns:a16="http://schemas.microsoft.com/office/drawing/2014/main" id="{FADA499C-F959-4352-B2EC-93A0F295AF37}"/>
+                <a16:creationId xmlns:a16="http://schemas.microsoft.com/office/drawing/2014/main" id="{0B31BA32-3FFF-4746-9C76-0101A42355DB}"/>
               </a:ext>
             </a:extLst>
           </p:cNvPr>
@@ -9527,39 +6524,8 @@
         </p:nvSpPr>
         <p:spPr>
           <a:xfrm xmlns:a="http://schemas.openxmlformats.org/drawingml/2006/main">
-            <a:off x="685800" y="4800600"/>
-            <a:ext cx="5334000" cy="9525"/>
-          </a:xfrm>
-          <a:prstGeom xmlns:a="http://schemas.openxmlformats.org/drawingml/2006/main" prst="rect">
-            <a:avLst/>
-          </a:prstGeom>
-          <a:solidFill xmlns:a="http://schemas.openxmlformats.org/drawingml/2006/main">
-            <a:srgbClr val="CCD9D3"/>
-          </a:solidFill>
-          <a:ln xmlns:a="http://schemas.openxmlformats.org/drawingml/2006/main" w="0">
-            <a:noFill/>
-            <a:prstDash val="solid"/>
-          </a:ln>
-        </p:spPr>
-      </p:sp>
-      <p:sp>
-        <p:nvSpPr>
-          <p:cNvPr id="16" name="">
-            <a:extLst xmlns:a="http://schemas.openxmlformats.org/drawingml/2006/main">
-              <a:ext uri="{FF2B5EF4-FFF2-40B4-BE49-F238E27FC236}">
-                <a16:creationId xmlns:a16="http://schemas.microsoft.com/office/drawing/2014/main" id="{87691DBE-7F7C-4BBB-8CA1-73C1ADB01F76}"/>
-              </a:ext>
-            </a:extLst>
-          </p:cNvPr>
-          <p:cNvSpPr>
-            <a:spLocks xmlns:a="http://schemas.openxmlformats.org/drawingml/2006/main" noGrp="1"/>
-          </p:cNvSpPr>
-          <p:nvPr/>
-        </p:nvSpPr>
-        <p:spPr>
-          <a:xfrm xmlns:a="http://schemas.openxmlformats.org/drawingml/2006/main">
-            <a:off x="685800" y="5162550"/>
-            <a:ext cx="419100" cy="266700"/>
+            <a:off x="7067550" y="2895600"/>
+            <a:ext cx="266700" cy="476250"/>
           </a:xfrm>
           <a:prstGeom xmlns:a="http://schemas.openxmlformats.org/drawingml/2006/main" prst="rect">
             <a:avLst/>
@@ -9574,38 +6540,71 @@
           <a:bodyPr xmlns:a="http://schemas.openxmlformats.org/drawingml/2006/main" anchor="t"/>
           <a:lstStyle xmlns:a="http://schemas.openxmlformats.org/drawingml/2006/main">
             <a:defPPr>
-              <a:defRPr sz="1050" b="1" i="0">
-                <a:solidFill>
-                  <a:srgbClr val="65786F"/>
+              <a:defRPr sz="2550" b="1">
+                <a:solidFill>
+                  <a:srgbClr val="C8FF63"/>
                 </a:solidFill>
               </a:defRPr>
             </a:defPPr>
           </a:lstStyle>
           <a:p xmlns:a="http://schemas.openxmlformats.org/drawingml/2006/main">
             <a:pPr>
-              <a:defRPr sz="1050" b="1" i="0">
-                <a:solidFill>
-                  <a:srgbClr val="65786F"/>
+              <a:defRPr sz="2550" b="1">
+                <a:solidFill>
+                  <a:srgbClr val="C8FF63"/>
                 </a:solidFill>
               </a:defRPr>
             </a:pPr>
             <a:r>
-              <a:rPr sz="1050" b="1" i="0">
-                <a:solidFill>
-                  <a:srgbClr val="65786F"/>
+              <a:rPr sz="2550" b="1">
+                <a:solidFill>
+                  <a:srgbClr val="C8FF63"/>
                 </a:solidFill>
               </a:rPr>
-              <a:t>05</a:t>
-            </a:r>
-          </a:p>
-        </p:txBody>
+              <a:t>›</a:t>
+            </a:r>
+          </a:p>
+        </p:txBody>
+      </p:sp>
+      <p:sp>
+        <p:nvSpPr>
+          <p:cNvPr id="16" name="">
+            <a:extLst xmlns:a="http://schemas.openxmlformats.org/drawingml/2006/main">
+              <a:ext uri="{FF2B5EF4-FFF2-40B4-BE49-F238E27FC236}">
+                <a16:creationId xmlns:a16="http://schemas.microsoft.com/office/drawing/2014/main" id="{E15D4735-EFCE-416F-A313-361D5393DB0D}"/>
+              </a:ext>
+            </a:extLst>
+          </p:cNvPr>
+          <p:cNvSpPr>
+            <a:spLocks xmlns:a="http://schemas.openxmlformats.org/drawingml/2006/main" noGrp="1"/>
+          </p:cNvSpPr>
+          <p:nvPr/>
+        </p:nvSpPr>
+        <p:spPr>
+          <a:xfrm xmlns:a="http://schemas.openxmlformats.org/drawingml/2006/main">
+            <a:off x="7448550" y="2152650"/>
+            <a:ext cx="1790700" cy="2286000"/>
+          </a:xfrm>
+          <a:prstGeom xmlns:a="http://schemas.openxmlformats.org/drawingml/2006/main" prst="roundRect">
+            <a:avLst>
+              <a:gd name="adj" fmla="val 13830"/>
+            </a:avLst>
+          </a:prstGeom>
+          <a:solidFill xmlns:a="http://schemas.openxmlformats.org/drawingml/2006/main">
+            <a:srgbClr val="0D4D40"/>
+          </a:solidFill>
+          <a:ln xmlns:a="http://schemas.openxmlformats.org/drawingml/2006/main" w="0">
+            <a:noFill/>
+            <a:prstDash val="solid"/>
+          </a:ln>
+        </p:spPr>
       </p:sp>
       <p:sp>
         <p:nvSpPr>
           <p:cNvPr id="17" name="">
             <a:extLst xmlns:a="http://schemas.openxmlformats.org/drawingml/2006/main">
               <a:ext uri="{FF2B5EF4-FFF2-40B4-BE49-F238E27FC236}">
-                <a16:creationId xmlns:a16="http://schemas.microsoft.com/office/drawing/2014/main" id="{0F59A7A8-697C-4750-9E5E-3CF3E1FAC616}"/>
+                <a16:creationId xmlns:a16="http://schemas.microsoft.com/office/drawing/2014/main" id="{15CB2606-5D26-4027-AF67-BB17A617491C}"/>
               </a:ext>
             </a:extLst>
           </p:cNvPr>
@@ -9616,8 +6615,8 @@
         </p:nvSpPr>
         <p:spPr>
           <a:xfrm xmlns:a="http://schemas.openxmlformats.org/drawingml/2006/main">
-            <a:off x="1257300" y="5124450"/>
-            <a:ext cx="5334000" cy="400050"/>
+            <a:off x="7639050" y="2419350"/>
+            <a:ext cx="1409700" cy="247650"/>
           </a:xfrm>
           <a:prstGeom xmlns:a="http://schemas.openxmlformats.org/drawingml/2006/main" prst="rect">
             <a:avLst/>
@@ -9632,28 +6631,28 @@
           <a:bodyPr xmlns:a="http://schemas.openxmlformats.org/drawingml/2006/main" anchor="t"/>
           <a:lstStyle xmlns:a="http://schemas.openxmlformats.org/drawingml/2006/main">
             <a:defPPr>
-              <a:defRPr sz="1875" b="1" i="0">
-                <a:solidFill>
-                  <a:srgbClr val="0B302A"/>
+              <a:defRPr sz="1050" b="1">
+                <a:solidFill>
+                  <a:srgbClr val="C8FF63"/>
                 </a:solidFill>
               </a:defRPr>
             </a:defPPr>
           </a:lstStyle>
           <a:p xmlns:a="http://schemas.openxmlformats.org/drawingml/2006/main">
             <a:pPr>
-              <a:defRPr sz="1875" b="1" i="0">
-                <a:solidFill>
-                  <a:srgbClr val="0B302A"/>
+              <a:defRPr sz="1050" b="1">
+                <a:solidFill>
+                  <a:srgbClr val="C8FF63"/>
                 </a:solidFill>
               </a:defRPr>
             </a:pPr>
             <a:r>
-              <a:rPr sz="1875" b="1" i="0">
-                <a:solidFill>
-                  <a:srgbClr val="0B302A"/>
+              <a:rPr sz="1050" b="1">
+                <a:solidFill>
+                  <a:srgbClr val="C8FF63"/>
                 </a:solidFill>
               </a:rPr>
-              <a:t>Insufficient data stays insufficient</a:t>
+              <a:t>GEMINI</a:t>
             </a:r>
           </a:p>
         </p:txBody>
@@ -9663,7 +6662,7 @@
           <p:cNvPr id="18" name="">
             <a:extLst xmlns:a="http://schemas.openxmlformats.org/drawingml/2006/main">
               <a:ext uri="{FF2B5EF4-FFF2-40B4-BE49-F238E27FC236}">
-                <a16:creationId xmlns:a16="http://schemas.microsoft.com/office/drawing/2014/main" id="{D127BA89-87B6-43CB-95AC-49CD76E35132}"/>
+                <a16:creationId xmlns:a16="http://schemas.microsoft.com/office/drawing/2014/main" id="{7C5CC84C-3A60-4241-A05C-5DC6BEEFB592}"/>
               </a:ext>
             </a:extLst>
           </p:cNvPr>
@@ -9674,14 +6673,149 @@
         </p:nvSpPr>
         <p:spPr>
           <a:xfrm xmlns:a="http://schemas.openxmlformats.org/drawingml/2006/main">
-            <a:off x="685800" y="5638800"/>
-            <a:ext cx="5334000" cy="9525"/>
+            <a:off x="7639050" y="3067050"/>
+            <a:ext cx="1409700" cy="857250"/>
           </a:xfrm>
           <a:prstGeom xmlns:a="http://schemas.openxmlformats.org/drawingml/2006/main" prst="rect">
             <a:avLst/>
           </a:prstGeom>
+          <a:noFill xmlns:a="http://schemas.openxmlformats.org/drawingml/2006/main"/>
+          <a:ln xmlns:a="http://schemas.openxmlformats.org/drawingml/2006/main" w="0">
+            <a:noFill/>
+            <a:prstDash val="solid"/>
+          </a:ln>
+        </p:spPr>
+        <p:txBody>
+          <a:bodyPr xmlns:a="http://schemas.openxmlformats.org/drawingml/2006/main" anchor="t"/>
+          <a:lstStyle xmlns:a="http://schemas.openxmlformats.org/drawingml/2006/main">
+            <a:defPPr>
+              <a:defRPr sz="1725" b="1">
+                <a:solidFill>
+                  <a:srgbClr val="FFFFFF"/>
+                </a:solidFill>
+              </a:defRPr>
+            </a:defPPr>
+          </a:lstStyle>
+          <a:p xmlns:a="http://schemas.openxmlformats.org/drawingml/2006/main">
+            <a:pPr>
+              <a:defRPr sz="1725" b="1">
+                <a:solidFill>
+                  <a:srgbClr val="FFFFFF"/>
+                </a:solidFill>
+              </a:defRPr>
+            </a:pPr>
+            <a:r>
+              <a:rPr sz="1725" b="1">
+                <a:solidFill>
+                  <a:srgbClr val="FFFFFF"/>
+                </a:solidFill>
+              </a:rPr>
+              <a:t>Approved facts</a:t>
+            </a:r>
+          </a:p>
+          <a:p xmlns:a="http://schemas.openxmlformats.org/drawingml/2006/main">
+            <a:pPr>
+              <a:defRPr sz="1725" b="1">
+                <a:solidFill>
+                  <a:srgbClr val="FFFFFF"/>
+                </a:solidFill>
+              </a:defRPr>
+            </a:pPr>
+            <a:r>
+              <a:rPr sz="1725" b="1">
+                <a:solidFill>
+                  <a:srgbClr val="FFFFFF"/>
+                </a:solidFill>
+              </a:rPr>
+              <a:t>in plain language</a:t>
+            </a:r>
+          </a:p>
+        </p:txBody>
+      </p:sp>
+      <p:sp>
+        <p:nvSpPr>
+          <p:cNvPr id="19" name="">
+            <a:extLst xmlns:a="http://schemas.openxmlformats.org/drawingml/2006/main">
+              <a:ext uri="{FF2B5EF4-FFF2-40B4-BE49-F238E27FC236}">
+                <a16:creationId xmlns:a16="http://schemas.microsoft.com/office/drawing/2014/main" id="{FB34FC68-98E4-4EDE-9C98-30E912B420C6}"/>
+              </a:ext>
+            </a:extLst>
+          </p:cNvPr>
+          <p:cNvSpPr>
+            <a:spLocks xmlns:a="http://schemas.openxmlformats.org/drawingml/2006/main" noGrp="1"/>
+          </p:cNvSpPr>
+          <p:nvPr/>
+        </p:nvSpPr>
+        <p:spPr>
+          <a:xfrm xmlns:a="http://schemas.openxmlformats.org/drawingml/2006/main">
+            <a:off x="9315450" y="2895600"/>
+            <a:ext cx="266700" cy="476250"/>
+          </a:xfrm>
+          <a:prstGeom xmlns:a="http://schemas.openxmlformats.org/drawingml/2006/main" prst="rect">
+            <a:avLst/>
+          </a:prstGeom>
+          <a:noFill xmlns:a="http://schemas.openxmlformats.org/drawingml/2006/main"/>
+          <a:ln xmlns:a="http://schemas.openxmlformats.org/drawingml/2006/main" w="0">
+            <a:noFill/>
+            <a:prstDash val="solid"/>
+          </a:ln>
+        </p:spPr>
+        <p:txBody>
+          <a:bodyPr xmlns:a="http://schemas.openxmlformats.org/drawingml/2006/main" anchor="t"/>
+          <a:lstStyle xmlns:a="http://schemas.openxmlformats.org/drawingml/2006/main">
+            <a:defPPr>
+              <a:defRPr sz="2550" b="1">
+                <a:solidFill>
+                  <a:srgbClr val="C8FF63"/>
+                </a:solidFill>
+              </a:defRPr>
+            </a:defPPr>
+          </a:lstStyle>
+          <a:p xmlns:a="http://schemas.openxmlformats.org/drawingml/2006/main">
+            <a:pPr>
+              <a:defRPr sz="2550" b="1">
+                <a:solidFill>
+                  <a:srgbClr val="C8FF63"/>
+                </a:solidFill>
+              </a:defRPr>
+            </a:pPr>
+            <a:r>
+              <a:rPr sz="2550" b="1">
+                <a:solidFill>
+                  <a:srgbClr val="C8FF63"/>
+                </a:solidFill>
+              </a:rPr>
+              <a:t>›</a:t>
+            </a:r>
+          </a:p>
+        </p:txBody>
+      </p:sp>
+      <p:sp>
+        <p:nvSpPr>
+          <p:cNvPr id="20" name="">
+            <a:extLst xmlns:a="http://schemas.openxmlformats.org/drawingml/2006/main">
+              <a:ext uri="{FF2B5EF4-FFF2-40B4-BE49-F238E27FC236}">
+                <a16:creationId xmlns:a16="http://schemas.microsoft.com/office/drawing/2014/main" id="{C510DBF7-0FE1-4847-9031-CE6242452A01}"/>
+              </a:ext>
+            </a:extLst>
+          </p:cNvPr>
+          <p:cNvSpPr>
+            <a:spLocks xmlns:a="http://schemas.openxmlformats.org/drawingml/2006/main" noGrp="1"/>
+          </p:cNvSpPr>
+          <p:nvPr/>
+        </p:nvSpPr>
+        <p:spPr>
+          <a:xfrm xmlns:a="http://schemas.openxmlformats.org/drawingml/2006/main">
+            <a:off x="9696450" y="2152650"/>
+            <a:ext cx="1790700" cy="2286000"/>
+          </a:xfrm>
+          <a:prstGeom xmlns:a="http://schemas.openxmlformats.org/drawingml/2006/main" prst="roundRect">
+            <a:avLst>
+              <a:gd name="adj" fmla="val 13830"/>
+            </a:avLst>
+          </a:prstGeom>
           <a:solidFill xmlns:a="http://schemas.openxmlformats.org/drawingml/2006/main">
-            <a:srgbClr val="CCD9D3"/>
+            <a:srgbClr val="C8FF63"/>
           </a:solidFill>
           <a:ln xmlns:a="http://schemas.openxmlformats.org/drawingml/2006/main" w="0">
             <a:noFill/>
@@ -9689,41 +6823,259 @@
           </a:ln>
         </p:spPr>
       </p:sp>
-      <p:pic>
-        <p:nvPicPr>
-          <p:cNvPr id="19" name="">
-            <a:extLst xmlns:a="http://schemas.openxmlformats.org/drawingml/2006/main">
-              <a:ext uri="{FF2B5EF4-FFF2-40B4-BE49-F238E27FC236}">
-                <a16:creationId xmlns:a16="http://schemas.microsoft.com/office/drawing/2014/main" id="{1921D3FE-3E34-4207-8AFD-3A7632144CDC}"/>
-              </a:ext>
-            </a:extLst>
-          </p:cNvPr>
-          <p:cNvPicPr>
-            <a:picLocks xmlns:a="http://schemas.openxmlformats.org/drawingml/2006/main" noChangeAspect="1"/>
-          </p:cNvPicPr>
+      <p:sp>
+        <p:nvSpPr>
+          <p:cNvPr id="21" name="">
+            <a:extLst xmlns:a="http://schemas.openxmlformats.org/drawingml/2006/main">
+              <a:ext uri="{FF2B5EF4-FFF2-40B4-BE49-F238E27FC236}">
+                <a16:creationId xmlns:a16="http://schemas.microsoft.com/office/drawing/2014/main" id="{87555385-FE01-446B-A45C-BD7D6164C99C}"/>
+              </a:ext>
+            </a:extLst>
+          </p:cNvPr>
+          <p:cNvSpPr>
+            <a:spLocks xmlns:a="http://schemas.openxmlformats.org/drawingml/2006/main" noGrp="1"/>
+          </p:cNvSpPr>
           <p:nvPr/>
-        </p:nvPicPr>
-        <p:blipFill>
-          <a:blip xmlns:r="http://schemas.openxmlformats.org/officeDocument/2006/relationships" xmlns:a="http://schemas.openxmlformats.org/drawingml/2006/main" r:embed="R8fa3f0f09670431a"/>
-          <a:srcRect xmlns:a="http://schemas.openxmlformats.org/drawingml/2006/main" l="2000" t="2000" r="4000" b="4000"/>
-          <a:stretch xmlns:a="http://schemas.openxmlformats.org/drawingml/2006/main"/>
-        </p:blipFill>
-        <p:spPr>
-          <a:xfrm xmlns:a="http://schemas.openxmlformats.org/drawingml/2006/main">
-            <a:off x="6858000" y="1657350"/>
-            <a:ext cx="4724400" cy="4343400"/>
-          </a:xfrm>
-          <a:prstGeom xmlns:a="http://schemas.openxmlformats.org/drawingml/2006/main" prst="roundRect">
-            <a:avLst>
-              <a:gd name="adj" fmla="val 5263"/>
-            </a:avLst>
-          </a:prstGeom>
-        </p:spPr>
-      </p:pic>
+        </p:nvSpPr>
+        <p:spPr>
+          <a:xfrm xmlns:a="http://schemas.openxmlformats.org/drawingml/2006/main">
+            <a:off x="9886950" y="2419350"/>
+            <a:ext cx="1409700" cy="247650"/>
+          </a:xfrm>
+          <a:prstGeom xmlns:a="http://schemas.openxmlformats.org/drawingml/2006/main" prst="rect">
+            <a:avLst/>
+          </a:prstGeom>
+          <a:noFill xmlns:a="http://schemas.openxmlformats.org/drawingml/2006/main"/>
+          <a:ln xmlns:a="http://schemas.openxmlformats.org/drawingml/2006/main" w="0">
+            <a:noFill/>
+            <a:prstDash val="solid"/>
+          </a:ln>
+        </p:spPr>
+        <p:txBody>
+          <a:bodyPr xmlns:a="http://schemas.openxmlformats.org/drawingml/2006/main" anchor="t"/>
+          <a:lstStyle xmlns:a="http://schemas.openxmlformats.org/drawingml/2006/main">
+            <a:defPPr>
+              <a:defRPr sz="1050" b="1">
+                <a:solidFill>
+                  <a:srgbClr val="082B26"/>
+                </a:solidFill>
+              </a:defRPr>
+            </a:defPPr>
+          </a:lstStyle>
+          <a:p xmlns:a="http://schemas.openxmlformats.org/drawingml/2006/main">
+            <a:pPr>
+              <a:defRPr sz="1050" b="1">
+                <a:solidFill>
+                  <a:srgbClr val="082B26"/>
+                </a:solidFill>
+              </a:defRPr>
+            </a:pPr>
+            <a:r>
+              <a:rPr sz="1050" b="1">
+                <a:solidFill>
+                  <a:srgbClr val="082B26"/>
+                </a:solidFill>
+              </a:rPr>
+              <a:t>HUMAN</a:t>
+            </a:r>
+          </a:p>
+        </p:txBody>
+      </p:sp>
+      <p:sp>
+        <p:nvSpPr>
+          <p:cNvPr id="22" name="">
+            <a:extLst xmlns:a="http://schemas.openxmlformats.org/drawingml/2006/main">
+              <a:ext uri="{FF2B5EF4-FFF2-40B4-BE49-F238E27FC236}">
+                <a16:creationId xmlns:a16="http://schemas.microsoft.com/office/drawing/2014/main" id="{934DC786-027D-4448-930B-41D793AFD6CC}"/>
+              </a:ext>
+            </a:extLst>
+          </p:cNvPr>
+          <p:cNvSpPr>
+            <a:spLocks xmlns:a="http://schemas.openxmlformats.org/drawingml/2006/main" noGrp="1"/>
+          </p:cNvSpPr>
+          <p:nvPr/>
+        </p:nvSpPr>
+        <p:spPr>
+          <a:xfrm xmlns:a="http://schemas.openxmlformats.org/drawingml/2006/main">
+            <a:off x="9886950" y="3067050"/>
+            <a:ext cx="1409700" cy="857250"/>
+          </a:xfrm>
+          <a:prstGeom xmlns:a="http://schemas.openxmlformats.org/drawingml/2006/main" prst="rect">
+            <a:avLst/>
+          </a:prstGeom>
+          <a:noFill xmlns:a="http://schemas.openxmlformats.org/drawingml/2006/main"/>
+          <a:ln xmlns:a="http://schemas.openxmlformats.org/drawingml/2006/main" w="0">
+            <a:noFill/>
+            <a:prstDash val="solid"/>
+          </a:ln>
+        </p:spPr>
+        <p:txBody>
+          <a:bodyPr xmlns:a="http://schemas.openxmlformats.org/drawingml/2006/main" anchor="t"/>
+          <a:lstStyle xmlns:a="http://schemas.openxmlformats.org/drawingml/2006/main">
+            <a:defPPr>
+              <a:defRPr sz="1725" b="1">
+                <a:solidFill>
+                  <a:srgbClr val="082B26"/>
+                </a:solidFill>
+              </a:defRPr>
+            </a:defPPr>
+          </a:lstStyle>
+          <a:p xmlns:a="http://schemas.openxmlformats.org/drawingml/2006/main">
+            <a:pPr>
+              <a:defRPr sz="1725" b="1">
+                <a:solidFill>
+                  <a:srgbClr val="082B26"/>
+                </a:solidFill>
+              </a:defRPr>
+            </a:pPr>
+            <a:r>
+              <a:rPr sz="1725" b="1">
+                <a:solidFill>
+                  <a:srgbClr val="082B26"/>
+                </a:solidFill>
+              </a:rPr>
+              <a:t>Review and</a:t>
+            </a:r>
+          </a:p>
+          <a:p xmlns:a="http://schemas.openxmlformats.org/drawingml/2006/main">
+            <a:pPr>
+              <a:defRPr sz="1725" b="1">
+                <a:solidFill>
+                  <a:srgbClr val="082B26"/>
+                </a:solidFill>
+              </a:defRPr>
+            </a:pPr>
+            <a:r>
+              <a:rPr sz="1725" b="1">
+                <a:solidFill>
+                  <a:srgbClr val="082B26"/>
+                </a:solidFill>
+              </a:rPr>
+              <a:t>response</a:t>
+            </a:r>
+          </a:p>
+        </p:txBody>
+      </p:sp>
+      <p:sp>
+        <p:nvSpPr>
+          <p:cNvPr id="23" name="">
+            <a:extLst xmlns:a="http://schemas.openxmlformats.org/drawingml/2006/main">
+              <a:ext uri="{FF2B5EF4-FFF2-40B4-BE49-F238E27FC236}">
+                <a16:creationId xmlns:a16="http://schemas.microsoft.com/office/drawing/2014/main" id="{92073E59-6FC7-466C-AA96-BBBF58691D86}"/>
+              </a:ext>
+            </a:extLst>
+          </p:cNvPr>
+          <p:cNvSpPr>
+            <a:spLocks xmlns:a="http://schemas.openxmlformats.org/drawingml/2006/main" noGrp="1"/>
+          </p:cNvSpPr>
+          <p:nvPr/>
+        </p:nvSpPr>
+        <p:spPr>
+          <a:xfrm xmlns:a="http://schemas.openxmlformats.org/drawingml/2006/main">
+            <a:off x="704850" y="5181600"/>
+            <a:ext cx="8763000" cy="400050"/>
+          </a:xfrm>
+          <a:prstGeom xmlns:a="http://schemas.openxmlformats.org/drawingml/2006/main" prst="rect">
+            <a:avLst/>
+          </a:prstGeom>
+          <a:noFill xmlns:a="http://schemas.openxmlformats.org/drawingml/2006/main"/>
+          <a:ln xmlns:a="http://schemas.openxmlformats.org/drawingml/2006/main" w="0">
+            <a:noFill/>
+            <a:prstDash val="solid"/>
+          </a:ln>
+        </p:spPr>
+        <p:txBody>
+          <a:bodyPr xmlns:a="http://schemas.openxmlformats.org/drawingml/2006/main" anchor="t"/>
+          <a:lstStyle xmlns:a="http://schemas.openxmlformats.org/drawingml/2006/main">
+            <a:defPPr>
+              <a:defRPr sz="1575" b="0">
+                <a:solidFill>
+                  <a:srgbClr val="DCE9E3"/>
+                </a:solidFill>
+              </a:defRPr>
+            </a:defPPr>
+          </a:lstStyle>
+          <a:p xmlns:a="http://schemas.openxmlformats.org/drawingml/2006/main">
+            <a:pPr>
+              <a:defRPr sz="1575" b="0">
+                <a:solidFill>
+                  <a:srgbClr val="DCE9E3"/>
+                </a:solidFill>
+              </a:defRPr>
+            </a:pPr>
+            <a:r>
+              <a:rPr sz="1575" b="0">
+                <a:solidFill>
+                  <a:srgbClr val="DCE9E3"/>
+                </a:solidFill>
+              </a:rPr>
+              <a:t>Frames are processed transiently. SiteGuard stores observations, not footage.</a:t>
+            </a:r>
+          </a:p>
+        </p:txBody>
+      </p:sp>
+      <p:sp>
+        <p:nvSpPr>
+          <p:cNvPr id="24" name="">
+            <a:extLst xmlns:a="http://schemas.openxmlformats.org/drawingml/2006/main">
+              <a:ext uri="{FF2B5EF4-FFF2-40B4-BE49-F238E27FC236}">
+                <a16:creationId xmlns:a16="http://schemas.microsoft.com/office/drawing/2014/main" id="{DE1E7F08-0C37-45BE-856B-AB601F21FE56}"/>
+              </a:ext>
+            </a:extLst>
+          </p:cNvPr>
+          <p:cNvSpPr>
+            <a:spLocks xmlns:a="http://schemas.openxmlformats.org/drawingml/2006/main" noGrp="1"/>
+          </p:cNvSpPr>
+          <p:nvPr/>
+        </p:nvSpPr>
+        <p:spPr>
+          <a:xfrm xmlns:a="http://schemas.openxmlformats.org/drawingml/2006/main">
+            <a:off x="704850" y="5753100"/>
+            <a:ext cx="7810500" cy="323850"/>
+          </a:xfrm>
+          <a:prstGeom xmlns:a="http://schemas.openxmlformats.org/drawingml/2006/main" prst="rect">
+            <a:avLst/>
+          </a:prstGeom>
+          <a:noFill xmlns:a="http://schemas.openxmlformats.org/drawingml/2006/main"/>
+          <a:ln xmlns:a="http://schemas.openxmlformats.org/drawingml/2006/main" w="0">
+            <a:noFill/>
+            <a:prstDash val="solid"/>
+          </a:ln>
+        </p:spPr>
+        <p:txBody>
+          <a:bodyPr xmlns:a="http://schemas.openxmlformats.org/drawingml/2006/main" anchor="t"/>
+          <a:lstStyle xmlns:a="http://schemas.openxmlformats.org/drawingml/2006/main">
+            <a:defPPr>
+              <a:defRPr sz="1275" b="1">
+                <a:solidFill>
+                  <a:srgbClr val="FFD278"/>
+                </a:solidFill>
+              </a:defRPr>
+            </a:defPPr>
+          </a:lstStyle>
+          <a:p xmlns:a="http://schemas.openxmlformats.org/drawingml/2006/main">
+            <a:pPr>
+              <a:defRPr sz="1275" b="1">
+                <a:solidFill>
+                  <a:srgbClr val="FFD278"/>
+                </a:solidFill>
+              </a:defRPr>
+            </a:pPr>
+            <a:r>
+              <a:rPr sz="1275" b="1">
+                <a:solidFill>
+                  <a:srgbClr val="FFD278"/>
+                </a:solidFill>
+              </a:rPr>
+              <a:t>No automatic medical or work-clearance decision.</a:t>
+            </a:r>
+          </a:p>
+        </p:txBody>
+      </p:sp>
     </p:spTree>
     <p:extLst>
       <p:ext uri="{BB962C8B-B14F-4D97-AF65-F5344CB8AC3E}">
-        <p14:creationId xmlns:p14="http://schemas.microsoft.com/office/powerpoint/2010/main" val="762845857"/>
+        <p14:creationId xmlns:p14="http://schemas.microsoft.com/office/powerpoint/2010/main" val="184431387"/>
       </p:ext>
     </p:extLst>
   </p:cSld>
@@ -9731,387 +7083,6 @@
 </file>
 
 <file path=ppt/slides/slide8.xml><?xml version="1.0" encoding="utf-8"?>
-<p:sld xmlns:p="http://schemas.openxmlformats.org/presentationml/2006/main">
-  <p:cSld>
-    <p:bg>
-      <p:bgPr>
-        <a:solidFill xmlns:a="http://schemas.openxmlformats.org/drawingml/2006/main">
-          <a:srgbClr val="0B302A"/>
-        </a:solidFill>
-      </p:bgPr>
-    </p:bg>
-    <p:spTree>
-      <p:nvGrpSpPr>
-        <p:cNvPr id="1" name=""/>
-        <p:cNvGrpSpPr/>
-        <p:nvPr/>
-      </p:nvGrpSpPr>
-      <p:grpSpPr>
-        <a:xfrm xmlns:a="http://schemas.openxmlformats.org/drawingml/2006/main"/>
-      </p:grpSpPr>
-      <p:sp>
-        <p:nvSpPr>
-          <p:cNvPr id="8" name="">
-            <a:extLst xmlns:a="http://schemas.openxmlformats.org/drawingml/2006/main">
-              <a:ext uri="{FF2B5EF4-FFF2-40B4-BE49-F238E27FC236}">
-                <a16:creationId xmlns:a16="http://schemas.microsoft.com/office/drawing/2014/main" id="{38F09ED6-E123-4F9B-8352-BCBD8A628577}"/>
-              </a:ext>
-            </a:extLst>
-          </p:cNvPr>
-          <p:cNvSpPr>
-            <a:spLocks xmlns:a="http://schemas.openxmlformats.org/drawingml/2006/main" noGrp="1"/>
-          </p:cNvSpPr>
-          <p:nvPr/>
-        </p:nvSpPr>
-        <p:spPr>
-          <a:xfrm xmlns:a="http://schemas.openxmlformats.org/drawingml/2006/main">
-            <a:off x="11334750" y="266700"/>
-            <a:ext cx="400050" cy="228600"/>
-          </a:xfrm>
-          <a:prstGeom xmlns:a="http://schemas.openxmlformats.org/drawingml/2006/main" prst="rect">
-            <a:avLst/>
-          </a:prstGeom>
-          <a:noFill xmlns:a="http://schemas.openxmlformats.org/drawingml/2006/main"/>
-          <a:ln xmlns:a="http://schemas.openxmlformats.org/drawingml/2006/main" w="0">
-            <a:noFill/>
-            <a:prstDash val="solid"/>
-          </a:ln>
-        </p:spPr>
-        <p:txBody>
-          <a:bodyPr xmlns:a="http://schemas.openxmlformats.org/drawingml/2006/main" anchor="t"/>
-          <a:lstStyle xmlns:a="http://schemas.openxmlformats.org/drawingml/2006/main">
-            <a:defPPr>
-              <a:defRPr sz="825" b="1" i="0">
-                <a:solidFill>
-                  <a:srgbClr val="DDE9E4"/>
-                </a:solidFill>
-              </a:defRPr>
-            </a:defPPr>
-          </a:lstStyle>
-          <a:p xmlns:a="http://schemas.openxmlformats.org/drawingml/2006/main">
-            <a:pPr>
-              <a:defRPr sz="825" b="1" i="0">
-                <a:solidFill>
-                  <a:srgbClr val="DDE9E4"/>
-                </a:solidFill>
-              </a:defRPr>
-            </a:pPr>
-            <a:r>
-              <a:rPr sz="825" b="1" i="0">
-                <a:solidFill>
-                  <a:srgbClr val="DDE9E4"/>
-                </a:solidFill>
-              </a:rPr>
-              <a:t>08</a:t>
-            </a:r>
-          </a:p>
-        </p:txBody>
-      </p:sp>
-      <p:sp>
-        <p:nvSpPr>
-          <p:cNvPr id="2" name="">
-            <a:extLst xmlns:a="http://schemas.openxmlformats.org/drawingml/2006/main">
-              <a:ext uri="{FF2B5EF4-FFF2-40B4-BE49-F238E27FC236}">
-                <a16:creationId xmlns:a16="http://schemas.microsoft.com/office/drawing/2014/main" id="{F4E7CA26-A17E-4388-949A-A234CA6A3E55}"/>
-              </a:ext>
-            </a:extLst>
-          </p:cNvPr>
-          <p:cNvSpPr>
-            <a:spLocks xmlns:a="http://schemas.openxmlformats.org/drawingml/2006/main" noGrp="1"/>
-          </p:cNvSpPr>
-          <p:nvPr/>
-        </p:nvSpPr>
-        <p:spPr>
-          <a:xfrm xmlns:a="http://schemas.openxmlformats.org/drawingml/2006/main">
-            <a:off x="609600" y="438150"/>
-            <a:ext cx="9906000" cy="552450"/>
-          </a:xfrm>
-          <a:prstGeom xmlns:a="http://schemas.openxmlformats.org/drawingml/2006/main" prst="rect">
-            <a:avLst/>
-          </a:prstGeom>
-          <a:noFill xmlns:a="http://schemas.openxmlformats.org/drawingml/2006/main"/>
-          <a:ln xmlns:a="http://schemas.openxmlformats.org/drawingml/2006/main" w="0">
-            <a:noFill/>
-            <a:prstDash val="solid"/>
-          </a:ln>
-        </p:spPr>
-        <p:txBody>
-          <a:bodyPr xmlns:a="http://schemas.openxmlformats.org/drawingml/2006/main" anchor="t"/>
-          <a:lstStyle xmlns:a="http://schemas.openxmlformats.org/drawingml/2006/main">
-            <a:defPPr>
-              <a:defRPr sz="2550" b="1" i="0">
-                <a:solidFill>
-                  <a:srgbClr val="FFFFFF"/>
-                </a:solidFill>
-              </a:defRPr>
-            </a:defPPr>
-          </a:lstStyle>
-          <a:p xmlns:a="http://schemas.openxmlformats.org/drawingml/2006/main">
-            <a:pPr>
-              <a:defRPr sz="2550" b="1" i="0">
-                <a:solidFill>
-                  <a:srgbClr val="FFFFFF"/>
-                </a:solidFill>
-              </a:defRPr>
-            </a:pPr>
-            <a:r>
-              <a:rPr sz="2550" b="1" i="0">
-                <a:solidFill>
-                  <a:srgbClr val="FFFFFF"/>
-                </a:solidFill>
-              </a:rPr>
-              <a:t>A possible person-down event reaches a human</a:t>
-            </a:r>
-          </a:p>
-        </p:txBody>
-      </p:sp>
-      <p:sp>
-        <p:nvSpPr>
-          <p:cNvPr id="3" name="">
-            <a:extLst xmlns:a="http://schemas.openxmlformats.org/drawingml/2006/main">
-              <a:ext uri="{FF2B5EF4-FFF2-40B4-BE49-F238E27FC236}">
-                <a16:creationId xmlns:a16="http://schemas.microsoft.com/office/drawing/2014/main" id="{6C150961-D39D-455E-93E7-412F15FAB35E}"/>
-              </a:ext>
-            </a:extLst>
-          </p:cNvPr>
-          <p:cNvSpPr>
-            <a:spLocks xmlns:a="http://schemas.openxmlformats.org/drawingml/2006/main" noGrp="1"/>
-          </p:cNvSpPr>
-          <p:nvPr/>
-        </p:nvSpPr>
-        <p:spPr>
-          <a:xfrm xmlns:a="http://schemas.openxmlformats.org/drawingml/2006/main">
-            <a:off x="628650" y="1028700"/>
-            <a:ext cx="9906000" cy="381000"/>
-          </a:xfrm>
-          <a:prstGeom xmlns:a="http://schemas.openxmlformats.org/drawingml/2006/main" prst="rect">
-            <a:avLst/>
-          </a:prstGeom>
-          <a:noFill xmlns:a="http://schemas.openxmlformats.org/drawingml/2006/main"/>
-          <a:ln xmlns:a="http://schemas.openxmlformats.org/drawingml/2006/main" w="0">
-            <a:noFill/>
-            <a:prstDash val="solid"/>
-          </a:ln>
-        </p:spPr>
-        <p:txBody>
-          <a:bodyPr xmlns:a="http://schemas.openxmlformats.org/drawingml/2006/main" anchor="t"/>
-          <a:lstStyle xmlns:a="http://schemas.openxmlformats.org/drawingml/2006/main">
-            <a:defPPr>
-              <a:defRPr sz="1350" b="0" i="0">
-                <a:solidFill>
-                  <a:srgbClr val="DDE9E4"/>
-                </a:solidFill>
-              </a:defRPr>
-            </a:defPPr>
-          </a:lstStyle>
-          <a:p xmlns:a="http://schemas.openxmlformats.org/drawingml/2006/main">
-            <a:pPr>
-              <a:defRPr sz="1350" b="0" i="0">
-                <a:solidFill>
-                  <a:srgbClr val="DDE9E4"/>
-                </a:solidFill>
-              </a:defRPr>
-            </a:pPr>
-            <a:r>
-              <a:rPr sz="1350" b="0" i="0">
-                <a:solidFill>
-                  <a:srgbClr val="DDE9E4"/>
-                </a:solidFill>
-              </a:rPr>
-              <a:t>The vision prototype surfaces the scene for acknowledgement, investigation, and documented resolution.</a:t>
-            </a:r>
-          </a:p>
-        </p:txBody>
-      </p:sp>
-      <p:pic>
-        <p:nvPicPr>
-          <p:cNvPr id="4" name="">
-            <a:extLst xmlns:a="http://schemas.openxmlformats.org/drawingml/2006/main">
-              <a:ext uri="{FF2B5EF4-FFF2-40B4-BE49-F238E27FC236}">
-                <a16:creationId xmlns:a16="http://schemas.microsoft.com/office/drawing/2014/main" id="{8188DBDD-497D-460E-AF1F-819B927FE553}"/>
-              </a:ext>
-            </a:extLst>
-          </p:cNvPr>
-          <p:cNvPicPr>
-            <a:picLocks xmlns:a="http://schemas.openxmlformats.org/drawingml/2006/main" noChangeAspect="1"/>
-          </p:cNvPicPr>
-          <p:nvPr/>
-        </p:nvPicPr>
-        <p:blipFill>
-          <a:blip xmlns:r="http://schemas.openxmlformats.org/officeDocument/2006/relationships" xmlns:a="http://schemas.openxmlformats.org/drawingml/2006/main" r:embed="R360f428fed874f82"/>
-          <a:srcRect xmlns:a="http://schemas.openxmlformats.org/drawingml/2006/main" l="2000" t="2000" r="2000" b="2000"/>
-          <a:stretch xmlns:a="http://schemas.openxmlformats.org/drawingml/2006/main"/>
-        </p:blipFill>
-        <p:spPr>
-          <a:xfrm xmlns:a="http://schemas.openxmlformats.org/drawingml/2006/main">
-            <a:off x="609600" y="1714500"/>
-            <a:ext cx="6858000" cy="4324350"/>
-          </a:xfrm>
-          <a:prstGeom xmlns:a="http://schemas.openxmlformats.org/drawingml/2006/main" prst="roundRect">
-            <a:avLst>
-              <a:gd name="adj" fmla="val 5286"/>
-            </a:avLst>
-          </a:prstGeom>
-        </p:spPr>
-      </p:pic>
-      <p:pic>
-        <p:nvPicPr>
-          <p:cNvPr id="5" name="">
-            <a:extLst xmlns:a="http://schemas.openxmlformats.org/drawingml/2006/main">
-              <a:ext uri="{FF2B5EF4-FFF2-40B4-BE49-F238E27FC236}">
-                <a16:creationId xmlns:a16="http://schemas.microsoft.com/office/drawing/2014/main" id="{749AED53-6320-47D2-B7B4-C403E5AA545B}"/>
-              </a:ext>
-            </a:extLst>
-          </p:cNvPr>
-          <p:cNvPicPr>
-            <a:picLocks xmlns:a="http://schemas.openxmlformats.org/drawingml/2006/main" noChangeAspect="1"/>
-          </p:cNvPicPr>
-          <p:nvPr/>
-        </p:nvPicPr>
-        <p:blipFill>
-          <a:blip xmlns:r="http://schemas.openxmlformats.org/officeDocument/2006/relationships" xmlns:a="http://schemas.openxmlformats.org/drawingml/2006/main" r:embed="Rba89ceaea74240ce"/>
-          <a:srcRect xmlns:a="http://schemas.openxmlformats.org/drawingml/2006/main" l="8000" t="5000" r="4000" b="5000"/>
-          <a:stretch xmlns:a="http://schemas.openxmlformats.org/drawingml/2006/main"/>
-        </p:blipFill>
-        <p:spPr>
-          <a:xfrm xmlns:a="http://schemas.openxmlformats.org/drawingml/2006/main">
-            <a:off x="7810500" y="1714500"/>
-            <a:ext cx="3771900" cy="2857500"/>
-          </a:xfrm>
-          <a:prstGeom xmlns:a="http://schemas.openxmlformats.org/drawingml/2006/main" prst="roundRect">
-            <a:avLst>
-              <a:gd name="adj" fmla="val 8000"/>
-            </a:avLst>
-          </a:prstGeom>
-        </p:spPr>
-      </p:pic>
-      <p:sp>
-        <p:nvSpPr>
-          <p:cNvPr id="6" name="">
-            <a:extLst xmlns:a="http://schemas.openxmlformats.org/drawingml/2006/main">
-              <a:ext uri="{FF2B5EF4-FFF2-40B4-BE49-F238E27FC236}">
-                <a16:creationId xmlns:a16="http://schemas.microsoft.com/office/drawing/2014/main" id="{B017A869-D4AC-4F52-B6B4-4FA5A45E3A76}"/>
-              </a:ext>
-            </a:extLst>
-          </p:cNvPr>
-          <p:cNvSpPr>
-            <a:spLocks xmlns:a="http://schemas.openxmlformats.org/drawingml/2006/main" noGrp="1"/>
-          </p:cNvSpPr>
-          <p:nvPr/>
-        </p:nvSpPr>
-        <p:spPr>
-          <a:xfrm xmlns:a="http://schemas.openxmlformats.org/drawingml/2006/main">
-            <a:off x="7886700" y="4914900"/>
-            <a:ext cx="2476500" cy="266700"/>
-          </a:xfrm>
-          <a:prstGeom xmlns:a="http://schemas.openxmlformats.org/drawingml/2006/main" prst="rect">
-            <a:avLst/>
-          </a:prstGeom>
-          <a:noFill xmlns:a="http://schemas.openxmlformats.org/drawingml/2006/main"/>
-          <a:ln xmlns:a="http://schemas.openxmlformats.org/drawingml/2006/main" w="0">
-            <a:noFill/>
-            <a:prstDash val="solid"/>
-          </a:ln>
-        </p:spPr>
-        <p:txBody>
-          <a:bodyPr xmlns:a="http://schemas.openxmlformats.org/drawingml/2006/main" anchor="t"/>
-          <a:lstStyle xmlns:a="http://schemas.openxmlformats.org/drawingml/2006/main">
-            <a:defPPr>
-              <a:defRPr sz="975" b="1" i="0">
-                <a:solidFill>
-                  <a:srgbClr val="FFCE73"/>
-                </a:solidFill>
-              </a:defRPr>
-            </a:defPPr>
-          </a:lstStyle>
-          <a:p xmlns:a="http://schemas.openxmlformats.org/drawingml/2006/main">
-            <a:pPr>
-              <a:defRPr sz="975" b="1" i="0">
-                <a:solidFill>
-                  <a:srgbClr val="FFCE73"/>
-                </a:solidFill>
-              </a:defRPr>
-            </a:pPr>
-            <a:r>
-              <a:rPr sz="975" b="1" i="0">
-                <a:solidFill>
-                  <a:srgbClr val="FFCE73"/>
-                </a:solidFill>
-              </a:rPr>
-              <a:t>POSSIBLE EVENT</a:t>
-            </a:r>
-          </a:p>
-        </p:txBody>
-      </p:sp>
-      <p:sp>
-        <p:nvSpPr>
-          <p:cNvPr id="7" name="">
-            <a:extLst xmlns:a="http://schemas.openxmlformats.org/drawingml/2006/main">
-              <a:ext uri="{FF2B5EF4-FFF2-40B4-BE49-F238E27FC236}">
-                <a16:creationId xmlns:a16="http://schemas.microsoft.com/office/drawing/2014/main" id="{D7A775C5-D4EB-45D3-9C85-2565CCF9D60E}"/>
-              </a:ext>
-            </a:extLst>
-          </p:cNvPr>
-          <p:cNvSpPr>
-            <a:spLocks xmlns:a="http://schemas.openxmlformats.org/drawingml/2006/main" noGrp="1"/>
-          </p:cNvSpPr>
-          <p:nvPr/>
-        </p:nvSpPr>
-        <p:spPr>
-          <a:xfrm xmlns:a="http://schemas.openxmlformats.org/drawingml/2006/main">
-            <a:off x="7886700" y="5257800"/>
-            <a:ext cx="3429000" cy="704850"/>
-          </a:xfrm>
-          <a:prstGeom xmlns:a="http://schemas.openxmlformats.org/drawingml/2006/main" prst="rect">
-            <a:avLst/>
-          </a:prstGeom>
-          <a:noFill xmlns:a="http://schemas.openxmlformats.org/drawingml/2006/main"/>
-          <a:ln xmlns:a="http://schemas.openxmlformats.org/drawingml/2006/main" w="0">
-            <a:noFill/>
-            <a:prstDash val="solid"/>
-          </a:ln>
-        </p:spPr>
-        <p:txBody>
-          <a:bodyPr xmlns:a="http://schemas.openxmlformats.org/drawingml/2006/main" anchor="t"/>
-          <a:lstStyle xmlns:a="http://schemas.openxmlformats.org/drawingml/2006/main">
-            <a:defPPr>
-              <a:defRPr sz="1800" b="1" i="0">
-                <a:solidFill>
-                  <a:srgbClr val="FFFFFF"/>
-                </a:solidFill>
-              </a:defRPr>
-            </a:defPPr>
-          </a:lstStyle>
-          <a:p xmlns:a="http://schemas.openxmlformats.org/drawingml/2006/main">
-            <a:pPr>
-              <a:defRPr sz="1800" b="1" i="0">
-                <a:solidFill>
-                  <a:srgbClr val="FFFFFF"/>
-                </a:solidFill>
-              </a:defRPr>
-            </a:pPr>
-            <a:r>
-              <a:rPr sz="1800" b="1" i="0">
-                <a:solidFill>
-                  <a:srgbClr val="FFFFFF"/>
-                </a:solidFill>
-              </a:rPr>
-              <a:t>A heuristic raises the review. A person closes it.</a:t>
-            </a:r>
-          </a:p>
-        </p:txBody>
-      </p:sp>
-    </p:spTree>
-    <p:extLst>
-      <p:ext uri="{BB962C8B-B14F-4D97-AF65-F5344CB8AC3E}">
-        <p14:creationId xmlns:p14="http://schemas.microsoft.com/office/powerpoint/2010/main" val="2070852525"/>
-      </p:ext>
-    </p:extLst>
-  </p:cSld>
-</p:sld>
-</file>
-
-<file path=ppt/slides/slide9.xml><?xml version="1.0" encoding="utf-8"?>
 <p:sld xmlns:p="http://schemas.openxmlformats.org/presentationml/2006/main">
   <p:cSld>
     <p:bg>
@@ -10132,10 +7103,10 @@
       </p:grpSpPr>
       <p:sp>
         <p:nvSpPr>
-          <p:cNvPr id="20" name="">
-            <a:extLst xmlns:a="http://schemas.openxmlformats.org/drawingml/2006/main">
-              <a:ext uri="{FF2B5EF4-FFF2-40B4-BE49-F238E27FC236}">
-                <a16:creationId xmlns:a16="http://schemas.microsoft.com/office/drawing/2014/main" id="{1344F813-FE82-4FF6-9480-F66261BC1B03}"/>
+          <p:cNvPr id="15" name="">
+            <a:extLst xmlns:a="http://schemas.openxmlformats.org/drawingml/2006/main">
+              <a:ext uri="{FF2B5EF4-FFF2-40B4-BE49-F238E27FC236}">
+                <a16:creationId xmlns:a16="http://schemas.microsoft.com/office/drawing/2014/main" id="{1AE39C0F-084A-48FD-9513-359ED03B5F2E}"/>
               </a:ext>
             </a:extLst>
           </p:cNvPr>
@@ -10146,8 +7117,8 @@
         </p:nvSpPr>
         <p:spPr>
           <a:xfrm xmlns:a="http://schemas.openxmlformats.org/drawingml/2006/main">
-            <a:off x="11334750" y="266700"/>
-            <a:ext cx="400050" cy="228600"/>
+            <a:off x="11410950" y="285750"/>
+            <a:ext cx="342900" cy="209550"/>
           </a:xfrm>
           <a:prstGeom xmlns:a="http://schemas.openxmlformats.org/drawingml/2006/main" prst="rect">
             <a:avLst/>
@@ -10162,28 +7133,28 @@
           <a:bodyPr xmlns:a="http://schemas.openxmlformats.org/drawingml/2006/main" anchor="t"/>
           <a:lstStyle xmlns:a="http://schemas.openxmlformats.org/drawingml/2006/main">
             <a:defPPr>
-              <a:defRPr sz="825" b="1" i="0">
-                <a:solidFill>
-                  <a:srgbClr val="65786F"/>
+              <a:defRPr sz="825" b="1">
+                <a:solidFill>
+                  <a:srgbClr val="61756C"/>
                 </a:solidFill>
               </a:defRPr>
             </a:defPPr>
           </a:lstStyle>
           <a:p xmlns:a="http://schemas.openxmlformats.org/drawingml/2006/main">
             <a:pPr>
-              <a:defRPr sz="825" b="1" i="0">
-                <a:solidFill>
-                  <a:srgbClr val="65786F"/>
+              <a:defRPr sz="825" b="1">
+                <a:solidFill>
+                  <a:srgbClr val="61756C"/>
                 </a:solidFill>
               </a:defRPr>
             </a:pPr>
             <a:r>
-              <a:rPr sz="825" b="1" i="0">
-                <a:solidFill>
-                  <a:srgbClr val="65786F"/>
+              <a:rPr sz="825" b="1">
+                <a:solidFill>
+                  <a:srgbClr val="61756C"/>
                 </a:solidFill>
               </a:rPr>
-              <a:t>09</a:t>
+              <a:t>08</a:t>
             </a:r>
           </a:p>
         </p:txBody>
@@ -10193,7 +7164,7 @@
           <p:cNvPr id="2" name="">
             <a:extLst xmlns:a="http://schemas.openxmlformats.org/drawingml/2006/main">
               <a:ext uri="{FF2B5EF4-FFF2-40B4-BE49-F238E27FC236}">
-                <a16:creationId xmlns:a16="http://schemas.microsoft.com/office/drawing/2014/main" id="{AAF0F99E-D9A9-442E-B44C-A1CC86655F7F}"/>
+                <a16:creationId xmlns:a16="http://schemas.microsoft.com/office/drawing/2014/main" id="{740B8E93-355C-4717-9B8A-0106A2D3BCF1}"/>
               </a:ext>
             </a:extLst>
           </p:cNvPr>
@@ -10205,7 +7176,7 @@
         <p:spPr>
           <a:xfrm xmlns:a="http://schemas.openxmlformats.org/drawingml/2006/main">
             <a:off x="609600" y="457200"/>
-            <a:ext cx="7239000" cy="552450"/>
+            <a:ext cx="7239000" cy="609600"/>
           </a:xfrm>
           <a:prstGeom xmlns:a="http://schemas.openxmlformats.org/drawingml/2006/main" prst="rect">
             <a:avLst/>
@@ -10220,28 +7191,28 @@
           <a:bodyPr xmlns:a="http://schemas.openxmlformats.org/drawingml/2006/main" anchor="t"/>
           <a:lstStyle xmlns:a="http://schemas.openxmlformats.org/drawingml/2006/main">
             <a:defPPr>
-              <a:defRPr sz="2550" b="1" i="0">
-                <a:solidFill>
-                  <a:srgbClr val="0B302A"/>
+              <a:defRPr sz="3150" b="1">
+                <a:solidFill>
+                  <a:srgbClr val="082B26"/>
                 </a:solidFill>
               </a:defRPr>
             </a:defPPr>
           </a:lstStyle>
           <a:p xmlns:a="http://schemas.openxmlformats.org/drawingml/2006/main">
             <a:pPr>
-              <a:defRPr sz="2550" b="1" i="0">
-                <a:solidFill>
-                  <a:srgbClr val="0B302A"/>
+              <a:defRPr sz="3150" b="1">
+                <a:solidFill>
+                  <a:srgbClr val="082B26"/>
                 </a:solidFill>
               </a:defRPr>
             </a:pPr>
             <a:r>
-              <a:rPr sz="2550" b="1" i="0">
-                <a:solidFill>
-                  <a:srgbClr val="0B302A"/>
+              <a:rPr sz="3150" b="1">
+                <a:solidFill>
+                  <a:srgbClr val="082B26"/>
                 </a:solidFill>
               </a:rPr>
-              <a:t>What the team proved</a:t>
+              <a:t>What we proved</a:t>
             </a:r>
           </a:p>
         </p:txBody>
@@ -10251,7 +7222,7 @@
           <p:cNvPr id="3" name="">
             <a:extLst xmlns:a="http://schemas.openxmlformats.org/drawingml/2006/main">
               <a:ext uri="{FF2B5EF4-FFF2-40B4-BE49-F238E27FC236}">
-                <a16:creationId xmlns:a16="http://schemas.microsoft.com/office/drawing/2014/main" id="{93220C02-C8B0-4E3C-8764-4618EA9EEE1B}"/>
+                <a16:creationId xmlns:a16="http://schemas.microsoft.com/office/drawing/2014/main" id="{DA5A586B-402E-43EE-AE8D-04BBE36A6445}"/>
               </a:ext>
             </a:extLst>
           </p:cNvPr>
@@ -10262,8 +7233,8 @@
         </p:nvSpPr>
         <p:spPr>
           <a:xfrm xmlns:a="http://schemas.openxmlformats.org/drawingml/2006/main">
-            <a:off x="628650" y="1028700"/>
-            <a:ext cx="7239000" cy="342900"/>
+            <a:off x="685800" y="1790700"/>
+            <a:ext cx="2190750" cy="666750"/>
           </a:xfrm>
           <a:prstGeom xmlns:a="http://schemas.openxmlformats.org/drawingml/2006/main" prst="rect">
             <a:avLst/>
@@ -10278,28 +7249,28 @@
           <a:bodyPr xmlns:a="http://schemas.openxmlformats.org/drawingml/2006/main" anchor="t"/>
           <a:lstStyle xmlns:a="http://schemas.openxmlformats.org/drawingml/2006/main">
             <a:defPPr>
-              <a:defRPr sz="1350" b="0" i="0">
-                <a:solidFill>
-                  <a:srgbClr val="65786F"/>
+              <a:defRPr sz="3375" b="1">
+                <a:solidFill>
+                  <a:srgbClr val="082B26"/>
                 </a:solidFill>
               </a:defRPr>
             </a:defPPr>
           </a:lstStyle>
           <a:p xmlns:a="http://schemas.openxmlformats.org/drawingml/2006/main">
             <a:pPr>
-              <a:defRPr sz="1350" b="0" i="0">
-                <a:solidFill>
-                  <a:srgbClr val="65786F"/>
+              <a:defRPr sz="3375" b="1">
+                <a:solidFill>
+                  <a:srgbClr val="082B26"/>
                 </a:solidFill>
               </a:defRPr>
             </a:pPr>
             <a:r>
-              <a:rPr sz="1350" b="0" i="0">
-                <a:solidFill>
-                  <a:srgbClr val="65786F"/>
+              <a:rPr sz="3375" b="1">
+                <a:solidFill>
+                  <a:srgbClr val="082B26"/>
                 </a:solidFill>
               </a:rPr>
-              <a:t>Evidence from the repository and recorded rehearsal</a:t>
+              <a:t>11 / 11</a:t>
             </a:r>
           </a:p>
         </p:txBody>
@@ -10309,7 +7280,7 @@
           <p:cNvPr id="4" name="">
             <a:extLst xmlns:a="http://schemas.openxmlformats.org/drawingml/2006/main">
               <a:ext uri="{FF2B5EF4-FFF2-40B4-BE49-F238E27FC236}">
-                <a16:creationId xmlns:a16="http://schemas.microsoft.com/office/drawing/2014/main" id="{D0D71DBB-5A1B-4A12-93BA-05702FD400D7}"/>
+                <a16:creationId xmlns:a16="http://schemas.microsoft.com/office/drawing/2014/main" id="{EED211BD-0667-471D-9347-43DF3066FE76}"/>
               </a:ext>
             </a:extLst>
           </p:cNvPr>
@@ -10320,8 +7291,8 @@
         </p:nvSpPr>
         <p:spPr>
           <a:xfrm xmlns:a="http://schemas.openxmlformats.org/drawingml/2006/main">
-            <a:off x="704850" y="1828800"/>
-            <a:ext cx="2000250" cy="571500"/>
+            <a:off x="3067050" y="1905000"/>
+            <a:ext cx="6191250" cy="457200"/>
           </a:xfrm>
           <a:prstGeom xmlns:a="http://schemas.openxmlformats.org/drawingml/2006/main" prst="rect">
             <a:avLst/>
@@ -10336,28 +7307,28 @@
           <a:bodyPr xmlns:a="http://schemas.openxmlformats.org/drawingml/2006/main" anchor="t"/>
           <a:lstStyle xmlns:a="http://schemas.openxmlformats.org/drawingml/2006/main">
             <a:defPPr>
-              <a:defRPr sz="2850" b="1" i="0">
-                <a:solidFill>
-                  <a:srgbClr val="0B302A"/>
+              <a:defRPr sz="1875" b="1">
+                <a:solidFill>
+                  <a:srgbClr val="082B26"/>
                 </a:solidFill>
               </a:defRPr>
             </a:defPPr>
           </a:lstStyle>
           <a:p xmlns:a="http://schemas.openxmlformats.org/drawingml/2006/main">
             <a:pPr>
-              <a:defRPr sz="2850" b="1" i="0">
-                <a:solidFill>
-                  <a:srgbClr val="0B302A"/>
+              <a:defRPr sz="1875" b="1">
+                <a:solidFill>
+                  <a:srgbClr val="082B26"/>
                 </a:solidFill>
               </a:defRPr>
             </a:pPr>
             <a:r>
-              <a:rPr sz="2850" b="1" i="0">
-                <a:solidFill>
-                  <a:srgbClr val="0B302A"/>
+              <a:rPr sz="1875" b="1">
+                <a:solidFill>
+                  <a:srgbClr val="082B26"/>
                 </a:solidFill>
               </a:rPr>
-              <a:t>11 / 11</a:t>
+              <a:t>Core rehearsal steps passed</a:t>
             </a:r>
           </a:p>
         </p:txBody>
@@ -10367,7 +7338,7 @@
           <p:cNvPr id="5" name="">
             <a:extLst xmlns:a="http://schemas.openxmlformats.org/drawingml/2006/main">
               <a:ext uri="{FF2B5EF4-FFF2-40B4-BE49-F238E27FC236}">
-                <a16:creationId xmlns:a16="http://schemas.microsoft.com/office/drawing/2014/main" id="{E1FFF429-0AE5-47D1-8C26-58AFFF478594}"/>
+                <a16:creationId xmlns:a16="http://schemas.microsoft.com/office/drawing/2014/main" id="{71BAF953-A716-4BC2-8317-67F87676EFC0}"/>
               </a:ext>
             </a:extLst>
           </p:cNvPr>
@@ -10378,8 +7349,39 @@
         </p:nvSpPr>
         <p:spPr>
           <a:xfrm xmlns:a="http://schemas.openxmlformats.org/drawingml/2006/main">
-            <a:off x="2857500" y="1847850"/>
-            <a:ext cx="4191000" cy="323850"/>
+            <a:off x="685800" y="2686050"/>
+            <a:ext cx="10001250" cy="19050"/>
+          </a:xfrm>
+          <a:prstGeom xmlns:a="http://schemas.openxmlformats.org/drawingml/2006/main" prst="rect">
+            <a:avLst/>
+          </a:prstGeom>
+          <a:solidFill xmlns:a="http://schemas.openxmlformats.org/drawingml/2006/main">
+            <a:srgbClr val="DCE9E3"/>
+          </a:solidFill>
+          <a:ln xmlns:a="http://schemas.openxmlformats.org/drawingml/2006/main" w="0">
+            <a:noFill/>
+            <a:prstDash val="solid"/>
+          </a:ln>
+        </p:spPr>
+      </p:sp>
+      <p:sp>
+        <p:nvSpPr>
+          <p:cNvPr id="6" name="">
+            <a:extLst xmlns:a="http://schemas.openxmlformats.org/drawingml/2006/main">
+              <a:ext uri="{FF2B5EF4-FFF2-40B4-BE49-F238E27FC236}">
+                <a16:creationId xmlns:a16="http://schemas.microsoft.com/office/drawing/2014/main" id="{37401488-9F6E-4298-AC8C-E07129EC4456}"/>
+              </a:ext>
+            </a:extLst>
+          </p:cNvPr>
+          <p:cNvSpPr>
+            <a:spLocks xmlns:a="http://schemas.openxmlformats.org/drawingml/2006/main" noGrp="1"/>
+          </p:cNvSpPr>
+          <p:nvPr/>
+        </p:nvSpPr>
+        <p:spPr>
+          <a:xfrm xmlns:a="http://schemas.openxmlformats.org/drawingml/2006/main">
+            <a:off x="685800" y="3048000"/>
+            <a:ext cx="2190750" cy="666750"/>
           </a:xfrm>
           <a:prstGeom xmlns:a="http://schemas.openxmlformats.org/drawingml/2006/main" prst="rect">
             <a:avLst/>
@@ -10394,38 +7396,38 @@
           <a:bodyPr xmlns:a="http://schemas.openxmlformats.org/drawingml/2006/main" anchor="t"/>
           <a:lstStyle xmlns:a="http://schemas.openxmlformats.org/drawingml/2006/main">
             <a:defPPr>
-              <a:defRPr sz="1800" b="1" i="0">
-                <a:solidFill>
-                  <a:srgbClr val="0B302A"/>
+              <a:defRPr sz="3375" b="1">
+                <a:solidFill>
+                  <a:srgbClr val="0D4D40"/>
                 </a:solidFill>
               </a:defRPr>
             </a:defPPr>
           </a:lstStyle>
           <a:p xmlns:a="http://schemas.openxmlformats.org/drawingml/2006/main">
             <a:pPr>
-              <a:defRPr sz="1800" b="1" i="0">
-                <a:solidFill>
-                  <a:srgbClr val="0B302A"/>
+              <a:defRPr sz="3375" b="1">
+                <a:solidFill>
+                  <a:srgbClr val="0D4D40"/>
                 </a:solidFill>
               </a:defRPr>
             </a:pPr>
             <a:r>
-              <a:rPr sz="1800" b="1" i="0">
-                <a:solidFill>
-                  <a:srgbClr val="0B302A"/>
+              <a:rPr sz="3375" b="1">
+                <a:solidFill>
+                  <a:srgbClr val="0D4D40"/>
                 </a:solidFill>
               </a:rPr>
-              <a:t>Core rehearsal beats passed</a:t>
-            </a:r>
-          </a:p>
-        </p:txBody>
-      </p:sp>
-      <p:sp>
-        <p:nvSpPr>
-          <p:cNvPr id="6" name="">
-            <a:extLst xmlns:a="http://schemas.openxmlformats.org/drawingml/2006/main">
-              <a:ext uri="{FF2B5EF4-FFF2-40B4-BE49-F238E27FC236}">
-                <a16:creationId xmlns:a16="http://schemas.microsoft.com/office/drawing/2014/main" id="{0954D593-6729-4873-AD41-13FEF6B74123}"/>
+              <a:t>PASS</a:t>
+            </a:r>
+          </a:p>
+        </p:txBody>
+      </p:sp>
+      <p:sp>
+        <p:nvSpPr>
+          <p:cNvPr id="7" name="">
+            <a:extLst xmlns:a="http://schemas.openxmlformats.org/drawingml/2006/main">
+              <a:ext uri="{FF2B5EF4-FFF2-40B4-BE49-F238E27FC236}">
+                <a16:creationId xmlns:a16="http://schemas.microsoft.com/office/drawing/2014/main" id="{A54E4090-E21E-418A-B1C7-A01FD73FF3E8}"/>
               </a:ext>
             </a:extLst>
           </p:cNvPr>
@@ -10436,8 +7438,8 @@
         </p:nvSpPr>
         <p:spPr>
           <a:xfrm xmlns:a="http://schemas.openxmlformats.org/drawingml/2006/main">
-            <a:off x="2857500" y="2247900"/>
-            <a:ext cx="5905500" cy="323850"/>
+            <a:off x="3067050" y="3162300"/>
+            <a:ext cx="6191250" cy="457200"/>
           </a:xfrm>
           <a:prstGeom xmlns:a="http://schemas.openxmlformats.org/drawingml/2006/main" prst="rect">
             <a:avLst/>
@@ -10452,38 +7454,38 @@
           <a:bodyPr xmlns:a="http://schemas.openxmlformats.org/drawingml/2006/main" anchor="t"/>
           <a:lstStyle xmlns:a="http://schemas.openxmlformats.org/drawingml/2006/main">
             <a:defPPr>
-              <a:defRPr sz="1275" b="0" i="0">
-                <a:solidFill>
-                  <a:srgbClr val="65786F"/>
+              <a:defRPr sz="1875" b="1">
+                <a:solidFill>
+                  <a:srgbClr val="082B26"/>
                 </a:solidFill>
               </a:defRPr>
             </a:defPPr>
           </a:lstStyle>
           <a:p xmlns:a="http://schemas.openxmlformats.org/drawingml/2006/main">
             <a:pPr>
-              <a:defRPr sz="1275" b="0" i="0">
-                <a:solidFill>
-                  <a:srgbClr val="65786F"/>
+              <a:defRPr sz="1875" b="1">
+                <a:solidFill>
+                  <a:srgbClr val="082B26"/>
                 </a:solidFill>
               </a:defRPr>
             </a:pPr>
             <a:r>
-              <a:rPr sz="1275" b="0" i="0">
-                <a:solidFill>
-                  <a:srgbClr val="65786F"/>
+              <a:rPr sz="1875" b="1">
+                <a:solidFill>
+                  <a:srgbClr val="082B26"/>
                 </a:solidFill>
               </a:rPr>
-              <a:t>Real browser, production build, synthetic data</a:t>
-            </a:r>
-          </a:p>
-        </p:txBody>
-      </p:sp>
-      <p:sp>
-        <p:nvSpPr>
-          <p:cNvPr id="7" name="">
-            <a:extLst xmlns:a="http://schemas.openxmlformats.org/drawingml/2006/main">
-              <a:ext uri="{FF2B5EF4-FFF2-40B4-BE49-F238E27FC236}">
-                <a16:creationId xmlns:a16="http://schemas.microsoft.com/office/drawing/2014/main" id="{DC3F5862-206E-418D-ACC9-6216AA8101AA}"/>
+              <a:t>Tiger Cloud verification</a:t>
+            </a:r>
+          </a:p>
+        </p:txBody>
+      </p:sp>
+      <p:sp>
+        <p:nvSpPr>
+          <p:cNvPr id="8" name="">
+            <a:extLst xmlns:a="http://schemas.openxmlformats.org/drawingml/2006/main">
+              <a:ext uri="{FF2B5EF4-FFF2-40B4-BE49-F238E27FC236}">
+                <a16:creationId xmlns:a16="http://schemas.microsoft.com/office/drawing/2014/main" id="{2EBCD426-F25E-4472-BC64-8C948CECE9C1}"/>
               </a:ext>
             </a:extLst>
           </p:cNvPr>
@@ -10494,14 +7496,14 @@
         </p:nvSpPr>
         <p:spPr>
           <a:xfrm xmlns:a="http://schemas.openxmlformats.org/drawingml/2006/main">
-            <a:off x="685800" y="2762250"/>
-            <a:ext cx="10572750" cy="9525"/>
+            <a:off x="685800" y="3943350"/>
+            <a:ext cx="10001250" cy="19050"/>
           </a:xfrm>
           <a:prstGeom xmlns:a="http://schemas.openxmlformats.org/drawingml/2006/main" prst="rect">
             <a:avLst/>
           </a:prstGeom>
           <a:solidFill xmlns:a="http://schemas.openxmlformats.org/drawingml/2006/main">
-            <a:srgbClr val="D6E0DB"/>
+            <a:srgbClr val="DCE9E3"/>
           </a:solidFill>
           <a:ln xmlns:a="http://schemas.openxmlformats.org/drawingml/2006/main" w="0">
             <a:noFill/>
@@ -10511,10 +7513,10 @@
       </p:sp>
       <p:sp>
         <p:nvSpPr>
-          <p:cNvPr id="8" name="">
-            <a:extLst xmlns:a="http://schemas.openxmlformats.org/drawingml/2006/main">
-              <a:ext uri="{FF2B5EF4-FFF2-40B4-BE49-F238E27FC236}">
-                <a16:creationId xmlns:a16="http://schemas.microsoft.com/office/drawing/2014/main" id="{736FC94A-5898-43DD-B9C5-47C51702A6C9}"/>
+          <p:cNvPr id="9" name="">
+            <a:extLst xmlns:a="http://schemas.openxmlformats.org/drawingml/2006/main">
+              <a:ext uri="{FF2B5EF4-FFF2-40B4-BE49-F238E27FC236}">
+                <a16:creationId xmlns:a16="http://schemas.microsoft.com/office/drawing/2014/main" id="{B2B44AAF-4145-4998-984D-E1D9DC2CEA70}"/>
               </a:ext>
             </a:extLst>
           </p:cNvPr>
@@ -10525,8 +7527,8 @@
         </p:nvSpPr>
         <p:spPr>
           <a:xfrm xmlns:a="http://schemas.openxmlformats.org/drawingml/2006/main">
-            <a:off x="704850" y="3124200"/>
-            <a:ext cx="2000250" cy="571500"/>
+            <a:off x="685800" y="4305300"/>
+            <a:ext cx="2190750" cy="666750"/>
           </a:xfrm>
           <a:prstGeom xmlns:a="http://schemas.openxmlformats.org/drawingml/2006/main" prst="rect">
             <a:avLst/>
@@ -10541,38 +7543,38 @@
           <a:bodyPr xmlns:a="http://schemas.openxmlformats.org/drawingml/2006/main" anchor="t"/>
           <a:lstStyle xmlns:a="http://schemas.openxmlformats.org/drawingml/2006/main">
             <a:defPPr>
-              <a:defRPr sz="2850" b="1" i="0">
-                <a:solidFill>
-                  <a:srgbClr val="174C3F"/>
+              <a:defRPr sz="3375" b="1">
+                <a:solidFill>
+                  <a:srgbClr val="082B26"/>
                 </a:solidFill>
               </a:defRPr>
             </a:defPPr>
           </a:lstStyle>
           <a:p xmlns:a="http://schemas.openxmlformats.org/drawingml/2006/main">
             <a:pPr>
-              <a:defRPr sz="2850" b="1" i="0">
-                <a:solidFill>
-                  <a:srgbClr val="174C3F"/>
+              <a:defRPr sz="3375" b="1">
+                <a:solidFill>
+                  <a:srgbClr val="082B26"/>
                 </a:solidFill>
               </a:defRPr>
             </a:pPr>
             <a:r>
-              <a:rPr sz="2850" b="1" i="0">
-                <a:solidFill>
-                  <a:srgbClr val="174C3F"/>
+              <a:rPr sz="3375" b="1">
+                <a:solidFill>
+                  <a:srgbClr val="082B26"/>
                 </a:solidFill>
               </a:rPr>
-              <a:t>PASS</a:t>
-            </a:r>
-          </a:p>
-        </p:txBody>
-      </p:sp>
-      <p:sp>
-        <p:nvSpPr>
-          <p:cNvPr id="9" name="">
-            <a:extLst xmlns:a="http://schemas.openxmlformats.org/drawingml/2006/main">
-              <a:ext uri="{FF2B5EF4-FFF2-40B4-BE49-F238E27FC236}">
-                <a16:creationId xmlns:a16="http://schemas.microsoft.com/office/drawing/2014/main" id="{315DA15C-426A-44A5-8834-8C0F39A2289A}"/>
+              <a:t>36</a:t>
+            </a:r>
+          </a:p>
+        </p:txBody>
+      </p:sp>
+      <p:sp>
+        <p:nvSpPr>
+          <p:cNvPr id="10" name="">
+            <a:extLst xmlns:a="http://schemas.openxmlformats.org/drawingml/2006/main">
+              <a:ext uri="{FF2B5EF4-FFF2-40B4-BE49-F238E27FC236}">
+                <a16:creationId xmlns:a16="http://schemas.microsoft.com/office/drawing/2014/main" id="{C4039958-5373-42BB-A66D-C84B08F1F818}"/>
               </a:ext>
             </a:extLst>
           </p:cNvPr>
@@ -10583,8 +7585,8 @@
         </p:nvSpPr>
         <p:spPr>
           <a:xfrm xmlns:a="http://schemas.openxmlformats.org/drawingml/2006/main">
-            <a:off x="2857500" y="3143250"/>
-            <a:ext cx="4191000" cy="323850"/>
+            <a:off x="3067050" y="4419600"/>
+            <a:ext cx="6191250" cy="457200"/>
           </a:xfrm>
           <a:prstGeom xmlns:a="http://schemas.openxmlformats.org/drawingml/2006/main" prst="rect">
             <a:avLst/>
@@ -10599,38 +7601,38 @@
           <a:bodyPr xmlns:a="http://schemas.openxmlformats.org/drawingml/2006/main" anchor="t"/>
           <a:lstStyle xmlns:a="http://schemas.openxmlformats.org/drawingml/2006/main">
             <a:defPPr>
-              <a:defRPr sz="1800" b="1" i="0">
-                <a:solidFill>
-                  <a:srgbClr val="0B302A"/>
+              <a:defRPr sz="1875" b="1">
+                <a:solidFill>
+                  <a:srgbClr val="082B26"/>
                 </a:solidFill>
               </a:defRPr>
             </a:defPPr>
           </a:lstStyle>
           <a:p xmlns:a="http://schemas.openxmlformats.org/drawingml/2006/main">
             <a:pPr>
-              <a:defRPr sz="1800" b="1" i="0">
-                <a:solidFill>
-                  <a:srgbClr val="0B302A"/>
+              <a:defRPr sz="1875" b="1">
+                <a:solidFill>
+                  <a:srgbClr val="082B26"/>
                 </a:solidFill>
               </a:defRPr>
             </a:pPr>
             <a:r>
-              <a:rPr sz="1800" b="1" i="0">
-                <a:solidFill>
-                  <a:srgbClr val="0B302A"/>
+              <a:rPr sz="1875" b="1">
+                <a:solidFill>
+                  <a:srgbClr val="082B26"/>
                 </a:solidFill>
               </a:rPr>
-              <a:t>Tiger Data verification</a:t>
-            </a:r>
-          </a:p>
-        </p:txBody>
-      </p:sp>
-      <p:sp>
-        <p:nvSpPr>
-          <p:cNvPr id="10" name="">
-            <a:extLst xmlns:a="http://schemas.openxmlformats.org/drawingml/2006/main">
-              <a:ext uri="{FF2B5EF4-FFF2-40B4-BE49-F238E27FC236}">
-                <a16:creationId xmlns:a16="http://schemas.microsoft.com/office/drawing/2014/main" id="{55332F07-E46C-43AF-92E1-4C4D6656CF8D}"/>
+              <a:t>Fall prototype tests passed</a:t>
+            </a:r>
+          </a:p>
+        </p:txBody>
+      </p:sp>
+      <p:sp>
+        <p:nvSpPr>
+          <p:cNvPr id="11" name="">
+            <a:extLst xmlns:a="http://schemas.openxmlformats.org/drawingml/2006/main">
+              <a:ext uri="{FF2B5EF4-FFF2-40B4-BE49-F238E27FC236}">
+                <a16:creationId xmlns:a16="http://schemas.microsoft.com/office/drawing/2014/main" id="{03B86AE5-F460-4AE9-88BA-45FA1DF10BDD}"/>
               </a:ext>
             </a:extLst>
           </p:cNvPr>
@@ -10641,8 +7643,72 @@
         </p:nvSpPr>
         <p:spPr>
           <a:xfrm xmlns:a="http://schemas.openxmlformats.org/drawingml/2006/main">
-            <a:off x="2857500" y="3543300"/>
-            <a:ext cx="5905500" cy="323850"/>
+            <a:off x="685800" y="5200650"/>
+            <a:ext cx="10001250" cy="19050"/>
+          </a:xfrm>
+          <a:prstGeom xmlns:a="http://schemas.openxmlformats.org/drawingml/2006/main" prst="rect">
+            <a:avLst/>
+          </a:prstGeom>
+          <a:solidFill xmlns:a="http://schemas.openxmlformats.org/drawingml/2006/main">
+            <a:srgbClr val="DCE9E3"/>
+          </a:solidFill>
+          <a:ln xmlns:a="http://schemas.openxmlformats.org/drawingml/2006/main" w="0">
+            <a:noFill/>
+            <a:prstDash val="solid"/>
+          </a:ln>
+        </p:spPr>
+      </p:sp>
+      <p:sp>
+        <p:nvSpPr>
+          <p:cNvPr id="12" name="">
+            <a:extLst xmlns:a="http://schemas.openxmlformats.org/drawingml/2006/main">
+              <a:ext uri="{FF2B5EF4-FFF2-40B4-BE49-F238E27FC236}">
+                <a16:creationId xmlns:a16="http://schemas.microsoft.com/office/drawing/2014/main" id="{F2BA0D17-6959-40D4-B915-7BEDF88577CF}"/>
+              </a:ext>
+            </a:extLst>
+          </p:cNvPr>
+          <p:cNvSpPr>
+            <a:spLocks xmlns:a="http://schemas.openxmlformats.org/drawingml/2006/main" noGrp="1"/>
+          </p:cNvSpPr>
+          <p:nvPr/>
+        </p:nvSpPr>
+        <p:spPr>
+          <a:xfrm xmlns:a="http://schemas.openxmlformats.org/drawingml/2006/main">
+            <a:off x="9144000" y="1524000"/>
+            <a:ext cx="2381250" cy="3848100"/>
+          </a:xfrm>
+          <a:prstGeom xmlns:a="http://schemas.openxmlformats.org/drawingml/2006/main" prst="roundRect">
+            <a:avLst>
+              <a:gd name="adj" fmla="val 11200"/>
+            </a:avLst>
+          </a:prstGeom>
+          <a:solidFill xmlns:a="http://schemas.openxmlformats.org/drawingml/2006/main">
+            <a:srgbClr val="082B26"/>
+          </a:solidFill>
+          <a:ln xmlns:a="http://schemas.openxmlformats.org/drawingml/2006/main" w="0">
+            <a:noFill/>
+            <a:prstDash val="solid"/>
+          </a:ln>
+        </p:spPr>
+      </p:sp>
+      <p:sp>
+        <p:nvSpPr>
+          <p:cNvPr id="13" name="">
+            <a:extLst xmlns:a="http://schemas.openxmlformats.org/drawingml/2006/main">
+              <a:ext uri="{FF2B5EF4-FFF2-40B4-BE49-F238E27FC236}">
+                <a16:creationId xmlns:a16="http://schemas.microsoft.com/office/drawing/2014/main" id="{8EA885A6-A047-45D3-8FEE-5AF79FF5DE7A}"/>
+              </a:ext>
+            </a:extLst>
+          </p:cNvPr>
+          <p:cNvSpPr>
+            <a:spLocks xmlns:a="http://schemas.openxmlformats.org/drawingml/2006/main" noGrp="1"/>
+          </p:cNvSpPr>
+          <p:nvPr/>
+        </p:nvSpPr>
+        <p:spPr>
+          <a:xfrm xmlns:a="http://schemas.openxmlformats.org/drawingml/2006/main">
+            <a:off x="9505950" y="1924050"/>
+            <a:ext cx="1657350" cy="266700"/>
           </a:xfrm>
           <a:prstGeom xmlns:a="http://schemas.openxmlformats.org/drawingml/2006/main" prst="rect">
             <a:avLst/>
@@ -10657,38 +7723,38 @@
           <a:bodyPr xmlns:a="http://schemas.openxmlformats.org/drawingml/2006/main" anchor="t"/>
           <a:lstStyle xmlns:a="http://schemas.openxmlformats.org/drawingml/2006/main">
             <a:defPPr>
-              <a:defRPr sz="1275" b="0" i="0">
-                <a:solidFill>
-                  <a:srgbClr val="65786F"/>
+              <a:defRPr sz="1050" b="1">
+                <a:solidFill>
+                  <a:srgbClr val="C8FF63"/>
                 </a:solidFill>
               </a:defRPr>
             </a:defPPr>
           </a:lstStyle>
           <a:p xmlns:a="http://schemas.openxmlformats.org/drawingml/2006/main">
             <a:pPr>
-              <a:defRPr sz="1275" b="0" i="0">
-                <a:solidFill>
-                  <a:srgbClr val="65786F"/>
+              <a:defRPr sz="1050" b="1">
+                <a:solidFill>
+                  <a:srgbClr val="C8FF63"/>
                 </a:solidFill>
               </a:defRPr>
             </a:pPr>
             <a:r>
-              <a:rPr sz="1275" b="0" i="0">
-                <a:solidFill>
-                  <a:srgbClr val="65786F"/>
+              <a:rPr sz="1050" b="1">
+                <a:solidFill>
+                  <a:srgbClr val="C8FF63"/>
                 </a:solidFill>
               </a:rPr>
-              <a:t>PostgreSQL 18.6, TLS 1.3, TimescaleDB 2.30.2</a:t>
-            </a:r>
-          </a:p>
-        </p:txBody>
-      </p:sp>
-      <p:sp>
-        <p:nvSpPr>
-          <p:cNvPr id="11" name="">
-            <a:extLst xmlns:a="http://schemas.openxmlformats.org/drawingml/2006/main">
-              <a:ext uri="{FF2B5EF4-FFF2-40B4-BE49-F238E27FC236}">
-                <a16:creationId xmlns:a16="http://schemas.microsoft.com/office/drawing/2014/main" id="{BDE4BC32-ACCE-4A2D-AE3B-D50C769A159F}"/>
+              <a:t>NEXT</a:t>
+            </a:r>
+          </a:p>
+        </p:txBody>
+      </p:sp>
+      <p:sp>
+        <p:nvSpPr>
+          <p:cNvPr id="14" name="">
+            <a:extLst xmlns:a="http://schemas.openxmlformats.org/drawingml/2006/main">
+              <a:ext uri="{FF2B5EF4-FFF2-40B4-BE49-F238E27FC236}">
+                <a16:creationId xmlns:a16="http://schemas.microsoft.com/office/drawing/2014/main" id="{E593A6D2-A3D8-4D7F-86A5-7A0BA51BE3C0}"/>
               </a:ext>
             </a:extLst>
           </p:cNvPr>
@@ -10699,39 +7765,8 @@
         </p:nvSpPr>
         <p:spPr>
           <a:xfrm xmlns:a="http://schemas.openxmlformats.org/drawingml/2006/main">
-            <a:off x="685800" y="4057650"/>
-            <a:ext cx="10572750" cy="9525"/>
-          </a:xfrm>
-          <a:prstGeom xmlns:a="http://schemas.openxmlformats.org/drawingml/2006/main" prst="rect">
-            <a:avLst/>
-          </a:prstGeom>
-          <a:solidFill xmlns:a="http://schemas.openxmlformats.org/drawingml/2006/main">
-            <a:srgbClr val="D6E0DB"/>
-          </a:solidFill>
-          <a:ln xmlns:a="http://schemas.openxmlformats.org/drawingml/2006/main" w="0">
-            <a:noFill/>
-            <a:prstDash val="solid"/>
-          </a:ln>
-        </p:spPr>
-      </p:sp>
-      <p:sp>
-        <p:nvSpPr>
-          <p:cNvPr id="12" name="">
-            <a:extLst xmlns:a="http://schemas.openxmlformats.org/drawingml/2006/main">
-              <a:ext uri="{FF2B5EF4-FFF2-40B4-BE49-F238E27FC236}">
-                <a16:creationId xmlns:a16="http://schemas.microsoft.com/office/drawing/2014/main" id="{660466FE-E00D-4F41-9493-DBE8A1FA0DF1}"/>
-              </a:ext>
-            </a:extLst>
-          </p:cNvPr>
-          <p:cNvSpPr>
-            <a:spLocks xmlns:a="http://schemas.openxmlformats.org/drawingml/2006/main" noGrp="1"/>
-          </p:cNvSpPr>
-          <p:nvPr/>
-        </p:nvSpPr>
-        <p:spPr>
-          <a:xfrm xmlns:a="http://schemas.openxmlformats.org/drawingml/2006/main">
-            <a:off x="704850" y="4419600"/>
-            <a:ext cx="2000250" cy="571500"/>
+            <a:off x="9448800" y="2628900"/>
+            <a:ext cx="1771650" cy="2190750"/>
           </a:xfrm>
           <a:prstGeom xmlns:a="http://schemas.openxmlformats.org/drawingml/2006/main" prst="rect">
             <a:avLst/>
@@ -10746,38 +7781,111 @@
           <a:bodyPr xmlns:a="http://schemas.openxmlformats.org/drawingml/2006/main" anchor="t"/>
           <a:lstStyle xmlns:a="http://schemas.openxmlformats.org/drawingml/2006/main">
             <a:defPPr>
-              <a:defRPr sz="2850" b="1" i="0">
-                <a:solidFill>
-                  <a:srgbClr val="0B302A"/>
+              <a:defRPr sz="1875" b="1">
+                <a:solidFill>
+                  <a:srgbClr val="FFFFFF"/>
                 </a:solidFill>
               </a:defRPr>
             </a:defPPr>
           </a:lstStyle>
           <a:p xmlns:a="http://schemas.openxmlformats.org/drawingml/2006/main">
             <a:pPr>
-              <a:defRPr sz="2850" b="1" i="0">
-                <a:solidFill>
-                  <a:srgbClr val="0B302A"/>
+              <a:defRPr sz="1875" b="1">
+                <a:solidFill>
+                  <a:srgbClr val="FFFFFF"/>
                 </a:solidFill>
               </a:defRPr>
             </a:pPr>
             <a:r>
-              <a:rPr sz="2850" b="1" i="0">
-                <a:solidFill>
-                  <a:srgbClr val="0B302A"/>
+              <a:rPr sz="1875" b="1">
+                <a:solidFill>
+                  <a:srgbClr val="FFFFFF"/>
                 </a:solidFill>
               </a:rPr>
-              <a:t>36</a:t>
-            </a:r>
-          </a:p>
-        </p:txBody>
-      </p:sp>
-      <p:sp>
-        <p:nvSpPr>
-          <p:cNvPr id="13" name="">
-            <a:extLst xmlns:a="http://schemas.openxmlformats.org/drawingml/2006/main">
-              <a:ext uri="{FF2B5EF4-FFF2-40B4-BE49-F238E27FC236}">
-                <a16:creationId xmlns:a16="http://schemas.microsoft.com/office/drawing/2014/main" id="{FF0A9D20-4F19-4980-92C0-51A3CD05CCFE}"/>
+              <a:t>Reliable mobile capture</a:t>
+            </a:r>
+          </a:p>
+          <a:p xmlns:a="http://schemas.openxmlformats.org/drawingml/2006/main">
+            <a:r>
+              <a:t/>
+            </a:r>
+          </a:p>
+          <a:p xmlns:a="http://schemas.openxmlformats.org/drawingml/2006/main">
+            <a:pPr>
+              <a:defRPr sz="1875" b="1">
+                <a:solidFill>
+                  <a:srgbClr val="FFFFFF"/>
+                </a:solidFill>
+              </a:defRPr>
+            </a:pPr>
+            <a:r>
+              <a:rPr sz="1875" b="1">
+                <a:solidFill>
+                  <a:srgbClr val="FFFFFF"/>
+                </a:solidFill>
+              </a:rPr>
+              <a:t>Labeled-data evaluation</a:t>
+            </a:r>
+          </a:p>
+          <a:p xmlns:a="http://schemas.openxmlformats.org/drawingml/2006/main">
+            <a:r>
+              <a:t/>
+            </a:r>
+          </a:p>
+          <a:p xmlns:a="http://schemas.openxmlformats.org/drawingml/2006/main">
+            <a:pPr>
+              <a:defRPr sz="1875" b="1">
+                <a:solidFill>
+                  <a:srgbClr val="FFFFFF"/>
+                </a:solidFill>
+              </a:defRPr>
+            </a:pPr>
+            <a:r>
+              <a:rPr sz="1875" b="1">
+                <a:solidFill>
+                  <a:srgbClr val="FFFFFF"/>
+                </a:solidFill>
+              </a:rPr>
+              <a:t>On-site pilot</a:t>
+            </a:r>
+          </a:p>
+        </p:txBody>
+      </p:sp>
+    </p:spTree>
+    <p:extLst>
+      <p:ext uri="{BB962C8B-B14F-4D97-AF65-F5344CB8AC3E}">
+        <p14:creationId xmlns:p14="http://schemas.microsoft.com/office/powerpoint/2010/main" val="531954408"/>
+      </p:ext>
+    </p:extLst>
+  </p:cSld>
+</p:sld>
+</file>
+
+<file path=ppt/slides/slide9.xml><?xml version="1.0" encoding="utf-8"?>
+<p:sld xmlns:p="http://schemas.openxmlformats.org/presentationml/2006/main">
+  <p:cSld>
+    <p:bg>
+      <p:bgPr>
+        <a:solidFill xmlns:a="http://schemas.openxmlformats.org/drawingml/2006/main">
+          <a:srgbClr val="082B26"/>
+        </a:solidFill>
+      </p:bgPr>
+    </p:bg>
+    <p:spTree>
+      <p:nvGrpSpPr>
+        <p:cNvPr id="1" name=""/>
+        <p:cNvGrpSpPr/>
+        <p:nvPr/>
+      </p:nvGrpSpPr>
+      <p:grpSpPr>
+        <a:xfrm xmlns:a="http://schemas.openxmlformats.org/drawingml/2006/main"/>
+      </p:grpSpPr>
+      <p:sp>
+        <p:nvSpPr>
+          <p:cNvPr id="7" name="">
+            <a:extLst xmlns:a="http://schemas.openxmlformats.org/drawingml/2006/main">
+              <a:ext uri="{FF2B5EF4-FFF2-40B4-BE49-F238E27FC236}">
+                <a16:creationId xmlns:a16="http://schemas.microsoft.com/office/drawing/2014/main" id="{CD99421D-571A-49A3-A691-B531F71B1C81}"/>
               </a:ext>
             </a:extLst>
           </p:cNvPr>
@@ -10788,8 +7896,69 @@
         </p:nvSpPr>
         <p:spPr>
           <a:xfrm xmlns:a="http://schemas.openxmlformats.org/drawingml/2006/main">
-            <a:off x="2857500" y="4438650"/>
-            <a:ext cx="4191000" cy="323850"/>
+            <a:off x="4743450" y="495300"/>
+            <a:ext cx="2705100" cy="1009650"/>
+          </a:xfrm>
+          <a:prstGeom xmlns:a="http://schemas.openxmlformats.org/drawingml/2006/main" prst="roundRect">
+            <a:avLst>
+              <a:gd name="adj" fmla="val 20755"/>
+            </a:avLst>
+          </a:prstGeom>
+          <a:solidFill xmlns:a="http://schemas.openxmlformats.org/drawingml/2006/main">
+            <a:srgbClr val="F5F7F2"/>
+          </a:solidFill>
+          <a:ln xmlns:a="http://schemas.openxmlformats.org/drawingml/2006/main" w="0">
+            <a:noFill/>
+            <a:prstDash val="solid"/>
+          </a:ln>
+        </p:spPr>
+      </p:sp>
+      <p:pic>
+        <p:nvPicPr>
+          <p:cNvPr id="2" name="">
+            <a:extLst xmlns:a="http://schemas.openxmlformats.org/drawingml/2006/main">
+              <a:ext uri="{FF2B5EF4-FFF2-40B4-BE49-F238E27FC236}">
+                <a16:creationId xmlns:a16="http://schemas.microsoft.com/office/drawing/2014/main" id="{AE1FB6FF-8021-4144-AEC0-DF174C83FE73}"/>
+              </a:ext>
+            </a:extLst>
+          </p:cNvPr>
+          <p:cNvPicPr>
+            <a:picLocks xmlns:a="http://schemas.openxmlformats.org/drawingml/2006/main" noChangeAspect="1"/>
+          </p:cNvPicPr>
+          <p:nvPr/>
+        </p:nvPicPr>
+        <p:blipFill>
+          <a:blip xmlns:r="http://schemas.openxmlformats.org/officeDocument/2006/relationships" xmlns:a="http://schemas.openxmlformats.org/drawingml/2006/main" r:embed="Re16eab715d8644ed"/>
+          <a:stretch xmlns:a="http://schemas.openxmlformats.org/drawingml/2006/main"/>
+        </p:blipFill>
+        <p:spPr>
+          <a:xfrm xmlns:a="http://schemas.openxmlformats.org/drawingml/2006/main">
+            <a:off x="5038725" y="647700"/>
+            <a:ext cx="2114550" cy="704850"/>
+          </a:xfrm>
+          <a:prstGeom xmlns:a="http://schemas.openxmlformats.org/drawingml/2006/main" prst="rect">
+            <a:avLst/>
+          </a:prstGeom>
+        </p:spPr>
+      </p:pic>
+      <p:sp>
+        <p:nvSpPr>
+          <p:cNvPr id="3" name="">
+            <a:extLst xmlns:a="http://schemas.openxmlformats.org/drawingml/2006/main">
+              <a:ext uri="{FF2B5EF4-FFF2-40B4-BE49-F238E27FC236}">
+                <a16:creationId xmlns:a16="http://schemas.microsoft.com/office/drawing/2014/main" id="{E9A74A56-2A08-4E25-9E86-4BE7757C9865}"/>
+              </a:ext>
+            </a:extLst>
+          </p:cNvPr>
+          <p:cNvSpPr>
+            <a:spLocks xmlns:a="http://schemas.openxmlformats.org/drawingml/2006/main" noGrp="1"/>
+          </p:cNvSpPr>
+          <p:nvPr/>
+        </p:nvSpPr>
+        <p:spPr>
+          <a:xfrm xmlns:a="http://schemas.openxmlformats.org/drawingml/2006/main">
+            <a:off x="1600200" y="2095500"/>
+            <a:ext cx="8991600" cy="1428750"/>
           </a:xfrm>
           <a:prstGeom xmlns:a="http://schemas.openxmlformats.org/drawingml/2006/main" prst="rect">
             <a:avLst/>
@@ -10804,38 +7973,55 @@
           <a:bodyPr xmlns:a="http://schemas.openxmlformats.org/drawingml/2006/main" anchor="t"/>
           <a:lstStyle xmlns:a="http://schemas.openxmlformats.org/drawingml/2006/main">
             <a:defPPr>
-              <a:defRPr sz="1800" b="1" i="0">
-                <a:solidFill>
-                  <a:srgbClr val="0B302A"/>
+              <a:defRPr sz="4650" b="1">
+                <a:solidFill>
+                  <a:srgbClr val="FFFFFF"/>
                 </a:solidFill>
               </a:defRPr>
             </a:defPPr>
           </a:lstStyle>
           <a:p xmlns:a="http://schemas.openxmlformats.org/drawingml/2006/main">
             <a:pPr>
-              <a:defRPr sz="1800" b="1" i="0">
-                <a:solidFill>
-                  <a:srgbClr val="0B302A"/>
+              <a:defRPr sz="4650" b="1">
+                <a:solidFill>
+                  <a:srgbClr val="FFFFFF"/>
                 </a:solidFill>
               </a:defRPr>
             </a:pPr>
             <a:r>
-              <a:rPr sz="1800" b="1" i="0">
-                <a:solidFill>
-                  <a:srgbClr val="0B302A"/>
+              <a:rPr sz="4650" b="1">
+                <a:solidFill>
+                  <a:srgbClr val="FFFFFF"/>
                 </a:solidFill>
               </a:rPr>
-              <a:t>Fall prototype tests passed</a:t>
-            </a:r>
-          </a:p>
-        </p:txBody>
-      </p:sp>
-      <p:sp>
-        <p:nvSpPr>
-          <p:cNvPr id="14" name="">
-            <a:extLst xmlns:a="http://schemas.openxmlformats.org/drawingml/2006/main">
-              <a:ext uri="{FF2B5EF4-FFF2-40B4-BE49-F238E27FC236}">
-                <a16:creationId xmlns:a16="http://schemas.microsoft.com/office/drawing/2014/main" id="{EDC1185F-73A4-429A-BDDD-1F086CE476FD}"/>
+              <a:t>People first.</a:t>
+            </a:r>
+          </a:p>
+          <a:p xmlns:a="http://schemas.openxmlformats.org/drawingml/2006/main">
+            <a:pPr>
+              <a:defRPr sz="4650" b="1">
+                <a:solidFill>
+                  <a:srgbClr val="FFFFFF"/>
+                </a:solidFill>
+              </a:defRPr>
+            </a:pPr>
+            <a:r>
+              <a:rPr sz="4650" b="1">
+                <a:solidFill>
+                  <a:srgbClr val="FFFFFF"/>
+                </a:solidFill>
+              </a:rPr>
+              <a:t>Every shift.</a:t>
+            </a:r>
+          </a:p>
+        </p:txBody>
+      </p:sp>
+      <p:sp>
+        <p:nvSpPr>
+          <p:cNvPr id="4" name="">
+            <a:extLst xmlns:a="http://schemas.openxmlformats.org/drawingml/2006/main">
+              <a:ext uri="{FF2B5EF4-FFF2-40B4-BE49-F238E27FC236}">
+                <a16:creationId xmlns:a16="http://schemas.microsoft.com/office/drawing/2014/main" id="{F70DB476-D6E2-4202-B870-2DD07B7189E3}"/>
               </a:ext>
             </a:extLst>
           </p:cNvPr>
@@ -10846,8 +8032,8 @@
         </p:nvSpPr>
         <p:spPr>
           <a:xfrm xmlns:a="http://schemas.openxmlformats.org/drawingml/2006/main">
-            <a:off x="2857500" y="4838700"/>
-            <a:ext cx="5905500" cy="323850"/>
+            <a:off x="1809750" y="3790950"/>
+            <a:ext cx="8572500" cy="457200"/>
           </a:xfrm>
           <a:prstGeom xmlns:a="http://schemas.openxmlformats.org/drawingml/2006/main" prst="rect">
             <a:avLst/>
@@ -10862,38 +8048,38 @@
           <a:bodyPr xmlns:a="http://schemas.openxmlformats.org/drawingml/2006/main" anchor="t"/>
           <a:lstStyle xmlns:a="http://schemas.openxmlformats.org/drawingml/2006/main">
             <a:defPPr>
-              <a:defRPr sz="1275" b="0" i="0">
-                <a:solidFill>
-                  <a:srgbClr val="65786F"/>
+              <a:defRPr sz="1800" b="0">
+                <a:solidFill>
+                  <a:srgbClr val="DCE9E3"/>
                 </a:solidFill>
               </a:defRPr>
             </a:defPPr>
           </a:lstStyle>
           <a:p xmlns:a="http://schemas.openxmlformats.org/drawingml/2006/main">
             <a:pPr>
-              <a:defRPr sz="1275" b="0" i="0">
-                <a:solidFill>
-                  <a:srgbClr val="65786F"/>
+              <a:defRPr sz="1800" b="0">
+                <a:solidFill>
+                  <a:srgbClr val="DCE9E3"/>
                 </a:solidFill>
               </a:defRPr>
             </a:pPr>
             <a:r>
-              <a:rPr sz="1275" b="0" i="0">
-                <a:solidFill>
-                  <a:srgbClr val="65786F"/>
+              <a:rPr sz="1800" b="0">
+                <a:solidFill>
+                  <a:srgbClr val="DCE9E3"/>
                 </a:solidFill>
               </a:rPr>
-              <a:t>Synthetic demo and human closure workflow</a:t>
-            </a:r>
-          </a:p>
-        </p:txBody>
-      </p:sp>
-      <p:sp>
-        <p:nvSpPr>
-          <p:cNvPr id="15" name="">
-            <a:extLst xmlns:a="http://schemas.openxmlformats.org/drawingml/2006/main">
-              <a:ext uri="{FF2B5EF4-FFF2-40B4-BE49-F238E27FC236}">
-                <a16:creationId xmlns:a16="http://schemas.microsoft.com/office/drawing/2014/main" id="{4469F58E-D57B-4488-87E4-97CF5FE7437C}"/>
+              <a:t>A worker-controlled check-in. A visible request. A human response.</a:t>
+            </a:r>
+          </a:p>
+        </p:txBody>
+      </p:sp>
+      <p:sp>
+        <p:nvSpPr>
+          <p:cNvPr id="5" name="">
+            <a:extLst xmlns:a="http://schemas.openxmlformats.org/drawingml/2006/main">
+              <a:ext uri="{FF2B5EF4-FFF2-40B4-BE49-F238E27FC236}">
+                <a16:creationId xmlns:a16="http://schemas.microsoft.com/office/drawing/2014/main" id="{DDFF35CA-C32A-4B71-B3FD-B7D7EFC84B2F}"/>
               </a:ext>
             </a:extLst>
           </p:cNvPr>
@@ -10904,72 +8090,8 @@
         </p:nvSpPr>
         <p:spPr>
           <a:xfrm xmlns:a="http://schemas.openxmlformats.org/drawingml/2006/main">
-            <a:off x="685800" y="5353050"/>
-            <a:ext cx="10572750" cy="9525"/>
-          </a:xfrm>
-          <a:prstGeom xmlns:a="http://schemas.openxmlformats.org/drawingml/2006/main" prst="rect">
-            <a:avLst/>
-          </a:prstGeom>
-          <a:solidFill xmlns:a="http://schemas.openxmlformats.org/drawingml/2006/main">
-            <a:srgbClr val="D6E0DB"/>
-          </a:solidFill>
-          <a:ln xmlns:a="http://schemas.openxmlformats.org/drawingml/2006/main" w="0">
-            <a:noFill/>
-            <a:prstDash val="solid"/>
-          </a:ln>
-        </p:spPr>
-      </p:sp>
-      <p:sp>
-        <p:nvSpPr>
-          <p:cNvPr id="16" name="">
-            <a:extLst xmlns:a="http://schemas.openxmlformats.org/drawingml/2006/main">
-              <a:ext uri="{FF2B5EF4-FFF2-40B4-BE49-F238E27FC236}">
-                <a16:creationId xmlns:a16="http://schemas.microsoft.com/office/drawing/2014/main" id="{658C12A1-D90D-4E59-9B39-2BA1D034A449}"/>
-              </a:ext>
-            </a:extLst>
-          </p:cNvPr>
-          <p:cNvSpPr>
-            <a:spLocks xmlns:a="http://schemas.openxmlformats.org/drawingml/2006/main" noGrp="1"/>
-          </p:cNvSpPr>
-          <p:nvPr/>
-        </p:nvSpPr>
-        <p:spPr>
-          <a:xfrm xmlns:a="http://schemas.openxmlformats.org/drawingml/2006/main">
-            <a:off x="8858250" y="1771650"/>
-            <a:ext cx="2419350" cy="3848100"/>
-          </a:xfrm>
-          <a:prstGeom xmlns:a="http://schemas.openxmlformats.org/drawingml/2006/main" prst="roundRect">
-            <a:avLst>
-              <a:gd name="adj" fmla="val 9449"/>
-            </a:avLst>
-          </a:prstGeom>
-          <a:solidFill xmlns:a="http://schemas.openxmlformats.org/drawingml/2006/main">
-            <a:srgbClr val="0B302A"/>
-          </a:solidFill>
-          <a:ln xmlns:a="http://schemas.openxmlformats.org/drawingml/2006/main" w="0">
-            <a:noFill/>
-            <a:prstDash val="solid"/>
-          </a:ln>
-        </p:spPr>
-      </p:sp>
-      <p:sp>
-        <p:nvSpPr>
-          <p:cNvPr id="17" name="">
-            <a:extLst xmlns:a="http://schemas.openxmlformats.org/drawingml/2006/main">
-              <a:ext uri="{FF2B5EF4-FFF2-40B4-BE49-F238E27FC236}">
-                <a16:creationId xmlns:a16="http://schemas.microsoft.com/office/drawing/2014/main" id="{C5FD2B43-0EB7-436F-8E81-784D20E74469}"/>
-              </a:ext>
-            </a:extLst>
-          </p:cNvPr>
-          <p:cNvSpPr>
-            <a:spLocks xmlns:a="http://schemas.openxmlformats.org/drawingml/2006/main" noGrp="1"/>
-          </p:cNvSpPr>
-          <p:nvPr/>
-        </p:nvSpPr>
-        <p:spPr>
-          <a:xfrm xmlns:a="http://schemas.openxmlformats.org/drawingml/2006/main">
-            <a:off x="9105900" y="2095500"/>
-            <a:ext cx="1885950" cy="266700"/>
+            <a:off x="1619250" y="5143500"/>
+            <a:ext cx="8953500" cy="285750"/>
           </a:xfrm>
           <a:prstGeom xmlns:a="http://schemas.openxmlformats.org/drawingml/2006/main" prst="rect">
             <a:avLst/>
@@ -10984,38 +8106,38 @@
           <a:bodyPr xmlns:a="http://schemas.openxmlformats.org/drawingml/2006/main" anchor="t"/>
           <a:lstStyle xmlns:a="http://schemas.openxmlformats.org/drawingml/2006/main">
             <a:defPPr>
-              <a:defRPr sz="1050" b="1" i="0">
-                <a:solidFill>
-                  <a:srgbClr val="C9FF65"/>
+              <a:defRPr sz="1125" b="1">
+                <a:solidFill>
+                  <a:srgbClr val="C8FF63"/>
                 </a:solidFill>
               </a:defRPr>
             </a:defPPr>
           </a:lstStyle>
           <a:p xmlns:a="http://schemas.openxmlformats.org/drawingml/2006/main">
             <a:pPr>
-              <a:defRPr sz="1050" b="1" i="0">
-                <a:solidFill>
-                  <a:srgbClr val="C9FF65"/>
+              <a:defRPr sz="1125" b="1">
+                <a:solidFill>
+                  <a:srgbClr val="C8FF63"/>
                 </a:solidFill>
               </a:defRPr>
             </a:pPr>
             <a:r>
-              <a:rPr sz="1050" b="1" i="0">
-                <a:solidFill>
-                  <a:srgbClr val="C9FF65"/>
+              <a:rPr sz="1125" b="1">
+                <a:solidFill>
+                  <a:srgbClr val="C8FF63"/>
                 </a:solidFill>
               </a:rPr>
-              <a:t>NEXT</a:t>
-            </a:r>
-          </a:p>
-        </p:txBody>
-      </p:sp>
-      <p:sp>
-        <p:nvSpPr>
-          <p:cNvPr id="18" name="">
-            <a:extLst xmlns:a="http://schemas.openxmlformats.org/drawingml/2006/main">
-              <a:ext uri="{FF2B5EF4-FFF2-40B4-BE49-F238E27FC236}">
-                <a16:creationId xmlns:a16="http://schemas.microsoft.com/office/drawing/2014/main" id="{47A3A28D-7AED-47D1-9CCC-DB4BCC842590}"/>
+              <a:t>BEST USE OF PRESAGE     BEST USE OF GEMINI API     BEST USE OF TIGER DATA</a:t>
+            </a:r>
+          </a:p>
+        </p:txBody>
+      </p:sp>
+      <p:sp>
+        <p:nvSpPr>
+          <p:cNvPr id="6" name="">
+            <a:extLst xmlns:a="http://schemas.openxmlformats.org/drawingml/2006/main">
+              <a:ext uri="{FF2B5EF4-FFF2-40B4-BE49-F238E27FC236}">
+                <a16:creationId xmlns:a16="http://schemas.microsoft.com/office/drawing/2014/main" id="{36471AD7-9225-465D-A8C7-8604629D0885}"/>
               </a:ext>
             </a:extLst>
           </p:cNvPr>
@@ -11026,8 +8148,8 @@
         </p:nvSpPr>
         <p:spPr>
           <a:xfrm xmlns:a="http://schemas.openxmlformats.org/drawingml/2006/main">
-            <a:off x="9105900" y="2705100"/>
-            <a:ext cx="1885950" cy="2381250"/>
+            <a:off x="3714750" y="6057900"/>
+            <a:ext cx="4762500" cy="247650"/>
           </a:xfrm>
           <a:prstGeom xmlns:a="http://schemas.openxmlformats.org/drawingml/2006/main" prst="rect">
             <a:avLst/>
@@ -11042,130 +8164,28 @@
           <a:bodyPr xmlns:a="http://schemas.openxmlformats.org/drawingml/2006/main" anchor="t"/>
           <a:lstStyle xmlns:a="http://schemas.openxmlformats.org/drawingml/2006/main">
             <a:defPPr>
-              <a:defRPr sz="1725" b="1" i="0">
-                <a:solidFill>
-                  <a:srgbClr val="FFFFFF"/>
+              <a:defRPr sz="1050" b="1">
+                <a:solidFill>
+                  <a:srgbClr val="FFD278"/>
                 </a:solidFill>
               </a:defRPr>
             </a:defPPr>
           </a:lstStyle>
           <a:p xmlns:a="http://schemas.openxmlformats.org/drawingml/2006/main">
             <a:pPr>
-              <a:defRPr sz="1725" b="1" i="0">
-                <a:solidFill>
-                  <a:srgbClr val="FFFFFF"/>
+              <a:defRPr sz="1050" b="1">
+                <a:solidFill>
+                  <a:srgbClr val="FFD278"/>
                 </a:solidFill>
               </a:defRPr>
             </a:pPr>
             <a:r>
-              <a:rPr sz="1725" b="1" i="0">
-                <a:solidFill>
-                  <a:srgbClr val="FFFFFF"/>
+              <a:rPr sz="1050" b="1">
+                <a:solidFill>
+                  <a:srgbClr val="FFD278"/>
                 </a:solidFill>
               </a:rPr>
-              <a:t>Reliable mobile capture</a:t>
-            </a:r>
-          </a:p>
-          <a:p xmlns:a="http://schemas.openxmlformats.org/drawingml/2006/main">
-            <a:r>
-              <a:t/>
-            </a:r>
-          </a:p>
-          <a:p xmlns:a="http://schemas.openxmlformats.org/drawingml/2006/main">
-            <a:pPr>
-              <a:defRPr sz="1725" b="1" i="0">
-                <a:solidFill>
-                  <a:srgbClr val="FFFFFF"/>
-                </a:solidFill>
-              </a:defRPr>
-            </a:pPr>
-            <a:r>
-              <a:rPr sz="1725" b="1" i="0">
-                <a:solidFill>
-                  <a:srgbClr val="FFFFFF"/>
-                </a:solidFill>
-              </a:rPr>
-              <a:t>Labeled-data evaluation</a:t>
-            </a:r>
-          </a:p>
-          <a:p xmlns:a="http://schemas.openxmlformats.org/drawingml/2006/main">
-            <a:r>
-              <a:t/>
-            </a:r>
-          </a:p>
-          <a:p xmlns:a="http://schemas.openxmlformats.org/drawingml/2006/main">
-            <a:pPr>
-              <a:defRPr sz="1725" b="1" i="0">
-                <a:solidFill>
-                  <a:srgbClr val="FFFFFF"/>
-                </a:solidFill>
-              </a:defRPr>
-            </a:pPr>
-            <a:r>
-              <a:rPr sz="1725" b="1" i="0">
-                <a:solidFill>
-                  <a:srgbClr val="FFFFFF"/>
-                </a:solidFill>
-              </a:rPr>
-              <a:t>On-site pilot</a:t>
-            </a:r>
-          </a:p>
-        </p:txBody>
-      </p:sp>
-      <p:sp>
-        <p:nvSpPr>
-          <p:cNvPr id="19" name="">
-            <a:extLst xmlns:a="http://schemas.openxmlformats.org/drawingml/2006/main">
-              <a:ext uri="{FF2B5EF4-FFF2-40B4-BE49-F238E27FC236}">
-                <a16:creationId xmlns:a16="http://schemas.microsoft.com/office/drawing/2014/main" id="{331EAA8E-323C-4210-8C77-611ADF0F669C}"/>
-              </a:ext>
-            </a:extLst>
-          </p:cNvPr>
-          <p:cNvSpPr>
-            <a:spLocks xmlns:a="http://schemas.openxmlformats.org/drawingml/2006/main" noGrp="1"/>
-          </p:cNvSpPr>
-          <p:nvPr/>
-        </p:nvSpPr>
-        <p:spPr>
-          <a:xfrm xmlns:a="http://schemas.openxmlformats.org/drawingml/2006/main">
-            <a:off x="685800" y="6115050"/>
-            <a:ext cx="7810500" cy="247650"/>
-          </a:xfrm>
-          <a:prstGeom xmlns:a="http://schemas.openxmlformats.org/drawingml/2006/main" prst="rect">
-            <a:avLst/>
-          </a:prstGeom>
-          <a:noFill xmlns:a="http://schemas.openxmlformats.org/drawingml/2006/main"/>
-          <a:ln xmlns:a="http://schemas.openxmlformats.org/drawingml/2006/main" w="0">
-            <a:noFill/>
-            <a:prstDash val="solid"/>
-          </a:ln>
-        </p:spPr>
-        <p:txBody>
-          <a:bodyPr xmlns:a="http://schemas.openxmlformats.org/drawingml/2006/main" anchor="t"/>
-          <a:lstStyle xmlns:a="http://schemas.openxmlformats.org/drawingml/2006/main">
-            <a:defPPr>
-              <a:defRPr sz="1050" b="0" i="0">
-                <a:solidFill>
-                  <a:srgbClr val="65786F"/>
-                </a:solidFill>
-              </a:defRPr>
-            </a:defPPr>
-          </a:lstStyle>
-          <a:p xmlns:a="http://schemas.openxmlformats.org/drawingml/2006/main">
-            <a:pPr>
-              <a:defRPr sz="1050" b="0" i="0">
-                <a:solidFill>
-                  <a:srgbClr val="65786F"/>
-                </a:solidFill>
-              </a:defRPr>
-            </a:pPr>
-            <a:r>
-              <a:rPr sz="1050" b="0" i="0">
-                <a:solidFill>
-                  <a:srgbClr val="65786F"/>
-                </a:solidFill>
-              </a:rPr>
-              <a:t>Live integration status must match the environment shown on demo day.</a:t>
+              <a:t>youtube.com/watch?v=CzoFM4OR6TA</a:t>
             </a:r>
           </a:p>
         </p:txBody>
@@ -11173,7 +8193,7 @@
     </p:spTree>
     <p:extLst>
       <p:ext uri="{BB962C8B-B14F-4D97-AF65-F5344CB8AC3E}">
-        <p14:creationId xmlns:p14="http://schemas.microsoft.com/office/powerpoint/2010/main" val="820275149"/>
+        <p14:creationId xmlns:p14="http://schemas.microsoft.com/office/powerpoint/2010/main" val="203436338"/>
       </p:ext>
     </p:extLst>
   </p:cSld>

--- a/docs/SiteGuard-Pitch-Deck.pptx
+++ b/docs/SiteGuard-Pitch-Deck.pptx
@@ -2,21 +2,21 @@
 <file path=ppt/presentation.xml><?xml version="1.0" encoding="utf-8"?>
 <p:presentation xmlns:p="http://schemas.openxmlformats.org/presentationml/2006/main">
   <p:sldMasterIdLst>
-    <p:sldMasterId xmlns:r="http://schemas.openxmlformats.org/officeDocument/2006/relationships" id="2147483648" r:id="R51e2070980154457"/>
+    <p:sldMasterId xmlns:r="http://schemas.openxmlformats.org/officeDocument/2006/relationships" id="2147483648" r:id="R1966c2cdb7b048a5"/>
   </p:sldMasterIdLst>
   <p:notesMasterIdLst>
-    <p:notesMasterId xmlns:r="http://schemas.openxmlformats.org/officeDocument/2006/relationships" r:id="R4a36bed9a7c64496"/>
+    <p:notesMasterId xmlns:r="http://schemas.openxmlformats.org/officeDocument/2006/relationships" r:id="R83eadcf765364f25"/>
   </p:notesMasterIdLst>
   <p:sldIdLst>
-    <p:sldId xmlns:r="http://schemas.openxmlformats.org/officeDocument/2006/relationships" id="256" r:id="R2ed65384570d4b99"/>
-    <p:sldId xmlns:r="http://schemas.openxmlformats.org/officeDocument/2006/relationships" id="257" r:id="Rdae1edb0a94d4893"/>
-    <p:sldId xmlns:r="http://schemas.openxmlformats.org/officeDocument/2006/relationships" id="258" r:id="R58c0eb20d64e4d7d"/>
-    <p:sldId xmlns:r="http://schemas.openxmlformats.org/officeDocument/2006/relationships" id="259" r:id="R7f09f750829748e8"/>
-    <p:sldId xmlns:r="http://schemas.openxmlformats.org/officeDocument/2006/relationships" id="260" r:id="Rdbb7e2a966a14856"/>
-    <p:sldId xmlns:r="http://schemas.openxmlformats.org/officeDocument/2006/relationships" id="261" r:id="Rc7c78a973daa4b5f"/>
-    <p:sldId xmlns:r="http://schemas.openxmlformats.org/officeDocument/2006/relationships" id="262" r:id="R6ce0c28c75de4726"/>
-    <p:sldId xmlns:r="http://schemas.openxmlformats.org/officeDocument/2006/relationships" id="263" r:id="Rd09810a851f54985"/>
-    <p:sldId xmlns:r="http://schemas.openxmlformats.org/officeDocument/2006/relationships" id="264" r:id="Rdb10eddaf1094cc6"/>
+    <p:sldId xmlns:r="http://schemas.openxmlformats.org/officeDocument/2006/relationships" id="256" r:id="R6bd32ddd4c1a41d3"/>
+    <p:sldId xmlns:r="http://schemas.openxmlformats.org/officeDocument/2006/relationships" id="257" r:id="R5cfe537b13304f1c"/>
+    <p:sldId xmlns:r="http://schemas.openxmlformats.org/officeDocument/2006/relationships" id="258" r:id="R1d6493ec0a5845d8"/>
+    <p:sldId xmlns:r="http://schemas.openxmlformats.org/officeDocument/2006/relationships" id="259" r:id="R66995d0ebc894cbb"/>
+    <p:sldId xmlns:r="http://schemas.openxmlformats.org/officeDocument/2006/relationships" id="260" r:id="Rdd501799c1814d98"/>
+    <p:sldId xmlns:r="http://schemas.openxmlformats.org/officeDocument/2006/relationships" id="261" r:id="Rad3d1d89332e4632"/>
+    <p:sldId xmlns:r="http://schemas.openxmlformats.org/officeDocument/2006/relationships" id="262" r:id="Rbb3f537f50f64e98"/>
+    <p:sldId xmlns:r="http://schemas.openxmlformats.org/officeDocument/2006/relationships" id="263" r:id="R56034deb45f44a20"/>
+    <p:sldId xmlns:r="http://schemas.openxmlformats.org/officeDocument/2006/relationships" id="264" r:id="R3f2e2e1a0d78430f"/>
   </p:sldIdLst>
   <p:sldSz cx="12192000" cy="6858000"/>
   <p:notesSz cx="6858000" cy="9144000"/>
@@ -450,7 +450,7 @@
           <a:lstStyle xmlns:a="http://schemas.openxmlformats.org/drawingml/2006/main"/>
           <a:p xmlns:a="http://schemas.openxmlformats.org/drawingml/2006/main">
             <a:r>
-              <a:t>Open with the worker, not the technology. A worker needs five more minutes. SiteGuard makes the request visible and helps the team respond without moving the protected break.</a:t>
+              <a:t>Cover image is conceptual AI-generated imagery, not a worksite record. Open with a worker asking for five more minutes of rest.</a:t>
             </a:r>
           </a:p>
           <a:p xmlns:a="http://schemas.openxmlformats.org/drawingml/2006/main">
@@ -465,12 +465,12 @@
           </a:p>
           <a:p xmlns:a="http://schemas.openxmlformats.org/drawingml/2006/main">
             <a:r>
+              <a:t>- docs/pitch-assets/worker-break-concept.png</a:t>
+            </a:r>
+          </a:p>
+          <a:p xmlns:a="http://schemas.openxmlformats.org/drawingml/2006/main">
+            <a:r>
               <a:t>- README.md</a:t>
-            </a:r>
-          </a:p>
-          <a:p xmlns:a="http://schemas.openxmlformats.org/drawingml/2006/main">
-            <a:r>
-              <a:t>- docs/PROJECT_SPEC.md</a:t>
             </a:r>
           </a:p>
         </p:txBody>
@@ -540,7 +540,7 @@
           <a:lstStyle xmlns:a="http://schemas.openxmlformats.org/drawingml/2006/main"/>
           <a:p xmlns:a="http://schemas.openxmlformats.org/drawingml/2006/main">
             <a:r>
-              <a:t>Let the quote breathe. The worker initiates the check-in and decides whether to ask for support. SiteGuard does not make a fitness-for-work decision.</a:t>
+              <a:t>Keep this worker-centered. Protected break time remains fixed. The product helps surface a voluntary request and coordinate coverage.</a:t>
             </a:r>
           </a:p>
           <a:p xmlns:a="http://schemas.openxmlformats.org/drawingml/2006/main">
@@ -556,11 +556,6 @@
           <a:p xmlns:a="http://schemas.openxmlformats.org/drawingml/2006/main">
             <a:r>
               <a:t>- docs/PROJECT_SPEC.md</a:t>
-            </a:r>
-          </a:p>
-          <a:p xmlns:a="http://schemas.openxmlformats.org/drawingml/2006/main">
-            <a:r>
-              <a:t>- docs/PRESENTATION_SCRIPT.md</a:t>
             </a:r>
           </a:p>
         </p:txBody>
@@ -630,7 +625,7 @@
           <a:lstStyle xmlns:a="http://schemas.openxmlformats.org/drawingml/2006/main"/>
           <a:p xmlns:a="http://schemas.openxmlformats.org/drawingml/2006/main">
             <a:r>
-              <a:t>Show the live check-in. The worker can stop at any time. The screenshots in this deck use labeled synthetic readings. In a live environment, consented frames pass transiently through the Presage measurement path.</a:t>
+              <a:t>This screenshot uses a synthetic source and does not show a live Presage reading. The worker can stop the check-in.</a:t>
             </a:r>
           </a:p>
           <a:p xmlns:a="http://schemas.openxmlformats.org/drawingml/2006/main">
@@ -645,12 +640,12 @@
           </a:p>
           <a:p xmlns:a="http://schemas.openxmlformats.org/drawingml/2006/main">
             <a:r>
+              <a:t>- docs/demo-screenshots/04b-measurement-60s.png</a:t>
+            </a:r>
+          </a:p>
+          <a:p xmlns:a="http://schemas.openxmlformats.org/drawingml/2006/main">
+            <a:r>
               <a:t>- docs/DEMO_RUN_REPORT.md</a:t>
-            </a:r>
-          </a:p>
-          <a:p xmlns:a="http://schemas.openxmlformats.org/drawingml/2006/main">
-            <a:r>
-              <a:t>- docs/PRESAGE_CONTRACT.md</a:t>
             </a:r>
           </a:p>
         </p:txBody>
@@ -720,7 +715,7 @@
           <a:lstStyle xmlns:a="http://schemas.openxmlformats.org/drawingml/2006/main"/>
           <a:p xmlns:a="http://schemas.openxmlformats.org/drawingml/2006/main">
             <a:r>
-              <a:t>The product presents a plain-language next step and its evidence. It labels uncertainty and keeps the final choice with the worker. The demo result must remain clearly labeled when it uses synthetic data.</a:t>
+              <a:t>The numeric values belong to the synthetic demo screenshot. They illustrate descriptive change within this session; they do not determine readiness or a rest need.</a:t>
             </a:r>
           </a:p>
           <a:p xmlns:a="http://schemas.openxmlformats.org/drawingml/2006/main">
@@ -735,12 +730,7 @@
           </a:p>
           <a:p xmlns:a="http://schemas.openxmlformats.org/drawingml/2006/main">
             <a:r>
-              <a:t>- README.md</a:t>
-            </a:r>
-          </a:p>
-          <a:p xmlns:a="http://schemas.openxmlformats.org/drawingml/2006/main">
-            <a:r>
-              <a:t>- docs/PROJECT_SPEC.md</a:t>
+              <a:t>- docs/demo-screenshots/05a-summary.png</a:t>
             </a:r>
           </a:p>
         </p:txBody>
@@ -810,7 +800,7 @@
           <a:lstStyle xmlns:a="http://schemas.openxmlformats.org/drawingml/2006/main"/>
           <a:p xmlns:a="http://schemas.openxmlformats.org/drawingml/2006/main">
             <a:r>
-              <a:t>This is the payoff. A worker asks for more rest. A supervisor reviews it. The planner updates coverage while protected time remains fixed.</a:t>
+              <a:t>The request is worker initiated. This screenshot is a fictional demo scenario. The supervisor approves additional rest as a separate request.</a:t>
             </a:r>
           </a:p>
           <a:p xmlns:a="http://schemas.openxmlformats.org/drawingml/2006/main">
@@ -825,12 +815,7 @@
           </a:p>
           <a:p xmlns:a="http://schemas.openxmlformats.org/drawingml/2006/main">
             <a:r>
-              <a:t>- docs/DEMO_RUN_REPORT.md</a:t>
-            </a:r>
-          </a:p>
-          <a:p xmlns:a="http://schemas.openxmlformats.org/drawingml/2006/main">
-            <a:r>
-              <a:t>- docs/PROJECT_SPEC.md</a:t>
+              <a:t>- docs/demo-screenshots/06b-approved.png</a:t>
             </a:r>
           </a:p>
         </p:txBody>
@@ -900,7 +885,7 @@
           <a:lstStyle xmlns:a="http://schemas.openxmlformats.org/drawingml/2006/main"/>
           <a:p xmlns:a="http://schemas.openxmlformats.org/drawingml/2006/main">
             <a:r>
-              <a:t>Frame this as a prototype workflow. The heuristic surfaces a possible person-down event. A human reviews and resolves it. Avoid claiming autonomous fall diagnosis.</a:t>
+              <a:t>The fictional demo's committed proposal preserves six protected breaks. The supervisor reviews the coverage update, with any remaining gap visible.</a:t>
             </a:r>
           </a:p>
           <a:p xmlns:a="http://schemas.openxmlformats.org/drawingml/2006/main">
@@ -915,12 +900,7 @@
           </a:p>
           <a:p xmlns:a="http://schemas.openxmlformats.org/drawingml/2006/main">
             <a:r>
-              <a:t>- docs/PROJECT_SPEC.md</a:t>
-            </a:r>
-          </a:p>
-          <a:p xmlns:a="http://schemas.openxmlformats.org/drawingml/2006/main">
-            <a:r>
-              <a:t>- docs/DEMO_RUN_REPORT.md</a:t>
+              <a:t>- docs/demo-screenshots/07b-committed.png</a:t>
             </a:r>
           </a:p>
         </p:txBody>
@@ -990,7 +970,7 @@
           <a:lstStyle xmlns:a="http://schemas.openxmlformats.org/drawingml/2006/main"/>
           <a:p xmlns:a="http://schemas.openxmlformats.org/drawingml/2006/main">
             <a:r>
-              <a:t>Presage supplies observations. SiteGuard keeps the worker-facing flow. Tiger Data holds history. Gemini explains only approved facts. A human makes the operational decision.</a:t>
+              <a:t>This is a synthetic bounding-box prototype. A possible person-down posture raises a review item. The UI requires a human follow-up note to close the event.</a:t>
             </a:r>
           </a:p>
           <a:p xmlns:a="http://schemas.openxmlformats.org/drawingml/2006/main">
@@ -1005,17 +985,12 @@
           </a:p>
           <a:p xmlns:a="http://schemas.openxmlformats.org/drawingml/2006/main">
             <a:r>
-              <a:t>- README.md</a:t>
-            </a:r>
-          </a:p>
-          <a:p xmlns:a="http://schemas.openxmlformats.org/drawingml/2006/main">
-            <a:r>
-              <a:t>- docs/PRESAGE_CONTRACT.md</a:t>
-            </a:r>
-          </a:p>
-          <a:p xmlns:a="http://schemas.openxmlformats.org/drawingml/2006/main">
-            <a:r>
-              <a:t>- docs/API_CONTRACT.md</a:t>
+              <a:t>- docs/demo-screenshots/11a-fall-incident.png</a:t>
+            </a:r>
+          </a:p>
+          <a:p xmlns:a="http://schemas.openxmlformats.org/drawingml/2006/main">
+            <a:r>
+              <a:t>- docs/DEMO_RUN_REPORT.md</a:t>
             </a:r>
           </a:p>
         </p:txBody>
@@ -1085,7 +1060,7 @@
           <a:lstStyle xmlns:a="http://schemas.openxmlformats.org/drawingml/2006/main"/>
           <a:p xmlns:a="http://schemas.openxmlformats.org/drawingml/2006/main">
             <a:r>
-              <a:t>Separate demonstrated evidence from the validation roadmap. The rehearsal passed every core step. Tiger Cloud verification passed. The fall prototype has 36 tests. Reliable mobile capture and labeled evaluation remain next.</a:t>
+              <a:t>Presage provides source-labeled observations when the bridge is available. Tiger Data stores history. Gemini explains server-approved facts. Worker and safety operations decide what to do. The screenshots shown in this deck are synthetic demo material.</a:t>
             </a:r>
           </a:p>
           <a:p xmlns:a="http://schemas.openxmlformats.org/drawingml/2006/main">
@@ -1100,17 +1075,17 @@
           </a:p>
           <a:p xmlns:a="http://schemas.openxmlformats.org/drawingml/2006/main">
             <a:r>
-              <a:t>- docs/DEMO_RUN_REPORT.md</a:t>
+              <a:t>- README.md</a:t>
+            </a:r>
+          </a:p>
+          <a:p xmlns:a="http://schemas.openxmlformats.org/drawingml/2006/main">
+            <a:r>
+              <a:t>- docs/PRESAGE_CONTRACT.md</a:t>
             </a:r>
           </a:p>
           <a:p xmlns:a="http://schemas.openxmlformats.org/drawingml/2006/main">
             <a:r>
               <a:t>- docs/TIGER_DATA_VERIFICATION.md</a:t>
-            </a:r>
-          </a:p>
-          <a:p xmlns:a="http://schemas.openxmlformats.org/drawingml/2006/main">
-            <a:r>
-              <a:t>- docs/PRODUCTION_READINESS.md</a:t>
             </a:r>
           </a:p>
         </p:txBody>
@@ -1180,7 +1155,7 @@
           <a:lstStyle xmlns:a="http://schemas.openxmlformats.org/drawingml/2006/main"/>
           <a:p xmlns:a="http://schemas.openxmlformats.org/drawingml/2006/main">
             <a:r>
-              <a:t>Close with the worker again. SiteGuard helps a worker speak up and helps the team respond while protected breaks remain protected. Name the sponsor categories and invite questions.</a:t>
+              <a:t>Close by returning to the worker's five-minute request. State the three sponsor categories: Best Use of Presage, Best Use of Gemini API, and Best Use of Tiger Data.</a:t>
             </a:r>
           </a:p>
           <a:p xmlns:a="http://schemas.openxmlformats.org/drawingml/2006/main">
@@ -1247,7 +1222,7 @@
           <p:cNvPr id="3" name="Title">
             <a:extLst xmlns:a="http://schemas.openxmlformats.org/drawingml/2006/main">
               <a:ext uri="{FF2B5EF4-FFF2-40B4-BE49-F238E27FC236}">
-                <a16:creationId xmlns:a16="http://schemas.microsoft.com/office/drawing/2014/main" id="{3185B10A-546A-4A1E-9383-59FF838CDC2F}"/>
+                <a16:creationId xmlns:a16="http://schemas.microsoft.com/office/drawing/2014/main" id="{7BF3B32F-4651-4B8D-87AF-FD23A4837868}"/>
               </a:ext>
             </a:extLst>
           </p:cNvPr>
@@ -1404,7 +1379,7 @@
           <p:cNvPr id="2" name="Subtitle">
             <a:extLst xmlns:a="http://schemas.openxmlformats.org/drawingml/2006/main">
               <a:ext uri="{FF2B5EF4-FFF2-40B4-BE49-F238E27FC236}">
-                <a16:creationId xmlns:a16="http://schemas.microsoft.com/office/drawing/2014/main" id="{5793B0F9-42EE-4064-9140-368A47858173}"/>
+                <a16:creationId xmlns:a16="http://schemas.microsoft.com/office/drawing/2014/main" id="{4B59F563-1934-4FCB-9B58-BD8D5834A412}"/>
               </a:ext>
             </a:extLst>
           </p:cNvPr>
@@ -1578,7 +1553,7 @@
           <p:cNvPr id="2" name="Section title">
             <a:extLst xmlns:a="http://schemas.openxmlformats.org/drawingml/2006/main">
               <a:ext uri="{FF2B5EF4-FFF2-40B4-BE49-F238E27FC236}">
-                <a16:creationId xmlns:a16="http://schemas.microsoft.com/office/drawing/2014/main" id="{0E836AE9-5818-436C-999F-34A6F1227B43}"/>
+                <a16:creationId xmlns:a16="http://schemas.microsoft.com/office/drawing/2014/main" id="{6EAEEA2C-DBC6-4D4C-9D3D-1DA52FC466FD}"/>
               </a:ext>
             </a:extLst>
           </p:cNvPr>
@@ -1752,7 +1727,7 @@
           <p:cNvPr id="3" name="Title">
             <a:extLst xmlns:a="http://schemas.openxmlformats.org/drawingml/2006/main">
               <a:ext uri="{FF2B5EF4-FFF2-40B4-BE49-F238E27FC236}">
-                <a16:creationId xmlns:a16="http://schemas.microsoft.com/office/drawing/2014/main" id="{25D329F8-2B8A-4FA6-8D05-A9A904A04515}"/>
+                <a16:creationId xmlns:a16="http://schemas.microsoft.com/office/drawing/2014/main" id="{B51804AA-AD88-41CE-93C5-82011251DFEC}"/>
               </a:ext>
             </a:extLst>
           </p:cNvPr>
@@ -1909,7 +1884,7 @@
           <p:cNvPr id="2" name="Body">
             <a:extLst xmlns:a="http://schemas.openxmlformats.org/drawingml/2006/main">
               <a:ext uri="{FF2B5EF4-FFF2-40B4-BE49-F238E27FC236}">
-                <a16:creationId xmlns:a16="http://schemas.microsoft.com/office/drawing/2014/main" id="{2581537E-DABB-46AF-8DD5-45BC3B4D37BB}"/>
+                <a16:creationId xmlns:a16="http://schemas.microsoft.com/office/drawing/2014/main" id="{EE71123D-EB84-4576-94FA-9C7D25201D22}"/>
               </a:ext>
             </a:extLst>
           </p:cNvPr>
@@ -2083,7 +2058,7 @@
           <p:cNvPr id="4" name="Title">
             <a:extLst xmlns:a="http://schemas.openxmlformats.org/drawingml/2006/main">
               <a:ext uri="{FF2B5EF4-FFF2-40B4-BE49-F238E27FC236}">
-                <a16:creationId xmlns:a16="http://schemas.microsoft.com/office/drawing/2014/main" id="{D26D20A9-E196-4EE9-AE42-325C7971FB8F}"/>
+                <a16:creationId xmlns:a16="http://schemas.microsoft.com/office/drawing/2014/main" id="{9531B4AE-3C83-463B-AC1E-87A5F7710E2B}"/>
               </a:ext>
             </a:extLst>
           </p:cNvPr>
@@ -2240,7 +2215,7 @@
           <p:cNvPr id="2" name="Left column">
             <a:extLst xmlns:a="http://schemas.openxmlformats.org/drawingml/2006/main">
               <a:ext uri="{FF2B5EF4-FFF2-40B4-BE49-F238E27FC236}">
-                <a16:creationId xmlns:a16="http://schemas.microsoft.com/office/drawing/2014/main" id="{4B33B34B-8AE8-4D9F-9368-A71E8E21865F}"/>
+                <a16:creationId xmlns:a16="http://schemas.microsoft.com/office/drawing/2014/main" id="{9EA5010A-D5D8-4345-BDA8-24EEFFF9BCC7}"/>
               </a:ext>
             </a:extLst>
           </p:cNvPr>
@@ -2397,7 +2372,7 @@
           <p:cNvPr id="3" name="Right column">
             <a:extLst xmlns:a="http://schemas.openxmlformats.org/drawingml/2006/main">
               <a:ext uri="{FF2B5EF4-FFF2-40B4-BE49-F238E27FC236}">
-                <a16:creationId xmlns:a16="http://schemas.microsoft.com/office/drawing/2014/main" id="{E3375A1F-78D0-4047-B1DC-99287E8EE212}"/>
+                <a16:creationId xmlns:a16="http://schemas.microsoft.com/office/drawing/2014/main" id="{92E0525C-D986-40A6-814F-FD1CB1AA3BCE}"/>
               </a:ext>
             </a:extLst>
           </p:cNvPr>
@@ -2571,7 +2546,7 @@
           <p:cNvPr id="3" name="Title">
             <a:extLst xmlns:a="http://schemas.openxmlformats.org/drawingml/2006/main">
               <a:ext uri="{FF2B5EF4-FFF2-40B4-BE49-F238E27FC236}">
-                <a16:creationId xmlns:a16="http://schemas.microsoft.com/office/drawing/2014/main" id="{ABD7A30F-1486-4CA5-B1AF-3948B3D7CB6F}"/>
+                <a16:creationId xmlns:a16="http://schemas.microsoft.com/office/drawing/2014/main" id="{A84BCFB7-6EA5-4BF9-A160-63E81BE17ADD}"/>
               </a:ext>
             </a:extLst>
           </p:cNvPr>
@@ -2728,7 +2703,7 @@
           <p:cNvPr id="2" name="Left column">
             <a:extLst xmlns:a="http://schemas.openxmlformats.org/drawingml/2006/main">
               <a:ext uri="{FF2B5EF4-FFF2-40B4-BE49-F238E27FC236}">
-                <a16:creationId xmlns:a16="http://schemas.microsoft.com/office/drawing/2014/main" id="{6A7311F6-B136-4464-A759-F3D97EFFD2BF}"/>
+                <a16:creationId xmlns:a16="http://schemas.microsoft.com/office/drawing/2014/main" id="{FC22B480-08D0-402B-B129-E0AF3136B88B}"/>
               </a:ext>
             </a:extLst>
           </p:cNvPr>
@@ -2923,12 +2898,12 @@
   </p:cSld>
   <p:clrMap bg1="lt1" tx1="dk1" bg2="lt2" tx2="dk2" accent1="accent1" accent2="accent2" accent3="accent3" accent4="accent4" accent5="accent5" accent6="accent6" hlink="hlink" folHlink="folHlink"/>
   <p:sldLayoutIdLst>
-    <p:sldLayoutId xmlns:r="http://schemas.openxmlformats.org/officeDocument/2006/relationships" id="2147483649" r:id="R7d2328e3262f46d0"/>
-    <p:sldLayoutId xmlns:r="http://schemas.openxmlformats.org/officeDocument/2006/relationships" id="2147483650" r:id="Rb2bc7d7353214000"/>
-    <p:sldLayoutId xmlns:r="http://schemas.openxmlformats.org/officeDocument/2006/relationships" id="2147483651" r:id="Rf971f0f0452441fb"/>
-    <p:sldLayoutId xmlns:r="http://schemas.openxmlformats.org/officeDocument/2006/relationships" id="2147483652" r:id="R0d85bad4405b4733"/>
-    <p:sldLayoutId xmlns:r="http://schemas.openxmlformats.org/officeDocument/2006/relationships" id="2147483653" r:id="Rc5e24d50b07249ea"/>
-    <p:sldLayoutId xmlns:r="http://schemas.openxmlformats.org/officeDocument/2006/relationships" id="2147483654" r:id="R6cdc3245fd7e44a0"/>
+    <p:sldLayoutId xmlns:r="http://schemas.openxmlformats.org/officeDocument/2006/relationships" id="2147483649" r:id="R7e11ff5fa2564a58"/>
+    <p:sldLayoutId xmlns:r="http://schemas.openxmlformats.org/officeDocument/2006/relationships" id="2147483650" r:id="Rd64bb072deec48be"/>
+    <p:sldLayoutId xmlns:r="http://schemas.openxmlformats.org/officeDocument/2006/relationships" id="2147483651" r:id="R80a3e600b2844ad6"/>
+    <p:sldLayoutId xmlns:r="http://schemas.openxmlformats.org/officeDocument/2006/relationships" id="2147483652" r:id="R4deed6d0b0a04b0b"/>
+    <p:sldLayoutId xmlns:r="http://schemas.openxmlformats.org/officeDocument/2006/relationships" id="2147483653" r:id="R3605a965a1374a6f"/>
+    <p:sldLayoutId xmlns:r="http://schemas.openxmlformats.org/officeDocument/2006/relationships" id="2147483654" r:id="Rd6bff985ebb8455b"/>
   </p:sldLayoutIdLst>
   <p:txStyles>
     <p:titleStyle>
@@ -3461,7 +3436,7 @@
     <p:bg>
       <p:bgPr>
         <a:solidFill xmlns:a="http://schemas.openxmlformats.org/drawingml/2006/main">
-          <a:srgbClr val="082B26"/>
+          <a:srgbClr val="051B19"/>
         </a:solidFill>
       </p:bgPr>
     </p:bg>
@@ -3474,76 +3449,12 @@
       <p:grpSpPr>
         <a:xfrm xmlns:a="http://schemas.openxmlformats.org/drawingml/2006/main"/>
       </p:grpSpPr>
-      <p:sp>
-        <p:nvSpPr>
-          <p:cNvPr id="8" name="">
+      <p:pic>
+        <p:nvPicPr>
+          <p:cNvPr id="5" name="">
             <a:extLst xmlns:a="http://schemas.openxmlformats.org/drawingml/2006/main">
               <a:ext uri="{FF2B5EF4-FFF2-40B4-BE49-F238E27FC236}">
-                <a16:creationId xmlns:a16="http://schemas.microsoft.com/office/drawing/2014/main" id="{A05D0F0D-B91D-4F6F-BE2E-7C2ECF333A7D}"/>
-              </a:ext>
-            </a:extLst>
-          </p:cNvPr>
-          <p:cNvSpPr>
-            <a:spLocks xmlns:a="http://schemas.openxmlformats.org/drawingml/2006/main" noGrp="1"/>
-          </p:cNvSpPr>
-          <p:nvPr/>
-        </p:nvSpPr>
-        <p:spPr>
-          <a:xfrm xmlns:a="http://schemas.openxmlformats.org/drawingml/2006/main">
-            <a:off x="0" y="0"/>
-            <a:ext cx="133350" cy="6858000"/>
-          </a:xfrm>
-          <a:prstGeom xmlns:a="http://schemas.openxmlformats.org/drawingml/2006/main" prst="rect">
-            <a:avLst/>
-          </a:prstGeom>
-          <a:solidFill xmlns:a="http://schemas.openxmlformats.org/drawingml/2006/main">
-            <a:srgbClr val="C8FF63"/>
-          </a:solidFill>
-          <a:ln xmlns:a="http://schemas.openxmlformats.org/drawingml/2006/main" w="0">
-            <a:noFill/>
-            <a:prstDash val="solid"/>
-          </a:ln>
-        </p:spPr>
-      </p:sp>
-      <p:sp>
-        <p:nvSpPr>
-          <p:cNvPr id="2" name="">
-            <a:extLst xmlns:a="http://schemas.openxmlformats.org/drawingml/2006/main">
-              <a:ext uri="{FF2B5EF4-FFF2-40B4-BE49-F238E27FC236}">
-                <a16:creationId xmlns:a16="http://schemas.microsoft.com/office/drawing/2014/main" id="{42B9C54F-DAE1-4E26-A7B1-28B39C71BA4E}"/>
-              </a:ext>
-            </a:extLst>
-          </p:cNvPr>
-          <p:cNvSpPr>
-            <a:spLocks xmlns:a="http://schemas.openxmlformats.org/drawingml/2006/main" noGrp="1"/>
-          </p:cNvSpPr>
-          <p:nvPr/>
-        </p:nvSpPr>
-        <p:spPr>
-          <a:xfrm xmlns:a="http://schemas.openxmlformats.org/drawingml/2006/main">
-            <a:off x="685800" y="495300"/>
-            <a:ext cx="2343150" cy="819150"/>
-          </a:xfrm>
-          <a:prstGeom xmlns:a="http://schemas.openxmlformats.org/drawingml/2006/main" prst="roundRect">
-            <a:avLst>
-              <a:gd name="adj" fmla="val 20930"/>
-            </a:avLst>
-          </a:prstGeom>
-          <a:solidFill xmlns:a="http://schemas.openxmlformats.org/drawingml/2006/main">
-            <a:srgbClr val="F5F7F2"/>
-          </a:solidFill>
-          <a:ln xmlns:a="http://schemas.openxmlformats.org/drawingml/2006/main" w="0">
-            <a:noFill/>
-            <a:prstDash val="solid"/>
-          </a:ln>
-        </p:spPr>
-      </p:sp>
-      <p:pic>
-        <p:nvPicPr>
-          <p:cNvPr id="3" name="">
-            <a:extLst xmlns:a="http://schemas.openxmlformats.org/drawingml/2006/main">
-              <a:ext uri="{FF2B5EF4-FFF2-40B4-BE49-F238E27FC236}">
-                <a16:creationId xmlns:a16="http://schemas.microsoft.com/office/drawing/2014/main" id="{2D4FDF44-999A-4672-977B-A607951B132C}"/>
+                <a16:creationId xmlns:a16="http://schemas.microsoft.com/office/drawing/2014/main" id="{29FDCD63-549E-4835-B5FE-C87D3D2DBE76}"/>
               </a:ext>
             </a:extLst>
           </p:cNvPr>
@@ -3553,13 +3464,16 @@
           <p:nvPr/>
         </p:nvPicPr>
         <p:blipFill>
-          <a:blip xmlns:r="http://schemas.openxmlformats.org/officeDocument/2006/relationships" xmlns:a="http://schemas.openxmlformats.org/drawingml/2006/main" r:embed="Rdede0652f61c428f"/>
-          <a:stretch xmlns:a="http://schemas.openxmlformats.org/drawingml/2006/main"/>
+          <a:blip xmlns:r="http://schemas.openxmlformats.org/officeDocument/2006/relationships" xmlns:a="http://schemas.openxmlformats.org/drawingml/2006/main" r:embed="R4260dd3032354d2a"/>
+          <a:srcRect xmlns:a="http://schemas.openxmlformats.org/drawingml/2006/main" l="0" t="27" r="0" b="27"/>
+          <a:stretch xmlns:a="http://schemas.openxmlformats.org/drawingml/2006/main">
+            <a:fillRect l="0" t="0" r="0" b="0"/>
+          </a:stretch>
         </p:blipFill>
         <p:spPr>
           <a:xfrm xmlns:a="http://schemas.openxmlformats.org/drawingml/2006/main">
-            <a:off x="971550" y="609600"/>
-            <a:ext cx="1771650" cy="590550"/>
+            <a:off x="0" y="0"/>
+            <a:ext cx="12192000" cy="6858000"/>
           </a:xfrm>
           <a:prstGeom xmlns:a="http://schemas.openxmlformats.org/drawingml/2006/main" prst="rect">
             <a:avLst/>
@@ -3568,10 +3482,10 @@
       </p:pic>
       <p:sp>
         <p:nvSpPr>
-          <p:cNvPr id="4" name="">
+          <p:cNvPr id="2" name="">
             <a:extLst xmlns:a="http://schemas.openxmlformats.org/drawingml/2006/main">
               <a:ext uri="{FF2B5EF4-FFF2-40B4-BE49-F238E27FC236}">
-                <a16:creationId xmlns:a16="http://schemas.microsoft.com/office/drawing/2014/main" id="{A7FC6730-140F-438E-B324-97212DE4602E}"/>
+                <a16:creationId xmlns:a16="http://schemas.microsoft.com/office/drawing/2014/main" id="{0A3DB9A1-00C2-4A7E-9F45-4A4FA406A756}"/>
               </a:ext>
             </a:extLst>
           </p:cNvPr>
@@ -3582,8 +3496,8 @@
         </p:nvSpPr>
         <p:spPr>
           <a:xfrm xmlns:a="http://schemas.openxmlformats.org/drawingml/2006/main">
-            <a:off x="685800" y="1952625"/>
-            <a:ext cx="7429500" cy="1809750"/>
+            <a:off x="685800" y="552450"/>
+            <a:ext cx="4572000" cy="514350"/>
           </a:xfrm>
           <a:prstGeom xmlns:a="http://schemas.openxmlformats.org/drawingml/2006/main" prst="rect">
             <a:avLst/>
@@ -3595,58 +3509,41 @@
           </a:ln>
         </p:spPr>
         <p:txBody>
-          <a:bodyPr xmlns:a="http://schemas.openxmlformats.org/drawingml/2006/main" anchor="t"/>
+          <a:bodyPr xmlns:a="http://schemas.openxmlformats.org/drawingml/2006/main" anchor="ctr"/>
           <a:lstStyle xmlns:a="http://schemas.openxmlformats.org/drawingml/2006/main">
             <a:defPPr>
-              <a:defRPr sz="4500" b="1">
-                <a:solidFill>
-                  <a:srgbClr val="FFFFFF"/>
+              <a:defRPr sz="2850" b="1">
+                <a:solidFill>
+                  <a:srgbClr val="CEFF75"/>
                 </a:solidFill>
               </a:defRPr>
             </a:defPPr>
           </a:lstStyle>
           <a:p xmlns:a="http://schemas.openxmlformats.org/drawingml/2006/main">
             <a:pPr>
-              <a:defRPr sz="4500" b="1">
-                <a:solidFill>
-                  <a:srgbClr val="FFFFFF"/>
+              <a:defRPr sz="2850" b="1">
+                <a:solidFill>
+                  <a:srgbClr val="CEFF75"/>
                 </a:solidFill>
               </a:defRPr>
             </a:pPr>
             <a:r>
-              <a:rPr sz="4500" b="1">
-                <a:solidFill>
-                  <a:srgbClr val="FFFFFF"/>
+              <a:rPr sz="2850" b="1">
+                <a:solidFill>
+                  <a:srgbClr val="CEFF75"/>
                 </a:solidFill>
               </a:rPr>
-              <a:t>A worker asks for</a:t>
-            </a:r>
-          </a:p>
-          <a:p xmlns:a="http://schemas.openxmlformats.org/drawingml/2006/main">
-            <a:pPr>
-              <a:defRPr sz="4500" b="1">
-                <a:solidFill>
-                  <a:srgbClr val="FFFFFF"/>
-                </a:solidFill>
-              </a:defRPr>
-            </a:pPr>
-            <a:r>
-              <a:rPr sz="4500" b="1">
-                <a:solidFill>
-                  <a:srgbClr val="FFFFFF"/>
-                </a:solidFill>
-              </a:rPr>
-              <a:t>five more minutes</a:t>
-            </a:r>
-          </a:p>
-        </p:txBody>
-      </p:sp>
-      <p:sp>
-        <p:nvSpPr>
-          <p:cNvPr id="5" name="">
+              <a:t>SiteGuard</a:t>
+            </a:r>
+          </a:p>
+        </p:txBody>
+      </p:sp>
+      <p:sp>
+        <p:nvSpPr>
+          <p:cNvPr id="3" name="">
             <a:extLst xmlns:a="http://schemas.openxmlformats.org/drawingml/2006/main">
               <a:ext uri="{FF2B5EF4-FFF2-40B4-BE49-F238E27FC236}">
-                <a16:creationId xmlns:a16="http://schemas.microsoft.com/office/drawing/2014/main" id="{77010134-F515-47E2-A03E-4DAC59B3A92B}"/>
+                <a16:creationId xmlns:a16="http://schemas.microsoft.com/office/drawing/2014/main" id="{DBFC0792-AE4E-4F3C-BF2B-1B496766DD4E}"/>
               </a:ext>
             </a:extLst>
           </p:cNvPr>
@@ -3657,8 +3554,8 @@
         </p:nvSpPr>
         <p:spPr>
           <a:xfrm xmlns:a="http://schemas.openxmlformats.org/drawingml/2006/main">
-            <a:off x="723900" y="4114800"/>
-            <a:ext cx="6191250" cy="523875"/>
+            <a:off x="685800" y="2362200"/>
+            <a:ext cx="7239000" cy="2190750"/>
           </a:xfrm>
           <a:prstGeom xmlns:a="http://schemas.openxmlformats.org/drawingml/2006/main" prst="rect">
             <a:avLst/>
@@ -3670,41 +3567,58 @@
           </a:ln>
         </p:spPr>
         <p:txBody>
-          <a:bodyPr xmlns:a="http://schemas.openxmlformats.org/drawingml/2006/main" anchor="t"/>
+          <a:bodyPr xmlns:a="http://schemas.openxmlformats.org/drawingml/2006/main" anchor="ctr"/>
           <a:lstStyle xmlns:a="http://schemas.openxmlformats.org/drawingml/2006/main">
             <a:defPPr>
-              <a:defRPr sz="1875" b="0">
-                <a:solidFill>
-                  <a:srgbClr val="DCE9E3"/>
+              <a:defRPr sz="6600" b="1">
+                <a:solidFill>
+                  <a:srgbClr val="FFFFFF"/>
                 </a:solidFill>
               </a:defRPr>
             </a:defPPr>
           </a:lstStyle>
           <a:p xmlns:a="http://schemas.openxmlformats.org/drawingml/2006/main">
             <a:pPr>
-              <a:defRPr sz="1875" b="0">
-                <a:solidFill>
-                  <a:srgbClr val="DCE9E3"/>
+              <a:defRPr sz="6600" b="1">
+                <a:solidFill>
+                  <a:srgbClr val="FFFFFF"/>
                 </a:solidFill>
               </a:defRPr>
             </a:pPr>
             <a:r>
-              <a:rPr sz="1875" b="0">
-                <a:solidFill>
-                  <a:srgbClr val="DCE9E3"/>
+              <a:rPr sz="6600" b="1">
+                <a:solidFill>
+                  <a:srgbClr val="FFFFFF"/>
                 </a:solidFill>
               </a:rPr>
-              <a:t>SiteGuard turns that request into a safe, staffed response.</a:t>
-            </a:r>
-          </a:p>
-        </p:txBody>
-      </p:sp>
-      <p:sp>
-        <p:nvSpPr>
-          <p:cNvPr id="6" name="">
+              <a:t>Five more</a:t>
+            </a:r>
+          </a:p>
+          <a:p xmlns:a="http://schemas.openxmlformats.org/drawingml/2006/main">
+            <a:pPr>
+              <a:defRPr sz="6600" b="1">
+                <a:solidFill>
+                  <a:srgbClr val="FFFFFF"/>
+                </a:solidFill>
+              </a:defRPr>
+            </a:pPr>
+            <a:r>
+              <a:rPr sz="6600" b="1">
+                <a:solidFill>
+                  <a:srgbClr val="FFFFFF"/>
+                </a:solidFill>
+              </a:rPr>
+              <a:t>minutes.</a:t>
+            </a:r>
+          </a:p>
+        </p:txBody>
+      </p:sp>
+      <p:sp>
+        <p:nvSpPr>
+          <p:cNvPr id="4" name="">
             <a:extLst xmlns:a="http://schemas.openxmlformats.org/drawingml/2006/main">
               <a:ext uri="{FF2B5EF4-FFF2-40B4-BE49-F238E27FC236}">
-                <a16:creationId xmlns:a16="http://schemas.microsoft.com/office/drawing/2014/main" id="{02ACBCBF-B7EB-4D53-8C34-C3137FD10729}"/>
+                <a16:creationId xmlns:a16="http://schemas.microsoft.com/office/drawing/2014/main" id="{A4AD045E-C0D8-445E-842E-AB333E9EAA56}"/>
               </a:ext>
             </a:extLst>
           </p:cNvPr>
@@ -3715,8 +3629,8 @@
         </p:nvSpPr>
         <p:spPr>
           <a:xfrm xmlns:a="http://schemas.openxmlformats.org/drawingml/2006/main">
-            <a:off x="742950" y="5810250"/>
-            <a:ext cx="4000500" cy="247650"/>
+            <a:off x="733425" y="5429250"/>
+            <a:ext cx="7429500" cy="571500"/>
           </a:xfrm>
           <a:prstGeom xmlns:a="http://schemas.openxmlformats.org/drawingml/2006/main" prst="rect">
             <a:avLst/>
@@ -3728,70 +3642,39 @@
           </a:ln>
         </p:spPr>
         <p:txBody>
-          <a:bodyPr xmlns:a="http://schemas.openxmlformats.org/drawingml/2006/main" anchor="t"/>
+          <a:bodyPr xmlns:a="http://schemas.openxmlformats.org/drawingml/2006/main" anchor="ctr"/>
           <a:lstStyle xmlns:a="http://schemas.openxmlformats.org/drawingml/2006/main">
             <a:defPPr>
-              <a:defRPr sz="1050" b="1">
-                <a:solidFill>
-                  <a:srgbClr val="C8FF63"/>
+              <a:defRPr sz="2100" b="0">
+                <a:solidFill>
+                  <a:srgbClr val="FFFFFF"/>
                 </a:solidFill>
               </a:defRPr>
             </a:defPPr>
           </a:lstStyle>
           <a:p xmlns:a="http://schemas.openxmlformats.org/drawingml/2006/main">
             <a:pPr>
-              <a:defRPr sz="1050" b="1">
-                <a:solidFill>
-                  <a:srgbClr val="C8FF63"/>
+              <a:defRPr sz="2100" b="0">
+                <a:solidFill>
+                  <a:srgbClr val="FFFFFF"/>
                 </a:solidFill>
               </a:defRPr>
             </a:pPr>
             <a:r>
-              <a:rPr sz="1050" b="1">
-                <a:solidFill>
-                  <a:srgbClr val="C8FF63"/>
+              <a:rPr sz="2100" b="0">
+                <a:solidFill>
+                  <a:srgbClr val="FFFFFF"/>
                 </a:solidFill>
               </a:rPr>
-              <a:t>PEOPLE FIRST. EVERY SHIFT.</a:t>
-            </a:r>
-          </a:p>
-        </p:txBody>
-      </p:sp>
-      <p:pic>
-        <p:nvPicPr>
-          <p:cNvPr id="7" name="">
-            <a:extLst xmlns:a="http://schemas.openxmlformats.org/drawingml/2006/main">
-              <a:ext uri="{FF2B5EF4-FFF2-40B4-BE49-F238E27FC236}">
-                <a16:creationId xmlns:a16="http://schemas.microsoft.com/office/drawing/2014/main" id="{8A98D2DE-672C-46CE-B91B-17B97DC0C1E8}"/>
-              </a:ext>
-            </a:extLst>
-          </p:cNvPr>
-          <p:cNvPicPr>
-            <a:picLocks xmlns:a="http://schemas.openxmlformats.org/drawingml/2006/main" noChangeAspect="1"/>
-          </p:cNvPicPr>
-          <p:nvPr/>
-        </p:nvPicPr>
-        <p:blipFill>
-          <a:blip xmlns:r="http://schemas.openxmlformats.org/officeDocument/2006/relationships" xmlns:a="http://schemas.openxmlformats.org/drawingml/2006/main" r:embed="Rba196b2911234d3a"/>
-          <a:srcRect xmlns:a="http://schemas.openxmlformats.org/drawingml/2006/main" l="16000" t="1000" r="3000" b="1000"/>
-          <a:stretch xmlns:a="http://schemas.openxmlformats.org/drawingml/2006/main"/>
-        </p:blipFill>
-        <p:spPr>
-          <a:xfrm xmlns:a="http://schemas.openxmlformats.org/drawingml/2006/main">
-            <a:off x="8334375" y="762000"/>
-            <a:ext cx="3238500" cy="5238750"/>
-          </a:xfrm>
-          <a:prstGeom xmlns:a="http://schemas.openxmlformats.org/drawingml/2006/main" prst="roundRect">
-            <a:avLst>
-              <a:gd name="adj" fmla="val 8235"/>
-            </a:avLst>
-          </a:prstGeom>
-        </p:spPr>
-      </p:pic>
+              <a:t>A worker asks. The team can respond.</a:t>
+            </a:r>
+          </a:p>
+        </p:txBody>
+      </p:sp>
     </p:spTree>
     <p:extLst>
       <p:ext uri="{BB962C8B-B14F-4D97-AF65-F5344CB8AC3E}">
-        <p14:creationId xmlns:p14="http://schemas.microsoft.com/office/powerpoint/2010/main" val="1915710849"/>
+        <p14:creationId xmlns:p14="http://schemas.microsoft.com/office/powerpoint/2010/main" val="1681531084"/>
       </p:ext>
     </p:extLst>
   </p:cSld>
@@ -3804,7 +3687,7 @@
     <p:bg>
       <p:bgPr>
         <a:solidFill xmlns:a="http://schemas.openxmlformats.org/drawingml/2006/main">
-          <a:srgbClr val="F5F7F2"/>
+          <a:srgbClr val="F4F6F1"/>
         </a:solidFill>
       </p:bgPr>
     </p:bg>
@@ -3819,10 +3702,10 @@
       </p:grpSpPr>
       <p:sp>
         <p:nvSpPr>
-          <p:cNvPr id="7" name="">
+          <p:cNvPr id="6" name="">
             <a:extLst xmlns:a="http://schemas.openxmlformats.org/drawingml/2006/main">
               <a:ext uri="{FF2B5EF4-FFF2-40B4-BE49-F238E27FC236}">
-                <a16:creationId xmlns:a16="http://schemas.microsoft.com/office/drawing/2014/main" id="{AC9384FC-BC5E-48BE-83C4-8C22B281494D}"/>
+                <a16:creationId xmlns:a16="http://schemas.microsoft.com/office/drawing/2014/main" id="{65AFFB8B-B79C-4AD1-8515-6F1AF86F05AB}"/>
               </a:ext>
             </a:extLst>
           </p:cNvPr>
@@ -3833,8 +3716,8 @@
         </p:nvSpPr>
         <p:spPr>
           <a:xfrm xmlns:a="http://schemas.openxmlformats.org/drawingml/2006/main">
-            <a:off x="11410950" y="285750"/>
-            <a:ext cx="342900" cy="209550"/>
+            <a:off x="685800" y="438150"/>
+            <a:ext cx="8191500" cy="266700"/>
           </a:xfrm>
           <a:prstGeom xmlns:a="http://schemas.openxmlformats.org/drawingml/2006/main" prst="rect">
             <a:avLst/>
@@ -3846,31 +3729,31 @@
           </a:ln>
         </p:spPr>
         <p:txBody>
-          <a:bodyPr xmlns:a="http://schemas.openxmlformats.org/drawingml/2006/main" anchor="t"/>
+          <a:bodyPr xmlns:a="http://schemas.openxmlformats.org/drawingml/2006/main" anchor="ctr"/>
           <a:lstStyle xmlns:a="http://schemas.openxmlformats.org/drawingml/2006/main">
             <a:defPPr>
-              <a:defRPr sz="825" b="1">
-                <a:solidFill>
-                  <a:srgbClr val="61756C"/>
+              <a:defRPr sz="1275" b="1">
+                <a:solidFill>
+                  <a:srgbClr val="205342"/>
                 </a:solidFill>
               </a:defRPr>
             </a:defPPr>
           </a:lstStyle>
           <a:p xmlns:a="http://schemas.openxmlformats.org/drawingml/2006/main">
             <a:pPr>
-              <a:defRPr sz="825" b="1">
-                <a:solidFill>
-                  <a:srgbClr val="61756C"/>
+              <a:defRPr sz="1275" b="1">
+                <a:solidFill>
+                  <a:srgbClr val="205342"/>
                 </a:solidFill>
               </a:defRPr>
             </a:pPr>
             <a:r>
-              <a:rPr sz="825" b="1">
-                <a:solidFill>
-                  <a:srgbClr val="61756C"/>
+              <a:rPr sz="1275" b="1">
+                <a:solidFill>
+                  <a:srgbClr val="205342"/>
                 </a:solidFill>
               </a:rPr>
-              <a:t>02</a:t>
+              <a:t>THE GAP</a:t>
             </a:r>
           </a:p>
         </p:txBody>
@@ -3880,7 +3763,7 @@
           <p:cNvPr id="2" name="">
             <a:extLst xmlns:a="http://schemas.openxmlformats.org/drawingml/2006/main">
               <a:ext uri="{FF2B5EF4-FFF2-40B4-BE49-F238E27FC236}">
-                <a16:creationId xmlns:a16="http://schemas.microsoft.com/office/drawing/2014/main" id="{62E76758-2C3B-495A-80BC-D1436E8EECB6}"/>
+                <a16:creationId xmlns:a16="http://schemas.microsoft.com/office/drawing/2014/main" id="{220AF9B5-42BB-475D-A9B9-A49CDFF1BBF7}"/>
               </a:ext>
             </a:extLst>
           </p:cNvPr>
@@ -3891,8 +3774,8 @@
         </p:nvSpPr>
         <p:spPr>
           <a:xfrm xmlns:a="http://schemas.openxmlformats.org/drawingml/2006/main">
-            <a:off x="647700" y="552450"/>
-            <a:ext cx="8572500" cy="609600"/>
+            <a:off x="685800" y="1428750"/>
+            <a:ext cx="10477500" cy="1714500"/>
           </a:xfrm>
           <a:prstGeom xmlns:a="http://schemas.openxmlformats.org/drawingml/2006/main" prst="rect">
             <a:avLst/>
@@ -3904,31 +3787,48 @@
           </a:ln>
         </p:spPr>
         <p:txBody>
-          <a:bodyPr xmlns:a="http://schemas.openxmlformats.org/drawingml/2006/main" anchor="t"/>
+          <a:bodyPr xmlns:a="http://schemas.openxmlformats.org/drawingml/2006/main" anchor="ctr"/>
           <a:lstStyle xmlns:a="http://schemas.openxmlformats.org/drawingml/2006/main">
             <a:defPPr>
-              <a:defRPr sz="3150" b="1">
-                <a:solidFill>
-                  <a:srgbClr val="082B26"/>
+              <a:defRPr sz="5100" b="1">
+                <a:solidFill>
+                  <a:srgbClr val="092C26"/>
                 </a:solidFill>
               </a:defRPr>
             </a:defPPr>
           </a:lstStyle>
           <a:p xmlns:a="http://schemas.openxmlformats.org/drawingml/2006/main">
             <a:pPr>
-              <a:defRPr sz="3150" b="1">
-                <a:solidFill>
-                  <a:srgbClr val="082B26"/>
+              <a:defRPr sz="5100" b="1">
+                <a:solidFill>
+                  <a:srgbClr val="092C26"/>
                 </a:solidFill>
               </a:defRPr>
             </a:pPr>
             <a:r>
-              <a:rPr sz="3150" b="1">
-                <a:solidFill>
-                  <a:srgbClr val="082B26"/>
+              <a:rPr sz="5100" b="1">
+                <a:solidFill>
+                  <a:srgbClr val="092C26"/>
                 </a:solidFill>
               </a:rPr>
-              <a:t>The worker knows first</a:t>
+              <a:t>A schedule knows</a:t>
+            </a:r>
+          </a:p>
+          <a:p xmlns:a="http://schemas.openxmlformats.org/drawingml/2006/main">
+            <a:pPr>
+              <a:defRPr sz="5100" b="1">
+                <a:solidFill>
+                  <a:srgbClr val="092C26"/>
+                </a:solidFill>
+              </a:defRPr>
+            </a:pPr>
+            <a:r>
+              <a:rPr sz="5100" b="1">
+                <a:solidFill>
+                  <a:srgbClr val="092C26"/>
+                </a:solidFill>
+              </a:rPr>
+              <a:t>the break ended.</a:t>
             </a:r>
           </a:p>
         </p:txBody>
@@ -3938,7 +3838,7 @@
           <p:cNvPr id="3" name="">
             <a:extLst xmlns:a="http://schemas.openxmlformats.org/drawingml/2006/main">
               <a:ext uri="{FF2B5EF4-FFF2-40B4-BE49-F238E27FC236}">
-                <a16:creationId xmlns:a16="http://schemas.microsoft.com/office/drawing/2014/main" id="{D8093642-4EC5-4B59-9EB6-B58E7AEC1DFE}"/>
+                <a16:creationId xmlns:a16="http://schemas.microsoft.com/office/drawing/2014/main" id="{643F1359-A138-422C-AB46-9F1CD51ECB70}"/>
               </a:ext>
             </a:extLst>
           </p:cNvPr>
@@ -3949,8 +3849,8 @@
         </p:nvSpPr>
         <p:spPr>
           <a:xfrm xmlns:a="http://schemas.openxmlformats.org/drawingml/2006/main">
-            <a:off x="647700" y="1905000"/>
-            <a:ext cx="9906000" cy="1047750"/>
+            <a:off x="723900" y="3476625"/>
+            <a:ext cx="9906000" cy="1143000"/>
           </a:xfrm>
           <a:prstGeom xmlns:a="http://schemas.openxmlformats.org/drawingml/2006/main" prst="rect">
             <a:avLst/>
@@ -3962,31 +3862,31 @@
           </a:ln>
         </p:spPr>
         <p:txBody>
-          <a:bodyPr xmlns:a="http://schemas.openxmlformats.org/drawingml/2006/main" anchor="t"/>
+          <a:bodyPr xmlns:a="http://schemas.openxmlformats.org/drawingml/2006/main" anchor="ctr"/>
           <a:lstStyle xmlns:a="http://schemas.openxmlformats.org/drawingml/2006/main">
             <a:defPPr>
-              <a:defRPr sz="4350" b="1">
-                <a:solidFill>
-                  <a:srgbClr val="0D4D40"/>
+              <a:defRPr sz="3150" b="1">
+                <a:solidFill>
+                  <a:srgbClr val="205342"/>
                 </a:solidFill>
               </a:defRPr>
             </a:defPPr>
           </a:lstStyle>
           <a:p xmlns:a="http://schemas.openxmlformats.org/drawingml/2006/main">
             <a:pPr>
-              <a:defRPr sz="4350" b="1">
-                <a:solidFill>
-                  <a:srgbClr val="0D4D40"/>
+              <a:defRPr sz="3150" b="1">
+                <a:solidFill>
+                  <a:srgbClr val="205342"/>
                 </a:solidFill>
               </a:defRPr>
             </a:pPr>
             <a:r>
-              <a:rPr sz="4350" b="1">
-                <a:solidFill>
-                  <a:srgbClr val="0D4D40"/>
+              <a:rPr sz="3150" b="1">
+                <a:solidFill>
+                  <a:srgbClr val="205342"/>
                 </a:solidFill>
               </a:rPr>
-              <a:t>“I need five more minutes.”</a:t>
+              <a:t>It cannot know whether the worker feels ready.</a:t>
             </a:r>
           </a:p>
         </p:txBody>
@@ -3996,7 +3896,7 @@
           <p:cNvPr id="4" name="">
             <a:extLst xmlns:a="http://schemas.openxmlformats.org/drawingml/2006/main">
               <a:ext uri="{FF2B5EF4-FFF2-40B4-BE49-F238E27FC236}">
-                <a16:creationId xmlns:a16="http://schemas.microsoft.com/office/drawing/2014/main" id="{ACB3AA7E-DE54-45C7-9A81-59820E912495}"/>
+                <a16:creationId xmlns:a16="http://schemas.microsoft.com/office/drawing/2014/main" id="{406B1150-ACD0-4A11-94F8-128064A64E91}"/>
               </a:ext>
             </a:extLst>
           </p:cNvPr>
@@ -4007,14 +3907,14 @@
         </p:nvSpPr>
         <p:spPr>
           <a:xfrm xmlns:a="http://schemas.openxmlformats.org/drawingml/2006/main">
-            <a:off x="647700" y="3448050"/>
-            <a:ext cx="7810500" cy="28575"/>
+            <a:off x="723900" y="5143500"/>
+            <a:ext cx="10668000" cy="28575"/>
           </a:xfrm>
           <a:prstGeom xmlns:a="http://schemas.openxmlformats.org/drawingml/2006/main" prst="rect">
             <a:avLst/>
           </a:prstGeom>
           <a:solidFill xmlns:a="http://schemas.openxmlformats.org/drawingml/2006/main">
-            <a:srgbClr val="C8FF63"/>
+            <a:srgbClr val="CEFF75"/>
           </a:solidFill>
           <a:ln xmlns:a="http://schemas.openxmlformats.org/drawingml/2006/main" w="0">
             <a:noFill/>
@@ -4027,7 +3927,7 @@
           <p:cNvPr id="5" name="">
             <a:extLst xmlns:a="http://schemas.openxmlformats.org/drawingml/2006/main">
               <a:ext uri="{FF2B5EF4-FFF2-40B4-BE49-F238E27FC236}">
-                <a16:creationId xmlns:a16="http://schemas.microsoft.com/office/drawing/2014/main" id="{E1D30F50-7EC6-466B-9A3C-CC01AC033D0E}"/>
+                <a16:creationId xmlns:a16="http://schemas.microsoft.com/office/drawing/2014/main" id="{C0C89EED-E7CA-4EFF-869D-7EEF3013DCDB}"/>
               </a:ext>
             </a:extLst>
           </p:cNvPr>
@@ -4038,8 +3938,8 @@
         </p:nvSpPr>
         <p:spPr>
           <a:xfrm xmlns:a="http://schemas.openxmlformats.org/drawingml/2006/main">
-            <a:off x="647700" y="3886200"/>
-            <a:ext cx="8286750" cy="1143000"/>
+            <a:off x="742950" y="5391150"/>
+            <a:ext cx="10191750" cy="819150"/>
           </a:xfrm>
           <a:prstGeom xmlns:a="http://schemas.openxmlformats.org/drawingml/2006/main" prst="rect">
             <a:avLst/>
@@ -4051,89 +3951,31 @@
           </a:ln>
         </p:spPr>
         <p:txBody>
-          <a:bodyPr xmlns:a="http://schemas.openxmlformats.org/drawingml/2006/main" anchor="t"/>
+          <a:bodyPr xmlns:a="http://schemas.openxmlformats.org/drawingml/2006/main" anchor="ctr"/>
           <a:lstStyle xmlns:a="http://schemas.openxmlformats.org/drawingml/2006/main">
             <a:defPPr>
-              <a:defRPr sz="2025" b="0">
-                <a:solidFill>
-                  <a:srgbClr val="082B26"/>
+              <a:defRPr sz="1800" b="0">
+                <a:solidFill>
+                  <a:srgbClr val="5B7169"/>
                 </a:solidFill>
               </a:defRPr>
             </a:defPPr>
           </a:lstStyle>
           <a:p xmlns:a="http://schemas.openxmlformats.org/drawingml/2006/main">
             <a:pPr>
-              <a:defRPr sz="2025" b="0">
-                <a:solidFill>
-                  <a:srgbClr val="082B26"/>
+              <a:defRPr sz="1800" b="0">
+                <a:solidFill>
+                  <a:srgbClr val="5B7169"/>
                 </a:solidFill>
               </a:defRPr>
             </a:pPr>
             <a:r>
-              <a:rPr sz="2025" b="0">
-                <a:solidFill>
-                  <a:srgbClr val="082B26"/>
+              <a:rPr sz="1800" b="0">
+                <a:solidFill>
+                  <a:srgbClr val="5B7169"/>
                 </a:solidFill>
               </a:rPr>
-              <a:t>A fixed schedule protects the break. It cannot show what changed during rest or whether the worker wants help.</a:t>
-            </a:r>
-          </a:p>
-        </p:txBody>
-      </p:sp>
-      <p:sp>
-        <p:nvSpPr>
-          <p:cNvPr id="6" name="">
-            <a:extLst xmlns:a="http://schemas.openxmlformats.org/drawingml/2006/main">
-              <a:ext uri="{FF2B5EF4-FFF2-40B4-BE49-F238E27FC236}">
-                <a16:creationId xmlns:a16="http://schemas.microsoft.com/office/drawing/2014/main" id="{E1AF4051-A70E-44A9-9D35-ED1B89E736F4}"/>
-              </a:ext>
-            </a:extLst>
-          </p:cNvPr>
-          <p:cNvSpPr>
-            <a:spLocks xmlns:a="http://schemas.openxmlformats.org/drawingml/2006/main" noGrp="1"/>
-          </p:cNvSpPr>
-          <p:nvPr/>
-        </p:nvSpPr>
-        <p:spPr>
-          <a:xfrm xmlns:a="http://schemas.openxmlformats.org/drawingml/2006/main">
-            <a:off x="647700" y="5448300"/>
-            <a:ext cx="8572500" cy="647700"/>
-          </a:xfrm>
-          <a:prstGeom xmlns:a="http://schemas.openxmlformats.org/drawingml/2006/main" prst="rect">
-            <a:avLst/>
-          </a:prstGeom>
-          <a:noFill xmlns:a="http://schemas.openxmlformats.org/drawingml/2006/main"/>
-          <a:ln xmlns:a="http://schemas.openxmlformats.org/drawingml/2006/main" w="0">
-            <a:noFill/>
-            <a:prstDash val="solid"/>
-          </a:ln>
-        </p:spPr>
-        <p:txBody>
-          <a:bodyPr xmlns:a="http://schemas.openxmlformats.org/drawingml/2006/main" anchor="t"/>
-          <a:lstStyle xmlns:a="http://schemas.openxmlformats.org/drawingml/2006/main">
-            <a:defPPr>
-              <a:defRPr sz="1725" b="0">
-                <a:solidFill>
-                  <a:srgbClr val="61756C"/>
-                </a:solidFill>
-              </a:defRPr>
-            </a:defPPr>
-          </a:lstStyle>
-          <a:p xmlns:a="http://schemas.openxmlformats.org/drawingml/2006/main">
-            <a:pPr>
-              <a:defRPr sz="1725" b="0">
-                <a:solidFill>
-                  <a:srgbClr val="61756C"/>
-                </a:solidFill>
-              </a:defRPr>
-            </a:pPr>
-            <a:r>
-              <a:rPr sz="1725" b="0">
-                <a:solidFill>
-                  <a:srgbClr val="61756C"/>
-                </a:solidFill>
-              </a:rPr>
-              <a:t>SiteGuard keeps the person in control and gives the safety team enough context to act.</a:t>
+              <a:t>The worker needs a clear way to ask. The safety team needs a way to make room.</a:t>
             </a:r>
           </a:p>
         </p:txBody>
@@ -4141,7 +3983,7 @@
     </p:spTree>
     <p:extLst>
       <p:ext uri="{BB962C8B-B14F-4D97-AF65-F5344CB8AC3E}">
-        <p14:creationId xmlns:p14="http://schemas.microsoft.com/office/powerpoint/2010/main" val="1777896721"/>
+        <p14:creationId xmlns:p14="http://schemas.microsoft.com/office/powerpoint/2010/main" val="975127358"/>
       </p:ext>
     </p:extLst>
   </p:cSld>
@@ -4154,7 +3996,7 @@
     <p:bg>
       <p:bgPr>
         <a:solidFill xmlns:a="http://schemas.openxmlformats.org/drawingml/2006/main">
-          <a:srgbClr val="07110F"/>
+          <a:srgbClr val="F4F6F1"/>
         </a:solidFill>
       </p:bgPr>
     </p:bg>
@@ -4169,10 +4011,10 @@
       </p:grpSpPr>
       <p:sp>
         <p:nvSpPr>
-          <p:cNvPr id="7" name="">
+          <p:cNvPr id="5" name="">
             <a:extLst xmlns:a="http://schemas.openxmlformats.org/drawingml/2006/main">
               <a:ext uri="{FF2B5EF4-FFF2-40B4-BE49-F238E27FC236}">
-                <a16:creationId xmlns:a16="http://schemas.microsoft.com/office/drawing/2014/main" id="{B2ACED75-F850-454D-AB61-F5C2A3A8C7D3}"/>
+                <a16:creationId xmlns:a16="http://schemas.microsoft.com/office/drawing/2014/main" id="{E6E2B5FD-2F93-4ECE-AA3A-BD5307527914}"/>
               </a:ext>
             </a:extLst>
           </p:cNvPr>
@@ -4183,8 +4025,8 @@
         </p:nvSpPr>
         <p:spPr>
           <a:xfrm xmlns:a="http://schemas.openxmlformats.org/drawingml/2006/main">
-            <a:off x="11410950" y="285750"/>
-            <a:ext cx="342900" cy="209550"/>
+            <a:off x="685800" y="438150"/>
+            <a:ext cx="8191500" cy="266700"/>
           </a:xfrm>
           <a:prstGeom xmlns:a="http://schemas.openxmlformats.org/drawingml/2006/main" prst="rect">
             <a:avLst/>
@@ -4196,31 +4038,31 @@
           </a:ln>
         </p:spPr>
         <p:txBody>
-          <a:bodyPr xmlns:a="http://schemas.openxmlformats.org/drawingml/2006/main" anchor="t"/>
+          <a:bodyPr xmlns:a="http://schemas.openxmlformats.org/drawingml/2006/main" anchor="ctr"/>
           <a:lstStyle xmlns:a="http://schemas.openxmlformats.org/drawingml/2006/main">
             <a:defPPr>
-              <a:defRPr sz="825" b="1">
-                <a:solidFill>
-                  <a:srgbClr val="DCE9E3"/>
+              <a:defRPr sz="1275" b="1">
+                <a:solidFill>
+                  <a:srgbClr val="205342"/>
                 </a:solidFill>
               </a:defRPr>
             </a:defPPr>
           </a:lstStyle>
           <a:p xmlns:a="http://schemas.openxmlformats.org/drawingml/2006/main">
             <a:pPr>
-              <a:defRPr sz="825" b="1">
-                <a:solidFill>
-                  <a:srgbClr val="DCE9E3"/>
+              <a:defRPr sz="1275" b="1">
+                <a:solidFill>
+                  <a:srgbClr val="205342"/>
                 </a:solidFill>
               </a:defRPr>
             </a:pPr>
             <a:r>
-              <a:rPr sz="825" b="1">
-                <a:solidFill>
-                  <a:srgbClr val="DCE9E3"/>
+              <a:rPr sz="1275" b="1">
+                <a:solidFill>
+                  <a:srgbClr val="205342"/>
                 </a:solidFill>
               </a:rPr>
-              <a:t>03</a:t>
+              <a:t>01  CHECK IN</a:t>
             </a:r>
           </a:p>
         </p:txBody>
@@ -4230,7 +4072,7 @@
           <p:cNvPr id="2" name="">
             <a:extLst xmlns:a="http://schemas.openxmlformats.org/drawingml/2006/main">
               <a:ext uri="{FF2B5EF4-FFF2-40B4-BE49-F238E27FC236}">
-                <a16:creationId xmlns:a16="http://schemas.microsoft.com/office/drawing/2014/main" id="{3375F113-9227-4B47-8973-513EC6C32A3B}"/>
+                <a16:creationId xmlns:a16="http://schemas.microsoft.com/office/drawing/2014/main" id="{CF544A67-F4EF-484C-9015-1B65D8359D43}"/>
               </a:ext>
             </a:extLst>
           </p:cNvPr>
@@ -4241,8 +4083,8 @@
         </p:nvSpPr>
         <p:spPr>
           <a:xfrm xmlns:a="http://schemas.openxmlformats.org/drawingml/2006/main">
-            <a:off x="628650" y="457200"/>
-            <a:ext cx="7429500" cy="609600"/>
+            <a:off x="685800" y="819150"/>
+            <a:ext cx="10668000" cy="685800"/>
           </a:xfrm>
           <a:prstGeom xmlns:a="http://schemas.openxmlformats.org/drawingml/2006/main" prst="rect">
             <a:avLst/>
@@ -4254,99 +4096,41 @@
           </a:ln>
         </p:spPr>
         <p:txBody>
-          <a:bodyPr xmlns:a="http://schemas.openxmlformats.org/drawingml/2006/main" anchor="t"/>
+          <a:bodyPr xmlns:a="http://schemas.openxmlformats.org/drawingml/2006/main" anchor="ctr"/>
           <a:lstStyle xmlns:a="http://schemas.openxmlformats.org/drawingml/2006/main">
             <a:defPPr>
-              <a:defRPr sz="3150" b="1">
-                <a:solidFill>
-                  <a:srgbClr val="FFFFFF"/>
+              <a:defRPr sz="3825" b="1">
+                <a:solidFill>
+                  <a:srgbClr val="092C26"/>
                 </a:solidFill>
               </a:defRPr>
             </a:defPPr>
           </a:lstStyle>
           <a:p xmlns:a="http://schemas.openxmlformats.org/drawingml/2006/main">
             <a:pPr>
-              <a:defRPr sz="3150" b="1">
-                <a:solidFill>
-                  <a:srgbClr val="FFFFFF"/>
+              <a:defRPr sz="3825" b="1">
+                <a:solidFill>
+                  <a:srgbClr val="092C26"/>
                 </a:solidFill>
               </a:defRPr>
             </a:pPr>
             <a:r>
-              <a:rPr sz="3150" b="1">
-                <a:solidFill>
-                  <a:srgbClr val="FFFFFF"/>
+              <a:rPr sz="3825" b="1">
+                <a:solidFill>
+                  <a:srgbClr val="092C26"/>
                 </a:solidFill>
               </a:rPr>
-              <a:t>A 90-second check-in</a:t>
-            </a:r>
-          </a:p>
-        </p:txBody>
-      </p:sp>
-      <p:sp>
-        <p:nvSpPr>
+              <a:t>The worker starts a check-in</a:t>
+            </a:r>
+          </a:p>
+        </p:txBody>
+      </p:sp>
+      <p:pic>
+        <p:nvPicPr>
           <p:cNvPr id="3" name="">
             <a:extLst xmlns:a="http://schemas.openxmlformats.org/drawingml/2006/main">
               <a:ext uri="{FF2B5EF4-FFF2-40B4-BE49-F238E27FC236}">
-                <a16:creationId xmlns:a16="http://schemas.microsoft.com/office/drawing/2014/main" id="{52954C5F-447D-4CDC-8E76-E835BA1585F8}"/>
-              </a:ext>
-            </a:extLst>
-          </p:cNvPr>
-          <p:cNvSpPr>
-            <a:spLocks xmlns:a="http://schemas.openxmlformats.org/drawingml/2006/main" noGrp="1"/>
-          </p:cNvSpPr>
-          <p:nvPr/>
-        </p:nvSpPr>
-        <p:spPr>
-          <a:xfrm xmlns:a="http://schemas.openxmlformats.org/drawingml/2006/main">
-            <a:off x="647700" y="1066800"/>
-            <a:ext cx="7810500" cy="400050"/>
-          </a:xfrm>
-          <a:prstGeom xmlns:a="http://schemas.openxmlformats.org/drawingml/2006/main" prst="rect">
-            <a:avLst/>
-          </a:prstGeom>
-          <a:noFill xmlns:a="http://schemas.openxmlformats.org/drawingml/2006/main"/>
-          <a:ln xmlns:a="http://schemas.openxmlformats.org/drawingml/2006/main" w="0">
-            <a:noFill/>
-            <a:prstDash val="solid"/>
-          </a:ln>
-        </p:spPr>
-        <p:txBody>
-          <a:bodyPr xmlns:a="http://schemas.openxmlformats.org/drawingml/2006/main" anchor="t"/>
-          <a:lstStyle xmlns:a="http://schemas.openxmlformats.org/drawingml/2006/main">
-            <a:defPPr>
-              <a:defRPr sz="1650" b="0">
-                <a:solidFill>
-                  <a:srgbClr val="DCE9E3"/>
-                </a:solidFill>
-              </a:defRPr>
-            </a:defPPr>
-          </a:lstStyle>
-          <a:p xmlns:a="http://schemas.openxmlformats.org/drawingml/2006/main">
-            <a:pPr>
-              <a:defRPr sz="1650" b="0">
-                <a:solidFill>
-                  <a:srgbClr val="DCE9E3"/>
-                </a:solidFill>
-              </a:defRPr>
-            </a:pPr>
-            <a:r>
-              <a:rPr sz="1650" b="0">
-                <a:solidFill>
-                  <a:srgbClr val="DCE9E3"/>
-                </a:solidFill>
-              </a:rPr>
-              <a:t>Camera observations become pulse and breathing trends.</a:t>
-            </a:r>
-          </a:p>
-        </p:txBody>
-      </p:sp>
-      <p:pic>
-        <p:nvPicPr>
-          <p:cNvPr id="4" name="">
-            <a:extLst xmlns:a="http://schemas.openxmlformats.org/drawingml/2006/main">
-              <a:ext uri="{FF2B5EF4-FFF2-40B4-BE49-F238E27FC236}">
-                <a16:creationId xmlns:a16="http://schemas.microsoft.com/office/drawing/2014/main" id="{1BFF1A23-9514-4706-BAC2-DF87B7484182}"/>
+                <a16:creationId xmlns:a16="http://schemas.microsoft.com/office/drawing/2014/main" id="{C9B01339-C0AC-4F01-9298-9420A62464F4}"/>
               </a:ext>
             </a:extLst>
           </p:cNvPr>
@@ -4356,28 +4140,28 @@
           <p:nvPr/>
         </p:nvPicPr>
         <p:blipFill>
-          <a:blip xmlns:r="http://schemas.openxmlformats.org/officeDocument/2006/relationships" xmlns:a="http://schemas.openxmlformats.org/drawingml/2006/main" r:embed="Rf734f484917a449e"/>
-          <a:srcRect xmlns:a="http://schemas.openxmlformats.org/drawingml/2006/main" l="8000" t="4000" r="4000" b="3000"/>
-          <a:stretch xmlns:a="http://schemas.openxmlformats.org/drawingml/2006/main"/>
+          <a:blip xmlns:r="http://schemas.openxmlformats.org/officeDocument/2006/relationships" xmlns:a="http://schemas.openxmlformats.org/drawingml/2006/main" r:embed="R6ed6a60c45814c53"/>
+          <a:srcRect xmlns:a="http://schemas.openxmlformats.org/drawingml/2006/main" l="0" t="15217" r="0" b="15217"/>
+          <a:stretch xmlns:a="http://schemas.openxmlformats.org/drawingml/2006/main">
+            <a:fillRect l="0" t="0" r="0" b="0"/>
+          </a:stretch>
         </p:blipFill>
         <p:spPr>
           <a:xfrm xmlns:a="http://schemas.openxmlformats.org/drawingml/2006/main">
-            <a:off x="666750" y="1733550"/>
-            <a:ext cx="10858500" cy="4381500"/>
+            <a:off x="666750" y="1905000"/>
+            <a:ext cx="10858500" cy="4248150"/>
           </a:xfrm>
-          <a:prstGeom xmlns:a="http://schemas.openxmlformats.org/drawingml/2006/main" prst="roundRect">
-            <a:avLst>
-              <a:gd name="adj" fmla="val 6087"/>
-            </a:avLst>
+          <a:prstGeom xmlns:a="http://schemas.openxmlformats.org/drawingml/2006/main" prst="rect">
+            <a:avLst/>
           </a:prstGeom>
         </p:spPr>
       </p:pic>
       <p:sp>
         <p:nvSpPr>
-          <p:cNvPr id="5" name="">
+          <p:cNvPr id="4" name="">
             <a:extLst xmlns:a="http://schemas.openxmlformats.org/drawingml/2006/main">
               <a:ext uri="{FF2B5EF4-FFF2-40B4-BE49-F238E27FC236}">
-                <a16:creationId xmlns:a16="http://schemas.microsoft.com/office/drawing/2014/main" id="{5022B0D1-02C0-4A4A-A28F-FE7E5DB291AD}"/>
+                <a16:creationId xmlns:a16="http://schemas.microsoft.com/office/drawing/2014/main" id="{4356A6E1-1537-4B3A-ABB4-B5C5B2BAFC8D}"/>
               </a:ext>
             </a:extLst>
           </p:cNvPr>
@@ -4388,41 +4172,8 @@
         </p:nvSpPr>
         <p:spPr>
           <a:xfrm xmlns:a="http://schemas.openxmlformats.org/drawingml/2006/main">
-            <a:off x="685800" y="6286500"/>
-            <a:ext cx="4286250" cy="285750"/>
-          </a:xfrm>
-          <a:prstGeom xmlns:a="http://schemas.openxmlformats.org/drawingml/2006/main" prst="roundRect">
-            <a:avLst>
-              <a:gd name="adj" fmla="val 50000"/>
-            </a:avLst>
-          </a:prstGeom>
-          <a:solidFill xmlns:a="http://schemas.openxmlformats.org/drawingml/2006/main">
-            <a:srgbClr val="FFD278"/>
-          </a:solidFill>
-          <a:ln xmlns:a="http://schemas.openxmlformats.org/drawingml/2006/main" w="0">
-            <a:noFill/>
-            <a:prstDash val="solid"/>
-          </a:ln>
-        </p:spPr>
-      </p:sp>
-      <p:sp>
-        <p:nvSpPr>
-          <p:cNvPr id="6" name="">
-            <a:extLst xmlns:a="http://schemas.openxmlformats.org/drawingml/2006/main">
-              <a:ext uri="{FF2B5EF4-FFF2-40B4-BE49-F238E27FC236}">
-                <a16:creationId xmlns:a16="http://schemas.microsoft.com/office/drawing/2014/main" id="{AC52C2AD-7441-4E1D-8AFD-22354B146FD1}"/>
-              </a:ext>
-            </a:extLst>
-          </p:cNvPr>
-          <p:cNvSpPr>
-            <a:spLocks xmlns:a="http://schemas.openxmlformats.org/drawingml/2006/main" noGrp="1"/>
-          </p:cNvSpPr>
-          <p:nvPr/>
-        </p:nvSpPr>
-        <p:spPr>
-          <a:xfrm xmlns:a="http://schemas.openxmlformats.org/drawingml/2006/main">
-            <a:off x="838200" y="6362700"/>
-            <a:ext cx="3981450" cy="152400"/>
+            <a:off x="685800" y="6305550"/>
+            <a:ext cx="6000750" cy="266700"/>
           </a:xfrm>
           <a:prstGeom xmlns:a="http://schemas.openxmlformats.org/drawingml/2006/main" prst="rect">
             <a:avLst/>
@@ -4434,31 +4185,31 @@
           </a:ln>
         </p:spPr>
         <p:txBody>
-          <a:bodyPr xmlns:a="http://schemas.openxmlformats.org/drawingml/2006/main" anchor="t"/>
+          <a:bodyPr xmlns:a="http://schemas.openxmlformats.org/drawingml/2006/main" anchor="ctr"/>
           <a:lstStyle xmlns:a="http://schemas.openxmlformats.org/drawingml/2006/main">
             <a:defPPr>
-              <a:defRPr sz="900" b="1">
-                <a:solidFill>
-                  <a:srgbClr val="07110F"/>
+              <a:defRPr sz="1350" b="1">
+                <a:solidFill>
+                  <a:srgbClr val="5B7169"/>
                 </a:solidFill>
               </a:defRPr>
             </a:defPPr>
           </a:lstStyle>
           <a:p xmlns:a="http://schemas.openxmlformats.org/drawingml/2006/main">
             <a:pPr>
-              <a:defRPr sz="900" b="1">
-                <a:solidFill>
-                  <a:srgbClr val="07110F"/>
+              <a:defRPr sz="1350" b="1">
+                <a:solidFill>
+                  <a:srgbClr val="5B7169"/>
                 </a:solidFill>
               </a:defRPr>
             </a:pPr>
             <a:r>
-              <a:rPr sz="900" b="1">
-                <a:solidFill>
-                  <a:srgbClr val="07110F"/>
+              <a:rPr sz="1350" b="1">
+                <a:solidFill>
+                  <a:srgbClr val="5B7169"/>
                 </a:solidFill>
               </a:rPr>
-              <a:t>SYNTHETIC READINGS SHOWN</a:t>
+              <a:t>Synthetic demo readings</a:t>
             </a:r>
           </a:p>
         </p:txBody>
@@ -4466,7 +4217,7 @@
     </p:spTree>
     <p:extLst>
       <p:ext uri="{BB962C8B-B14F-4D97-AF65-F5344CB8AC3E}">
-        <p14:creationId xmlns:p14="http://schemas.microsoft.com/office/powerpoint/2010/main" val="537024887"/>
+        <p14:creationId xmlns:p14="http://schemas.microsoft.com/office/powerpoint/2010/main" val="731588075"/>
       </p:ext>
     </p:extLst>
   </p:cSld>
@@ -4479,7 +4230,7 @@
     <p:bg>
       <p:bgPr>
         <a:solidFill xmlns:a="http://schemas.openxmlformats.org/drawingml/2006/main">
-          <a:srgbClr val="FFFFFF"/>
+          <a:srgbClr val="092C26"/>
         </a:solidFill>
       </p:bgPr>
     </p:bg>
@@ -4494,10 +4245,10 @@
       </p:grpSpPr>
       <p:sp>
         <p:nvSpPr>
-          <p:cNvPr id="8" name="">
+          <p:cNvPr id="6" name="">
             <a:extLst xmlns:a="http://schemas.openxmlformats.org/drawingml/2006/main">
               <a:ext uri="{FF2B5EF4-FFF2-40B4-BE49-F238E27FC236}">
-                <a16:creationId xmlns:a16="http://schemas.microsoft.com/office/drawing/2014/main" id="{C22603D7-F571-43F5-AA53-9E2419B89D2C}"/>
+                <a16:creationId xmlns:a16="http://schemas.microsoft.com/office/drawing/2014/main" id="{4AAE05ED-8079-4305-BD7D-59DAA00FACDC}"/>
               </a:ext>
             </a:extLst>
           </p:cNvPr>
@@ -4508,8 +4259,8 @@
         </p:nvSpPr>
         <p:spPr>
           <a:xfrm xmlns:a="http://schemas.openxmlformats.org/drawingml/2006/main">
-            <a:off x="11410950" y="285750"/>
-            <a:ext cx="342900" cy="209550"/>
+            <a:off x="685800" y="438150"/>
+            <a:ext cx="8191500" cy="266700"/>
           </a:xfrm>
           <a:prstGeom xmlns:a="http://schemas.openxmlformats.org/drawingml/2006/main" prst="rect">
             <a:avLst/>
@@ -4521,31 +4272,31 @@
           </a:ln>
         </p:spPr>
         <p:txBody>
-          <a:bodyPr xmlns:a="http://schemas.openxmlformats.org/drawingml/2006/main" anchor="t"/>
+          <a:bodyPr xmlns:a="http://schemas.openxmlformats.org/drawingml/2006/main" anchor="ctr"/>
           <a:lstStyle xmlns:a="http://schemas.openxmlformats.org/drawingml/2006/main">
             <a:defPPr>
-              <a:defRPr sz="825" b="1">
-                <a:solidFill>
-                  <a:srgbClr val="61756C"/>
+              <a:defRPr sz="1275" b="1">
+                <a:solidFill>
+                  <a:srgbClr val="CEFF75"/>
                 </a:solidFill>
               </a:defRPr>
             </a:defPPr>
           </a:lstStyle>
           <a:p xmlns:a="http://schemas.openxmlformats.org/drawingml/2006/main">
             <a:pPr>
-              <a:defRPr sz="825" b="1">
-                <a:solidFill>
-                  <a:srgbClr val="61756C"/>
+              <a:defRPr sz="1275" b="1">
+                <a:solidFill>
+                  <a:srgbClr val="CEFF75"/>
                 </a:solidFill>
               </a:defRPr>
             </a:pPr>
             <a:r>
-              <a:rPr sz="825" b="1">
-                <a:solidFill>
-                  <a:srgbClr val="61756C"/>
+              <a:rPr sz="1275" b="1">
+                <a:solidFill>
+                  <a:srgbClr val="CEFF75"/>
                 </a:solidFill>
               </a:rPr>
-              <a:t>04</a:t>
+              <a:t>02  UNDERSTAND</a:t>
             </a:r>
           </a:p>
         </p:txBody>
@@ -4555,7 +4306,7 @@
           <p:cNvPr id="2" name="">
             <a:extLst xmlns:a="http://schemas.openxmlformats.org/drawingml/2006/main">
               <a:ext uri="{FF2B5EF4-FFF2-40B4-BE49-F238E27FC236}">
-                <a16:creationId xmlns:a16="http://schemas.microsoft.com/office/drawing/2014/main" id="{43EC9A21-4252-4850-BB10-A4790D89D7C7}"/>
+                <a16:creationId xmlns:a16="http://schemas.microsoft.com/office/drawing/2014/main" id="{C0F8F139-48D1-4E11-A769-E2938576B5DC}"/>
               </a:ext>
             </a:extLst>
           </p:cNvPr>
@@ -4566,8 +4317,8 @@
         </p:nvSpPr>
         <p:spPr>
           <a:xfrm xmlns:a="http://schemas.openxmlformats.org/drawingml/2006/main">
-            <a:off x="609600" y="438150"/>
-            <a:ext cx="7239000" cy="590550"/>
+            <a:off x="685800" y="800100"/>
+            <a:ext cx="10668000" cy="704850"/>
           </a:xfrm>
           <a:prstGeom xmlns:a="http://schemas.openxmlformats.org/drawingml/2006/main" prst="rect">
             <a:avLst/>
@@ -4579,31 +4330,31 @@
           </a:ln>
         </p:spPr>
         <p:txBody>
-          <a:bodyPr xmlns:a="http://schemas.openxmlformats.org/drawingml/2006/main" anchor="t"/>
+          <a:bodyPr xmlns:a="http://schemas.openxmlformats.org/drawingml/2006/main" anchor="ctr"/>
           <a:lstStyle xmlns:a="http://schemas.openxmlformats.org/drawingml/2006/main">
             <a:defPPr>
-              <a:defRPr sz="3150" b="1">
-                <a:solidFill>
-                  <a:srgbClr val="082B26"/>
+              <a:defRPr sz="3975" b="1">
+                <a:solidFill>
+                  <a:srgbClr val="FFFFFF"/>
                 </a:solidFill>
               </a:defRPr>
             </a:defPPr>
           </a:lstStyle>
           <a:p xmlns:a="http://schemas.openxmlformats.org/drawingml/2006/main">
             <a:pPr>
-              <a:defRPr sz="3150" b="1">
-                <a:solidFill>
-                  <a:srgbClr val="082B26"/>
+              <a:defRPr sz="3975" b="1">
+                <a:solidFill>
+                  <a:srgbClr val="FFFFFF"/>
                 </a:solidFill>
               </a:defRPr>
             </a:pPr>
             <a:r>
-              <a:rPr sz="3150" b="1">
-                <a:solidFill>
-                  <a:srgbClr val="082B26"/>
+              <a:rPr sz="3975" b="1">
+                <a:solidFill>
+                  <a:srgbClr val="FFFFFF"/>
                 </a:solidFill>
               </a:rPr>
-              <a:t>One clear next step</a:t>
+              <a:t>A change the worker can see</a:t>
             </a:r>
           </a:p>
         </p:txBody>
@@ -4613,7 +4364,7 @@
           <p:cNvPr id="3" name="">
             <a:extLst xmlns:a="http://schemas.openxmlformats.org/drawingml/2006/main">
               <a:ext uri="{FF2B5EF4-FFF2-40B4-BE49-F238E27FC236}">
-                <a16:creationId xmlns:a16="http://schemas.microsoft.com/office/drawing/2014/main" id="{76401C19-EC86-4D65-965E-B1F75107193E}"/>
+                <a16:creationId xmlns:a16="http://schemas.microsoft.com/office/drawing/2014/main" id="{90D4538E-049F-47D1-96EE-9481F8B5A344}"/>
               </a:ext>
             </a:extLst>
           </p:cNvPr>
@@ -4624,8 +4375,8 @@
         </p:nvSpPr>
         <p:spPr>
           <a:xfrm xmlns:a="http://schemas.openxmlformats.org/drawingml/2006/main">
-            <a:off x="628650" y="1066800"/>
-            <a:ext cx="9906000" cy="400050"/>
+            <a:off x="685800" y="1466850"/>
+            <a:ext cx="10477500" cy="495300"/>
           </a:xfrm>
           <a:prstGeom xmlns:a="http://schemas.openxmlformats.org/drawingml/2006/main" prst="rect">
             <a:avLst/>
@@ -4637,31 +4388,31 @@
           </a:ln>
         </p:spPr>
         <p:txBody>
-          <a:bodyPr xmlns:a="http://schemas.openxmlformats.org/drawingml/2006/main" anchor="t"/>
+          <a:bodyPr xmlns:a="http://schemas.openxmlformats.org/drawingml/2006/main" anchor="ctr"/>
           <a:lstStyle xmlns:a="http://schemas.openxmlformats.org/drawingml/2006/main">
             <a:defPPr>
-              <a:defRPr sz="1650" b="0">
-                <a:solidFill>
-                  <a:srgbClr val="61756C"/>
+              <a:defRPr sz="2100" b="0">
+                <a:solidFill>
+                  <a:srgbClr val="CEFF75"/>
                 </a:solidFill>
               </a:defRPr>
             </a:defPPr>
           </a:lstStyle>
           <a:p xmlns:a="http://schemas.openxmlformats.org/drawingml/2006/main">
             <a:pPr>
-              <a:defRPr sz="1650" b="0">
-                <a:solidFill>
-                  <a:srgbClr val="61756C"/>
+              <a:defRPr sz="2100" b="0">
+                <a:solidFill>
+                  <a:srgbClr val="CEFF75"/>
                 </a:solidFill>
               </a:defRPr>
             </a:pPr>
             <a:r>
-              <a:rPr sz="1650" b="0">
-                <a:solidFill>
-                  <a:srgbClr val="61756C"/>
+              <a:rPr sz="2100" b="0">
+                <a:solidFill>
+                  <a:srgbClr val="CEFF75"/>
                 </a:solidFill>
               </a:rPr>
-              <a:t>The model surfaces evidence. Gemini explains approved facts. The worker decides.</a:t>
+              <a:t>This demo session: pulse 102.2 to 88.6 bpm</a:t>
             </a:r>
           </a:p>
         </p:txBody>
@@ -4671,7 +4422,7 @@
           <p:cNvPr id="4" name="">
             <a:extLst xmlns:a="http://schemas.openxmlformats.org/drawingml/2006/main">
               <a:ext uri="{FF2B5EF4-FFF2-40B4-BE49-F238E27FC236}">
-                <a16:creationId xmlns:a16="http://schemas.microsoft.com/office/drawing/2014/main" id="{3F56EDFB-E6E1-43CC-8E9E-3A1CDAA56411}"/>
+                <a16:creationId xmlns:a16="http://schemas.microsoft.com/office/drawing/2014/main" id="{8630FA64-0986-4933-87EE-E4ED9EAC147A}"/>
               </a:ext>
             </a:extLst>
           </p:cNvPr>
@@ -4681,19 +4432,19 @@
           <p:nvPr/>
         </p:nvPicPr>
         <p:blipFill>
-          <a:blip xmlns:r="http://schemas.openxmlformats.org/officeDocument/2006/relationships" xmlns:a="http://schemas.openxmlformats.org/drawingml/2006/main" r:embed="Ra68bbf12684b42e4"/>
-          <a:srcRect xmlns:a="http://schemas.openxmlformats.org/drawingml/2006/main" l="4000" t="3000" r="3000" b="4000"/>
-          <a:stretch xmlns:a="http://schemas.openxmlformats.org/drawingml/2006/main"/>
+          <a:blip xmlns:r="http://schemas.openxmlformats.org/officeDocument/2006/relationships" xmlns:a="http://schemas.openxmlformats.org/drawingml/2006/main" r:embed="Re1f5f529e5ec4ce2"/>
+          <a:srcRect xmlns:a="http://schemas.openxmlformats.org/drawingml/2006/main" l="0" t="4" r="0" b="4"/>
+          <a:stretch xmlns:a="http://schemas.openxmlformats.org/drawingml/2006/main">
+            <a:fillRect l="0" t="0" r="0" b="0"/>
+          </a:stretch>
         </p:blipFill>
         <p:spPr>
           <a:xfrm xmlns:a="http://schemas.openxmlformats.org/drawingml/2006/main">
-            <a:off x="628650" y="1695450"/>
-            <a:ext cx="10934700" cy="4476750"/>
+            <a:off x="666750" y="2266950"/>
+            <a:ext cx="10858500" cy="3181350"/>
           </a:xfrm>
-          <a:prstGeom xmlns:a="http://schemas.openxmlformats.org/drawingml/2006/main" prst="roundRect">
-            <a:avLst>
-              <a:gd name="adj" fmla="val 5957"/>
-            </a:avLst>
+          <a:prstGeom xmlns:a="http://schemas.openxmlformats.org/drawingml/2006/main" prst="rect">
+            <a:avLst/>
           </a:prstGeom>
         </p:spPr>
       </p:pic>
@@ -4702,7 +4453,7 @@
           <p:cNvPr id="5" name="">
             <a:extLst xmlns:a="http://schemas.openxmlformats.org/drawingml/2006/main">
               <a:ext uri="{FF2B5EF4-FFF2-40B4-BE49-F238E27FC236}">
-                <a16:creationId xmlns:a16="http://schemas.microsoft.com/office/drawing/2014/main" id="{BDA1C4AB-440E-4A26-9E13-BA3FAB710775}"/>
+                <a16:creationId xmlns:a16="http://schemas.microsoft.com/office/drawing/2014/main" id="{5526DBBC-C45B-44CF-AE4C-7CA220E557F5}"/>
               </a:ext>
             </a:extLst>
           </p:cNvPr>
@@ -4713,8 +4464,8 @@
         </p:nvSpPr>
         <p:spPr>
           <a:xfrm xmlns:a="http://schemas.openxmlformats.org/drawingml/2006/main">
-            <a:off x="857250" y="5791200"/>
-            <a:ext cx="1619250" cy="419100"/>
+            <a:off x="704850" y="5734050"/>
+            <a:ext cx="10477500" cy="476250"/>
           </a:xfrm>
           <a:prstGeom xmlns:a="http://schemas.openxmlformats.org/drawingml/2006/main" prst="rect">
             <a:avLst/>
@@ -4726,147 +4477,31 @@
           </a:ln>
         </p:spPr>
         <p:txBody>
-          <a:bodyPr xmlns:a="http://schemas.openxmlformats.org/drawingml/2006/main" anchor="t"/>
+          <a:bodyPr xmlns:a="http://schemas.openxmlformats.org/drawingml/2006/main" anchor="ctr"/>
           <a:lstStyle xmlns:a="http://schemas.openxmlformats.org/drawingml/2006/main">
             <a:defPPr>
-              <a:defRPr sz="2175" b="1">
-                <a:solidFill>
-                  <a:srgbClr val="0D4D40"/>
+              <a:defRPr sz="2025" b="0">
+                <a:solidFill>
+                  <a:srgbClr val="FFFFFF"/>
                 </a:solidFill>
               </a:defRPr>
             </a:defPPr>
           </a:lstStyle>
           <a:p xmlns:a="http://schemas.openxmlformats.org/drawingml/2006/main">
             <a:pPr>
-              <a:defRPr sz="2175" b="1">
-                <a:solidFill>
-                  <a:srgbClr val="0D4D40"/>
+              <a:defRPr sz="2025" b="0">
+                <a:solidFill>
+                  <a:srgbClr val="FFFFFF"/>
                 </a:solidFill>
               </a:defRPr>
             </a:pPr>
             <a:r>
-              <a:rPr sz="2175" b="1">
-                <a:solidFill>
-                  <a:srgbClr val="0D4D40"/>
+              <a:rPr sz="2025" b="0">
+                <a:solidFill>
+                  <a:srgbClr val="FFFFFF"/>
                 </a:solidFill>
               </a:rPr>
-              <a:t>REST</a:t>
-            </a:r>
-          </a:p>
-        </p:txBody>
-      </p:sp>
-      <p:sp>
-        <p:nvSpPr>
-          <p:cNvPr id="6" name="">
-            <a:extLst xmlns:a="http://schemas.openxmlformats.org/drawingml/2006/main">
-              <a:ext uri="{FF2B5EF4-FFF2-40B4-BE49-F238E27FC236}">
-                <a16:creationId xmlns:a16="http://schemas.microsoft.com/office/drawing/2014/main" id="{FB89C00F-0563-4A0A-B61C-C55FE40ECAAB}"/>
-              </a:ext>
-            </a:extLst>
-          </p:cNvPr>
-          <p:cNvSpPr>
-            <a:spLocks xmlns:a="http://schemas.openxmlformats.org/drawingml/2006/main" noGrp="1"/>
-          </p:cNvSpPr>
-          <p:nvPr/>
-        </p:nvSpPr>
-        <p:spPr>
-          <a:xfrm xmlns:a="http://schemas.openxmlformats.org/drawingml/2006/main">
-            <a:off x="2857500" y="5791200"/>
-            <a:ext cx="2190750" cy="419100"/>
-          </a:xfrm>
-          <a:prstGeom xmlns:a="http://schemas.openxmlformats.org/drawingml/2006/main" prst="rect">
-            <a:avLst/>
-          </a:prstGeom>
-          <a:noFill xmlns:a="http://schemas.openxmlformats.org/drawingml/2006/main"/>
-          <a:ln xmlns:a="http://schemas.openxmlformats.org/drawingml/2006/main" w="0">
-            <a:noFill/>
-            <a:prstDash val="solid"/>
-          </a:ln>
-        </p:spPr>
-        <p:txBody>
-          <a:bodyPr xmlns:a="http://schemas.openxmlformats.org/drawingml/2006/main" anchor="t"/>
-          <a:lstStyle xmlns:a="http://schemas.openxmlformats.org/drawingml/2006/main">
-            <a:defPPr>
-              <a:defRPr sz="2175" b="1">
-                <a:solidFill>
-                  <a:srgbClr val="0D4D40"/>
-                </a:solidFill>
-              </a:defRPr>
-            </a:defPPr>
-          </a:lstStyle>
-          <a:p xmlns:a="http://schemas.openxmlformats.org/drawingml/2006/main">
-            <a:pPr>
-              <a:defRPr sz="2175" b="1">
-                <a:solidFill>
-                  <a:srgbClr val="0D4D40"/>
-                </a:solidFill>
-              </a:defRPr>
-            </a:pPr>
-            <a:r>
-              <a:rPr sz="2175" b="1">
-                <a:solidFill>
-                  <a:srgbClr val="0D4D40"/>
-                </a:solidFill>
-              </a:rPr>
-              <a:t>TRY AGAIN</a:t>
-            </a:r>
-          </a:p>
-        </p:txBody>
-      </p:sp>
-      <p:sp>
-        <p:nvSpPr>
-          <p:cNvPr id="7" name="">
-            <a:extLst xmlns:a="http://schemas.openxmlformats.org/drawingml/2006/main">
-              <a:ext uri="{FF2B5EF4-FFF2-40B4-BE49-F238E27FC236}">
-                <a16:creationId xmlns:a16="http://schemas.microsoft.com/office/drawing/2014/main" id="{50C8EE3E-DF50-456D-AB27-DAAD46BE001C}"/>
-              </a:ext>
-            </a:extLst>
-          </p:cNvPr>
-          <p:cNvSpPr>
-            <a:spLocks xmlns:a="http://schemas.openxmlformats.org/drawingml/2006/main" noGrp="1"/>
-          </p:cNvSpPr>
-          <p:nvPr/>
-        </p:nvSpPr>
-        <p:spPr>
-          <a:xfrm xmlns:a="http://schemas.openxmlformats.org/drawingml/2006/main">
-            <a:off x="5476875" y="5791200"/>
-            <a:ext cx="2190750" cy="419100"/>
-          </a:xfrm>
-          <a:prstGeom xmlns:a="http://schemas.openxmlformats.org/drawingml/2006/main" prst="rect">
-            <a:avLst/>
-          </a:prstGeom>
-          <a:noFill xmlns:a="http://schemas.openxmlformats.org/drawingml/2006/main"/>
-          <a:ln xmlns:a="http://schemas.openxmlformats.org/drawingml/2006/main" w="0">
-            <a:noFill/>
-            <a:prstDash val="solid"/>
-          </a:ln>
-        </p:spPr>
-        <p:txBody>
-          <a:bodyPr xmlns:a="http://schemas.openxmlformats.org/drawingml/2006/main" anchor="t"/>
-          <a:lstStyle xmlns:a="http://schemas.openxmlformats.org/drawingml/2006/main">
-            <a:defPPr>
-              <a:defRPr sz="2175" b="1">
-                <a:solidFill>
-                  <a:srgbClr val="0D4D40"/>
-                </a:solidFill>
-              </a:defRPr>
-            </a:defPPr>
-          </a:lstStyle>
-          <a:p xmlns:a="http://schemas.openxmlformats.org/drawingml/2006/main">
-            <a:pPr>
-              <a:defRPr sz="2175" b="1">
-                <a:solidFill>
-                  <a:srgbClr val="0D4D40"/>
-                </a:solidFill>
-              </a:defRPr>
-            </a:pPr>
-            <a:r>
-              <a:rPr sz="2175" b="1">
-                <a:solidFill>
-                  <a:srgbClr val="0D4D40"/>
-                </a:solidFill>
-              </a:rPr>
-              <a:t>CONTINUE</a:t>
+              <a:t>The app shows the evidence and its source.</a:t>
             </a:r>
           </a:p>
         </p:txBody>
@@ -4874,7 +4509,7 @@
     </p:spTree>
     <p:extLst>
       <p:ext uri="{BB962C8B-B14F-4D97-AF65-F5344CB8AC3E}">
-        <p14:creationId xmlns:p14="http://schemas.microsoft.com/office/powerpoint/2010/main" val="590165973"/>
+        <p14:creationId xmlns:p14="http://schemas.microsoft.com/office/powerpoint/2010/main" val="285844992"/>
       </p:ext>
     </p:extLst>
   </p:cSld>
@@ -4887,7 +4522,7 @@
     <p:bg>
       <p:bgPr>
         <a:solidFill xmlns:a="http://schemas.openxmlformats.org/drawingml/2006/main">
-          <a:srgbClr val="F5F7F2"/>
+          <a:srgbClr val="F4F6F1"/>
         </a:solidFill>
       </p:bgPr>
     </p:bg>
@@ -4902,10 +4537,10 @@
       </p:grpSpPr>
       <p:sp>
         <p:nvSpPr>
-          <p:cNvPr id="8" name="">
+          <p:cNvPr id="4" name="">
             <a:extLst xmlns:a="http://schemas.openxmlformats.org/drawingml/2006/main">
               <a:ext uri="{FF2B5EF4-FFF2-40B4-BE49-F238E27FC236}">
-                <a16:creationId xmlns:a16="http://schemas.microsoft.com/office/drawing/2014/main" id="{8BE885AC-1D22-4E20-8B8F-EC7F0F5DA140}"/>
+                <a16:creationId xmlns:a16="http://schemas.microsoft.com/office/drawing/2014/main" id="{F7373B6C-7897-48BF-8DBA-1AEBB1928E81}"/>
               </a:ext>
             </a:extLst>
           </p:cNvPr>
@@ -4916,8 +4551,8 @@
         </p:nvSpPr>
         <p:spPr>
           <a:xfrm xmlns:a="http://schemas.openxmlformats.org/drawingml/2006/main">
-            <a:off x="11410950" y="285750"/>
-            <a:ext cx="342900" cy="209550"/>
+            <a:off x="685800" y="438150"/>
+            <a:ext cx="8191500" cy="266700"/>
           </a:xfrm>
           <a:prstGeom xmlns:a="http://schemas.openxmlformats.org/drawingml/2006/main" prst="rect">
             <a:avLst/>
@@ -4929,31 +4564,31 @@
           </a:ln>
         </p:spPr>
         <p:txBody>
-          <a:bodyPr xmlns:a="http://schemas.openxmlformats.org/drawingml/2006/main" anchor="t"/>
+          <a:bodyPr xmlns:a="http://schemas.openxmlformats.org/drawingml/2006/main" anchor="ctr"/>
           <a:lstStyle xmlns:a="http://schemas.openxmlformats.org/drawingml/2006/main">
             <a:defPPr>
-              <a:defRPr sz="825" b="1">
-                <a:solidFill>
-                  <a:srgbClr val="61756C"/>
+              <a:defRPr sz="1275" b="1">
+                <a:solidFill>
+                  <a:srgbClr val="205342"/>
                 </a:solidFill>
               </a:defRPr>
             </a:defPPr>
           </a:lstStyle>
           <a:p xmlns:a="http://schemas.openxmlformats.org/drawingml/2006/main">
             <a:pPr>
-              <a:defRPr sz="825" b="1">
-                <a:solidFill>
-                  <a:srgbClr val="61756C"/>
+              <a:defRPr sz="1275" b="1">
+                <a:solidFill>
+                  <a:srgbClr val="205342"/>
                 </a:solidFill>
               </a:defRPr>
             </a:pPr>
             <a:r>
-              <a:rPr sz="825" b="1">
-                <a:solidFill>
-                  <a:srgbClr val="61756C"/>
+              <a:rPr sz="1275" b="1">
+                <a:solidFill>
+                  <a:srgbClr val="205342"/>
                 </a:solidFill>
               </a:rPr>
-              <a:t>05</a:t>
+              <a:t>03  ASK</a:t>
             </a:r>
           </a:p>
         </p:txBody>
@@ -4963,7 +4598,7 @@
           <p:cNvPr id="2" name="">
             <a:extLst xmlns:a="http://schemas.openxmlformats.org/drawingml/2006/main">
               <a:ext uri="{FF2B5EF4-FFF2-40B4-BE49-F238E27FC236}">
-                <a16:creationId xmlns:a16="http://schemas.microsoft.com/office/drawing/2014/main" id="{8B5D42D1-9351-4ADE-B5A7-1941BE26278B}"/>
+                <a16:creationId xmlns:a16="http://schemas.microsoft.com/office/drawing/2014/main" id="{167BDB7F-42B9-4187-BBB3-680F900DF09C}"/>
               </a:ext>
             </a:extLst>
           </p:cNvPr>
@@ -4974,8 +4609,8 @@
         </p:nvSpPr>
         <p:spPr>
           <a:xfrm xmlns:a="http://schemas.openxmlformats.org/drawingml/2006/main">
-            <a:off x="609600" y="457200"/>
-            <a:ext cx="7810500" cy="609600"/>
+            <a:off x="685800" y="790575"/>
+            <a:ext cx="10668000" cy="762000"/>
           </a:xfrm>
           <a:prstGeom xmlns:a="http://schemas.openxmlformats.org/drawingml/2006/main" prst="rect">
             <a:avLst/>
@@ -4987,99 +4622,41 @@
           </a:ln>
         </p:spPr>
         <p:txBody>
-          <a:bodyPr xmlns:a="http://schemas.openxmlformats.org/drawingml/2006/main" anchor="t"/>
+          <a:bodyPr xmlns:a="http://schemas.openxmlformats.org/drawingml/2006/main" anchor="ctr"/>
           <a:lstStyle xmlns:a="http://schemas.openxmlformats.org/drawingml/2006/main">
             <a:defPPr>
-              <a:defRPr sz="3150" b="1">
-                <a:solidFill>
-                  <a:srgbClr val="082B26"/>
+              <a:defRPr sz="4050" b="1">
+                <a:solidFill>
+                  <a:srgbClr val="092C26"/>
                 </a:solidFill>
               </a:defRPr>
             </a:defPPr>
           </a:lstStyle>
           <a:p xmlns:a="http://schemas.openxmlformats.org/drawingml/2006/main">
             <a:pPr>
-              <a:defRPr sz="3150" b="1">
-                <a:solidFill>
-                  <a:srgbClr val="082B26"/>
+              <a:defRPr sz="4050" b="1">
+                <a:solidFill>
+                  <a:srgbClr val="092C26"/>
                 </a:solidFill>
               </a:defRPr>
             </a:pPr>
             <a:r>
-              <a:rPr sz="3150" b="1">
-                <a:solidFill>
-                  <a:srgbClr val="082B26"/>
+              <a:rPr sz="4050" b="1">
+                <a:solidFill>
+                  <a:srgbClr val="092C26"/>
                 </a:solidFill>
               </a:rPr>
-              <a:t>One request. One decision.</a:t>
-            </a:r>
-          </a:p>
-        </p:txBody>
-      </p:sp>
-      <p:sp>
-        <p:nvSpPr>
+              <a:t>Five more minutes of rest</a:t>
+            </a:r>
+          </a:p>
+        </p:txBody>
+      </p:sp>
+      <p:pic>
+        <p:nvPicPr>
           <p:cNvPr id="3" name="">
             <a:extLst xmlns:a="http://schemas.openxmlformats.org/drawingml/2006/main">
               <a:ext uri="{FF2B5EF4-FFF2-40B4-BE49-F238E27FC236}">
-                <a16:creationId xmlns:a16="http://schemas.microsoft.com/office/drawing/2014/main" id="{5733F01B-432E-4E7C-B1A3-FA2996430ED5}"/>
-              </a:ext>
-            </a:extLst>
-          </p:cNvPr>
-          <p:cNvSpPr>
-            <a:spLocks xmlns:a="http://schemas.openxmlformats.org/drawingml/2006/main" noGrp="1"/>
-          </p:cNvSpPr>
-          <p:nvPr/>
-        </p:nvSpPr>
-        <p:spPr>
-          <a:xfrm xmlns:a="http://schemas.openxmlformats.org/drawingml/2006/main">
-            <a:off x="628650" y="1085850"/>
-            <a:ext cx="8096250" cy="400050"/>
-          </a:xfrm>
-          <a:prstGeom xmlns:a="http://schemas.openxmlformats.org/drawingml/2006/main" prst="rect">
-            <a:avLst/>
-          </a:prstGeom>
-          <a:noFill xmlns:a="http://schemas.openxmlformats.org/drawingml/2006/main"/>
-          <a:ln xmlns:a="http://schemas.openxmlformats.org/drawingml/2006/main" w="0">
-            <a:noFill/>
-            <a:prstDash val="solid"/>
-          </a:ln>
-        </p:spPr>
-        <p:txBody>
-          <a:bodyPr xmlns:a="http://schemas.openxmlformats.org/drawingml/2006/main" anchor="t"/>
-          <a:lstStyle xmlns:a="http://schemas.openxmlformats.org/drawingml/2006/main">
-            <a:defPPr>
-              <a:defRPr sz="1725" b="0">
-                <a:solidFill>
-                  <a:srgbClr val="61756C"/>
-                </a:solidFill>
-              </a:defRPr>
-            </a:defPPr>
-          </a:lstStyle>
-          <a:p xmlns:a="http://schemas.openxmlformats.org/drawingml/2006/main">
-            <a:pPr>
-              <a:defRPr sz="1725" b="0">
-                <a:solidFill>
-                  <a:srgbClr val="61756C"/>
-                </a:solidFill>
-              </a:defRPr>
-            </a:pPr>
-            <a:r>
-              <a:rPr sz="1725" b="0">
-                <a:solidFill>
-                  <a:srgbClr val="61756C"/>
-                </a:solidFill>
-              </a:rPr>
-              <a:t>The break stays fixed. Coverage adapts around the worker.</a:t>
-            </a:r>
-          </a:p>
-        </p:txBody>
-      </p:sp>
-      <p:pic>
-        <p:nvPicPr>
-          <p:cNvPr id="4" name="">
-            <a:extLst xmlns:a="http://schemas.openxmlformats.org/drawingml/2006/main">
-              <a:ext uri="{FF2B5EF4-FFF2-40B4-BE49-F238E27FC236}">
-                <a16:creationId xmlns:a16="http://schemas.microsoft.com/office/drawing/2014/main" id="{C047A7C7-2B30-4449-902E-E008B2EA424C}"/>
+                <a16:creationId xmlns:a16="http://schemas.microsoft.com/office/drawing/2014/main" id="{C3AD2109-D2D7-4A58-9014-D3BE5833766C}"/>
               </a:ext>
             </a:extLst>
           </p:cNvPr>
@@ -5089,173 +4666,26 @@
           <p:nvPr/>
         </p:nvPicPr>
         <p:blipFill>
-          <a:blip xmlns:r="http://schemas.openxmlformats.org/officeDocument/2006/relationships" xmlns:a="http://schemas.openxmlformats.org/drawingml/2006/main" r:embed="Rbce19265f8cf445c"/>
-          <a:srcRect xmlns:a="http://schemas.openxmlformats.org/drawingml/2006/main" l="8000" t="5000" r="3000" b="3000"/>
-          <a:stretch xmlns:a="http://schemas.openxmlformats.org/drawingml/2006/main"/>
+          <a:blip xmlns:r="http://schemas.openxmlformats.org/officeDocument/2006/relationships" xmlns:a="http://schemas.openxmlformats.org/drawingml/2006/main" r:embed="Rc7055d64a1f94a36"/>
+          <a:srcRect xmlns:a="http://schemas.openxmlformats.org/drawingml/2006/main" l="0" t="2045" r="0" b="2045"/>
+          <a:stretch xmlns:a="http://schemas.openxmlformats.org/drawingml/2006/main">
+            <a:fillRect l="0" t="0" r="0" b="0"/>
+          </a:stretch>
         </p:blipFill>
         <p:spPr>
           <a:xfrm xmlns:a="http://schemas.openxmlformats.org/drawingml/2006/main">
-            <a:off x="628650" y="1790700"/>
-            <a:ext cx="5219700" cy="3905250"/>
+            <a:off x="1714500" y="1714500"/>
+            <a:ext cx="8763000" cy="4857750"/>
           </a:xfrm>
-          <a:prstGeom xmlns:a="http://schemas.openxmlformats.org/drawingml/2006/main" prst="roundRect">
-            <a:avLst>
-              <a:gd name="adj" fmla="val 6829"/>
-            </a:avLst>
+          <a:prstGeom xmlns:a="http://schemas.openxmlformats.org/drawingml/2006/main" prst="rect">
+            <a:avLst/>
           </a:prstGeom>
         </p:spPr>
       </p:pic>
-      <p:pic>
-        <p:nvPicPr>
-          <p:cNvPr id="5" name="">
-            <a:extLst xmlns:a="http://schemas.openxmlformats.org/drawingml/2006/main">
-              <a:ext uri="{FF2B5EF4-FFF2-40B4-BE49-F238E27FC236}">
-                <a16:creationId xmlns:a16="http://schemas.microsoft.com/office/drawing/2014/main" id="{707F2918-66A6-41AD-B087-49FBFBB3F118}"/>
-              </a:ext>
-            </a:extLst>
-          </p:cNvPr>
-          <p:cNvPicPr>
-            <a:picLocks xmlns:a="http://schemas.openxmlformats.org/drawingml/2006/main" noChangeAspect="1"/>
-          </p:cNvPicPr>
-          <p:nvPr/>
-        </p:nvPicPr>
-        <p:blipFill>
-          <a:blip xmlns:r="http://schemas.openxmlformats.org/officeDocument/2006/relationships" xmlns:a="http://schemas.openxmlformats.org/drawingml/2006/main" r:embed="R0bccfef516c04912"/>
-          <a:srcRect xmlns:a="http://schemas.openxmlformats.org/drawingml/2006/main" l="8000" t="5000" r="2000" b="3000"/>
-          <a:stretch xmlns:a="http://schemas.openxmlformats.org/drawingml/2006/main"/>
-        </p:blipFill>
-        <p:spPr>
-          <a:xfrm xmlns:a="http://schemas.openxmlformats.org/drawingml/2006/main">
-            <a:off x="6343650" y="1790700"/>
-            <a:ext cx="5219700" cy="3905250"/>
-          </a:xfrm>
-          <a:prstGeom xmlns:a="http://schemas.openxmlformats.org/drawingml/2006/main" prst="roundRect">
-            <a:avLst>
-              <a:gd name="adj" fmla="val 6829"/>
-            </a:avLst>
-          </a:prstGeom>
-        </p:spPr>
-      </p:pic>
-      <p:sp>
-        <p:nvSpPr>
-          <p:cNvPr id="6" name="">
-            <a:extLst xmlns:a="http://schemas.openxmlformats.org/drawingml/2006/main">
-              <a:ext uri="{FF2B5EF4-FFF2-40B4-BE49-F238E27FC236}">
-                <a16:creationId xmlns:a16="http://schemas.microsoft.com/office/drawing/2014/main" id="{532E4CEE-C1C8-4331-B086-A45E7056C945}"/>
-              </a:ext>
-            </a:extLst>
-          </p:cNvPr>
-          <p:cNvSpPr>
-            <a:spLocks xmlns:a="http://schemas.openxmlformats.org/drawingml/2006/main" noGrp="1"/>
-          </p:cNvSpPr>
-          <p:nvPr/>
-        </p:nvSpPr>
-        <p:spPr>
-          <a:xfrm xmlns:a="http://schemas.openxmlformats.org/drawingml/2006/main">
-            <a:off x="666750" y="5962650"/>
-            <a:ext cx="4000500" cy="247650"/>
-          </a:xfrm>
-          <a:prstGeom xmlns:a="http://schemas.openxmlformats.org/drawingml/2006/main" prst="rect">
-            <a:avLst/>
-          </a:prstGeom>
-          <a:noFill xmlns:a="http://schemas.openxmlformats.org/drawingml/2006/main"/>
-          <a:ln xmlns:a="http://schemas.openxmlformats.org/drawingml/2006/main" w="0">
-            <a:noFill/>
-            <a:prstDash val="solid"/>
-          </a:ln>
-        </p:spPr>
-        <p:txBody>
-          <a:bodyPr xmlns:a="http://schemas.openxmlformats.org/drawingml/2006/main" anchor="t"/>
-          <a:lstStyle xmlns:a="http://schemas.openxmlformats.org/drawingml/2006/main">
-            <a:defPPr>
-              <a:defRPr sz="1050" b="1">
-                <a:solidFill>
-                  <a:srgbClr val="0D4D40"/>
-                </a:solidFill>
-              </a:defRPr>
-            </a:defPPr>
-          </a:lstStyle>
-          <a:p xmlns:a="http://schemas.openxmlformats.org/drawingml/2006/main">
-            <a:pPr>
-              <a:defRPr sz="1050" b="1">
-                <a:solidFill>
-                  <a:srgbClr val="0D4D40"/>
-                </a:solidFill>
-              </a:defRPr>
-            </a:pPr>
-            <a:r>
-              <a:rPr sz="1050" b="1">
-                <a:solidFill>
-                  <a:srgbClr val="0D4D40"/>
-                </a:solidFill>
-              </a:rPr>
-              <a:t>SUPERVISOR APPROVES</a:t>
-            </a:r>
-          </a:p>
-        </p:txBody>
-      </p:sp>
-      <p:sp>
-        <p:nvSpPr>
-          <p:cNvPr id="7" name="">
-            <a:extLst xmlns:a="http://schemas.openxmlformats.org/drawingml/2006/main">
-              <a:ext uri="{FF2B5EF4-FFF2-40B4-BE49-F238E27FC236}">
-                <a16:creationId xmlns:a16="http://schemas.microsoft.com/office/drawing/2014/main" id="{8EC31F0E-8A2D-4DFD-B0CE-B4EBCD7785A8}"/>
-              </a:ext>
-            </a:extLst>
-          </p:cNvPr>
-          <p:cNvSpPr>
-            <a:spLocks xmlns:a="http://schemas.openxmlformats.org/drawingml/2006/main" noGrp="1"/>
-          </p:cNvSpPr>
-          <p:nvPr/>
-        </p:nvSpPr>
-        <p:spPr>
-          <a:xfrm xmlns:a="http://schemas.openxmlformats.org/drawingml/2006/main">
-            <a:off x="6381750" y="5962650"/>
-            <a:ext cx="4000500" cy="247650"/>
-          </a:xfrm>
-          <a:prstGeom xmlns:a="http://schemas.openxmlformats.org/drawingml/2006/main" prst="rect">
-            <a:avLst/>
-          </a:prstGeom>
-          <a:noFill xmlns:a="http://schemas.openxmlformats.org/drawingml/2006/main"/>
-          <a:ln xmlns:a="http://schemas.openxmlformats.org/drawingml/2006/main" w="0">
-            <a:noFill/>
-            <a:prstDash val="solid"/>
-          </a:ln>
-        </p:spPr>
-        <p:txBody>
-          <a:bodyPr xmlns:a="http://schemas.openxmlformats.org/drawingml/2006/main" anchor="t"/>
-          <a:lstStyle xmlns:a="http://schemas.openxmlformats.org/drawingml/2006/main">
-            <a:defPPr>
-              <a:defRPr sz="1050" b="1">
-                <a:solidFill>
-                  <a:srgbClr val="0D4D40"/>
-                </a:solidFill>
-              </a:defRPr>
-            </a:defPPr>
-          </a:lstStyle>
-          <a:p xmlns:a="http://schemas.openxmlformats.org/drawingml/2006/main">
-            <a:pPr>
-              <a:defRPr sz="1050" b="1">
-                <a:solidFill>
-                  <a:srgbClr val="0D4D40"/>
-                </a:solidFill>
-              </a:defRPr>
-            </a:pPr>
-            <a:r>
-              <a:rPr sz="1050" b="1">
-                <a:solidFill>
-                  <a:srgbClr val="0D4D40"/>
-                </a:solidFill>
-              </a:rPr>
-              <a:t>COVERAGE UPDATES</a:t>
-            </a:r>
-          </a:p>
-        </p:txBody>
-      </p:sp>
     </p:spTree>
     <p:extLst>
       <p:ext uri="{BB962C8B-B14F-4D97-AF65-F5344CB8AC3E}">
-        <p14:creationId xmlns:p14="http://schemas.microsoft.com/office/powerpoint/2010/main" val="1714910665"/>
+        <p14:creationId xmlns:p14="http://schemas.microsoft.com/office/powerpoint/2010/main" val="1748099748"/>
       </p:ext>
     </p:extLst>
   </p:cSld>
@@ -5268,7 +4698,7 @@
     <p:bg>
       <p:bgPr>
         <a:solidFill xmlns:a="http://schemas.openxmlformats.org/drawingml/2006/main">
-          <a:srgbClr val="07110F"/>
+          <a:srgbClr val="092C26"/>
         </a:solidFill>
       </p:bgPr>
     </p:bg>
@@ -5283,10 +4713,10 @@
       </p:grpSpPr>
       <p:sp>
         <p:nvSpPr>
-          <p:cNvPr id="9" name="">
+          <p:cNvPr id="7" name="">
             <a:extLst xmlns:a="http://schemas.openxmlformats.org/drawingml/2006/main">
               <a:ext uri="{FF2B5EF4-FFF2-40B4-BE49-F238E27FC236}">
-                <a16:creationId xmlns:a16="http://schemas.microsoft.com/office/drawing/2014/main" id="{0D8E08F8-A282-4CA9-AB43-BD2DB37E75B0}"/>
+                <a16:creationId xmlns:a16="http://schemas.microsoft.com/office/drawing/2014/main" id="{4A99B524-3DC0-4246-A270-AFF5C6B849CF}"/>
               </a:ext>
             </a:extLst>
           </p:cNvPr>
@@ -5297,8 +4727,8 @@
         </p:nvSpPr>
         <p:spPr>
           <a:xfrm xmlns:a="http://schemas.openxmlformats.org/drawingml/2006/main">
-            <a:off x="11410950" y="285750"/>
-            <a:ext cx="342900" cy="209550"/>
+            <a:off x="685800" y="438150"/>
+            <a:ext cx="8191500" cy="266700"/>
           </a:xfrm>
           <a:prstGeom xmlns:a="http://schemas.openxmlformats.org/drawingml/2006/main" prst="rect">
             <a:avLst/>
@@ -5310,31 +4740,31 @@
           </a:ln>
         </p:spPr>
         <p:txBody>
-          <a:bodyPr xmlns:a="http://schemas.openxmlformats.org/drawingml/2006/main" anchor="t"/>
+          <a:bodyPr xmlns:a="http://schemas.openxmlformats.org/drawingml/2006/main" anchor="ctr"/>
           <a:lstStyle xmlns:a="http://schemas.openxmlformats.org/drawingml/2006/main">
             <a:defPPr>
-              <a:defRPr sz="825" b="1">
-                <a:solidFill>
-                  <a:srgbClr val="DCE9E3"/>
+              <a:defRPr sz="1275" b="1">
+                <a:solidFill>
+                  <a:srgbClr val="CEFF75"/>
                 </a:solidFill>
               </a:defRPr>
             </a:defPPr>
           </a:lstStyle>
           <a:p xmlns:a="http://schemas.openxmlformats.org/drawingml/2006/main">
             <a:pPr>
-              <a:defRPr sz="825" b="1">
-                <a:solidFill>
-                  <a:srgbClr val="DCE9E3"/>
+              <a:defRPr sz="1275" b="1">
+                <a:solidFill>
+                  <a:srgbClr val="CEFF75"/>
                 </a:solidFill>
               </a:defRPr>
             </a:pPr>
             <a:r>
-              <a:rPr sz="825" b="1">
-                <a:solidFill>
-                  <a:srgbClr val="DCE9E3"/>
+              <a:rPr sz="1275" b="1">
+                <a:solidFill>
+                  <a:srgbClr val="CEFF75"/>
                 </a:solidFill>
               </a:rPr>
-              <a:t>06</a:t>
+              <a:t>04  RESPOND</a:t>
             </a:r>
           </a:p>
         </p:txBody>
@@ -5344,7 +4774,7 @@
           <p:cNvPr id="2" name="">
             <a:extLst xmlns:a="http://schemas.openxmlformats.org/drawingml/2006/main">
               <a:ext uri="{FF2B5EF4-FFF2-40B4-BE49-F238E27FC236}">
-                <a16:creationId xmlns:a16="http://schemas.microsoft.com/office/drawing/2014/main" id="{2988335D-41E9-4B06-A2C2-ABF318B1E353}"/>
+                <a16:creationId xmlns:a16="http://schemas.microsoft.com/office/drawing/2014/main" id="{EE610CFD-0DED-43DA-B6C0-CC6025CB8D8F}"/>
               </a:ext>
             </a:extLst>
           </p:cNvPr>
@@ -5355,8 +4785,8 @@
         </p:nvSpPr>
         <p:spPr>
           <a:xfrm xmlns:a="http://schemas.openxmlformats.org/drawingml/2006/main">
-            <a:off x="609600" y="457200"/>
-            <a:ext cx="8572500" cy="609600"/>
+            <a:off x="685800" y="1085850"/>
+            <a:ext cx="5905500" cy="1238250"/>
           </a:xfrm>
           <a:prstGeom xmlns:a="http://schemas.openxmlformats.org/drawingml/2006/main" prst="rect">
             <a:avLst/>
@@ -5368,10 +4798,10 @@
           </a:ln>
         </p:spPr>
         <p:txBody>
-          <a:bodyPr xmlns:a="http://schemas.openxmlformats.org/drawingml/2006/main" anchor="t"/>
+          <a:bodyPr xmlns:a="http://schemas.openxmlformats.org/drawingml/2006/main" anchor="ctr"/>
           <a:lstStyle xmlns:a="http://schemas.openxmlformats.org/drawingml/2006/main">
             <a:defPPr>
-              <a:defRPr sz="3150" b="1">
+              <a:defRPr sz="4950" b="1">
                 <a:solidFill>
                   <a:srgbClr val="FFFFFF"/>
                 </a:solidFill>
@@ -5380,19 +4810,19 @@
           </a:lstStyle>
           <a:p xmlns:a="http://schemas.openxmlformats.org/drawingml/2006/main">
             <a:pPr>
-              <a:defRPr sz="3150" b="1">
+              <a:defRPr sz="4950" b="1">
                 <a:solidFill>
                   <a:srgbClr val="FFFFFF"/>
                 </a:solidFill>
               </a:defRPr>
             </a:pPr>
             <a:r>
-              <a:rPr sz="3150" b="1">
+              <a:rPr sz="4950" b="1">
                 <a:solidFill>
                   <a:srgbClr val="FFFFFF"/>
                 </a:solidFill>
               </a:rPr>
-              <a:t>A possible person-down alert</a:t>
+              <a:t>The schedule makes room.</a:t>
             </a:r>
           </a:p>
         </p:txBody>
@@ -5402,7 +4832,7 @@
           <p:cNvPr id="3" name="">
             <a:extLst xmlns:a="http://schemas.openxmlformats.org/drawingml/2006/main">
               <a:ext uri="{FF2B5EF4-FFF2-40B4-BE49-F238E27FC236}">
-                <a16:creationId xmlns:a16="http://schemas.microsoft.com/office/drawing/2014/main" id="{CD88DA6F-91EF-42FF-9165-380944335DCD}"/>
+                <a16:creationId xmlns:a16="http://schemas.microsoft.com/office/drawing/2014/main" id="{56CA476F-F2DF-4045-ACC1-D740BC41ECD7}"/>
               </a:ext>
             </a:extLst>
           </p:cNvPr>
@@ -5413,8 +4843,8 @@
         </p:nvSpPr>
         <p:spPr>
           <a:xfrm xmlns:a="http://schemas.openxmlformats.org/drawingml/2006/main">
-            <a:off x="628650" y="1066800"/>
-            <a:ext cx="8572500" cy="400050"/>
+            <a:off x="685800" y="2857500"/>
+            <a:ext cx="2381250" cy="1809750"/>
           </a:xfrm>
           <a:prstGeom xmlns:a="http://schemas.openxmlformats.org/drawingml/2006/main" prst="rect">
             <a:avLst/>
@@ -5426,41 +4856,174 @@
           </a:ln>
         </p:spPr>
         <p:txBody>
-          <a:bodyPr xmlns:a="http://schemas.openxmlformats.org/drawingml/2006/main" anchor="t"/>
+          <a:bodyPr xmlns:a="http://schemas.openxmlformats.org/drawingml/2006/main" anchor="ctr"/>
           <a:lstStyle xmlns:a="http://schemas.openxmlformats.org/drawingml/2006/main">
             <a:defPPr>
-              <a:defRPr sz="1650" b="0">
-                <a:solidFill>
-                  <a:srgbClr val="DCE9E3"/>
+              <a:defRPr sz="10800" b="1">
+                <a:solidFill>
+                  <a:srgbClr val="CEFF75"/>
                 </a:solidFill>
               </a:defRPr>
             </a:defPPr>
           </a:lstStyle>
           <a:p xmlns:a="http://schemas.openxmlformats.org/drawingml/2006/main">
             <a:pPr>
-              <a:defRPr sz="1650" b="0">
-                <a:solidFill>
-                  <a:srgbClr val="DCE9E3"/>
+              <a:defRPr sz="10800" b="1">
+                <a:solidFill>
+                  <a:srgbClr val="CEFF75"/>
                 </a:solidFill>
               </a:defRPr>
             </a:pPr>
             <a:r>
-              <a:rPr sz="1650" b="0">
-                <a:solidFill>
-                  <a:srgbClr val="DCE9E3"/>
+              <a:rPr sz="10800" b="1">
+                <a:solidFill>
+                  <a:srgbClr val="CEFF75"/>
                 </a:solidFill>
               </a:rPr>
-              <a:t>A possible person-down event reaches a human reviewer.</a:t>
-            </a:r>
-          </a:p>
-        </p:txBody>
-      </p:sp>
-      <p:pic>
-        <p:nvPicPr>
+              <a:t>6</a:t>
+            </a:r>
+          </a:p>
+        </p:txBody>
+      </p:sp>
+      <p:sp>
+        <p:nvSpPr>
           <p:cNvPr id="4" name="">
             <a:extLst xmlns:a="http://schemas.openxmlformats.org/drawingml/2006/main">
               <a:ext uri="{FF2B5EF4-FFF2-40B4-BE49-F238E27FC236}">
-                <a16:creationId xmlns:a16="http://schemas.microsoft.com/office/drawing/2014/main" id="{26555D0E-E66F-47FC-9D67-909B5C66C2D0}"/>
+                <a16:creationId xmlns:a16="http://schemas.microsoft.com/office/drawing/2014/main" id="{1AF3FB6F-4CD8-4458-8968-D96661F7044B}"/>
+              </a:ext>
+            </a:extLst>
+          </p:cNvPr>
+          <p:cNvSpPr>
+            <a:spLocks xmlns:a="http://schemas.openxmlformats.org/drawingml/2006/main" noGrp="1"/>
+          </p:cNvSpPr>
+          <p:nvPr/>
+        </p:nvSpPr>
+        <p:spPr>
+          <a:xfrm xmlns:a="http://schemas.openxmlformats.org/drawingml/2006/main">
+            <a:off x="2571750" y="3171825"/>
+            <a:ext cx="3333750" cy="1352550"/>
+          </a:xfrm>
+          <a:prstGeom xmlns:a="http://schemas.openxmlformats.org/drawingml/2006/main" prst="rect">
+            <a:avLst/>
+          </a:prstGeom>
+          <a:noFill xmlns:a="http://schemas.openxmlformats.org/drawingml/2006/main"/>
+          <a:ln xmlns:a="http://schemas.openxmlformats.org/drawingml/2006/main" w="0">
+            <a:noFill/>
+            <a:prstDash val="solid"/>
+          </a:ln>
+        </p:spPr>
+        <p:txBody>
+          <a:bodyPr xmlns:a="http://schemas.openxmlformats.org/drawingml/2006/main" anchor="ctr"/>
+          <a:lstStyle xmlns:a="http://schemas.openxmlformats.org/drawingml/2006/main">
+            <a:defPPr>
+              <a:defRPr sz="2850" b="1">
+                <a:solidFill>
+                  <a:srgbClr val="FFFFFF"/>
+                </a:solidFill>
+              </a:defRPr>
+            </a:defPPr>
+          </a:lstStyle>
+          <a:p xmlns:a="http://schemas.openxmlformats.org/drawingml/2006/main">
+            <a:pPr>
+              <a:defRPr sz="2850" b="1">
+                <a:solidFill>
+                  <a:srgbClr val="FFFFFF"/>
+                </a:solidFill>
+              </a:defRPr>
+            </a:pPr>
+            <a:r>
+              <a:rPr sz="2850" b="1">
+                <a:solidFill>
+                  <a:srgbClr val="FFFFFF"/>
+                </a:solidFill>
+              </a:rPr>
+              <a:t>protected breaks</a:t>
+            </a:r>
+          </a:p>
+          <a:p xmlns:a="http://schemas.openxmlformats.org/drawingml/2006/main">
+            <a:pPr>
+              <a:defRPr sz="2850" b="1">
+                <a:solidFill>
+                  <a:srgbClr val="FFFFFF"/>
+                </a:solidFill>
+              </a:defRPr>
+            </a:pPr>
+            <a:r>
+              <a:rPr sz="2850" b="1">
+                <a:solidFill>
+                  <a:srgbClr val="FFFFFF"/>
+                </a:solidFill>
+              </a:rPr>
+              <a:t>preserved</a:t>
+            </a:r>
+          </a:p>
+        </p:txBody>
+      </p:sp>
+      <p:sp>
+        <p:nvSpPr>
+          <p:cNvPr id="5" name="">
+            <a:extLst xmlns:a="http://schemas.openxmlformats.org/drawingml/2006/main">
+              <a:ext uri="{FF2B5EF4-FFF2-40B4-BE49-F238E27FC236}">
+                <a16:creationId xmlns:a16="http://schemas.microsoft.com/office/drawing/2014/main" id="{63DF220F-2B17-4725-863A-06F866DE7035}"/>
+              </a:ext>
+            </a:extLst>
+          </p:cNvPr>
+          <p:cNvSpPr>
+            <a:spLocks xmlns:a="http://schemas.openxmlformats.org/drawingml/2006/main" noGrp="1"/>
+          </p:cNvSpPr>
+          <p:nvPr/>
+        </p:nvSpPr>
+        <p:spPr>
+          <a:xfrm xmlns:a="http://schemas.openxmlformats.org/drawingml/2006/main">
+            <a:off x="714375" y="5486400"/>
+            <a:ext cx="5048250" cy="704850"/>
+          </a:xfrm>
+          <a:prstGeom xmlns:a="http://schemas.openxmlformats.org/drawingml/2006/main" prst="rect">
+            <a:avLst/>
+          </a:prstGeom>
+          <a:noFill xmlns:a="http://schemas.openxmlformats.org/drawingml/2006/main"/>
+          <a:ln xmlns:a="http://schemas.openxmlformats.org/drawingml/2006/main" w="0">
+            <a:noFill/>
+            <a:prstDash val="solid"/>
+          </a:ln>
+        </p:spPr>
+        <p:txBody>
+          <a:bodyPr xmlns:a="http://schemas.openxmlformats.org/drawingml/2006/main" anchor="ctr"/>
+          <a:lstStyle xmlns:a="http://schemas.openxmlformats.org/drawingml/2006/main">
+            <a:defPPr>
+              <a:defRPr sz="2100" b="0">
+                <a:solidFill>
+                  <a:srgbClr val="FFFFFF"/>
+                </a:solidFill>
+              </a:defRPr>
+            </a:defPPr>
+          </a:lstStyle>
+          <a:p xmlns:a="http://schemas.openxmlformats.org/drawingml/2006/main">
+            <a:pPr>
+              <a:defRPr sz="2100" b="0">
+                <a:solidFill>
+                  <a:srgbClr val="FFFFFF"/>
+                </a:solidFill>
+              </a:defRPr>
+            </a:pPr>
+            <a:r>
+              <a:rPr sz="2100" b="0">
+                <a:solidFill>
+                  <a:srgbClr val="FFFFFF"/>
+                </a:solidFill>
+              </a:rPr>
+              <a:t>Coverage updates after review.</a:t>
+            </a:r>
+          </a:p>
+        </p:txBody>
+      </p:sp>
+      <p:pic>
+        <p:nvPicPr>
+          <p:cNvPr id="6" name="">
+            <a:extLst xmlns:a="http://schemas.openxmlformats.org/drawingml/2006/main">
+              <a:ext uri="{FF2B5EF4-FFF2-40B4-BE49-F238E27FC236}">
+                <a16:creationId xmlns:a16="http://schemas.microsoft.com/office/drawing/2014/main" id="{F248A13C-4DC9-45FD-8F17-9A4390014A1F}"/>
               </a:ext>
             </a:extLst>
           </p:cNvPr>
@@ -5470,231 +5033,26 @@
           <p:nvPr/>
         </p:nvPicPr>
         <p:blipFill>
-          <a:blip xmlns:r="http://schemas.openxmlformats.org/officeDocument/2006/relationships" xmlns:a="http://schemas.openxmlformats.org/drawingml/2006/main" r:embed="R48c21b09fcd34d32"/>
-          <a:srcRect xmlns:a="http://schemas.openxmlformats.org/drawingml/2006/main" l="3000" t="3000" r="2000" b="3000"/>
-          <a:stretch xmlns:a="http://schemas.openxmlformats.org/drawingml/2006/main"/>
+          <a:blip xmlns:r="http://schemas.openxmlformats.org/officeDocument/2006/relationships" xmlns:a="http://schemas.openxmlformats.org/drawingml/2006/main" r:embed="Rad3f8fedcab64a83"/>
+          <a:srcRect xmlns:a="http://schemas.openxmlformats.org/drawingml/2006/main" l="0" t="4998" r="0" b="4998"/>
+          <a:stretch xmlns:a="http://schemas.openxmlformats.org/drawingml/2006/main">
+            <a:fillRect l="0" t="0" r="0" b="0"/>
+          </a:stretch>
         </p:blipFill>
         <p:spPr>
           <a:xfrm xmlns:a="http://schemas.openxmlformats.org/drawingml/2006/main">
-            <a:off x="609600" y="1714500"/>
-            <a:ext cx="6953250" cy="4362450"/>
+            <a:off x="6238875" y="933450"/>
+            <a:ext cx="5000625" cy="5238750"/>
           </a:xfrm>
-          <a:prstGeom xmlns:a="http://schemas.openxmlformats.org/drawingml/2006/main" prst="roundRect">
-            <a:avLst>
-              <a:gd name="adj" fmla="val 6114"/>
-            </a:avLst>
+          <a:prstGeom xmlns:a="http://schemas.openxmlformats.org/drawingml/2006/main" prst="rect">
+            <a:avLst/>
           </a:prstGeom>
         </p:spPr>
       </p:pic>
-      <p:pic>
-        <p:nvPicPr>
-          <p:cNvPr id="5" name="">
-            <a:extLst xmlns:a="http://schemas.openxmlformats.org/drawingml/2006/main">
-              <a:ext uri="{FF2B5EF4-FFF2-40B4-BE49-F238E27FC236}">
-                <a16:creationId xmlns:a16="http://schemas.microsoft.com/office/drawing/2014/main" id="{74E1383D-4A7A-486B-B7EA-DF91A3EAD759}"/>
-              </a:ext>
-            </a:extLst>
-          </p:cNvPr>
-          <p:cNvPicPr>
-            <a:picLocks xmlns:a="http://schemas.openxmlformats.org/drawingml/2006/main" noChangeAspect="1"/>
-          </p:cNvPicPr>
-          <p:nvPr/>
-        </p:nvPicPr>
-        <p:blipFill>
-          <a:blip xmlns:r="http://schemas.openxmlformats.org/officeDocument/2006/relationships" xmlns:a="http://schemas.openxmlformats.org/drawingml/2006/main" r:embed="R6eb35bcaf3854426"/>
-          <a:srcRect xmlns:a="http://schemas.openxmlformats.org/drawingml/2006/main" l="5000" t="5000" r="3000" b="4000"/>
-          <a:stretch xmlns:a="http://schemas.openxmlformats.org/drawingml/2006/main"/>
-        </p:blipFill>
-        <p:spPr>
-          <a:xfrm xmlns:a="http://schemas.openxmlformats.org/drawingml/2006/main">
-            <a:off x="7943850" y="2190750"/>
-            <a:ext cx="3600450" cy="2857500"/>
-          </a:xfrm>
-          <a:prstGeom xmlns:a="http://schemas.openxmlformats.org/drawingml/2006/main" prst="roundRect">
-            <a:avLst>
-              <a:gd name="adj" fmla="val 9333"/>
-            </a:avLst>
-          </a:prstGeom>
-        </p:spPr>
-      </p:pic>
-      <p:sp>
-        <p:nvSpPr>
-          <p:cNvPr id="6" name="">
-            <a:extLst xmlns:a="http://schemas.openxmlformats.org/drawingml/2006/main">
-              <a:ext uri="{FF2B5EF4-FFF2-40B4-BE49-F238E27FC236}">
-                <a16:creationId xmlns:a16="http://schemas.microsoft.com/office/drawing/2014/main" id="{0D098627-3253-4AA0-801D-53B3C730133C}"/>
-              </a:ext>
-            </a:extLst>
-          </p:cNvPr>
-          <p:cNvSpPr>
-            <a:spLocks xmlns:a="http://schemas.openxmlformats.org/drawingml/2006/main" noGrp="1"/>
-          </p:cNvSpPr>
-          <p:nvPr/>
-        </p:nvSpPr>
-        <p:spPr>
-          <a:xfrm xmlns:a="http://schemas.openxmlformats.org/drawingml/2006/main">
-            <a:off x="8020050" y="5334000"/>
-            <a:ext cx="1428750" cy="266700"/>
-          </a:xfrm>
-          <a:prstGeom xmlns:a="http://schemas.openxmlformats.org/drawingml/2006/main" prst="rect">
-            <a:avLst/>
-          </a:prstGeom>
-          <a:noFill xmlns:a="http://schemas.openxmlformats.org/drawingml/2006/main"/>
-          <a:ln xmlns:a="http://schemas.openxmlformats.org/drawingml/2006/main" w="0">
-            <a:noFill/>
-            <a:prstDash val="solid"/>
-          </a:ln>
-        </p:spPr>
-        <p:txBody>
-          <a:bodyPr xmlns:a="http://schemas.openxmlformats.org/drawingml/2006/main" anchor="t"/>
-          <a:lstStyle xmlns:a="http://schemas.openxmlformats.org/drawingml/2006/main">
-            <a:defPPr>
-              <a:defRPr sz="1125" b="1">
-                <a:solidFill>
-                  <a:srgbClr val="FFD278"/>
-                </a:solidFill>
-              </a:defRPr>
-            </a:defPPr>
-          </a:lstStyle>
-          <a:p xmlns:a="http://schemas.openxmlformats.org/drawingml/2006/main">
-            <a:pPr>
-              <a:defRPr sz="1125" b="1">
-                <a:solidFill>
-                  <a:srgbClr val="FFD278"/>
-                </a:solidFill>
-              </a:defRPr>
-            </a:pPr>
-            <a:r>
-              <a:rPr sz="1125" b="1">
-                <a:solidFill>
-                  <a:srgbClr val="FFD278"/>
-                </a:solidFill>
-              </a:rPr>
-              <a:t>DETECT</a:t>
-            </a:r>
-          </a:p>
-        </p:txBody>
-      </p:sp>
-      <p:sp>
-        <p:nvSpPr>
-          <p:cNvPr id="7" name="">
-            <a:extLst xmlns:a="http://schemas.openxmlformats.org/drawingml/2006/main">
-              <a:ext uri="{FF2B5EF4-FFF2-40B4-BE49-F238E27FC236}">
-                <a16:creationId xmlns:a16="http://schemas.microsoft.com/office/drawing/2014/main" id="{FA0F5F2B-7F64-4058-A23C-0A4066088A9C}"/>
-              </a:ext>
-            </a:extLst>
-          </p:cNvPr>
-          <p:cNvSpPr>
-            <a:spLocks xmlns:a="http://schemas.openxmlformats.org/drawingml/2006/main" noGrp="1"/>
-          </p:cNvSpPr>
-          <p:nvPr/>
-        </p:nvSpPr>
-        <p:spPr>
-          <a:xfrm xmlns:a="http://schemas.openxmlformats.org/drawingml/2006/main">
-            <a:off x="9525000" y="5334000"/>
-            <a:ext cx="1428750" cy="266700"/>
-          </a:xfrm>
-          <a:prstGeom xmlns:a="http://schemas.openxmlformats.org/drawingml/2006/main" prst="rect">
-            <a:avLst/>
-          </a:prstGeom>
-          <a:noFill xmlns:a="http://schemas.openxmlformats.org/drawingml/2006/main"/>
-          <a:ln xmlns:a="http://schemas.openxmlformats.org/drawingml/2006/main" w="0">
-            <a:noFill/>
-            <a:prstDash val="solid"/>
-          </a:ln>
-        </p:spPr>
-        <p:txBody>
-          <a:bodyPr xmlns:a="http://schemas.openxmlformats.org/drawingml/2006/main" anchor="t"/>
-          <a:lstStyle xmlns:a="http://schemas.openxmlformats.org/drawingml/2006/main">
-            <a:defPPr>
-              <a:defRPr sz="1125" b="1">
-                <a:solidFill>
-                  <a:srgbClr val="C8FF63"/>
-                </a:solidFill>
-              </a:defRPr>
-            </a:defPPr>
-          </a:lstStyle>
-          <a:p xmlns:a="http://schemas.openxmlformats.org/drawingml/2006/main">
-            <a:pPr>
-              <a:defRPr sz="1125" b="1">
-                <a:solidFill>
-                  <a:srgbClr val="C8FF63"/>
-                </a:solidFill>
-              </a:defRPr>
-            </a:pPr>
-            <a:r>
-              <a:rPr sz="1125" b="1">
-                <a:solidFill>
-                  <a:srgbClr val="C8FF63"/>
-                </a:solidFill>
-              </a:rPr>
-              <a:t>REVIEW</a:t>
-            </a:r>
-          </a:p>
-        </p:txBody>
-      </p:sp>
-      <p:sp>
-        <p:nvSpPr>
-          <p:cNvPr id="8" name="">
-            <a:extLst xmlns:a="http://schemas.openxmlformats.org/drawingml/2006/main">
-              <a:ext uri="{FF2B5EF4-FFF2-40B4-BE49-F238E27FC236}">
-                <a16:creationId xmlns:a16="http://schemas.microsoft.com/office/drawing/2014/main" id="{2146C573-53F3-414C-B272-D9E40C7A697A}"/>
-              </a:ext>
-            </a:extLst>
-          </p:cNvPr>
-          <p:cNvSpPr>
-            <a:spLocks xmlns:a="http://schemas.openxmlformats.org/drawingml/2006/main" noGrp="1"/>
-          </p:cNvSpPr>
-          <p:nvPr/>
-        </p:nvSpPr>
-        <p:spPr>
-          <a:xfrm xmlns:a="http://schemas.openxmlformats.org/drawingml/2006/main">
-            <a:off x="7962900" y="5715000"/>
-            <a:ext cx="3429000" cy="476250"/>
-          </a:xfrm>
-          <a:prstGeom xmlns:a="http://schemas.openxmlformats.org/drawingml/2006/main" prst="rect">
-            <a:avLst/>
-          </a:prstGeom>
-          <a:noFill xmlns:a="http://schemas.openxmlformats.org/drawingml/2006/main"/>
-          <a:ln xmlns:a="http://schemas.openxmlformats.org/drawingml/2006/main" w="0">
-            <a:noFill/>
-            <a:prstDash val="solid"/>
-          </a:ln>
-        </p:spPr>
-        <p:txBody>
-          <a:bodyPr xmlns:a="http://schemas.openxmlformats.org/drawingml/2006/main" anchor="t"/>
-          <a:lstStyle xmlns:a="http://schemas.openxmlformats.org/drawingml/2006/main">
-            <a:defPPr>
-              <a:defRPr sz="1425" b="1">
-                <a:solidFill>
-                  <a:srgbClr val="FFFFFF"/>
-                </a:solidFill>
-              </a:defRPr>
-            </a:defPPr>
-          </a:lstStyle>
-          <a:p xmlns:a="http://schemas.openxmlformats.org/drawingml/2006/main">
-            <a:pPr>
-              <a:defRPr sz="1425" b="1">
-                <a:solidFill>
-                  <a:srgbClr val="FFFFFF"/>
-                </a:solidFill>
-              </a:defRPr>
-            </a:pPr>
-            <a:r>
-              <a:rPr sz="1425" b="1">
-                <a:solidFill>
-                  <a:srgbClr val="FFFFFF"/>
-                </a:solidFill>
-              </a:rPr>
-              <a:t>A heuristic raises the event. A person closes it.</a:t>
-            </a:r>
-          </a:p>
-        </p:txBody>
-      </p:sp>
     </p:spTree>
     <p:extLst>
       <p:ext uri="{BB962C8B-B14F-4D97-AF65-F5344CB8AC3E}">
-        <p14:creationId xmlns:p14="http://schemas.microsoft.com/office/powerpoint/2010/main" val="1630261575"/>
+        <p14:creationId xmlns:p14="http://schemas.microsoft.com/office/powerpoint/2010/main" val="14858483"/>
       </p:ext>
     </p:extLst>
   </p:cSld>
@@ -5707,7 +5065,7 @@
     <p:bg>
       <p:bgPr>
         <a:solidFill xmlns:a="http://schemas.openxmlformats.org/drawingml/2006/main">
-          <a:srgbClr val="082B26"/>
+          <a:srgbClr val="051B19"/>
         </a:solidFill>
       </p:bgPr>
     </p:bg>
@@ -5722,10 +5080,10 @@
       </p:grpSpPr>
       <p:sp>
         <p:nvSpPr>
-          <p:cNvPr id="25" name="">
+          <p:cNvPr id="5" name="">
             <a:extLst xmlns:a="http://schemas.openxmlformats.org/drawingml/2006/main">
               <a:ext uri="{FF2B5EF4-FFF2-40B4-BE49-F238E27FC236}">
-                <a16:creationId xmlns:a16="http://schemas.microsoft.com/office/drawing/2014/main" id="{B9C31B0D-0886-4813-A923-6A9502E00F5F}"/>
+                <a16:creationId xmlns:a16="http://schemas.microsoft.com/office/drawing/2014/main" id="{EA5CEDA7-8054-4393-961A-A4E7055389F1}"/>
               </a:ext>
             </a:extLst>
           </p:cNvPr>
@@ -5736,8 +5094,8 @@
         </p:nvSpPr>
         <p:spPr>
           <a:xfrm xmlns:a="http://schemas.openxmlformats.org/drawingml/2006/main">
-            <a:off x="11410950" y="285750"/>
-            <a:ext cx="342900" cy="209550"/>
+            <a:off x="685800" y="438150"/>
+            <a:ext cx="8191500" cy="266700"/>
           </a:xfrm>
           <a:prstGeom xmlns:a="http://schemas.openxmlformats.org/drawingml/2006/main" prst="rect">
             <a:avLst/>
@@ -5749,31 +5107,31 @@
           </a:ln>
         </p:spPr>
         <p:txBody>
-          <a:bodyPr xmlns:a="http://schemas.openxmlformats.org/drawingml/2006/main" anchor="t"/>
+          <a:bodyPr xmlns:a="http://schemas.openxmlformats.org/drawingml/2006/main" anchor="ctr"/>
           <a:lstStyle xmlns:a="http://schemas.openxmlformats.org/drawingml/2006/main">
             <a:defPPr>
-              <a:defRPr sz="825" b="1">
-                <a:solidFill>
-                  <a:srgbClr val="DCE9E3"/>
+              <a:defRPr sz="1275" b="1">
+                <a:solidFill>
+                  <a:srgbClr val="F4C66B"/>
                 </a:solidFill>
               </a:defRPr>
             </a:defPPr>
           </a:lstStyle>
           <a:p xmlns:a="http://schemas.openxmlformats.org/drawingml/2006/main">
             <a:pPr>
-              <a:defRPr sz="825" b="1">
-                <a:solidFill>
-                  <a:srgbClr val="DCE9E3"/>
+              <a:defRPr sz="1275" b="1">
+                <a:solidFill>
+                  <a:srgbClr val="F4C66B"/>
                 </a:solidFill>
               </a:defRPr>
             </a:pPr>
             <a:r>
-              <a:rPr sz="825" b="1">
-                <a:solidFill>
-                  <a:srgbClr val="DCE9E3"/>
+              <a:rPr sz="1275" b="1">
+                <a:solidFill>
+                  <a:srgbClr val="F4C66B"/>
                 </a:solidFill>
               </a:rPr>
-              <a:t>07</a:t>
+              <a:t>ANOTHER SAFETY MOMENT</a:t>
             </a:r>
           </a:p>
         </p:txBody>
@@ -5783,7 +5141,7 @@
           <p:cNvPr id="2" name="">
             <a:extLst xmlns:a="http://schemas.openxmlformats.org/drawingml/2006/main">
               <a:ext uri="{FF2B5EF4-FFF2-40B4-BE49-F238E27FC236}">
-                <a16:creationId xmlns:a16="http://schemas.microsoft.com/office/drawing/2014/main" id="{5BDF021A-9599-49F6-9542-3D58188BB5E5}"/>
+                <a16:creationId xmlns:a16="http://schemas.microsoft.com/office/drawing/2014/main" id="{CA325889-569F-4D21-8D4B-21F3F22A68D5}"/>
               </a:ext>
             </a:extLst>
           </p:cNvPr>
@@ -5794,8 +5152,8 @@
         </p:nvSpPr>
         <p:spPr>
           <a:xfrm xmlns:a="http://schemas.openxmlformats.org/drawingml/2006/main">
-            <a:off x="609600" y="457200"/>
-            <a:ext cx="6667500" cy="609600"/>
+            <a:off x="685800" y="781050"/>
+            <a:ext cx="10668000" cy="762000"/>
           </a:xfrm>
           <a:prstGeom xmlns:a="http://schemas.openxmlformats.org/drawingml/2006/main" prst="rect">
             <a:avLst/>
@@ -5807,10 +5165,10 @@
           </a:ln>
         </p:spPr>
         <p:txBody>
-          <a:bodyPr xmlns:a="http://schemas.openxmlformats.org/drawingml/2006/main" anchor="t"/>
+          <a:bodyPr xmlns:a="http://schemas.openxmlformats.org/drawingml/2006/main" anchor="ctr"/>
           <a:lstStyle xmlns:a="http://schemas.openxmlformats.org/drawingml/2006/main">
             <a:defPPr>
-              <a:defRPr sz="3150" b="1">
+              <a:defRPr sz="4200" b="1">
                 <a:solidFill>
                   <a:srgbClr val="FFFFFF"/>
                 </a:solidFill>
@@ -5819,41 +5177,72 @@
           </a:lstStyle>
           <a:p xmlns:a="http://schemas.openxmlformats.org/drawingml/2006/main">
             <a:pPr>
-              <a:defRPr sz="3150" b="1">
+              <a:defRPr sz="4200" b="1">
                 <a:solidFill>
                   <a:srgbClr val="FFFFFF"/>
                 </a:solidFill>
               </a:defRPr>
             </a:pPr>
             <a:r>
-              <a:rPr sz="3150" b="1">
+              <a:rPr sz="4200" b="1">
                 <a:solidFill>
                   <a:srgbClr val="FFFFFF"/>
                 </a:solidFill>
               </a:rPr>
-              <a:t>The safety loop</a:t>
-            </a:r>
-          </a:p>
-        </p:txBody>
-      </p:sp>
-      <p:sp>
-        <p:nvSpPr>
+              <a:t>Possible person down</a:t>
+            </a:r>
+          </a:p>
+        </p:txBody>
+      </p:sp>
+      <p:pic>
+        <p:nvPicPr>
           <p:cNvPr id="3" name="">
             <a:extLst xmlns:a="http://schemas.openxmlformats.org/drawingml/2006/main">
               <a:ext uri="{FF2B5EF4-FFF2-40B4-BE49-F238E27FC236}">
-                <a16:creationId xmlns:a16="http://schemas.microsoft.com/office/drawing/2014/main" id="{7C75B821-8E84-4F97-8B03-AE67A7D3F079}"/>
+                <a16:creationId xmlns:a16="http://schemas.microsoft.com/office/drawing/2014/main" id="{67619C02-BFB4-4C68-9E54-A7FB8A45551E}"/>
               </a:ext>
             </a:extLst>
           </p:cNvPr>
-          <p:cNvSpPr>
-            <a:spLocks xmlns:a="http://schemas.openxmlformats.org/drawingml/2006/main" noGrp="1"/>
-          </p:cNvSpPr>
+          <p:cNvPicPr>
+            <a:picLocks xmlns:a="http://schemas.openxmlformats.org/drawingml/2006/main" noChangeAspect="1"/>
+          </p:cNvPicPr>
           <p:nvPr/>
-        </p:nvSpPr>
+        </p:nvPicPr>
+        <p:blipFill>
+          <a:blip xmlns:r="http://schemas.openxmlformats.org/officeDocument/2006/relationships" xmlns:a="http://schemas.openxmlformats.org/drawingml/2006/main" r:embed="R9de792141f0d4353"/>
+          <a:srcRect xmlns:a="http://schemas.openxmlformats.org/drawingml/2006/main" l="21" t="0" r="21" b="0"/>
+          <a:stretch xmlns:a="http://schemas.openxmlformats.org/drawingml/2006/main">
+            <a:fillRect l="0" t="0" r="0" b="0"/>
+          </a:stretch>
+        </p:blipFill>
         <p:spPr>
           <a:xfrm xmlns:a="http://schemas.openxmlformats.org/drawingml/2006/main">
-            <a:off x="628650" y="1066800"/>
-            <a:ext cx="6667500" cy="381000"/>
+            <a:off x="666750" y="1790700"/>
+            <a:ext cx="10858500" cy="3981450"/>
+          </a:xfrm>
+          <a:prstGeom xmlns:a="http://schemas.openxmlformats.org/drawingml/2006/main" prst="rect">
+            <a:avLst/>
+          </a:prstGeom>
+        </p:spPr>
+      </p:pic>
+      <p:sp>
+        <p:nvSpPr>
+          <p:cNvPr id="4" name="">
+            <a:extLst xmlns:a="http://schemas.openxmlformats.org/drawingml/2006/main">
+              <a:ext uri="{FF2B5EF4-FFF2-40B4-BE49-F238E27FC236}">
+                <a16:creationId xmlns:a16="http://schemas.microsoft.com/office/drawing/2014/main" id="{DF094FBA-A0EE-42A9-B0FF-7C1FDDF620F9}"/>
+              </a:ext>
+            </a:extLst>
+          </p:cNvPr>
+          <p:cNvSpPr>
+            <a:spLocks xmlns:a="http://schemas.openxmlformats.org/drawingml/2006/main" noGrp="1"/>
+          </p:cNvSpPr>
+          <p:nvPr/>
+        </p:nvSpPr>
+        <p:spPr>
+          <a:xfrm xmlns:a="http://schemas.openxmlformats.org/drawingml/2006/main">
+            <a:off x="685800" y="6000750"/>
+            <a:ext cx="10477500" cy="438150"/>
           </a:xfrm>
           <a:prstGeom xmlns:a="http://schemas.openxmlformats.org/drawingml/2006/main" prst="rect">
             <a:avLst/>
@@ -5865,1209 +5254,31 @@
           </a:ln>
         </p:spPr>
         <p:txBody>
-          <a:bodyPr xmlns:a="http://schemas.openxmlformats.org/drawingml/2006/main" anchor="t"/>
+          <a:bodyPr xmlns:a="http://schemas.openxmlformats.org/drawingml/2006/main" anchor="ctr"/>
           <a:lstStyle xmlns:a="http://schemas.openxmlformats.org/drawingml/2006/main">
             <a:defPPr>
-              <a:defRPr sz="1650" b="0">
-                <a:solidFill>
-                  <a:srgbClr val="DCE9E3"/>
+              <a:defRPr sz="2025" b="0">
+                <a:solidFill>
+                  <a:srgbClr val="FFFFFF"/>
                 </a:solidFill>
               </a:defRPr>
             </a:defPPr>
           </a:lstStyle>
           <a:p xmlns:a="http://schemas.openxmlformats.org/drawingml/2006/main">
             <a:pPr>
-              <a:defRPr sz="1650" b="0">
-                <a:solidFill>
-                  <a:srgbClr val="DCE9E3"/>
+              <a:defRPr sz="2025" b="0">
+                <a:solidFill>
+                  <a:srgbClr val="FFFFFF"/>
                 </a:solidFill>
               </a:defRPr>
             </a:pPr>
             <a:r>
-              <a:rPr sz="1650" b="0">
-                <a:solidFill>
-                  <a:srgbClr val="DCE9E3"/>
+              <a:rPr sz="2025" b="0">
+                <a:solidFill>
+                  <a:srgbClr val="FFFFFF"/>
                 </a:solidFill>
               </a:rPr>
-              <a:t>Each integration has one job.</a:t>
-            </a:r>
-          </a:p>
-        </p:txBody>
-      </p:sp>
-      <p:sp>
-        <p:nvSpPr>
-          <p:cNvPr id="4" name="">
-            <a:extLst xmlns:a="http://schemas.openxmlformats.org/drawingml/2006/main">
-              <a:ext uri="{FF2B5EF4-FFF2-40B4-BE49-F238E27FC236}">
-                <a16:creationId xmlns:a16="http://schemas.microsoft.com/office/drawing/2014/main" id="{ED59BE03-DBBF-458B-A446-2FF7A7C9C905}"/>
-              </a:ext>
-            </a:extLst>
-          </p:cNvPr>
-          <p:cNvSpPr>
-            <a:spLocks xmlns:a="http://schemas.openxmlformats.org/drawingml/2006/main" noGrp="1"/>
-          </p:cNvSpPr>
-          <p:nvPr/>
-        </p:nvSpPr>
-        <p:spPr>
-          <a:xfrm xmlns:a="http://schemas.openxmlformats.org/drawingml/2006/main">
-            <a:off x="704850" y="2152650"/>
-            <a:ext cx="1790700" cy="2286000"/>
-          </a:xfrm>
-          <a:prstGeom xmlns:a="http://schemas.openxmlformats.org/drawingml/2006/main" prst="roundRect">
-            <a:avLst>
-              <a:gd name="adj" fmla="val 13830"/>
-            </a:avLst>
-          </a:prstGeom>
-          <a:solidFill xmlns:a="http://schemas.openxmlformats.org/drawingml/2006/main">
-            <a:srgbClr val="0D4D40"/>
-          </a:solidFill>
-          <a:ln xmlns:a="http://schemas.openxmlformats.org/drawingml/2006/main" w="0">
-            <a:noFill/>
-            <a:prstDash val="solid"/>
-          </a:ln>
-        </p:spPr>
-      </p:sp>
-      <p:sp>
-        <p:nvSpPr>
-          <p:cNvPr id="5" name="">
-            <a:extLst xmlns:a="http://schemas.openxmlformats.org/drawingml/2006/main">
-              <a:ext uri="{FF2B5EF4-FFF2-40B4-BE49-F238E27FC236}">
-                <a16:creationId xmlns:a16="http://schemas.microsoft.com/office/drawing/2014/main" id="{E84C2813-5E82-4FF2-83FA-748111CF2DAA}"/>
-              </a:ext>
-            </a:extLst>
-          </p:cNvPr>
-          <p:cNvSpPr>
-            <a:spLocks xmlns:a="http://schemas.openxmlformats.org/drawingml/2006/main" noGrp="1"/>
-          </p:cNvSpPr>
-          <p:nvPr/>
-        </p:nvSpPr>
-        <p:spPr>
-          <a:xfrm xmlns:a="http://schemas.openxmlformats.org/drawingml/2006/main">
-            <a:off x="895350" y="2419350"/>
-            <a:ext cx="1409700" cy="247650"/>
-          </a:xfrm>
-          <a:prstGeom xmlns:a="http://schemas.openxmlformats.org/drawingml/2006/main" prst="rect">
-            <a:avLst/>
-          </a:prstGeom>
-          <a:noFill xmlns:a="http://schemas.openxmlformats.org/drawingml/2006/main"/>
-          <a:ln xmlns:a="http://schemas.openxmlformats.org/drawingml/2006/main" w="0">
-            <a:noFill/>
-            <a:prstDash val="solid"/>
-          </a:ln>
-        </p:spPr>
-        <p:txBody>
-          <a:bodyPr xmlns:a="http://schemas.openxmlformats.org/drawingml/2006/main" anchor="t"/>
-          <a:lstStyle xmlns:a="http://schemas.openxmlformats.org/drawingml/2006/main">
-            <a:defPPr>
-              <a:defRPr sz="1050" b="1">
-                <a:solidFill>
-                  <a:srgbClr val="C8FF63"/>
-                </a:solidFill>
-              </a:defRPr>
-            </a:defPPr>
-          </a:lstStyle>
-          <a:p xmlns:a="http://schemas.openxmlformats.org/drawingml/2006/main">
-            <a:pPr>
-              <a:defRPr sz="1050" b="1">
-                <a:solidFill>
-                  <a:srgbClr val="C8FF63"/>
-                </a:solidFill>
-              </a:defRPr>
-            </a:pPr>
-            <a:r>
-              <a:rPr sz="1050" b="1">
-                <a:solidFill>
-                  <a:srgbClr val="C8FF63"/>
-                </a:solidFill>
-              </a:rPr>
-              <a:t>PRESAGE</a:t>
-            </a:r>
-          </a:p>
-        </p:txBody>
-      </p:sp>
-      <p:sp>
-        <p:nvSpPr>
-          <p:cNvPr id="6" name="">
-            <a:extLst xmlns:a="http://schemas.openxmlformats.org/drawingml/2006/main">
-              <a:ext uri="{FF2B5EF4-FFF2-40B4-BE49-F238E27FC236}">
-                <a16:creationId xmlns:a16="http://schemas.microsoft.com/office/drawing/2014/main" id="{281D234D-4DB8-4071-A6D5-6153E38EADC0}"/>
-              </a:ext>
-            </a:extLst>
-          </p:cNvPr>
-          <p:cNvSpPr>
-            <a:spLocks xmlns:a="http://schemas.openxmlformats.org/drawingml/2006/main" noGrp="1"/>
-          </p:cNvSpPr>
-          <p:nvPr/>
-        </p:nvSpPr>
-        <p:spPr>
-          <a:xfrm xmlns:a="http://schemas.openxmlformats.org/drawingml/2006/main">
-            <a:off x="895350" y="3067050"/>
-            <a:ext cx="1409700" cy="857250"/>
-          </a:xfrm>
-          <a:prstGeom xmlns:a="http://schemas.openxmlformats.org/drawingml/2006/main" prst="rect">
-            <a:avLst/>
-          </a:prstGeom>
-          <a:noFill xmlns:a="http://schemas.openxmlformats.org/drawingml/2006/main"/>
-          <a:ln xmlns:a="http://schemas.openxmlformats.org/drawingml/2006/main" w="0">
-            <a:noFill/>
-            <a:prstDash val="solid"/>
-          </a:ln>
-        </p:spPr>
-        <p:txBody>
-          <a:bodyPr xmlns:a="http://schemas.openxmlformats.org/drawingml/2006/main" anchor="t"/>
-          <a:lstStyle xmlns:a="http://schemas.openxmlformats.org/drawingml/2006/main">
-            <a:defPPr>
-              <a:defRPr sz="1725" b="1">
-                <a:solidFill>
-                  <a:srgbClr val="FFFFFF"/>
-                </a:solidFill>
-              </a:defRPr>
-            </a:defPPr>
-          </a:lstStyle>
-          <a:p xmlns:a="http://schemas.openxmlformats.org/drawingml/2006/main">
-            <a:pPr>
-              <a:defRPr sz="1725" b="1">
-                <a:solidFill>
-                  <a:srgbClr val="FFFFFF"/>
-                </a:solidFill>
-              </a:defRPr>
-            </a:pPr>
-            <a:r>
-              <a:rPr sz="1725" b="1">
-                <a:solidFill>
-                  <a:srgbClr val="FFFFFF"/>
-                </a:solidFill>
-              </a:rPr>
-              <a:t>Contactless</a:t>
-            </a:r>
-          </a:p>
-          <a:p xmlns:a="http://schemas.openxmlformats.org/drawingml/2006/main">
-            <a:pPr>
-              <a:defRPr sz="1725" b="1">
-                <a:solidFill>
-                  <a:srgbClr val="FFFFFF"/>
-                </a:solidFill>
-              </a:defRPr>
-            </a:pPr>
-            <a:r>
-              <a:rPr sz="1725" b="1">
-                <a:solidFill>
-                  <a:srgbClr val="FFFFFF"/>
-                </a:solidFill>
-              </a:rPr>
-              <a:t>observations</a:t>
-            </a:r>
-          </a:p>
-        </p:txBody>
-      </p:sp>
-      <p:sp>
-        <p:nvSpPr>
-          <p:cNvPr id="7" name="">
-            <a:extLst xmlns:a="http://schemas.openxmlformats.org/drawingml/2006/main">
-              <a:ext uri="{FF2B5EF4-FFF2-40B4-BE49-F238E27FC236}">
-                <a16:creationId xmlns:a16="http://schemas.microsoft.com/office/drawing/2014/main" id="{D349E889-6418-43CB-A6F0-F596EECAC673}"/>
-              </a:ext>
-            </a:extLst>
-          </p:cNvPr>
-          <p:cNvSpPr>
-            <a:spLocks xmlns:a="http://schemas.openxmlformats.org/drawingml/2006/main" noGrp="1"/>
-          </p:cNvSpPr>
-          <p:nvPr/>
-        </p:nvSpPr>
-        <p:spPr>
-          <a:xfrm xmlns:a="http://schemas.openxmlformats.org/drawingml/2006/main">
-            <a:off x="2571750" y="2895600"/>
-            <a:ext cx="266700" cy="476250"/>
-          </a:xfrm>
-          <a:prstGeom xmlns:a="http://schemas.openxmlformats.org/drawingml/2006/main" prst="rect">
-            <a:avLst/>
-          </a:prstGeom>
-          <a:noFill xmlns:a="http://schemas.openxmlformats.org/drawingml/2006/main"/>
-          <a:ln xmlns:a="http://schemas.openxmlformats.org/drawingml/2006/main" w="0">
-            <a:noFill/>
-            <a:prstDash val="solid"/>
-          </a:ln>
-        </p:spPr>
-        <p:txBody>
-          <a:bodyPr xmlns:a="http://schemas.openxmlformats.org/drawingml/2006/main" anchor="t"/>
-          <a:lstStyle xmlns:a="http://schemas.openxmlformats.org/drawingml/2006/main">
-            <a:defPPr>
-              <a:defRPr sz="2550" b="1">
-                <a:solidFill>
-                  <a:srgbClr val="C8FF63"/>
-                </a:solidFill>
-              </a:defRPr>
-            </a:defPPr>
-          </a:lstStyle>
-          <a:p xmlns:a="http://schemas.openxmlformats.org/drawingml/2006/main">
-            <a:pPr>
-              <a:defRPr sz="2550" b="1">
-                <a:solidFill>
-                  <a:srgbClr val="C8FF63"/>
-                </a:solidFill>
-              </a:defRPr>
-            </a:pPr>
-            <a:r>
-              <a:rPr sz="2550" b="1">
-                <a:solidFill>
-                  <a:srgbClr val="C8FF63"/>
-                </a:solidFill>
-              </a:rPr>
-              <a:t>›</a:t>
-            </a:r>
-          </a:p>
-        </p:txBody>
-      </p:sp>
-      <p:sp>
-        <p:nvSpPr>
-          <p:cNvPr id="8" name="">
-            <a:extLst xmlns:a="http://schemas.openxmlformats.org/drawingml/2006/main">
-              <a:ext uri="{FF2B5EF4-FFF2-40B4-BE49-F238E27FC236}">
-                <a16:creationId xmlns:a16="http://schemas.microsoft.com/office/drawing/2014/main" id="{882C73E1-486E-406D-B9B4-FB22D7EF5CF5}"/>
-              </a:ext>
-            </a:extLst>
-          </p:cNvPr>
-          <p:cNvSpPr>
-            <a:spLocks xmlns:a="http://schemas.openxmlformats.org/drawingml/2006/main" noGrp="1"/>
-          </p:cNvSpPr>
-          <p:nvPr/>
-        </p:nvSpPr>
-        <p:spPr>
-          <a:xfrm xmlns:a="http://schemas.openxmlformats.org/drawingml/2006/main">
-            <a:off x="2952750" y="2152650"/>
-            <a:ext cx="1790700" cy="2286000"/>
-          </a:xfrm>
-          <a:prstGeom xmlns:a="http://schemas.openxmlformats.org/drawingml/2006/main" prst="roundRect">
-            <a:avLst>
-              <a:gd name="adj" fmla="val 13830"/>
-            </a:avLst>
-          </a:prstGeom>
-          <a:solidFill xmlns:a="http://schemas.openxmlformats.org/drawingml/2006/main">
-            <a:srgbClr val="0D4D40"/>
-          </a:solidFill>
-          <a:ln xmlns:a="http://schemas.openxmlformats.org/drawingml/2006/main" w="0">
-            <a:noFill/>
-            <a:prstDash val="solid"/>
-          </a:ln>
-        </p:spPr>
-      </p:sp>
-      <p:sp>
-        <p:nvSpPr>
-          <p:cNvPr id="9" name="">
-            <a:extLst xmlns:a="http://schemas.openxmlformats.org/drawingml/2006/main">
-              <a:ext uri="{FF2B5EF4-FFF2-40B4-BE49-F238E27FC236}">
-                <a16:creationId xmlns:a16="http://schemas.microsoft.com/office/drawing/2014/main" id="{1A0BCA20-895F-4A64-A9F7-B23C0BCA7F73}"/>
-              </a:ext>
-            </a:extLst>
-          </p:cNvPr>
-          <p:cNvSpPr>
-            <a:spLocks xmlns:a="http://schemas.openxmlformats.org/drawingml/2006/main" noGrp="1"/>
-          </p:cNvSpPr>
-          <p:nvPr/>
-        </p:nvSpPr>
-        <p:spPr>
-          <a:xfrm xmlns:a="http://schemas.openxmlformats.org/drawingml/2006/main">
-            <a:off x="3143250" y="2419350"/>
-            <a:ext cx="1409700" cy="247650"/>
-          </a:xfrm>
-          <a:prstGeom xmlns:a="http://schemas.openxmlformats.org/drawingml/2006/main" prst="rect">
-            <a:avLst/>
-          </a:prstGeom>
-          <a:noFill xmlns:a="http://schemas.openxmlformats.org/drawingml/2006/main"/>
-          <a:ln xmlns:a="http://schemas.openxmlformats.org/drawingml/2006/main" w="0">
-            <a:noFill/>
-            <a:prstDash val="solid"/>
-          </a:ln>
-        </p:spPr>
-        <p:txBody>
-          <a:bodyPr xmlns:a="http://schemas.openxmlformats.org/drawingml/2006/main" anchor="t"/>
-          <a:lstStyle xmlns:a="http://schemas.openxmlformats.org/drawingml/2006/main">
-            <a:defPPr>
-              <a:defRPr sz="1050" b="1">
-                <a:solidFill>
-                  <a:srgbClr val="C8FF63"/>
-                </a:solidFill>
-              </a:defRPr>
-            </a:defPPr>
-          </a:lstStyle>
-          <a:p xmlns:a="http://schemas.openxmlformats.org/drawingml/2006/main">
-            <a:pPr>
-              <a:defRPr sz="1050" b="1">
-                <a:solidFill>
-                  <a:srgbClr val="C8FF63"/>
-                </a:solidFill>
-              </a:defRPr>
-            </a:pPr>
-            <a:r>
-              <a:rPr sz="1050" b="1">
-                <a:solidFill>
-                  <a:srgbClr val="C8FF63"/>
-                </a:solidFill>
-              </a:rPr>
-              <a:t>SITEGUARD</a:t>
-            </a:r>
-          </a:p>
-        </p:txBody>
-      </p:sp>
-      <p:sp>
-        <p:nvSpPr>
-          <p:cNvPr id="10" name="">
-            <a:extLst xmlns:a="http://schemas.openxmlformats.org/drawingml/2006/main">
-              <a:ext uri="{FF2B5EF4-FFF2-40B4-BE49-F238E27FC236}">
-                <a16:creationId xmlns:a16="http://schemas.microsoft.com/office/drawing/2014/main" id="{2FADB22F-907F-41E9-97E5-4FBBD94ED1D2}"/>
-              </a:ext>
-            </a:extLst>
-          </p:cNvPr>
-          <p:cNvSpPr>
-            <a:spLocks xmlns:a="http://schemas.openxmlformats.org/drawingml/2006/main" noGrp="1"/>
-          </p:cNvSpPr>
-          <p:nvPr/>
-        </p:nvSpPr>
-        <p:spPr>
-          <a:xfrm xmlns:a="http://schemas.openxmlformats.org/drawingml/2006/main">
-            <a:off x="3143250" y="3067050"/>
-            <a:ext cx="1409700" cy="857250"/>
-          </a:xfrm>
-          <a:prstGeom xmlns:a="http://schemas.openxmlformats.org/drawingml/2006/main" prst="rect">
-            <a:avLst/>
-          </a:prstGeom>
-          <a:noFill xmlns:a="http://schemas.openxmlformats.org/drawingml/2006/main"/>
-          <a:ln xmlns:a="http://schemas.openxmlformats.org/drawingml/2006/main" w="0">
-            <a:noFill/>
-            <a:prstDash val="solid"/>
-          </a:ln>
-        </p:spPr>
-        <p:txBody>
-          <a:bodyPr xmlns:a="http://schemas.openxmlformats.org/drawingml/2006/main" anchor="t"/>
-          <a:lstStyle xmlns:a="http://schemas.openxmlformats.org/drawingml/2006/main">
-            <a:defPPr>
-              <a:defRPr sz="1725" b="1">
-                <a:solidFill>
-                  <a:srgbClr val="FFFFFF"/>
-                </a:solidFill>
-              </a:defRPr>
-            </a:defPPr>
-          </a:lstStyle>
-          <a:p xmlns:a="http://schemas.openxmlformats.org/drawingml/2006/main">
-            <a:pPr>
-              <a:defRPr sz="1725" b="1">
-                <a:solidFill>
-                  <a:srgbClr val="FFFFFF"/>
-                </a:solidFill>
-              </a:defRPr>
-            </a:pPr>
-            <a:r>
-              <a:rPr sz="1725" b="1">
-                <a:solidFill>
-                  <a:srgbClr val="FFFFFF"/>
-                </a:solidFill>
-              </a:rPr>
-              <a:t>Worker choice</a:t>
-            </a:r>
-          </a:p>
-          <a:p xmlns:a="http://schemas.openxmlformats.org/drawingml/2006/main">
-            <a:pPr>
-              <a:defRPr sz="1725" b="1">
-                <a:solidFill>
-                  <a:srgbClr val="FFFFFF"/>
-                </a:solidFill>
-              </a:defRPr>
-            </a:pPr>
-            <a:r>
-              <a:rPr sz="1725" b="1">
-                <a:solidFill>
-                  <a:srgbClr val="FFFFFF"/>
-                </a:solidFill>
-              </a:rPr>
-              <a:t>and requests</a:t>
-            </a:r>
-          </a:p>
-        </p:txBody>
-      </p:sp>
-      <p:sp>
-        <p:nvSpPr>
-          <p:cNvPr id="11" name="">
-            <a:extLst xmlns:a="http://schemas.openxmlformats.org/drawingml/2006/main">
-              <a:ext uri="{FF2B5EF4-FFF2-40B4-BE49-F238E27FC236}">
-                <a16:creationId xmlns:a16="http://schemas.microsoft.com/office/drawing/2014/main" id="{B12A5C4E-4DD3-41F5-A9F8-04B4D99CF494}"/>
-              </a:ext>
-            </a:extLst>
-          </p:cNvPr>
-          <p:cNvSpPr>
-            <a:spLocks xmlns:a="http://schemas.openxmlformats.org/drawingml/2006/main" noGrp="1"/>
-          </p:cNvSpPr>
-          <p:nvPr/>
-        </p:nvSpPr>
-        <p:spPr>
-          <a:xfrm xmlns:a="http://schemas.openxmlformats.org/drawingml/2006/main">
-            <a:off x="4819650" y="2895600"/>
-            <a:ext cx="266700" cy="476250"/>
-          </a:xfrm>
-          <a:prstGeom xmlns:a="http://schemas.openxmlformats.org/drawingml/2006/main" prst="rect">
-            <a:avLst/>
-          </a:prstGeom>
-          <a:noFill xmlns:a="http://schemas.openxmlformats.org/drawingml/2006/main"/>
-          <a:ln xmlns:a="http://schemas.openxmlformats.org/drawingml/2006/main" w="0">
-            <a:noFill/>
-            <a:prstDash val="solid"/>
-          </a:ln>
-        </p:spPr>
-        <p:txBody>
-          <a:bodyPr xmlns:a="http://schemas.openxmlformats.org/drawingml/2006/main" anchor="t"/>
-          <a:lstStyle xmlns:a="http://schemas.openxmlformats.org/drawingml/2006/main">
-            <a:defPPr>
-              <a:defRPr sz="2550" b="1">
-                <a:solidFill>
-                  <a:srgbClr val="C8FF63"/>
-                </a:solidFill>
-              </a:defRPr>
-            </a:defPPr>
-          </a:lstStyle>
-          <a:p xmlns:a="http://schemas.openxmlformats.org/drawingml/2006/main">
-            <a:pPr>
-              <a:defRPr sz="2550" b="1">
-                <a:solidFill>
-                  <a:srgbClr val="C8FF63"/>
-                </a:solidFill>
-              </a:defRPr>
-            </a:pPr>
-            <a:r>
-              <a:rPr sz="2550" b="1">
-                <a:solidFill>
-                  <a:srgbClr val="C8FF63"/>
-                </a:solidFill>
-              </a:rPr>
-              <a:t>›</a:t>
-            </a:r>
-          </a:p>
-        </p:txBody>
-      </p:sp>
-      <p:sp>
-        <p:nvSpPr>
-          <p:cNvPr id="12" name="">
-            <a:extLst xmlns:a="http://schemas.openxmlformats.org/drawingml/2006/main">
-              <a:ext uri="{FF2B5EF4-FFF2-40B4-BE49-F238E27FC236}">
-                <a16:creationId xmlns:a16="http://schemas.microsoft.com/office/drawing/2014/main" id="{555BBFBD-33A2-444E-A072-90BA1B00F224}"/>
-              </a:ext>
-            </a:extLst>
-          </p:cNvPr>
-          <p:cNvSpPr>
-            <a:spLocks xmlns:a="http://schemas.openxmlformats.org/drawingml/2006/main" noGrp="1"/>
-          </p:cNvSpPr>
-          <p:nvPr/>
-        </p:nvSpPr>
-        <p:spPr>
-          <a:xfrm xmlns:a="http://schemas.openxmlformats.org/drawingml/2006/main">
-            <a:off x="5200650" y="2152650"/>
-            <a:ext cx="1790700" cy="2286000"/>
-          </a:xfrm>
-          <a:prstGeom xmlns:a="http://schemas.openxmlformats.org/drawingml/2006/main" prst="roundRect">
-            <a:avLst>
-              <a:gd name="adj" fmla="val 13830"/>
-            </a:avLst>
-          </a:prstGeom>
-          <a:solidFill xmlns:a="http://schemas.openxmlformats.org/drawingml/2006/main">
-            <a:srgbClr val="0D4D40"/>
-          </a:solidFill>
-          <a:ln xmlns:a="http://schemas.openxmlformats.org/drawingml/2006/main" w="0">
-            <a:noFill/>
-            <a:prstDash val="solid"/>
-          </a:ln>
-        </p:spPr>
-      </p:sp>
-      <p:sp>
-        <p:nvSpPr>
-          <p:cNvPr id="13" name="">
-            <a:extLst xmlns:a="http://schemas.openxmlformats.org/drawingml/2006/main">
-              <a:ext uri="{FF2B5EF4-FFF2-40B4-BE49-F238E27FC236}">
-                <a16:creationId xmlns:a16="http://schemas.microsoft.com/office/drawing/2014/main" id="{57D4B4EC-0A1E-42B0-B5B7-B0D74F94EEDA}"/>
-              </a:ext>
-            </a:extLst>
-          </p:cNvPr>
-          <p:cNvSpPr>
-            <a:spLocks xmlns:a="http://schemas.openxmlformats.org/drawingml/2006/main" noGrp="1"/>
-          </p:cNvSpPr>
-          <p:nvPr/>
-        </p:nvSpPr>
-        <p:spPr>
-          <a:xfrm xmlns:a="http://schemas.openxmlformats.org/drawingml/2006/main">
-            <a:off x="5391150" y="2419350"/>
-            <a:ext cx="1409700" cy="247650"/>
-          </a:xfrm>
-          <a:prstGeom xmlns:a="http://schemas.openxmlformats.org/drawingml/2006/main" prst="rect">
-            <a:avLst/>
-          </a:prstGeom>
-          <a:noFill xmlns:a="http://schemas.openxmlformats.org/drawingml/2006/main"/>
-          <a:ln xmlns:a="http://schemas.openxmlformats.org/drawingml/2006/main" w="0">
-            <a:noFill/>
-            <a:prstDash val="solid"/>
-          </a:ln>
-        </p:spPr>
-        <p:txBody>
-          <a:bodyPr xmlns:a="http://schemas.openxmlformats.org/drawingml/2006/main" anchor="t"/>
-          <a:lstStyle xmlns:a="http://schemas.openxmlformats.org/drawingml/2006/main">
-            <a:defPPr>
-              <a:defRPr sz="1050" b="1">
-                <a:solidFill>
-                  <a:srgbClr val="C8FF63"/>
-                </a:solidFill>
-              </a:defRPr>
-            </a:defPPr>
-          </a:lstStyle>
-          <a:p xmlns:a="http://schemas.openxmlformats.org/drawingml/2006/main">
-            <a:pPr>
-              <a:defRPr sz="1050" b="1">
-                <a:solidFill>
-                  <a:srgbClr val="C8FF63"/>
-                </a:solidFill>
-              </a:defRPr>
-            </a:pPr>
-            <a:r>
-              <a:rPr sz="1050" b="1">
-                <a:solidFill>
-                  <a:srgbClr val="C8FF63"/>
-                </a:solidFill>
-              </a:rPr>
-              <a:t>TIGER DATA</a:t>
-            </a:r>
-          </a:p>
-        </p:txBody>
-      </p:sp>
-      <p:sp>
-        <p:nvSpPr>
-          <p:cNvPr id="14" name="">
-            <a:extLst xmlns:a="http://schemas.openxmlformats.org/drawingml/2006/main">
-              <a:ext uri="{FF2B5EF4-FFF2-40B4-BE49-F238E27FC236}">
-                <a16:creationId xmlns:a16="http://schemas.microsoft.com/office/drawing/2014/main" id="{AF1CA712-FEFA-4895-AF7B-74301C3B9043}"/>
-              </a:ext>
-            </a:extLst>
-          </p:cNvPr>
-          <p:cNvSpPr>
-            <a:spLocks xmlns:a="http://schemas.openxmlformats.org/drawingml/2006/main" noGrp="1"/>
-          </p:cNvSpPr>
-          <p:nvPr/>
-        </p:nvSpPr>
-        <p:spPr>
-          <a:xfrm xmlns:a="http://schemas.openxmlformats.org/drawingml/2006/main">
-            <a:off x="5391150" y="3067050"/>
-            <a:ext cx="1409700" cy="857250"/>
-          </a:xfrm>
-          <a:prstGeom xmlns:a="http://schemas.openxmlformats.org/drawingml/2006/main" prst="rect">
-            <a:avLst/>
-          </a:prstGeom>
-          <a:noFill xmlns:a="http://schemas.openxmlformats.org/drawingml/2006/main"/>
-          <a:ln xmlns:a="http://schemas.openxmlformats.org/drawingml/2006/main" w="0">
-            <a:noFill/>
-            <a:prstDash val="solid"/>
-          </a:ln>
-        </p:spPr>
-        <p:txBody>
-          <a:bodyPr xmlns:a="http://schemas.openxmlformats.org/drawingml/2006/main" anchor="t"/>
-          <a:lstStyle xmlns:a="http://schemas.openxmlformats.org/drawingml/2006/main">
-            <a:defPPr>
-              <a:defRPr sz="1725" b="1">
-                <a:solidFill>
-                  <a:srgbClr val="FFFFFF"/>
-                </a:solidFill>
-              </a:defRPr>
-            </a:defPPr>
-          </a:lstStyle>
-          <a:p xmlns:a="http://schemas.openxmlformats.org/drawingml/2006/main">
-            <a:pPr>
-              <a:defRPr sz="1725" b="1">
-                <a:solidFill>
-                  <a:srgbClr val="FFFFFF"/>
-                </a:solidFill>
-              </a:defRPr>
-            </a:pPr>
-            <a:r>
-              <a:rPr sz="1725" b="1">
-                <a:solidFill>
-                  <a:srgbClr val="FFFFFF"/>
-                </a:solidFill>
-              </a:rPr>
-              <a:t>Time-series</a:t>
-            </a:r>
-          </a:p>
-          <a:p xmlns:a="http://schemas.openxmlformats.org/drawingml/2006/main">
-            <a:pPr>
-              <a:defRPr sz="1725" b="1">
-                <a:solidFill>
-                  <a:srgbClr val="FFFFFF"/>
-                </a:solidFill>
-              </a:defRPr>
-            </a:pPr>
-            <a:r>
-              <a:rPr sz="1725" b="1">
-                <a:solidFill>
-                  <a:srgbClr val="FFFFFF"/>
-                </a:solidFill>
-              </a:rPr>
-              <a:t>history</a:t>
-            </a:r>
-          </a:p>
-        </p:txBody>
-      </p:sp>
-      <p:sp>
-        <p:nvSpPr>
-          <p:cNvPr id="15" name="">
-            <a:extLst xmlns:a="http://schemas.openxmlformats.org/drawingml/2006/main">
-              <a:ext uri="{FF2B5EF4-FFF2-40B4-BE49-F238E27FC236}">
-                <a16:creationId xmlns:a16="http://schemas.microsoft.com/office/drawing/2014/main" id="{0B31BA32-3FFF-4746-9C76-0101A42355DB}"/>
-              </a:ext>
-            </a:extLst>
-          </p:cNvPr>
-          <p:cNvSpPr>
-            <a:spLocks xmlns:a="http://schemas.openxmlformats.org/drawingml/2006/main" noGrp="1"/>
-          </p:cNvSpPr>
-          <p:nvPr/>
-        </p:nvSpPr>
-        <p:spPr>
-          <a:xfrm xmlns:a="http://schemas.openxmlformats.org/drawingml/2006/main">
-            <a:off x="7067550" y="2895600"/>
-            <a:ext cx="266700" cy="476250"/>
-          </a:xfrm>
-          <a:prstGeom xmlns:a="http://schemas.openxmlformats.org/drawingml/2006/main" prst="rect">
-            <a:avLst/>
-          </a:prstGeom>
-          <a:noFill xmlns:a="http://schemas.openxmlformats.org/drawingml/2006/main"/>
-          <a:ln xmlns:a="http://schemas.openxmlformats.org/drawingml/2006/main" w="0">
-            <a:noFill/>
-            <a:prstDash val="solid"/>
-          </a:ln>
-        </p:spPr>
-        <p:txBody>
-          <a:bodyPr xmlns:a="http://schemas.openxmlformats.org/drawingml/2006/main" anchor="t"/>
-          <a:lstStyle xmlns:a="http://schemas.openxmlformats.org/drawingml/2006/main">
-            <a:defPPr>
-              <a:defRPr sz="2550" b="1">
-                <a:solidFill>
-                  <a:srgbClr val="C8FF63"/>
-                </a:solidFill>
-              </a:defRPr>
-            </a:defPPr>
-          </a:lstStyle>
-          <a:p xmlns:a="http://schemas.openxmlformats.org/drawingml/2006/main">
-            <a:pPr>
-              <a:defRPr sz="2550" b="1">
-                <a:solidFill>
-                  <a:srgbClr val="C8FF63"/>
-                </a:solidFill>
-              </a:defRPr>
-            </a:pPr>
-            <a:r>
-              <a:rPr sz="2550" b="1">
-                <a:solidFill>
-                  <a:srgbClr val="C8FF63"/>
-                </a:solidFill>
-              </a:rPr>
-              <a:t>›</a:t>
-            </a:r>
-          </a:p>
-        </p:txBody>
-      </p:sp>
-      <p:sp>
-        <p:nvSpPr>
-          <p:cNvPr id="16" name="">
-            <a:extLst xmlns:a="http://schemas.openxmlformats.org/drawingml/2006/main">
-              <a:ext uri="{FF2B5EF4-FFF2-40B4-BE49-F238E27FC236}">
-                <a16:creationId xmlns:a16="http://schemas.microsoft.com/office/drawing/2014/main" id="{E15D4735-EFCE-416F-A313-361D5393DB0D}"/>
-              </a:ext>
-            </a:extLst>
-          </p:cNvPr>
-          <p:cNvSpPr>
-            <a:spLocks xmlns:a="http://schemas.openxmlformats.org/drawingml/2006/main" noGrp="1"/>
-          </p:cNvSpPr>
-          <p:nvPr/>
-        </p:nvSpPr>
-        <p:spPr>
-          <a:xfrm xmlns:a="http://schemas.openxmlformats.org/drawingml/2006/main">
-            <a:off x="7448550" y="2152650"/>
-            <a:ext cx="1790700" cy="2286000"/>
-          </a:xfrm>
-          <a:prstGeom xmlns:a="http://schemas.openxmlformats.org/drawingml/2006/main" prst="roundRect">
-            <a:avLst>
-              <a:gd name="adj" fmla="val 13830"/>
-            </a:avLst>
-          </a:prstGeom>
-          <a:solidFill xmlns:a="http://schemas.openxmlformats.org/drawingml/2006/main">
-            <a:srgbClr val="0D4D40"/>
-          </a:solidFill>
-          <a:ln xmlns:a="http://schemas.openxmlformats.org/drawingml/2006/main" w="0">
-            <a:noFill/>
-            <a:prstDash val="solid"/>
-          </a:ln>
-        </p:spPr>
-      </p:sp>
-      <p:sp>
-        <p:nvSpPr>
-          <p:cNvPr id="17" name="">
-            <a:extLst xmlns:a="http://schemas.openxmlformats.org/drawingml/2006/main">
-              <a:ext uri="{FF2B5EF4-FFF2-40B4-BE49-F238E27FC236}">
-                <a16:creationId xmlns:a16="http://schemas.microsoft.com/office/drawing/2014/main" id="{15CB2606-5D26-4027-AF67-BB17A617491C}"/>
-              </a:ext>
-            </a:extLst>
-          </p:cNvPr>
-          <p:cNvSpPr>
-            <a:spLocks xmlns:a="http://schemas.openxmlformats.org/drawingml/2006/main" noGrp="1"/>
-          </p:cNvSpPr>
-          <p:nvPr/>
-        </p:nvSpPr>
-        <p:spPr>
-          <a:xfrm xmlns:a="http://schemas.openxmlformats.org/drawingml/2006/main">
-            <a:off x="7639050" y="2419350"/>
-            <a:ext cx="1409700" cy="247650"/>
-          </a:xfrm>
-          <a:prstGeom xmlns:a="http://schemas.openxmlformats.org/drawingml/2006/main" prst="rect">
-            <a:avLst/>
-          </a:prstGeom>
-          <a:noFill xmlns:a="http://schemas.openxmlformats.org/drawingml/2006/main"/>
-          <a:ln xmlns:a="http://schemas.openxmlformats.org/drawingml/2006/main" w="0">
-            <a:noFill/>
-            <a:prstDash val="solid"/>
-          </a:ln>
-        </p:spPr>
-        <p:txBody>
-          <a:bodyPr xmlns:a="http://schemas.openxmlformats.org/drawingml/2006/main" anchor="t"/>
-          <a:lstStyle xmlns:a="http://schemas.openxmlformats.org/drawingml/2006/main">
-            <a:defPPr>
-              <a:defRPr sz="1050" b="1">
-                <a:solidFill>
-                  <a:srgbClr val="C8FF63"/>
-                </a:solidFill>
-              </a:defRPr>
-            </a:defPPr>
-          </a:lstStyle>
-          <a:p xmlns:a="http://schemas.openxmlformats.org/drawingml/2006/main">
-            <a:pPr>
-              <a:defRPr sz="1050" b="1">
-                <a:solidFill>
-                  <a:srgbClr val="C8FF63"/>
-                </a:solidFill>
-              </a:defRPr>
-            </a:pPr>
-            <a:r>
-              <a:rPr sz="1050" b="1">
-                <a:solidFill>
-                  <a:srgbClr val="C8FF63"/>
-                </a:solidFill>
-              </a:rPr>
-              <a:t>GEMINI</a:t>
-            </a:r>
-          </a:p>
-        </p:txBody>
-      </p:sp>
-      <p:sp>
-        <p:nvSpPr>
-          <p:cNvPr id="18" name="">
-            <a:extLst xmlns:a="http://schemas.openxmlformats.org/drawingml/2006/main">
-              <a:ext uri="{FF2B5EF4-FFF2-40B4-BE49-F238E27FC236}">
-                <a16:creationId xmlns:a16="http://schemas.microsoft.com/office/drawing/2014/main" id="{7C5CC84C-3A60-4241-A05C-5DC6BEEFB592}"/>
-              </a:ext>
-            </a:extLst>
-          </p:cNvPr>
-          <p:cNvSpPr>
-            <a:spLocks xmlns:a="http://schemas.openxmlformats.org/drawingml/2006/main" noGrp="1"/>
-          </p:cNvSpPr>
-          <p:nvPr/>
-        </p:nvSpPr>
-        <p:spPr>
-          <a:xfrm xmlns:a="http://schemas.openxmlformats.org/drawingml/2006/main">
-            <a:off x="7639050" y="3067050"/>
-            <a:ext cx="1409700" cy="857250"/>
-          </a:xfrm>
-          <a:prstGeom xmlns:a="http://schemas.openxmlformats.org/drawingml/2006/main" prst="rect">
-            <a:avLst/>
-          </a:prstGeom>
-          <a:noFill xmlns:a="http://schemas.openxmlformats.org/drawingml/2006/main"/>
-          <a:ln xmlns:a="http://schemas.openxmlformats.org/drawingml/2006/main" w="0">
-            <a:noFill/>
-            <a:prstDash val="solid"/>
-          </a:ln>
-        </p:spPr>
-        <p:txBody>
-          <a:bodyPr xmlns:a="http://schemas.openxmlformats.org/drawingml/2006/main" anchor="t"/>
-          <a:lstStyle xmlns:a="http://schemas.openxmlformats.org/drawingml/2006/main">
-            <a:defPPr>
-              <a:defRPr sz="1725" b="1">
-                <a:solidFill>
-                  <a:srgbClr val="FFFFFF"/>
-                </a:solidFill>
-              </a:defRPr>
-            </a:defPPr>
-          </a:lstStyle>
-          <a:p xmlns:a="http://schemas.openxmlformats.org/drawingml/2006/main">
-            <a:pPr>
-              <a:defRPr sz="1725" b="1">
-                <a:solidFill>
-                  <a:srgbClr val="FFFFFF"/>
-                </a:solidFill>
-              </a:defRPr>
-            </a:pPr>
-            <a:r>
-              <a:rPr sz="1725" b="1">
-                <a:solidFill>
-                  <a:srgbClr val="FFFFFF"/>
-                </a:solidFill>
-              </a:rPr>
-              <a:t>Approved facts</a:t>
-            </a:r>
-          </a:p>
-          <a:p xmlns:a="http://schemas.openxmlformats.org/drawingml/2006/main">
-            <a:pPr>
-              <a:defRPr sz="1725" b="1">
-                <a:solidFill>
-                  <a:srgbClr val="FFFFFF"/>
-                </a:solidFill>
-              </a:defRPr>
-            </a:pPr>
-            <a:r>
-              <a:rPr sz="1725" b="1">
-                <a:solidFill>
-                  <a:srgbClr val="FFFFFF"/>
-                </a:solidFill>
-              </a:rPr>
-              <a:t>in plain language</a:t>
-            </a:r>
-          </a:p>
-        </p:txBody>
-      </p:sp>
-      <p:sp>
-        <p:nvSpPr>
-          <p:cNvPr id="19" name="">
-            <a:extLst xmlns:a="http://schemas.openxmlformats.org/drawingml/2006/main">
-              <a:ext uri="{FF2B5EF4-FFF2-40B4-BE49-F238E27FC236}">
-                <a16:creationId xmlns:a16="http://schemas.microsoft.com/office/drawing/2014/main" id="{FB34FC68-98E4-4EDE-9C98-30E912B420C6}"/>
-              </a:ext>
-            </a:extLst>
-          </p:cNvPr>
-          <p:cNvSpPr>
-            <a:spLocks xmlns:a="http://schemas.openxmlformats.org/drawingml/2006/main" noGrp="1"/>
-          </p:cNvSpPr>
-          <p:nvPr/>
-        </p:nvSpPr>
-        <p:spPr>
-          <a:xfrm xmlns:a="http://schemas.openxmlformats.org/drawingml/2006/main">
-            <a:off x="9315450" y="2895600"/>
-            <a:ext cx="266700" cy="476250"/>
-          </a:xfrm>
-          <a:prstGeom xmlns:a="http://schemas.openxmlformats.org/drawingml/2006/main" prst="rect">
-            <a:avLst/>
-          </a:prstGeom>
-          <a:noFill xmlns:a="http://schemas.openxmlformats.org/drawingml/2006/main"/>
-          <a:ln xmlns:a="http://schemas.openxmlformats.org/drawingml/2006/main" w="0">
-            <a:noFill/>
-            <a:prstDash val="solid"/>
-          </a:ln>
-        </p:spPr>
-        <p:txBody>
-          <a:bodyPr xmlns:a="http://schemas.openxmlformats.org/drawingml/2006/main" anchor="t"/>
-          <a:lstStyle xmlns:a="http://schemas.openxmlformats.org/drawingml/2006/main">
-            <a:defPPr>
-              <a:defRPr sz="2550" b="1">
-                <a:solidFill>
-                  <a:srgbClr val="C8FF63"/>
-                </a:solidFill>
-              </a:defRPr>
-            </a:defPPr>
-          </a:lstStyle>
-          <a:p xmlns:a="http://schemas.openxmlformats.org/drawingml/2006/main">
-            <a:pPr>
-              <a:defRPr sz="2550" b="1">
-                <a:solidFill>
-                  <a:srgbClr val="C8FF63"/>
-                </a:solidFill>
-              </a:defRPr>
-            </a:pPr>
-            <a:r>
-              <a:rPr sz="2550" b="1">
-                <a:solidFill>
-                  <a:srgbClr val="C8FF63"/>
-                </a:solidFill>
-              </a:rPr>
-              <a:t>›</a:t>
-            </a:r>
-          </a:p>
-        </p:txBody>
-      </p:sp>
-      <p:sp>
-        <p:nvSpPr>
-          <p:cNvPr id="20" name="">
-            <a:extLst xmlns:a="http://schemas.openxmlformats.org/drawingml/2006/main">
-              <a:ext uri="{FF2B5EF4-FFF2-40B4-BE49-F238E27FC236}">
-                <a16:creationId xmlns:a16="http://schemas.microsoft.com/office/drawing/2014/main" id="{C510DBF7-0FE1-4847-9031-CE6242452A01}"/>
-              </a:ext>
-            </a:extLst>
-          </p:cNvPr>
-          <p:cNvSpPr>
-            <a:spLocks xmlns:a="http://schemas.openxmlformats.org/drawingml/2006/main" noGrp="1"/>
-          </p:cNvSpPr>
-          <p:nvPr/>
-        </p:nvSpPr>
-        <p:spPr>
-          <a:xfrm xmlns:a="http://schemas.openxmlformats.org/drawingml/2006/main">
-            <a:off x="9696450" y="2152650"/>
-            <a:ext cx="1790700" cy="2286000"/>
-          </a:xfrm>
-          <a:prstGeom xmlns:a="http://schemas.openxmlformats.org/drawingml/2006/main" prst="roundRect">
-            <a:avLst>
-              <a:gd name="adj" fmla="val 13830"/>
-            </a:avLst>
-          </a:prstGeom>
-          <a:solidFill xmlns:a="http://schemas.openxmlformats.org/drawingml/2006/main">
-            <a:srgbClr val="C8FF63"/>
-          </a:solidFill>
-          <a:ln xmlns:a="http://schemas.openxmlformats.org/drawingml/2006/main" w="0">
-            <a:noFill/>
-            <a:prstDash val="solid"/>
-          </a:ln>
-        </p:spPr>
-      </p:sp>
-      <p:sp>
-        <p:nvSpPr>
-          <p:cNvPr id="21" name="">
-            <a:extLst xmlns:a="http://schemas.openxmlformats.org/drawingml/2006/main">
-              <a:ext uri="{FF2B5EF4-FFF2-40B4-BE49-F238E27FC236}">
-                <a16:creationId xmlns:a16="http://schemas.microsoft.com/office/drawing/2014/main" id="{87555385-FE01-446B-A45C-BD7D6164C99C}"/>
-              </a:ext>
-            </a:extLst>
-          </p:cNvPr>
-          <p:cNvSpPr>
-            <a:spLocks xmlns:a="http://schemas.openxmlformats.org/drawingml/2006/main" noGrp="1"/>
-          </p:cNvSpPr>
-          <p:nvPr/>
-        </p:nvSpPr>
-        <p:spPr>
-          <a:xfrm xmlns:a="http://schemas.openxmlformats.org/drawingml/2006/main">
-            <a:off x="9886950" y="2419350"/>
-            <a:ext cx="1409700" cy="247650"/>
-          </a:xfrm>
-          <a:prstGeom xmlns:a="http://schemas.openxmlformats.org/drawingml/2006/main" prst="rect">
-            <a:avLst/>
-          </a:prstGeom>
-          <a:noFill xmlns:a="http://schemas.openxmlformats.org/drawingml/2006/main"/>
-          <a:ln xmlns:a="http://schemas.openxmlformats.org/drawingml/2006/main" w="0">
-            <a:noFill/>
-            <a:prstDash val="solid"/>
-          </a:ln>
-        </p:spPr>
-        <p:txBody>
-          <a:bodyPr xmlns:a="http://schemas.openxmlformats.org/drawingml/2006/main" anchor="t"/>
-          <a:lstStyle xmlns:a="http://schemas.openxmlformats.org/drawingml/2006/main">
-            <a:defPPr>
-              <a:defRPr sz="1050" b="1">
-                <a:solidFill>
-                  <a:srgbClr val="082B26"/>
-                </a:solidFill>
-              </a:defRPr>
-            </a:defPPr>
-          </a:lstStyle>
-          <a:p xmlns:a="http://schemas.openxmlformats.org/drawingml/2006/main">
-            <a:pPr>
-              <a:defRPr sz="1050" b="1">
-                <a:solidFill>
-                  <a:srgbClr val="082B26"/>
-                </a:solidFill>
-              </a:defRPr>
-            </a:pPr>
-            <a:r>
-              <a:rPr sz="1050" b="1">
-                <a:solidFill>
-                  <a:srgbClr val="082B26"/>
-                </a:solidFill>
-              </a:rPr>
-              <a:t>HUMAN</a:t>
-            </a:r>
-          </a:p>
-        </p:txBody>
-      </p:sp>
-      <p:sp>
-        <p:nvSpPr>
-          <p:cNvPr id="22" name="">
-            <a:extLst xmlns:a="http://schemas.openxmlformats.org/drawingml/2006/main">
-              <a:ext uri="{FF2B5EF4-FFF2-40B4-BE49-F238E27FC236}">
-                <a16:creationId xmlns:a16="http://schemas.microsoft.com/office/drawing/2014/main" id="{934DC786-027D-4448-930B-41D793AFD6CC}"/>
-              </a:ext>
-            </a:extLst>
-          </p:cNvPr>
-          <p:cNvSpPr>
-            <a:spLocks xmlns:a="http://schemas.openxmlformats.org/drawingml/2006/main" noGrp="1"/>
-          </p:cNvSpPr>
-          <p:nvPr/>
-        </p:nvSpPr>
-        <p:spPr>
-          <a:xfrm xmlns:a="http://schemas.openxmlformats.org/drawingml/2006/main">
-            <a:off x="9886950" y="3067050"/>
-            <a:ext cx="1409700" cy="857250"/>
-          </a:xfrm>
-          <a:prstGeom xmlns:a="http://schemas.openxmlformats.org/drawingml/2006/main" prst="rect">
-            <a:avLst/>
-          </a:prstGeom>
-          <a:noFill xmlns:a="http://schemas.openxmlformats.org/drawingml/2006/main"/>
-          <a:ln xmlns:a="http://schemas.openxmlformats.org/drawingml/2006/main" w="0">
-            <a:noFill/>
-            <a:prstDash val="solid"/>
-          </a:ln>
-        </p:spPr>
-        <p:txBody>
-          <a:bodyPr xmlns:a="http://schemas.openxmlformats.org/drawingml/2006/main" anchor="t"/>
-          <a:lstStyle xmlns:a="http://schemas.openxmlformats.org/drawingml/2006/main">
-            <a:defPPr>
-              <a:defRPr sz="1725" b="1">
-                <a:solidFill>
-                  <a:srgbClr val="082B26"/>
-                </a:solidFill>
-              </a:defRPr>
-            </a:defPPr>
-          </a:lstStyle>
-          <a:p xmlns:a="http://schemas.openxmlformats.org/drawingml/2006/main">
-            <a:pPr>
-              <a:defRPr sz="1725" b="1">
-                <a:solidFill>
-                  <a:srgbClr val="082B26"/>
-                </a:solidFill>
-              </a:defRPr>
-            </a:pPr>
-            <a:r>
-              <a:rPr sz="1725" b="1">
-                <a:solidFill>
-                  <a:srgbClr val="082B26"/>
-                </a:solidFill>
-              </a:rPr>
-              <a:t>Review and</a:t>
-            </a:r>
-          </a:p>
-          <a:p xmlns:a="http://schemas.openxmlformats.org/drawingml/2006/main">
-            <a:pPr>
-              <a:defRPr sz="1725" b="1">
-                <a:solidFill>
-                  <a:srgbClr val="082B26"/>
-                </a:solidFill>
-              </a:defRPr>
-            </a:pPr>
-            <a:r>
-              <a:rPr sz="1725" b="1">
-                <a:solidFill>
-                  <a:srgbClr val="082B26"/>
-                </a:solidFill>
-              </a:rPr>
-              <a:t>response</a:t>
-            </a:r>
-          </a:p>
-        </p:txBody>
-      </p:sp>
-      <p:sp>
-        <p:nvSpPr>
-          <p:cNvPr id="23" name="">
-            <a:extLst xmlns:a="http://schemas.openxmlformats.org/drawingml/2006/main">
-              <a:ext uri="{FF2B5EF4-FFF2-40B4-BE49-F238E27FC236}">
-                <a16:creationId xmlns:a16="http://schemas.microsoft.com/office/drawing/2014/main" id="{92073E59-6FC7-466C-AA96-BBBF58691D86}"/>
-              </a:ext>
-            </a:extLst>
-          </p:cNvPr>
-          <p:cNvSpPr>
-            <a:spLocks xmlns:a="http://schemas.openxmlformats.org/drawingml/2006/main" noGrp="1"/>
-          </p:cNvSpPr>
-          <p:nvPr/>
-        </p:nvSpPr>
-        <p:spPr>
-          <a:xfrm xmlns:a="http://schemas.openxmlformats.org/drawingml/2006/main">
-            <a:off x="704850" y="5181600"/>
-            <a:ext cx="8763000" cy="400050"/>
-          </a:xfrm>
-          <a:prstGeom xmlns:a="http://schemas.openxmlformats.org/drawingml/2006/main" prst="rect">
-            <a:avLst/>
-          </a:prstGeom>
-          <a:noFill xmlns:a="http://schemas.openxmlformats.org/drawingml/2006/main"/>
-          <a:ln xmlns:a="http://schemas.openxmlformats.org/drawingml/2006/main" w="0">
-            <a:noFill/>
-            <a:prstDash val="solid"/>
-          </a:ln>
-        </p:spPr>
-        <p:txBody>
-          <a:bodyPr xmlns:a="http://schemas.openxmlformats.org/drawingml/2006/main" anchor="t"/>
-          <a:lstStyle xmlns:a="http://schemas.openxmlformats.org/drawingml/2006/main">
-            <a:defPPr>
-              <a:defRPr sz="1575" b="0">
-                <a:solidFill>
-                  <a:srgbClr val="DCE9E3"/>
-                </a:solidFill>
-              </a:defRPr>
-            </a:defPPr>
-          </a:lstStyle>
-          <a:p xmlns:a="http://schemas.openxmlformats.org/drawingml/2006/main">
-            <a:pPr>
-              <a:defRPr sz="1575" b="0">
-                <a:solidFill>
-                  <a:srgbClr val="DCE9E3"/>
-                </a:solidFill>
-              </a:defRPr>
-            </a:pPr>
-            <a:r>
-              <a:rPr sz="1575" b="0">
-                <a:solidFill>
-                  <a:srgbClr val="DCE9E3"/>
-                </a:solidFill>
-              </a:rPr>
-              <a:t>Frames are processed transiently. SiteGuard stores observations, not footage.</a:t>
-            </a:r>
-          </a:p>
-        </p:txBody>
-      </p:sp>
-      <p:sp>
-        <p:nvSpPr>
-          <p:cNvPr id="24" name="">
-            <a:extLst xmlns:a="http://schemas.openxmlformats.org/drawingml/2006/main">
-              <a:ext uri="{FF2B5EF4-FFF2-40B4-BE49-F238E27FC236}">
-                <a16:creationId xmlns:a16="http://schemas.microsoft.com/office/drawing/2014/main" id="{DE1E7F08-0C37-45BE-856B-AB601F21FE56}"/>
-              </a:ext>
-            </a:extLst>
-          </p:cNvPr>
-          <p:cNvSpPr>
-            <a:spLocks xmlns:a="http://schemas.openxmlformats.org/drawingml/2006/main" noGrp="1"/>
-          </p:cNvSpPr>
-          <p:nvPr/>
-        </p:nvSpPr>
-        <p:spPr>
-          <a:xfrm xmlns:a="http://schemas.openxmlformats.org/drawingml/2006/main">
-            <a:off x="704850" y="5753100"/>
-            <a:ext cx="7810500" cy="323850"/>
-          </a:xfrm>
-          <a:prstGeom xmlns:a="http://schemas.openxmlformats.org/drawingml/2006/main" prst="rect">
-            <a:avLst/>
-          </a:prstGeom>
-          <a:noFill xmlns:a="http://schemas.openxmlformats.org/drawingml/2006/main"/>
-          <a:ln xmlns:a="http://schemas.openxmlformats.org/drawingml/2006/main" w="0">
-            <a:noFill/>
-            <a:prstDash val="solid"/>
-          </a:ln>
-        </p:spPr>
-        <p:txBody>
-          <a:bodyPr xmlns:a="http://schemas.openxmlformats.org/drawingml/2006/main" anchor="t"/>
-          <a:lstStyle xmlns:a="http://schemas.openxmlformats.org/drawingml/2006/main">
-            <a:defPPr>
-              <a:defRPr sz="1275" b="1">
-                <a:solidFill>
-                  <a:srgbClr val="FFD278"/>
-                </a:solidFill>
-              </a:defRPr>
-            </a:defPPr>
-          </a:lstStyle>
-          <a:p xmlns:a="http://schemas.openxmlformats.org/drawingml/2006/main">
-            <a:pPr>
-              <a:defRPr sz="1275" b="1">
-                <a:solidFill>
-                  <a:srgbClr val="FFD278"/>
-                </a:solidFill>
-              </a:defRPr>
-            </a:pPr>
-            <a:r>
-              <a:rPr sz="1275" b="1">
-                <a:solidFill>
-                  <a:srgbClr val="FFD278"/>
-                </a:solidFill>
-              </a:rPr>
-              <a:t>No automatic medical or work-clearance decision.</a:t>
+              <a:t>The alert goes to a person for review.</a:t>
             </a:r>
           </a:p>
         </p:txBody>
@@ -7075,7 +5286,7 @@
     </p:spTree>
     <p:extLst>
       <p:ext uri="{BB962C8B-B14F-4D97-AF65-F5344CB8AC3E}">
-        <p14:creationId xmlns:p14="http://schemas.microsoft.com/office/powerpoint/2010/main" val="184431387"/>
+        <p14:creationId xmlns:p14="http://schemas.microsoft.com/office/powerpoint/2010/main" val="2117421612"/>
       </p:ext>
     </p:extLst>
   </p:cSld>
@@ -7088,7 +5299,7 @@
     <p:bg>
       <p:bgPr>
         <a:solidFill xmlns:a="http://schemas.openxmlformats.org/drawingml/2006/main">
-          <a:srgbClr val="FFFFFF"/>
+          <a:srgbClr val="F4F6F1"/>
         </a:solidFill>
       </p:bgPr>
     </p:bg>
@@ -7103,10 +5314,10 @@
       </p:grpSpPr>
       <p:sp>
         <p:nvSpPr>
-          <p:cNvPr id="15" name="">
+          <p:cNvPr id="23" name="">
             <a:extLst xmlns:a="http://schemas.openxmlformats.org/drawingml/2006/main">
               <a:ext uri="{FF2B5EF4-FFF2-40B4-BE49-F238E27FC236}">
-                <a16:creationId xmlns:a16="http://schemas.microsoft.com/office/drawing/2014/main" id="{1AE39C0F-084A-48FD-9513-359ED03B5F2E}"/>
+                <a16:creationId xmlns:a16="http://schemas.microsoft.com/office/drawing/2014/main" id="{79CA522A-A6D9-459E-BEC2-0815CE93F8C9}"/>
               </a:ext>
             </a:extLst>
           </p:cNvPr>
@@ -7117,8 +5328,8 @@
         </p:nvSpPr>
         <p:spPr>
           <a:xfrm xmlns:a="http://schemas.openxmlformats.org/drawingml/2006/main">
-            <a:off x="11410950" y="285750"/>
-            <a:ext cx="342900" cy="209550"/>
+            <a:off x="685800" y="438150"/>
+            <a:ext cx="8191500" cy="266700"/>
           </a:xfrm>
           <a:prstGeom xmlns:a="http://schemas.openxmlformats.org/drawingml/2006/main" prst="rect">
             <a:avLst/>
@@ -7130,31 +5341,31 @@
           </a:ln>
         </p:spPr>
         <p:txBody>
-          <a:bodyPr xmlns:a="http://schemas.openxmlformats.org/drawingml/2006/main" anchor="t"/>
+          <a:bodyPr xmlns:a="http://schemas.openxmlformats.org/drawingml/2006/main" anchor="ctr"/>
           <a:lstStyle xmlns:a="http://schemas.openxmlformats.org/drawingml/2006/main">
             <a:defPPr>
-              <a:defRPr sz="825" b="1">
-                <a:solidFill>
-                  <a:srgbClr val="61756C"/>
+              <a:defRPr sz="1275" b="1">
+                <a:solidFill>
+                  <a:srgbClr val="205342"/>
                 </a:solidFill>
               </a:defRPr>
             </a:defPPr>
           </a:lstStyle>
           <a:p xmlns:a="http://schemas.openxmlformats.org/drawingml/2006/main">
             <a:pPr>
-              <a:defRPr sz="825" b="1">
-                <a:solidFill>
-                  <a:srgbClr val="61756C"/>
+              <a:defRPr sz="1275" b="1">
+                <a:solidFill>
+                  <a:srgbClr val="205342"/>
                 </a:solidFill>
               </a:defRPr>
             </a:pPr>
             <a:r>
-              <a:rPr sz="825" b="1">
-                <a:solidFill>
-                  <a:srgbClr val="61756C"/>
+              <a:rPr sz="1275" b="1">
+                <a:solidFill>
+                  <a:srgbClr val="205342"/>
                 </a:solidFill>
               </a:rPr>
-              <a:t>08</a:t>
+              <a:t>UNDER THE HOOD</a:t>
             </a:r>
           </a:p>
         </p:txBody>
@@ -7164,7 +5375,7 @@
           <p:cNvPr id="2" name="">
             <a:extLst xmlns:a="http://schemas.openxmlformats.org/drawingml/2006/main">
               <a:ext uri="{FF2B5EF4-FFF2-40B4-BE49-F238E27FC236}">
-                <a16:creationId xmlns:a16="http://schemas.microsoft.com/office/drawing/2014/main" id="{740B8E93-355C-4717-9B8A-0106A2D3BCF1}"/>
+                <a16:creationId xmlns:a16="http://schemas.microsoft.com/office/drawing/2014/main" id="{F5C40ECF-9B00-4D9B-BA1D-F2F1614E494F}"/>
               </a:ext>
             </a:extLst>
           </p:cNvPr>
@@ -7175,8 +5386,8 @@
         </p:nvSpPr>
         <p:spPr>
           <a:xfrm xmlns:a="http://schemas.openxmlformats.org/drawingml/2006/main">
-            <a:off x="609600" y="457200"/>
-            <a:ext cx="7239000" cy="609600"/>
+            <a:off x="685800" y="885825"/>
+            <a:ext cx="10477500" cy="781050"/>
           </a:xfrm>
           <a:prstGeom xmlns:a="http://schemas.openxmlformats.org/drawingml/2006/main" prst="rect">
             <a:avLst/>
@@ -7188,31 +5399,31 @@
           </a:ln>
         </p:spPr>
         <p:txBody>
-          <a:bodyPr xmlns:a="http://schemas.openxmlformats.org/drawingml/2006/main" anchor="t"/>
+          <a:bodyPr xmlns:a="http://schemas.openxmlformats.org/drawingml/2006/main" anchor="ctr"/>
           <a:lstStyle xmlns:a="http://schemas.openxmlformats.org/drawingml/2006/main">
             <a:defPPr>
-              <a:defRPr sz="3150" b="1">
-                <a:solidFill>
-                  <a:srgbClr val="082B26"/>
+              <a:defRPr sz="4350" b="1">
+                <a:solidFill>
+                  <a:srgbClr val="092C26"/>
                 </a:solidFill>
               </a:defRPr>
             </a:defPPr>
           </a:lstStyle>
           <a:p xmlns:a="http://schemas.openxmlformats.org/drawingml/2006/main">
             <a:pPr>
-              <a:defRPr sz="3150" b="1">
-                <a:solidFill>
-                  <a:srgbClr val="082B26"/>
+              <a:defRPr sz="4350" b="1">
+                <a:solidFill>
+                  <a:srgbClr val="092C26"/>
                 </a:solidFill>
               </a:defRPr>
             </a:pPr>
             <a:r>
-              <a:rPr sz="3150" b="1">
-                <a:solidFill>
-                  <a:srgbClr val="082B26"/>
+              <a:rPr sz="4350" b="1">
+                <a:solidFill>
+                  <a:srgbClr val="092C26"/>
                 </a:solidFill>
               </a:rPr>
-              <a:t>What we proved</a:t>
+              <a:t>Four jobs. One response.</a:t>
             </a:r>
           </a:p>
         </p:txBody>
@@ -7222,7 +5433,7 @@
           <p:cNvPr id="3" name="">
             <a:extLst xmlns:a="http://schemas.openxmlformats.org/drawingml/2006/main">
               <a:ext uri="{FF2B5EF4-FFF2-40B4-BE49-F238E27FC236}">
-                <a16:creationId xmlns:a16="http://schemas.microsoft.com/office/drawing/2014/main" id="{DA5A586B-402E-43EE-AE8D-04BBE36A6445}"/>
+                <a16:creationId xmlns:a16="http://schemas.microsoft.com/office/drawing/2014/main" id="{C76EC251-E815-4DCB-B94F-F40BBC274468}"/>
               </a:ext>
             </a:extLst>
           </p:cNvPr>
@@ -7233,8 +5444,8 @@
         </p:nvSpPr>
         <p:spPr>
           <a:xfrm xmlns:a="http://schemas.openxmlformats.org/drawingml/2006/main">
-            <a:off x="685800" y="1790700"/>
-            <a:ext cx="2190750" cy="666750"/>
+            <a:off x="704850" y="2428875"/>
+            <a:ext cx="2095500" cy="419100"/>
           </a:xfrm>
           <a:prstGeom xmlns:a="http://schemas.openxmlformats.org/drawingml/2006/main" prst="rect">
             <a:avLst/>
@@ -7246,31 +5457,31 @@
           </a:ln>
         </p:spPr>
         <p:txBody>
-          <a:bodyPr xmlns:a="http://schemas.openxmlformats.org/drawingml/2006/main" anchor="t"/>
+          <a:bodyPr xmlns:a="http://schemas.openxmlformats.org/drawingml/2006/main" anchor="ctr"/>
           <a:lstStyle xmlns:a="http://schemas.openxmlformats.org/drawingml/2006/main">
             <a:defPPr>
-              <a:defRPr sz="3375" b="1">
-                <a:solidFill>
-                  <a:srgbClr val="082B26"/>
+              <a:defRPr sz="1950" b="1">
+                <a:solidFill>
+                  <a:srgbClr val="205342"/>
                 </a:solidFill>
               </a:defRPr>
             </a:defPPr>
           </a:lstStyle>
           <a:p xmlns:a="http://schemas.openxmlformats.org/drawingml/2006/main">
             <a:pPr>
-              <a:defRPr sz="3375" b="1">
-                <a:solidFill>
-                  <a:srgbClr val="082B26"/>
+              <a:defRPr sz="1950" b="1">
+                <a:solidFill>
+                  <a:srgbClr val="205342"/>
                 </a:solidFill>
               </a:defRPr>
             </a:pPr>
             <a:r>
-              <a:rPr sz="3375" b="1">
-                <a:solidFill>
-                  <a:srgbClr val="082B26"/>
+              <a:rPr sz="1950" b="1">
+                <a:solidFill>
+                  <a:srgbClr val="205342"/>
                 </a:solidFill>
               </a:rPr>
-              <a:t>11 / 11</a:t>
+              <a:t>01</a:t>
             </a:r>
           </a:p>
         </p:txBody>
@@ -7280,7 +5491,7 @@
           <p:cNvPr id="4" name="">
             <a:extLst xmlns:a="http://schemas.openxmlformats.org/drawingml/2006/main">
               <a:ext uri="{FF2B5EF4-FFF2-40B4-BE49-F238E27FC236}">
-                <a16:creationId xmlns:a16="http://schemas.microsoft.com/office/drawing/2014/main" id="{EED211BD-0667-471D-9347-43DF3066FE76}"/>
+                <a16:creationId xmlns:a16="http://schemas.microsoft.com/office/drawing/2014/main" id="{5DA17298-C4FE-40E3-9E0B-BBD1067B251F}"/>
               </a:ext>
             </a:extLst>
           </p:cNvPr>
@@ -7291,8 +5502,39 @@
         </p:nvSpPr>
         <p:spPr>
           <a:xfrm xmlns:a="http://schemas.openxmlformats.org/drawingml/2006/main">
-            <a:off x="3067050" y="1905000"/>
-            <a:ext cx="6191250" cy="457200"/>
+            <a:off x="704850" y="3057525"/>
+            <a:ext cx="2152650" cy="28575"/>
+          </a:xfrm>
+          <a:prstGeom xmlns:a="http://schemas.openxmlformats.org/drawingml/2006/main" prst="rect">
+            <a:avLst/>
+          </a:prstGeom>
+          <a:solidFill xmlns:a="http://schemas.openxmlformats.org/drawingml/2006/main">
+            <a:srgbClr val="CEFF75"/>
+          </a:solidFill>
+          <a:ln xmlns:a="http://schemas.openxmlformats.org/drawingml/2006/main" w="0">
+            <a:noFill/>
+            <a:prstDash val="solid"/>
+          </a:ln>
+        </p:spPr>
+      </p:sp>
+      <p:sp>
+        <p:nvSpPr>
+          <p:cNvPr id="5" name="">
+            <a:extLst xmlns:a="http://schemas.openxmlformats.org/drawingml/2006/main">
+              <a:ext uri="{FF2B5EF4-FFF2-40B4-BE49-F238E27FC236}">
+                <a16:creationId xmlns:a16="http://schemas.microsoft.com/office/drawing/2014/main" id="{FFC2D1DB-EE6E-4755-9310-FDCB2F03A711}"/>
+              </a:ext>
+            </a:extLst>
+          </p:cNvPr>
+          <p:cNvSpPr>
+            <a:spLocks xmlns:a="http://schemas.openxmlformats.org/drawingml/2006/main" noGrp="1"/>
+          </p:cNvSpPr>
+          <p:nvPr/>
+        </p:nvSpPr>
+        <p:spPr>
+          <a:xfrm xmlns:a="http://schemas.openxmlformats.org/drawingml/2006/main">
+            <a:off x="704850" y="3438525"/>
+            <a:ext cx="2286000" cy="619125"/>
           </a:xfrm>
           <a:prstGeom xmlns:a="http://schemas.openxmlformats.org/drawingml/2006/main" prst="rect">
             <a:avLst/>
@@ -7304,41 +5546,41 @@
           </a:ln>
         </p:spPr>
         <p:txBody>
-          <a:bodyPr xmlns:a="http://schemas.openxmlformats.org/drawingml/2006/main" anchor="t"/>
+          <a:bodyPr xmlns:a="http://schemas.openxmlformats.org/drawingml/2006/main" anchor="ctr"/>
           <a:lstStyle xmlns:a="http://schemas.openxmlformats.org/drawingml/2006/main">
             <a:defPPr>
-              <a:defRPr sz="1875" b="1">
-                <a:solidFill>
-                  <a:srgbClr val="082B26"/>
+              <a:defRPr sz="3000" b="1">
+                <a:solidFill>
+                  <a:srgbClr val="092C26"/>
                 </a:solidFill>
               </a:defRPr>
             </a:defPPr>
           </a:lstStyle>
           <a:p xmlns:a="http://schemas.openxmlformats.org/drawingml/2006/main">
             <a:pPr>
-              <a:defRPr sz="1875" b="1">
-                <a:solidFill>
-                  <a:srgbClr val="082B26"/>
+              <a:defRPr sz="3000" b="1">
+                <a:solidFill>
+                  <a:srgbClr val="092C26"/>
                 </a:solidFill>
               </a:defRPr>
             </a:pPr>
             <a:r>
-              <a:rPr sz="1875" b="1">
-                <a:solidFill>
-                  <a:srgbClr val="082B26"/>
+              <a:rPr sz="3000" b="1">
+                <a:solidFill>
+                  <a:srgbClr val="092C26"/>
                 </a:solidFill>
               </a:rPr>
-              <a:t>Core rehearsal steps passed</a:t>
-            </a:r>
-          </a:p>
-        </p:txBody>
-      </p:sp>
-      <p:sp>
-        <p:nvSpPr>
-          <p:cNvPr id="5" name="">
+              <a:t>Observe</a:t>
+            </a:r>
+          </a:p>
+        </p:txBody>
+      </p:sp>
+      <p:sp>
+        <p:nvSpPr>
+          <p:cNvPr id="6" name="">
             <a:extLst xmlns:a="http://schemas.openxmlformats.org/drawingml/2006/main">
               <a:ext uri="{FF2B5EF4-FFF2-40B4-BE49-F238E27FC236}">
-                <a16:creationId xmlns:a16="http://schemas.microsoft.com/office/drawing/2014/main" id="{71BAF953-A716-4BC2-8317-67F87676EFC0}"/>
+                <a16:creationId xmlns:a16="http://schemas.microsoft.com/office/drawing/2014/main" id="{D1CB32F7-8294-4420-8870-277DFE1EDBE1}"/>
               </a:ext>
             </a:extLst>
           </p:cNvPr>
@@ -7349,14 +5591,188 @@
         </p:nvSpPr>
         <p:spPr>
           <a:xfrm xmlns:a="http://schemas.openxmlformats.org/drawingml/2006/main">
-            <a:off x="685800" y="2686050"/>
-            <a:ext cx="10001250" cy="19050"/>
+            <a:off x="704850" y="4343400"/>
+            <a:ext cx="2333625" cy="409575"/>
           </a:xfrm>
           <a:prstGeom xmlns:a="http://schemas.openxmlformats.org/drawingml/2006/main" prst="rect">
             <a:avLst/>
           </a:prstGeom>
+          <a:noFill xmlns:a="http://schemas.openxmlformats.org/drawingml/2006/main"/>
+          <a:ln xmlns:a="http://schemas.openxmlformats.org/drawingml/2006/main" w="0">
+            <a:noFill/>
+            <a:prstDash val="solid"/>
+          </a:ln>
+        </p:spPr>
+        <p:txBody>
+          <a:bodyPr xmlns:a="http://schemas.openxmlformats.org/drawingml/2006/main" anchor="ctr"/>
+          <a:lstStyle xmlns:a="http://schemas.openxmlformats.org/drawingml/2006/main">
+            <a:defPPr>
+              <a:defRPr sz="1725" b="1">
+                <a:solidFill>
+                  <a:srgbClr val="205342"/>
+                </a:solidFill>
+              </a:defRPr>
+            </a:defPPr>
+          </a:lstStyle>
+          <a:p xmlns:a="http://schemas.openxmlformats.org/drawingml/2006/main">
+            <a:pPr>
+              <a:defRPr sz="1725" b="1">
+                <a:solidFill>
+                  <a:srgbClr val="205342"/>
+                </a:solidFill>
+              </a:defRPr>
+            </a:pPr>
+            <a:r>
+              <a:rPr sz="1725" b="1">
+                <a:solidFill>
+                  <a:srgbClr val="205342"/>
+                </a:solidFill>
+              </a:rPr>
+              <a:t>Presage</a:t>
+            </a:r>
+          </a:p>
+        </p:txBody>
+      </p:sp>
+      <p:sp>
+        <p:nvSpPr>
+          <p:cNvPr id="7" name="">
+            <a:extLst xmlns:a="http://schemas.openxmlformats.org/drawingml/2006/main">
+              <a:ext uri="{FF2B5EF4-FFF2-40B4-BE49-F238E27FC236}">
+                <a16:creationId xmlns:a16="http://schemas.microsoft.com/office/drawing/2014/main" id="{33F90C59-63D5-4FD3-B4DA-EA5C86F0AD2F}"/>
+              </a:ext>
+            </a:extLst>
+          </p:cNvPr>
+          <p:cNvSpPr>
+            <a:spLocks xmlns:a="http://schemas.openxmlformats.org/drawingml/2006/main" noGrp="1"/>
+          </p:cNvSpPr>
+          <p:nvPr/>
+        </p:nvSpPr>
+        <p:spPr>
+          <a:xfrm xmlns:a="http://schemas.openxmlformats.org/drawingml/2006/main">
+            <a:off x="704850" y="4857750"/>
+            <a:ext cx="2333625" cy="895350"/>
+          </a:xfrm>
+          <a:prstGeom xmlns:a="http://schemas.openxmlformats.org/drawingml/2006/main" prst="rect">
+            <a:avLst/>
+          </a:prstGeom>
+          <a:noFill xmlns:a="http://schemas.openxmlformats.org/drawingml/2006/main"/>
+          <a:ln xmlns:a="http://schemas.openxmlformats.org/drawingml/2006/main" w="0">
+            <a:noFill/>
+            <a:prstDash val="solid"/>
+          </a:ln>
+        </p:spPr>
+        <p:txBody>
+          <a:bodyPr xmlns:a="http://schemas.openxmlformats.org/drawingml/2006/main" anchor="ctr"/>
+          <a:lstStyle xmlns:a="http://schemas.openxmlformats.org/drawingml/2006/main">
+            <a:defPPr>
+              <a:defRPr sz="1575" b="0">
+                <a:solidFill>
+                  <a:srgbClr val="5B7169"/>
+                </a:solidFill>
+              </a:defRPr>
+            </a:defPPr>
+          </a:lstStyle>
+          <a:p xmlns:a="http://schemas.openxmlformats.org/drawingml/2006/main">
+            <a:pPr>
+              <a:defRPr sz="1575" b="0">
+                <a:solidFill>
+                  <a:srgbClr val="5B7169"/>
+                </a:solidFill>
+              </a:defRPr>
+            </a:pPr>
+            <a:r>
+              <a:rPr sz="1575" b="0">
+                <a:solidFill>
+                  <a:srgbClr val="5B7169"/>
+                </a:solidFill>
+              </a:rPr>
+              <a:t>Camera pulse and breathing</a:t>
+            </a:r>
+          </a:p>
+        </p:txBody>
+      </p:sp>
+      <p:sp>
+        <p:nvSpPr>
+          <p:cNvPr id="8" name="">
+            <a:extLst xmlns:a="http://schemas.openxmlformats.org/drawingml/2006/main">
+              <a:ext uri="{FF2B5EF4-FFF2-40B4-BE49-F238E27FC236}">
+                <a16:creationId xmlns:a16="http://schemas.microsoft.com/office/drawing/2014/main" id="{DE4FE173-C9FF-4D74-B159-7AB8EE99DA07}"/>
+              </a:ext>
+            </a:extLst>
+          </p:cNvPr>
+          <p:cNvSpPr>
+            <a:spLocks xmlns:a="http://schemas.openxmlformats.org/drawingml/2006/main" noGrp="1"/>
+          </p:cNvSpPr>
+          <p:nvPr/>
+        </p:nvSpPr>
+        <p:spPr>
+          <a:xfrm xmlns:a="http://schemas.openxmlformats.org/drawingml/2006/main">
+            <a:off x="3505200" y="2428875"/>
+            <a:ext cx="2095500" cy="419100"/>
+          </a:xfrm>
+          <a:prstGeom xmlns:a="http://schemas.openxmlformats.org/drawingml/2006/main" prst="rect">
+            <a:avLst/>
+          </a:prstGeom>
+          <a:noFill xmlns:a="http://schemas.openxmlformats.org/drawingml/2006/main"/>
+          <a:ln xmlns:a="http://schemas.openxmlformats.org/drawingml/2006/main" w="0">
+            <a:noFill/>
+            <a:prstDash val="solid"/>
+          </a:ln>
+        </p:spPr>
+        <p:txBody>
+          <a:bodyPr xmlns:a="http://schemas.openxmlformats.org/drawingml/2006/main" anchor="ctr"/>
+          <a:lstStyle xmlns:a="http://schemas.openxmlformats.org/drawingml/2006/main">
+            <a:defPPr>
+              <a:defRPr sz="1950" b="1">
+                <a:solidFill>
+                  <a:srgbClr val="205342"/>
+                </a:solidFill>
+              </a:defRPr>
+            </a:defPPr>
+          </a:lstStyle>
+          <a:p xmlns:a="http://schemas.openxmlformats.org/drawingml/2006/main">
+            <a:pPr>
+              <a:defRPr sz="1950" b="1">
+                <a:solidFill>
+                  <a:srgbClr val="205342"/>
+                </a:solidFill>
+              </a:defRPr>
+            </a:pPr>
+            <a:r>
+              <a:rPr sz="1950" b="1">
+                <a:solidFill>
+                  <a:srgbClr val="205342"/>
+                </a:solidFill>
+              </a:rPr>
+              <a:t>02</a:t>
+            </a:r>
+          </a:p>
+        </p:txBody>
+      </p:sp>
+      <p:sp>
+        <p:nvSpPr>
+          <p:cNvPr id="9" name="">
+            <a:extLst xmlns:a="http://schemas.openxmlformats.org/drawingml/2006/main">
+              <a:ext uri="{FF2B5EF4-FFF2-40B4-BE49-F238E27FC236}">
+                <a16:creationId xmlns:a16="http://schemas.microsoft.com/office/drawing/2014/main" id="{15FA9452-A197-4299-937B-075629E0782E}"/>
+              </a:ext>
+            </a:extLst>
+          </p:cNvPr>
+          <p:cNvSpPr>
+            <a:spLocks xmlns:a="http://schemas.openxmlformats.org/drawingml/2006/main" noGrp="1"/>
+          </p:cNvSpPr>
+          <p:nvPr/>
+        </p:nvSpPr>
+        <p:spPr>
+          <a:xfrm xmlns:a="http://schemas.openxmlformats.org/drawingml/2006/main">
+            <a:off x="3505200" y="3057525"/>
+            <a:ext cx="2152650" cy="28575"/>
+          </a:xfrm>
+          <a:prstGeom xmlns:a="http://schemas.openxmlformats.org/drawingml/2006/main" prst="rect">
+            <a:avLst/>
+          </a:prstGeom>
           <a:solidFill xmlns:a="http://schemas.openxmlformats.org/drawingml/2006/main">
-            <a:srgbClr val="DCE9E3"/>
+            <a:srgbClr val="CEFF75"/>
           </a:solidFill>
           <a:ln xmlns:a="http://schemas.openxmlformats.org/drawingml/2006/main" w="0">
             <a:noFill/>
@@ -7366,10 +5782,10 @@
       </p:sp>
       <p:sp>
         <p:nvSpPr>
-          <p:cNvPr id="6" name="">
+          <p:cNvPr id="10" name="">
             <a:extLst xmlns:a="http://schemas.openxmlformats.org/drawingml/2006/main">
               <a:ext uri="{FF2B5EF4-FFF2-40B4-BE49-F238E27FC236}">
-                <a16:creationId xmlns:a16="http://schemas.microsoft.com/office/drawing/2014/main" id="{37401488-9F6E-4298-AC8C-E07129EC4456}"/>
+                <a16:creationId xmlns:a16="http://schemas.microsoft.com/office/drawing/2014/main" id="{C090196B-4EB2-4F72-B24F-BC41B5E26C11}"/>
               </a:ext>
             </a:extLst>
           </p:cNvPr>
@@ -7380,8 +5796,8 @@
         </p:nvSpPr>
         <p:spPr>
           <a:xfrm xmlns:a="http://schemas.openxmlformats.org/drawingml/2006/main">
-            <a:off x="685800" y="3048000"/>
-            <a:ext cx="2190750" cy="666750"/>
+            <a:off x="3505200" y="3438525"/>
+            <a:ext cx="2286000" cy="619125"/>
           </a:xfrm>
           <a:prstGeom xmlns:a="http://schemas.openxmlformats.org/drawingml/2006/main" prst="rect">
             <a:avLst/>
@@ -7393,41 +5809,41 @@
           </a:ln>
         </p:spPr>
         <p:txBody>
-          <a:bodyPr xmlns:a="http://schemas.openxmlformats.org/drawingml/2006/main" anchor="t"/>
+          <a:bodyPr xmlns:a="http://schemas.openxmlformats.org/drawingml/2006/main" anchor="ctr"/>
           <a:lstStyle xmlns:a="http://schemas.openxmlformats.org/drawingml/2006/main">
             <a:defPPr>
-              <a:defRPr sz="3375" b="1">
-                <a:solidFill>
-                  <a:srgbClr val="0D4D40"/>
+              <a:defRPr sz="3000" b="1">
+                <a:solidFill>
+                  <a:srgbClr val="092C26"/>
                 </a:solidFill>
               </a:defRPr>
             </a:defPPr>
           </a:lstStyle>
           <a:p xmlns:a="http://schemas.openxmlformats.org/drawingml/2006/main">
             <a:pPr>
-              <a:defRPr sz="3375" b="1">
-                <a:solidFill>
-                  <a:srgbClr val="0D4D40"/>
+              <a:defRPr sz="3000" b="1">
+                <a:solidFill>
+                  <a:srgbClr val="092C26"/>
                 </a:solidFill>
               </a:defRPr>
             </a:pPr>
             <a:r>
-              <a:rPr sz="3375" b="1">
-                <a:solidFill>
-                  <a:srgbClr val="0D4D40"/>
+              <a:rPr sz="3000" b="1">
+                <a:solidFill>
+                  <a:srgbClr val="092C26"/>
                 </a:solidFill>
               </a:rPr>
-              <a:t>PASS</a:t>
-            </a:r>
-          </a:p>
-        </p:txBody>
-      </p:sp>
-      <p:sp>
-        <p:nvSpPr>
-          <p:cNvPr id="7" name="">
+              <a:t>Remember</a:t>
+            </a:r>
+          </a:p>
+        </p:txBody>
+      </p:sp>
+      <p:sp>
+        <p:nvSpPr>
+          <p:cNvPr id="11" name="">
             <a:extLst xmlns:a="http://schemas.openxmlformats.org/drawingml/2006/main">
               <a:ext uri="{FF2B5EF4-FFF2-40B4-BE49-F238E27FC236}">
-                <a16:creationId xmlns:a16="http://schemas.microsoft.com/office/drawing/2014/main" id="{A54E4090-E21E-418A-B1C7-A01FD73FF3E8}"/>
+                <a16:creationId xmlns:a16="http://schemas.microsoft.com/office/drawing/2014/main" id="{E0253537-A5F6-462C-AD78-9ABEA7A97830}"/>
               </a:ext>
             </a:extLst>
           </p:cNvPr>
@@ -7438,8 +5854,8 @@
         </p:nvSpPr>
         <p:spPr>
           <a:xfrm xmlns:a="http://schemas.openxmlformats.org/drawingml/2006/main">
-            <a:off x="3067050" y="3162300"/>
-            <a:ext cx="6191250" cy="457200"/>
+            <a:off x="3505200" y="4343400"/>
+            <a:ext cx="2333625" cy="409575"/>
           </a:xfrm>
           <a:prstGeom xmlns:a="http://schemas.openxmlformats.org/drawingml/2006/main" prst="rect">
             <a:avLst/>
@@ -7451,41 +5867,41 @@
           </a:ln>
         </p:spPr>
         <p:txBody>
-          <a:bodyPr xmlns:a="http://schemas.openxmlformats.org/drawingml/2006/main" anchor="t"/>
+          <a:bodyPr xmlns:a="http://schemas.openxmlformats.org/drawingml/2006/main" anchor="ctr"/>
           <a:lstStyle xmlns:a="http://schemas.openxmlformats.org/drawingml/2006/main">
             <a:defPPr>
-              <a:defRPr sz="1875" b="1">
-                <a:solidFill>
-                  <a:srgbClr val="082B26"/>
+              <a:defRPr sz="1725" b="1">
+                <a:solidFill>
+                  <a:srgbClr val="205342"/>
                 </a:solidFill>
               </a:defRPr>
             </a:defPPr>
           </a:lstStyle>
           <a:p xmlns:a="http://schemas.openxmlformats.org/drawingml/2006/main">
             <a:pPr>
-              <a:defRPr sz="1875" b="1">
-                <a:solidFill>
-                  <a:srgbClr val="082B26"/>
+              <a:defRPr sz="1725" b="1">
+                <a:solidFill>
+                  <a:srgbClr val="205342"/>
                 </a:solidFill>
               </a:defRPr>
             </a:pPr>
             <a:r>
-              <a:rPr sz="1875" b="1">
-                <a:solidFill>
-                  <a:srgbClr val="082B26"/>
+              <a:rPr sz="1725" b="1">
+                <a:solidFill>
+                  <a:srgbClr val="205342"/>
                 </a:solidFill>
               </a:rPr>
-              <a:t>Tiger Cloud verification</a:t>
-            </a:r>
-          </a:p>
-        </p:txBody>
-      </p:sp>
-      <p:sp>
-        <p:nvSpPr>
-          <p:cNvPr id="8" name="">
+              <a:t>Tiger Data</a:t>
+            </a:r>
+          </a:p>
+        </p:txBody>
+      </p:sp>
+      <p:sp>
+        <p:nvSpPr>
+          <p:cNvPr id="12" name="">
             <a:extLst xmlns:a="http://schemas.openxmlformats.org/drawingml/2006/main">
               <a:ext uri="{FF2B5EF4-FFF2-40B4-BE49-F238E27FC236}">
-                <a16:creationId xmlns:a16="http://schemas.microsoft.com/office/drawing/2014/main" id="{2EBCD426-F25E-4472-BC64-8C948CECE9C1}"/>
+                <a16:creationId xmlns:a16="http://schemas.microsoft.com/office/drawing/2014/main" id="{A2133FD7-9ED3-4BB6-91CE-2AFB92A7EA6F}"/>
               </a:ext>
             </a:extLst>
           </p:cNvPr>
@@ -7496,14 +5912,130 @@
         </p:nvSpPr>
         <p:spPr>
           <a:xfrm xmlns:a="http://schemas.openxmlformats.org/drawingml/2006/main">
-            <a:off x="685800" y="3943350"/>
-            <a:ext cx="10001250" cy="19050"/>
+            <a:off x="3505200" y="4857750"/>
+            <a:ext cx="2333625" cy="895350"/>
           </a:xfrm>
           <a:prstGeom xmlns:a="http://schemas.openxmlformats.org/drawingml/2006/main" prst="rect">
             <a:avLst/>
           </a:prstGeom>
+          <a:noFill xmlns:a="http://schemas.openxmlformats.org/drawingml/2006/main"/>
+          <a:ln xmlns:a="http://schemas.openxmlformats.org/drawingml/2006/main" w="0">
+            <a:noFill/>
+            <a:prstDash val="solid"/>
+          </a:ln>
+        </p:spPr>
+        <p:txBody>
+          <a:bodyPr xmlns:a="http://schemas.openxmlformats.org/drawingml/2006/main" anchor="ctr"/>
+          <a:lstStyle xmlns:a="http://schemas.openxmlformats.org/drawingml/2006/main">
+            <a:defPPr>
+              <a:defRPr sz="1575" b="0">
+                <a:solidFill>
+                  <a:srgbClr val="5B7169"/>
+                </a:solidFill>
+              </a:defRPr>
+            </a:defPPr>
+          </a:lstStyle>
+          <a:p xmlns:a="http://schemas.openxmlformats.org/drawingml/2006/main">
+            <a:pPr>
+              <a:defRPr sz="1575" b="0">
+                <a:solidFill>
+                  <a:srgbClr val="5B7169"/>
+                </a:solidFill>
+              </a:defRPr>
+            </a:pPr>
+            <a:r>
+              <a:rPr sz="1575" b="0">
+                <a:solidFill>
+                  <a:srgbClr val="5B7169"/>
+                </a:solidFill>
+              </a:rPr>
+              <a:t>Worker history over time</a:t>
+            </a:r>
+          </a:p>
+        </p:txBody>
+      </p:sp>
+      <p:sp>
+        <p:nvSpPr>
+          <p:cNvPr id="13" name="">
+            <a:extLst xmlns:a="http://schemas.openxmlformats.org/drawingml/2006/main">
+              <a:ext uri="{FF2B5EF4-FFF2-40B4-BE49-F238E27FC236}">
+                <a16:creationId xmlns:a16="http://schemas.microsoft.com/office/drawing/2014/main" id="{AFE29367-6A4B-4F66-9DEA-67FCC486B0BC}"/>
+              </a:ext>
+            </a:extLst>
+          </p:cNvPr>
+          <p:cNvSpPr>
+            <a:spLocks xmlns:a="http://schemas.openxmlformats.org/drawingml/2006/main" noGrp="1"/>
+          </p:cNvSpPr>
+          <p:nvPr/>
+        </p:nvSpPr>
+        <p:spPr>
+          <a:xfrm xmlns:a="http://schemas.openxmlformats.org/drawingml/2006/main">
+            <a:off x="6305550" y="2428875"/>
+            <a:ext cx="2095500" cy="419100"/>
+          </a:xfrm>
+          <a:prstGeom xmlns:a="http://schemas.openxmlformats.org/drawingml/2006/main" prst="rect">
+            <a:avLst/>
+          </a:prstGeom>
+          <a:noFill xmlns:a="http://schemas.openxmlformats.org/drawingml/2006/main"/>
+          <a:ln xmlns:a="http://schemas.openxmlformats.org/drawingml/2006/main" w="0">
+            <a:noFill/>
+            <a:prstDash val="solid"/>
+          </a:ln>
+        </p:spPr>
+        <p:txBody>
+          <a:bodyPr xmlns:a="http://schemas.openxmlformats.org/drawingml/2006/main" anchor="ctr"/>
+          <a:lstStyle xmlns:a="http://schemas.openxmlformats.org/drawingml/2006/main">
+            <a:defPPr>
+              <a:defRPr sz="1950" b="1">
+                <a:solidFill>
+                  <a:srgbClr val="205342"/>
+                </a:solidFill>
+              </a:defRPr>
+            </a:defPPr>
+          </a:lstStyle>
+          <a:p xmlns:a="http://schemas.openxmlformats.org/drawingml/2006/main">
+            <a:pPr>
+              <a:defRPr sz="1950" b="1">
+                <a:solidFill>
+                  <a:srgbClr val="205342"/>
+                </a:solidFill>
+              </a:defRPr>
+            </a:pPr>
+            <a:r>
+              <a:rPr sz="1950" b="1">
+                <a:solidFill>
+                  <a:srgbClr val="205342"/>
+                </a:solidFill>
+              </a:rPr>
+              <a:t>03</a:t>
+            </a:r>
+          </a:p>
+        </p:txBody>
+      </p:sp>
+      <p:sp>
+        <p:nvSpPr>
+          <p:cNvPr id="14" name="">
+            <a:extLst xmlns:a="http://schemas.openxmlformats.org/drawingml/2006/main">
+              <a:ext uri="{FF2B5EF4-FFF2-40B4-BE49-F238E27FC236}">
+                <a16:creationId xmlns:a16="http://schemas.microsoft.com/office/drawing/2014/main" id="{95D09078-7EA9-4038-8BD8-CE089183B882}"/>
+              </a:ext>
+            </a:extLst>
+          </p:cNvPr>
+          <p:cNvSpPr>
+            <a:spLocks xmlns:a="http://schemas.openxmlformats.org/drawingml/2006/main" noGrp="1"/>
+          </p:cNvSpPr>
+          <p:nvPr/>
+        </p:nvSpPr>
+        <p:spPr>
+          <a:xfrm xmlns:a="http://schemas.openxmlformats.org/drawingml/2006/main">
+            <a:off x="6305550" y="3057525"/>
+            <a:ext cx="2152650" cy="28575"/>
+          </a:xfrm>
+          <a:prstGeom xmlns:a="http://schemas.openxmlformats.org/drawingml/2006/main" prst="rect">
+            <a:avLst/>
+          </a:prstGeom>
           <a:solidFill xmlns:a="http://schemas.openxmlformats.org/drawingml/2006/main">
-            <a:srgbClr val="DCE9E3"/>
+            <a:srgbClr val="CEFF75"/>
           </a:solidFill>
           <a:ln xmlns:a="http://schemas.openxmlformats.org/drawingml/2006/main" w="0">
             <a:noFill/>
@@ -7513,10 +6045,10 @@
       </p:sp>
       <p:sp>
         <p:nvSpPr>
-          <p:cNvPr id="9" name="">
+          <p:cNvPr id="15" name="">
             <a:extLst xmlns:a="http://schemas.openxmlformats.org/drawingml/2006/main">
               <a:ext uri="{FF2B5EF4-FFF2-40B4-BE49-F238E27FC236}">
-                <a16:creationId xmlns:a16="http://schemas.microsoft.com/office/drawing/2014/main" id="{B2B44AAF-4145-4998-984D-E1D9DC2CEA70}"/>
+                <a16:creationId xmlns:a16="http://schemas.microsoft.com/office/drawing/2014/main" id="{CF8BF6D5-1D16-49AF-B3A0-DD3237DB1591}"/>
               </a:ext>
             </a:extLst>
           </p:cNvPr>
@@ -7527,8 +6059,8 @@
         </p:nvSpPr>
         <p:spPr>
           <a:xfrm xmlns:a="http://schemas.openxmlformats.org/drawingml/2006/main">
-            <a:off x="685800" y="4305300"/>
-            <a:ext cx="2190750" cy="666750"/>
+            <a:off x="6305550" y="3438525"/>
+            <a:ext cx="2286000" cy="619125"/>
           </a:xfrm>
           <a:prstGeom xmlns:a="http://schemas.openxmlformats.org/drawingml/2006/main" prst="rect">
             <a:avLst/>
@@ -7540,41 +6072,41 @@
           </a:ln>
         </p:spPr>
         <p:txBody>
-          <a:bodyPr xmlns:a="http://schemas.openxmlformats.org/drawingml/2006/main" anchor="t"/>
+          <a:bodyPr xmlns:a="http://schemas.openxmlformats.org/drawingml/2006/main" anchor="ctr"/>
           <a:lstStyle xmlns:a="http://schemas.openxmlformats.org/drawingml/2006/main">
             <a:defPPr>
-              <a:defRPr sz="3375" b="1">
-                <a:solidFill>
-                  <a:srgbClr val="082B26"/>
+              <a:defRPr sz="3000" b="1">
+                <a:solidFill>
+                  <a:srgbClr val="092C26"/>
                 </a:solidFill>
               </a:defRPr>
             </a:defPPr>
           </a:lstStyle>
           <a:p xmlns:a="http://schemas.openxmlformats.org/drawingml/2006/main">
             <a:pPr>
-              <a:defRPr sz="3375" b="1">
-                <a:solidFill>
-                  <a:srgbClr val="082B26"/>
+              <a:defRPr sz="3000" b="1">
+                <a:solidFill>
+                  <a:srgbClr val="092C26"/>
                 </a:solidFill>
               </a:defRPr>
             </a:pPr>
             <a:r>
-              <a:rPr sz="3375" b="1">
-                <a:solidFill>
-                  <a:srgbClr val="082B26"/>
+              <a:rPr sz="3000" b="1">
+                <a:solidFill>
+                  <a:srgbClr val="092C26"/>
                 </a:solidFill>
               </a:rPr>
-              <a:t>36</a:t>
-            </a:r>
-          </a:p>
-        </p:txBody>
-      </p:sp>
-      <p:sp>
-        <p:nvSpPr>
-          <p:cNvPr id="10" name="">
+              <a:t>Explain</a:t>
+            </a:r>
+          </a:p>
+        </p:txBody>
+      </p:sp>
+      <p:sp>
+        <p:nvSpPr>
+          <p:cNvPr id="16" name="">
             <a:extLst xmlns:a="http://schemas.openxmlformats.org/drawingml/2006/main">
               <a:ext uri="{FF2B5EF4-FFF2-40B4-BE49-F238E27FC236}">
-                <a16:creationId xmlns:a16="http://schemas.microsoft.com/office/drawing/2014/main" id="{C4039958-5373-42BB-A66D-C84B08F1F818}"/>
+                <a16:creationId xmlns:a16="http://schemas.microsoft.com/office/drawing/2014/main" id="{20B87E67-C608-4584-AEF5-B700A7C4D3AC}"/>
               </a:ext>
             </a:extLst>
           </p:cNvPr>
@@ -7585,8 +6117,8 @@
         </p:nvSpPr>
         <p:spPr>
           <a:xfrm xmlns:a="http://schemas.openxmlformats.org/drawingml/2006/main">
-            <a:off x="3067050" y="4419600"/>
-            <a:ext cx="6191250" cy="457200"/>
+            <a:off x="6305550" y="4343400"/>
+            <a:ext cx="2333625" cy="409575"/>
           </a:xfrm>
           <a:prstGeom xmlns:a="http://schemas.openxmlformats.org/drawingml/2006/main" prst="rect">
             <a:avLst/>
@@ -7598,41 +6130,41 @@
           </a:ln>
         </p:spPr>
         <p:txBody>
-          <a:bodyPr xmlns:a="http://schemas.openxmlformats.org/drawingml/2006/main" anchor="t"/>
+          <a:bodyPr xmlns:a="http://schemas.openxmlformats.org/drawingml/2006/main" anchor="ctr"/>
           <a:lstStyle xmlns:a="http://schemas.openxmlformats.org/drawingml/2006/main">
             <a:defPPr>
-              <a:defRPr sz="1875" b="1">
-                <a:solidFill>
-                  <a:srgbClr val="082B26"/>
+              <a:defRPr sz="1725" b="1">
+                <a:solidFill>
+                  <a:srgbClr val="205342"/>
                 </a:solidFill>
               </a:defRPr>
             </a:defPPr>
           </a:lstStyle>
           <a:p xmlns:a="http://schemas.openxmlformats.org/drawingml/2006/main">
             <a:pPr>
-              <a:defRPr sz="1875" b="1">
-                <a:solidFill>
-                  <a:srgbClr val="082B26"/>
+              <a:defRPr sz="1725" b="1">
+                <a:solidFill>
+                  <a:srgbClr val="205342"/>
                 </a:solidFill>
               </a:defRPr>
             </a:pPr>
             <a:r>
-              <a:rPr sz="1875" b="1">
-                <a:solidFill>
-                  <a:srgbClr val="082B26"/>
+              <a:rPr sz="1725" b="1">
+                <a:solidFill>
+                  <a:srgbClr val="205342"/>
                 </a:solidFill>
               </a:rPr>
-              <a:t>Fall prototype tests passed</a:t>
-            </a:r>
-          </a:p>
-        </p:txBody>
-      </p:sp>
-      <p:sp>
-        <p:nvSpPr>
-          <p:cNvPr id="11" name="">
+              <a:t>Gemini</a:t>
+            </a:r>
+          </a:p>
+        </p:txBody>
+      </p:sp>
+      <p:sp>
+        <p:nvSpPr>
+          <p:cNvPr id="17" name="">
             <a:extLst xmlns:a="http://schemas.openxmlformats.org/drawingml/2006/main">
               <a:ext uri="{FF2B5EF4-FFF2-40B4-BE49-F238E27FC236}">
-                <a16:creationId xmlns:a16="http://schemas.microsoft.com/office/drawing/2014/main" id="{03B86AE5-F460-4AE9-88BA-45FA1DF10BDD}"/>
+                <a16:creationId xmlns:a16="http://schemas.microsoft.com/office/drawing/2014/main" id="{7637ED97-FB24-4F72-A048-04986F7E1C10}"/>
               </a:ext>
             </a:extLst>
           </p:cNvPr>
@@ -7643,14 +6175,130 @@
         </p:nvSpPr>
         <p:spPr>
           <a:xfrm xmlns:a="http://schemas.openxmlformats.org/drawingml/2006/main">
-            <a:off x="685800" y="5200650"/>
-            <a:ext cx="10001250" cy="19050"/>
+            <a:off x="6305550" y="4857750"/>
+            <a:ext cx="2333625" cy="895350"/>
           </a:xfrm>
           <a:prstGeom xmlns:a="http://schemas.openxmlformats.org/drawingml/2006/main" prst="rect">
             <a:avLst/>
           </a:prstGeom>
+          <a:noFill xmlns:a="http://schemas.openxmlformats.org/drawingml/2006/main"/>
+          <a:ln xmlns:a="http://schemas.openxmlformats.org/drawingml/2006/main" w="0">
+            <a:noFill/>
+            <a:prstDash val="solid"/>
+          </a:ln>
+        </p:spPr>
+        <p:txBody>
+          <a:bodyPr xmlns:a="http://schemas.openxmlformats.org/drawingml/2006/main" anchor="ctr"/>
+          <a:lstStyle xmlns:a="http://schemas.openxmlformats.org/drawingml/2006/main">
+            <a:defPPr>
+              <a:defRPr sz="1575" b="0">
+                <a:solidFill>
+                  <a:srgbClr val="5B7169"/>
+                </a:solidFill>
+              </a:defRPr>
+            </a:defPPr>
+          </a:lstStyle>
+          <a:p xmlns:a="http://schemas.openxmlformats.org/drawingml/2006/main">
+            <a:pPr>
+              <a:defRPr sz="1575" b="0">
+                <a:solidFill>
+                  <a:srgbClr val="5B7169"/>
+                </a:solidFill>
+              </a:defRPr>
+            </a:pPr>
+            <a:r>
+              <a:rPr sz="1575" b="0">
+                <a:solidFill>
+                  <a:srgbClr val="5B7169"/>
+                </a:solidFill>
+              </a:rPr>
+              <a:t>Approved facts in plain language</a:t>
+            </a:r>
+          </a:p>
+        </p:txBody>
+      </p:sp>
+      <p:sp>
+        <p:nvSpPr>
+          <p:cNvPr id="18" name="">
+            <a:extLst xmlns:a="http://schemas.openxmlformats.org/drawingml/2006/main">
+              <a:ext uri="{FF2B5EF4-FFF2-40B4-BE49-F238E27FC236}">
+                <a16:creationId xmlns:a16="http://schemas.microsoft.com/office/drawing/2014/main" id="{2830AFDA-683A-4E5D-B4D2-8E3BA7464B87}"/>
+              </a:ext>
+            </a:extLst>
+          </p:cNvPr>
+          <p:cNvSpPr>
+            <a:spLocks xmlns:a="http://schemas.openxmlformats.org/drawingml/2006/main" noGrp="1"/>
+          </p:cNvSpPr>
+          <p:nvPr/>
+        </p:nvSpPr>
+        <p:spPr>
+          <a:xfrm xmlns:a="http://schemas.openxmlformats.org/drawingml/2006/main">
+            <a:off x="9105900" y="2428875"/>
+            <a:ext cx="2095500" cy="419100"/>
+          </a:xfrm>
+          <a:prstGeom xmlns:a="http://schemas.openxmlformats.org/drawingml/2006/main" prst="rect">
+            <a:avLst/>
+          </a:prstGeom>
+          <a:noFill xmlns:a="http://schemas.openxmlformats.org/drawingml/2006/main"/>
+          <a:ln xmlns:a="http://schemas.openxmlformats.org/drawingml/2006/main" w="0">
+            <a:noFill/>
+            <a:prstDash val="solid"/>
+          </a:ln>
+        </p:spPr>
+        <p:txBody>
+          <a:bodyPr xmlns:a="http://schemas.openxmlformats.org/drawingml/2006/main" anchor="ctr"/>
+          <a:lstStyle xmlns:a="http://schemas.openxmlformats.org/drawingml/2006/main">
+            <a:defPPr>
+              <a:defRPr sz="1950" b="1">
+                <a:solidFill>
+                  <a:srgbClr val="205342"/>
+                </a:solidFill>
+              </a:defRPr>
+            </a:defPPr>
+          </a:lstStyle>
+          <a:p xmlns:a="http://schemas.openxmlformats.org/drawingml/2006/main">
+            <a:pPr>
+              <a:defRPr sz="1950" b="1">
+                <a:solidFill>
+                  <a:srgbClr val="205342"/>
+                </a:solidFill>
+              </a:defRPr>
+            </a:pPr>
+            <a:r>
+              <a:rPr sz="1950" b="1">
+                <a:solidFill>
+                  <a:srgbClr val="205342"/>
+                </a:solidFill>
+              </a:rPr>
+              <a:t>04</a:t>
+            </a:r>
+          </a:p>
+        </p:txBody>
+      </p:sp>
+      <p:sp>
+        <p:nvSpPr>
+          <p:cNvPr id="19" name="">
+            <a:extLst xmlns:a="http://schemas.openxmlformats.org/drawingml/2006/main">
+              <a:ext uri="{FF2B5EF4-FFF2-40B4-BE49-F238E27FC236}">
+                <a16:creationId xmlns:a16="http://schemas.microsoft.com/office/drawing/2014/main" id="{2B5E5106-FF92-495A-ADE8-AEDBC60CAB42}"/>
+              </a:ext>
+            </a:extLst>
+          </p:cNvPr>
+          <p:cNvSpPr>
+            <a:spLocks xmlns:a="http://schemas.openxmlformats.org/drawingml/2006/main" noGrp="1"/>
+          </p:cNvSpPr>
+          <p:nvPr/>
+        </p:nvSpPr>
+        <p:spPr>
+          <a:xfrm xmlns:a="http://schemas.openxmlformats.org/drawingml/2006/main">
+            <a:off x="9105900" y="3057525"/>
+            <a:ext cx="2152650" cy="28575"/>
+          </a:xfrm>
+          <a:prstGeom xmlns:a="http://schemas.openxmlformats.org/drawingml/2006/main" prst="rect">
+            <a:avLst/>
+          </a:prstGeom>
           <a:solidFill xmlns:a="http://schemas.openxmlformats.org/drawingml/2006/main">
-            <a:srgbClr val="DCE9E3"/>
+            <a:srgbClr val="CEFF75"/>
           </a:solidFill>
           <a:ln xmlns:a="http://schemas.openxmlformats.org/drawingml/2006/main" w="0">
             <a:noFill/>
@@ -7660,10 +6308,10 @@
       </p:sp>
       <p:sp>
         <p:nvSpPr>
-          <p:cNvPr id="12" name="">
+          <p:cNvPr id="20" name="">
             <a:extLst xmlns:a="http://schemas.openxmlformats.org/drawingml/2006/main">
               <a:ext uri="{FF2B5EF4-FFF2-40B4-BE49-F238E27FC236}">
-                <a16:creationId xmlns:a16="http://schemas.microsoft.com/office/drawing/2014/main" id="{F2BA0D17-6959-40D4-B915-7BEDF88577CF}"/>
+                <a16:creationId xmlns:a16="http://schemas.microsoft.com/office/drawing/2014/main" id="{72B750BE-F1DE-4F5D-B4FE-54EBEEEED107}"/>
               </a:ext>
             </a:extLst>
           </p:cNvPr>
@@ -7674,41 +6322,8 @@
         </p:nvSpPr>
         <p:spPr>
           <a:xfrm xmlns:a="http://schemas.openxmlformats.org/drawingml/2006/main">
-            <a:off x="9144000" y="1524000"/>
-            <a:ext cx="2381250" cy="3848100"/>
-          </a:xfrm>
-          <a:prstGeom xmlns:a="http://schemas.openxmlformats.org/drawingml/2006/main" prst="roundRect">
-            <a:avLst>
-              <a:gd name="adj" fmla="val 11200"/>
-            </a:avLst>
-          </a:prstGeom>
-          <a:solidFill xmlns:a="http://schemas.openxmlformats.org/drawingml/2006/main">
-            <a:srgbClr val="082B26"/>
-          </a:solidFill>
-          <a:ln xmlns:a="http://schemas.openxmlformats.org/drawingml/2006/main" w="0">
-            <a:noFill/>
-            <a:prstDash val="solid"/>
-          </a:ln>
-        </p:spPr>
-      </p:sp>
-      <p:sp>
-        <p:nvSpPr>
-          <p:cNvPr id="13" name="">
-            <a:extLst xmlns:a="http://schemas.openxmlformats.org/drawingml/2006/main">
-              <a:ext uri="{FF2B5EF4-FFF2-40B4-BE49-F238E27FC236}">
-                <a16:creationId xmlns:a16="http://schemas.microsoft.com/office/drawing/2014/main" id="{8EA885A6-A047-45D3-8FEE-5AF79FF5DE7A}"/>
-              </a:ext>
-            </a:extLst>
-          </p:cNvPr>
-          <p:cNvSpPr>
-            <a:spLocks xmlns:a="http://schemas.openxmlformats.org/drawingml/2006/main" noGrp="1"/>
-          </p:cNvSpPr>
-          <p:nvPr/>
-        </p:nvSpPr>
-        <p:spPr>
-          <a:xfrm xmlns:a="http://schemas.openxmlformats.org/drawingml/2006/main">
-            <a:off x="9505950" y="1924050"/>
-            <a:ext cx="1657350" cy="266700"/>
+            <a:off x="9105900" y="3438525"/>
+            <a:ext cx="2286000" cy="619125"/>
           </a:xfrm>
           <a:prstGeom xmlns:a="http://schemas.openxmlformats.org/drawingml/2006/main" prst="rect">
             <a:avLst/>
@@ -7720,41 +6335,41 @@
           </a:ln>
         </p:spPr>
         <p:txBody>
-          <a:bodyPr xmlns:a="http://schemas.openxmlformats.org/drawingml/2006/main" anchor="t"/>
+          <a:bodyPr xmlns:a="http://schemas.openxmlformats.org/drawingml/2006/main" anchor="ctr"/>
           <a:lstStyle xmlns:a="http://schemas.openxmlformats.org/drawingml/2006/main">
             <a:defPPr>
-              <a:defRPr sz="1050" b="1">
-                <a:solidFill>
-                  <a:srgbClr val="C8FF63"/>
+              <a:defRPr sz="3000" b="1">
+                <a:solidFill>
+                  <a:srgbClr val="092C26"/>
                 </a:solidFill>
               </a:defRPr>
             </a:defPPr>
           </a:lstStyle>
           <a:p xmlns:a="http://schemas.openxmlformats.org/drawingml/2006/main">
             <a:pPr>
-              <a:defRPr sz="1050" b="1">
-                <a:solidFill>
-                  <a:srgbClr val="C8FF63"/>
+              <a:defRPr sz="3000" b="1">
+                <a:solidFill>
+                  <a:srgbClr val="092C26"/>
                 </a:solidFill>
               </a:defRPr>
             </a:pPr>
             <a:r>
-              <a:rPr sz="1050" b="1">
-                <a:solidFill>
-                  <a:srgbClr val="C8FF63"/>
+              <a:rPr sz="3000" b="1">
+                <a:solidFill>
+                  <a:srgbClr val="092C26"/>
                 </a:solidFill>
               </a:rPr>
-              <a:t>NEXT</a:t>
-            </a:r>
-          </a:p>
-        </p:txBody>
-      </p:sp>
-      <p:sp>
-        <p:nvSpPr>
-          <p:cNvPr id="14" name="">
+              <a:t>Act</a:t>
+            </a:r>
+          </a:p>
+        </p:txBody>
+      </p:sp>
+      <p:sp>
+        <p:nvSpPr>
+          <p:cNvPr id="21" name="">
             <a:extLst xmlns:a="http://schemas.openxmlformats.org/drawingml/2006/main">
               <a:ext uri="{FF2B5EF4-FFF2-40B4-BE49-F238E27FC236}">
-                <a16:creationId xmlns:a16="http://schemas.microsoft.com/office/drawing/2014/main" id="{E593A6D2-A3D8-4D7F-86A5-7A0BA51BE3C0}"/>
+                <a16:creationId xmlns:a16="http://schemas.microsoft.com/office/drawing/2014/main" id="{9DCA3FCE-4CF8-48F2-93DA-B3652C701B0B}"/>
               </a:ext>
             </a:extLst>
           </p:cNvPr>
@@ -7765,8 +6380,8 @@
         </p:nvSpPr>
         <p:spPr>
           <a:xfrm xmlns:a="http://schemas.openxmlformats.org/drawingml/2006/main">
-            <a:off x="9448800" y="2628900"/>
-            <a:ext cx="1771650" cy="2190750"/>
+            <a:off x="9105900" y="4343400"/>
+            <a:ext cx="2333625" cy="409575"/>
           </a:xfrm>
           <a:prstGeom xmlns:a="http://schemas.openxmlformats.org/drawingml/2006/main" prst="rect">
             <a:avLst/>
@@ -7778,75 +6393,89 @@
           </a:ln>
         </p:spPr>
         <p:txBody>
-          <a:bodyPr xmlns:a="http://schemas.openxmlformats.org/drawingml/2006/main" anchor="t"/>
+          <a:bodyPr xmlns:a="http://schemas.openxmlformats.org/drawingml/2006/main" anchor="ctr"/>
           <a:lstStyle xmlns:a="http://schemas.openxmlformats.org/drawingml/2006/main">
             <a:defPPr>
-              <a:defRPr sz="1875" b="1">
-                <a:solidFill>
-                  <a:srgbClr val="FFFFFF"/>
+              <a:defRPr sz="1725" b="1">
+                <a:solidFill>
+                  <a:srgbClr val="205342"/>
                 </a:solidFill>
               </a:defRPr>
             </a:defPPr>
           </a:lstStyle>
           <a:p xmlns:a="http://schemas.openxmlformats.org/drawingml/2006/main">
             <a:pPr>
-              <a:defRPr sz="1875" b="1">
-                <a:solidFill>
-                  <a:srgbClr val="FFFFFF"/>
+              <a:defRPr sz="1725" b="1">
+                <a:solidFill>
+                  <a:srgbClr val="205342"/>
                 </a:solidFill>
               </a:defRPr>
             </a:pPr>
             <a:r>
-              <a:rPr sz="1875" b="1">
-                <a:solidFill>
-                  <a:srgbClr val="FFFFFF"/>
+              <a:rPr sz="1725" b="1">
+                <a:solidFill>
+                  <a:srgbClr val="205342"/>
                 </a:solidFill>
               </a:rPr>
-              <a:t>Reliable mobile capture</a:t>
-            </a:r>
-          </a:p>
-          <a:p xmlns:a="http://schemas.openxmlformats.org/drawingml/2006/main">
-            <a:r>
-              <a:t/>
-            </a:r>
-          </a:p>
+              <a:t>Worker + team</a:t>
+            </a:r>
+          </a:p>
+        </p:txBody>
+      </p:sp>
+      <p:sp>
+        <p:nvSpPr>
+          <p:cNvPr id="22" name="">
+            <a:extLst xmlns:a="http://schemas.openxmlformats.org/drawingml/2006/main">
+              <a:ext uri="{FF2B5EF4-FFF2-40B4-BE49-F238E27FC236}">
+                <a16:creationId xmlns:a16="http://schemas.microsoft.com/office/drawing/2014/main" id="{BC3814B9-17A5-4524-9333-95F5D08A89AF}"/>
+              </a:ext>
+            </a:extLst>
+          </p:cNvPr>
+          <p:cNvSpPr>
+            <a:spLocks xmlns:a="http://schemas.openxmlformats.org/drawingml/2006/main" noGrp="1"/>
+          </p:cNvSpPr>
+          <p:nvPr/>
+        </p:nvSpPr>
+        <p:spPr>
+          <a:xfrm xmlns:a="http://schemas.openxmlformats.org/drawingml/2006/main">
+            <a:off x="9105900" y="4857750"/>
+            <a:ext cx="2333625" cy="895350"/>
+          </a:xfrm>
+          <a:prstGeom xmlns:a="http://schemas.openxmlformats.org/drawingml/2006/main" prst="rect">
+            <a:avLst/>
+          </a:prstGeom>
+          <a:noFill xmlns:a="http://schemas.openxmlformats.org/drawingml/2006/main"/>
+          <a:ln xmlns:a="http://schemas.openxmlformats.org/drawingml/2006/main" w="0">
+            <a:noFill/>
+            <a:prstDash val="solid"/>
+          </a:ln>
+        </p:spPr>
+        <p:txBody>
+          <a:bodyPr xmlns:a="http://schemas.openxmlformats.org/drawingml/2006/main" anchor="ctr"/>
+          <a:lstStyle xmlns:a="http://schemas.openxmlformats.org/drawingml/2006/main">
+            <a:defPPr>
+              <a:defRPr sz="1575" b="0">
+                <a:solidFill>
+                  <a:srgbClr val="5B7169"/>
+                </a:solidFill>
+              </a:defRPr>
+            </a:defPPr>
+          </a:lstStyle>
           <a:p xmlns:a="http://schemas.openxmlformats.org/drawingml/2006/main">
             <a:pPr>
-              <a:defRPr sz="1875" b="1">
-                <a:solidFill>
-                  <a:srgbClr val="FFFFFF"/>
+              <a:defRPr sz="1575" b="0">
+                <a:solidFill>
+                  <a:srgbClr val="5B7169"/>
                 </a:solidFill>
               </a:defRPr>
             </a:pPr>
             <a:r>
-              <a:rPr sz="1875" b="1">
-                <a:solidFill>
-                  <a:srgbClr val="FFFFFF"/>
+              <a:rPr sz="1575" b="0">
+                <a:solidFill>
+                  <a:srgbClr val="5B7169"/>
                 </a:solidFill>
               </a:rPr>
-              <a:t>Labeled-data evaluation</a:t>
-            </a:r>
-          </a:p>
-          <a:p xmlns:a="http://schemas.openxmlformats.org/drawingml/2006/main">
-            <a:r>
-              <a:t/>
-            </a:r>
-          </a:p>
-          <a:p xmlns:a="http://schemas.openxmlformats.org/drawingml/2006/main">
-            <a:pPr>
-              <a:defRPr sz="1875" b="1">
-                <a:solidFill>
-                  <a:srgbClr val="FFFFFF"/>
-                </a:solidFill>
-              </a:defRPr>
-            </a:pPr>
-            <a:r>
-              <a:rPr sz="1875" b="1">
-                <a:solidFill>
-                  <a:srgbClr val="FFFFFF"/>
-                </a:solidFill>
-              </a:rPr>
-              <a:t>On-site pilot</a:t>
+              <a:t>Request, review, coverage</a:t>
             </a:r>
           </a:p>
         </p:txBody>
@@ -7854,7 +6483,7 @@
     </p:spTree>
     <p:extLst>
       <p:ext uri="{BB962C8B-B14F-4D97-AF65-F5344CB8AC3E}">
-        <p14:creationId xmlns:p14="http://schemas.microsoft.com/office/powerpoint/2010/main" val="531954408"/>
+        <p14:creationId xmlns:p14="http://schemas.microsoft.com/office/powerpoint/2010/main" val="721414823"/>
       </p:ext>
     </p:extLst>
   </p:cSld>
@@ -7867,7 +6496,7 @@
     <p:bg>
       <p:bgPr>
         <a:solidFill xmlns:a="http://schemas.openxmlformats.org/drawingml/2006/main">
-          <a:srgbClr val="082B26"/>
+          <a:srgbClr val="092C26"/>
         </a:solidFill>
       </p:bgPr>
     </p:bg>
@@ -7882,10 +6511,10 @@
       </p:grpSpPr>
       <p:sp>
         <p:nvSpPr>
-          <p:cNvPr id="7" name="">
+          <p:cNvPr id="6" name="">
             <a:extLst xmlns:a="http://schemas.openxmlformats.org/drawingml/2006/main">
               <a:ext uri="{FF2B5EF4-FFF2-40B4-BE49-F238E27FC236}">
-                <a16:creationId xmlns:a16="http://schemas.microsoft.com/office/drawing/2014/main" id="{CD99421D-571A-49A3-A691-B531F71B1C81}"/>
+                <a16:creationId xmlns:a16="http://schemas.microsoft.com/office/drawing/2014/main" id="{85FA4869-C508-49C8-B29D-E0977E13F299}"/>
               </a:ext>
             </a:extLst>
           </p:cNvPr>
@@ -7896,16 +6525,147 @@
         </p:nvSpPr>
         <p:spPr>
           <a:xfrm xmlns:a="http://schemas.openxmlformats.org/drawingml/2006/main">
-            <a:off x="4743450" y="495300"/>
-            <a:ext cx="2705100" cy="1009650"/>
+            <a:off x="685800" y="609600"/>
+            <a:ext cx="5715000" cy="666750"/>
           </a:xfrm>
-          <a:prstGeom xmlns:a="http://schemas.openxmlformats.org/drawingml/2006/main" prst="roundRect">
-            <a:avLst>
-              <a:gd name="adj" fmla="val 20755"/>
-            </a:avLst>
+          <a:prstGeom xmlns:a="http://schemas.openxmlformats.org/drawingml/2006/main" prst="rect">
+            <a:avLst/>
+          </a:prstGeom>
+          <a:noFill xmlns:a="http://schemas.openxmlformats.org/drawingml/2006/main"/>
+          <a:ln xmlns:a="http://schemas.openxmlformats.org/drawingml/2006/main" w="0">
+            <a:noFill/>
+            <a:prstDash val="solid"/>
+          </a:ln>
+        </p:spPr>
+        <p:txBody>
+          <a:bodyPr xmlns:a="http://schemas.openxmlformats.org/drawingml/2006/main" anchor="ctr"/>
+          <a:lstStyle xmlns:a="http://schemas.openxmlformats.org/drawingml/2006/main">
+            <a:defPPr>
+              <a:defRPr sz="3525" b="1">
+                <a:solidFill>
+                  <a:srgbClr val="CEFF75"/>
+                </a:solidFill>
+              </a:defRPr>
+            </a:defPPr>
+          </a:lstStyle>
+          <a:p xmlns:a="http://schemas.openxmlformats.org/drawingml/2006/main">
+            <a:pPr>
+              <a:defRPr sz="3525" b="1">
+                <a:solidFill>
+                  <a:srgbClr val="CEFF75"/>
+                </a:solidFill>
+              </a:defRPr>
+            </a:pPr>
+            <a:r>
+              <a:rPr sz="3525" b="1">
+                <a:solidFill>
+                  <a:srgbClr val="CEFF75"/>
+                </a:solidFill>
+              </a:rPr>
+              <a:t>SiteGuard</a:t>
+            </a:r>
+          </a:p>
+        </p:txBody>
+      </p:sp>
+      <p:sp>
+        <p:nvSpPr>
+          <p:cNvPr id="2" name="">
+            <a:extLst xmlns:a="http://schemas.openxmlformats.org/drawingml/2006/main">
+              <a:ext uri="{FF2B5EF4-FFF2-40B4-BE49-F238E27FC236}">
+                <a16:creationId xmlns:a16="http://schemas.microsoft.com/office/drawing/2014/main" id="{0C076FC5-7050-4714-A15B-D4C44701A827}"/>
+              </a:ext>
+            </a:extLst>
+          </p:cNvPr>
+          <p:cNvSpPr>
+            <a:spLocks xmlns:a="http://schemas.openxmlformats.org/drawingml/2006/main" noGrp="1"/>
+          </p:cNvSpPr>
+          <p:nvPr/>
+        </p:nvSpPr>
+        <p:spPr>
+          <a:xfrm xmlns:a="http://schemas.openxmlformats.org/drawingml/2006/main">
+            <a:off x="685800" y="1857375"/>
+            <a:ext cx="10763250" cy="2019300"/>
+          </a:xfrm>
+          <a:prstGeom xmlns:a="http://schemas.openxmlformats.org/drawingml/2006/main" prst="rect">
+            <a:avLst/>
+          </a:prstGeom>
+          <a:noFill xmlns:a="http://schemas.openxmlformats.org/drawingml/2006/main"/>
+          <a:ln xmlns:a="http://schemas.openxmlformats.org/drawingml/2006/main" w="0">
+            <a:noFill/>
+            <a:prstDash val="solid"/>
+          </a:ln>
+        </p:spPr>
+        <p:txBody>
+          <a:bodyPr xmlns:a="http://schemas.openxmlformats.org/drawingml/2006/main" anchor="ctr"/>
+          <a:lstStyle xmlns:a="http://schemas.openxmlformats.org/drawingml/2006/main">
+            <a:defPPr>
+              <a:defRPr sz="5700" b="1">
+                <a:solidFill>
+                  <a:srgbClr val="FFFFFF"/>
+                </a:solidFill>
+              </a:defRPr>
+            </a:defPPr>
+          </a:lstStyle>
+          <a:p xmlns:a="http://schemas.openxmlformats.org/drawingml/2006/main">
+            <a:pPr>
+              <a:defRPr sz="5700" b="1">
+                <a:solidFill>
+                  <a:srgbClr val="FFFFFF"/>
+                </a:solidFill>
+              </a:defRPr>
+            </a:pPr>
+            <a:r>
+              <a:rPr sz="5700" b="1">
+                <a:solidFill>
+                  <a:srgbClr val="FFFFFF"/>
+                </a:solidFill>
+              </a:rPr>
+              <a:t>A request becomes</a:t>
+            </a:r>
+          </a:p>
+          <a:p xmlns:a="http://schemas.openxmlformats.org/drawingml/2006/main">
+            <a:pPr>
+              <a:defRPr sz="5700" b="1">
+                <a:solidFill>
+                  <a:srgbClr val="FFFFFF"/>
+                </a:solidFill>
+              </a:defRPr>
+            </a:pPr>
+            <a:r>
+              <a:rPr sz="5700" b="1">
+                <a:solidFill>
+                  <a:srgbClr val="FFFFFF"/>
+                </a:solidFill>
+              </a:rPr>
+              <a:t>a response.</a:t>
+            </a:r>
+          </a:p>
+        </p:txBody>
+      </p:sp>
+      <p:sp>
+        <p:nvSpPr>
+          <p:cNvPr id="3" name="">
+            <a:extLst xmlns:a="http://schemas.openxmlformats.org/drawingml/2006/main">
+              <a:ext uri="{FF2B5EF4-FFF2-40B4-BE49-F238E27FC236}">
+                <a16:creationId xmlns:a16="http://schemas.microsoft.com/office/drawing/2014/main" id="{9B209873-87DE-4B3F-AFF3-FF6A03B82CC2}"/>
+              </a:ext>
+            </a:extLst>
+          </p:cNvPr>
+          <p:cNvSpPr>
+            <a:spLocks xmlns:a="http://schemas.openxmlformats.org/drawingml/2006/main" noGrp="1"/>
+          </p:cNvSpPr>
+          <p:nvPr/>
+        </p:nvSpPr>
+        <p:spPr>
+          <a:xfrm xmlns:a="http://schemas.openxmlformats.org/drawingml/2006/main">
+            <a:off x="714375" y="4352925"/>
+            <a:ext cx="9906000" cy="28575"/>
+          </a:xfrm>
+          <a:prstGeom xmlns:a="http://schemas.openxmlformats.org/drawingml/2006/main" prst="rect">
+            <a:avLst/>
           </a:prstGeom>
           <a:solidFill xmlns:a="http://schemas.openxmlformats.org/drawingml/2006/main">
-            <a:srgbClr val="F5F7F2"/>
+            <a:srgbClr val="CEFF75"/>
           </a:solidFill>
           <a:ln xmlns:a="http://schemas.openxmlformats.org/drawingml/2006/main" w="0">
             <a:noFill/>
@@ -7913,52 +6673,24 @@
           </a:ln>
         </p:spPr>
       </p:sp>
-      <p:pic>
-        <p:nvPicPr>
-          <p:cNvPr id="2" name="">
+      <p:sp>
+        <p:nvSpPr>
+          <p:cNvPr id="4" name="">
             <a:extLst xmlns:a="http://schemas.openxmlformats.org/drawingml/2006/main">
               <a:ext uri="{FF2B5EF4-FFF2-40B4-BE49-F238E27FC236}">
-                <a16:creationId xmlns:a16="http://schemas.microsoft.com/office/drawing/2014/main" id="{AE1FB6FF-8021-4144-AEC0-DF174C83FE73}"/>
+                <a16:creationId xmlns:a16="http://schemas.microsoft.com/office/drawing/2014/main" id="{6D5CB9C5-D4B9-4086-B220-98E91DB7AFBB}"/>
               </a:ext>
             </a:extLst>
           </p:cNvPr>
-          <p:cNvPicPr>
-            <a:picLocks xmlns:a="http://schemas.openxmlformats.org/drawingml/2006/main" noChangeAspect="1"/>
-          </p:cNvPicPr>
+          <p:cNvSpPr>
+            <a:spLocks xmlns:a="http://schemas.openxmlformats.org/drawingml/2006/main" noGrp="1"/>
+          </p:cNvSpPr>
           <p:nvPr/>
-        </p:nvPicPr>
-        <p:blipFill>
-          <a:blip xmlns:r="http://schemas.openxmlformats.org/officeDocument/2006/relationships" xmlns:a="http://schemas.openxmlformats.org/drawingml/2006/main" r:embed="Re16eab715d8644ed"/>
-          <a:stretch xmlns:a="http://schemas.openxmlformats.org/drawingml/2006/main"/>
-        </p:blipFill>
+        </p:nvSpPr>
         <p:spPr>
           <a:xfrm xmlns:a="http://schemas.openxmlformats.org/drawingml/2006/main">
-            <a:off x="5038725" y="647700"/>
-            <a:ext cx="2114550" cy="704850"/>
-          </a:xfrm>
-          <a:prstGeom xmlns:a="http://schemas.openxmlformats.org/drawingml/2006/main" prst="rect">
-            <a:avLst/>
-          </a:prstGeom>
-        </p:spPr>
-      </p:pic>
-      <p:sp>
-        <p:nvSpPr>
-          <p:cNvPr id="3" name="">
-            <a:extLst xmlns:a="http://schemas.openxmlformats.org/drawingml/2006/main">
-              <a:ext uri="{FF2B5EF4-FFF2-40B4-BE49-F238E27FC236}">
-                <a16:creationId xmlns:a16="http://schemas.microsoft.com/office/drawing/2014/main" id="{E9A74A56-2A08-4E25-9E86-4BE7757C9865}"/>
-              </a:ext>
-            </a:extLst>
-          </p:cNvPr>
-          <p:cNvSpPr>
-            <a:spLocks xmlns:a="http://schemas.openxmlformats.org/drawingml/2006/main" noGrp="1"/>
-          </p:cNvSpPr>
-          <p:nvPr/>
-        </p:nvSpPr>
-        <p:spPr>
-          <a:xfrm xmlns:a="http://schemas.openxmlformats.org/drawingml/2006/main">
-            <a:off x="1600200" y="2095500"/>
-            <a:ext cx="8991600" cy="1428750"/>
+            <a:off x="742950" y="4800600"/>
+            <a:ext cx="10477500" cy="590550"/>
           </a:xfrm>
           <a:prstGeom xmlns:a="http://schemas.openxmlformats.org/drawingml/2006/main" prst="rect">
             <a:avLst/>
@@ -7970,10 +6702,10 @@
           </a:ln>
         </p:spPr>
         <p:txBody>
-          <a:bodyPr xmlns:a="http://schemas.openxmlformats.org/drawingml/2006/main" anchor="t"/>
+          <a:bodyPr xmlns:a="http://schemas.openxmlformats.org/drawingml/2006/main" anchor="ctr"/>
           <a:lstStyle xmlns:a="http://schemas.openxmlformats.org/drawingml/2006/main">
             <a:defPPr>
-              <a:defRPr sz="4650" b="1">
+              <a:defRPr sz="2325" b="1">
                 <a:solidFill>
                   <a:srgbClr val="FFFFFF"/>
                 </a:solidFill>
@@ -7982,46 +6714,29 @@
           </a:lstStyle>
           <a:p xmlns:a="http://schemas.openxmlformats.org/drawingml/2006/main">
             <a:pPr>
-              <a:defRPr sz="4650" b="1">
+              <a:defRPr sz="2325" b="1">
                 <a:solidFill>
                   <a:srgbClr val="FFFFFF"/>
                 </a:solidFill>
               </a:defRPr>
             </a:pPr>
             <a:r>
-              <a:rPr sz="4650" b="1">
+              <a:rPr sz="2325" b="1">
                 <a:solidFill>
                   <a:srgbClr val="FFFFFF"/>
                 </a:solidFill>
               </a:rPr>
-              <a:t>People first.</a:t>
-            </a:r>
-          </a:p>
-          <a:p xmlns:a="http://schemas.openxmlformats.org/drawingml/2006/main">
-            <a:pPr>
-              <a:defRPr sz="4650" b="1">
-                <a:solidFill>
-                  <a:srgbClr val="FFFFFF"/>
-                </a:solidFill>
-              </a:defRPr>
-            </a:pPr>
-            <a:r>
-              <a:rPr sz="4650" b="1">
-                <a:solidFill>
-                  <a:srgbClr val="FFFFFF"/>
-                </a:solidFill>
-              </a:rPr>
-              <a:t>Every shift.</a:t>
-            </a:r>
-          </a:p>
-        </p:txBody>
-      </p:sp>
-      <p:sp>
-        <p:nvSpPr>
-          <p:cNvPr id="4" name="">
+              <a:t>Presage     Gemini API     Tiger Data</a:t>
+            </a:r>
+          </a:p>
+        </p:txBody>
+      </p:sp>
+      <p:sp>
+        <p:nvSpPr>
+          <p:cNvPr id="5" name="">
             <a:extLst xmlns:a="http://schemas.openxmlformats.org/drawingml/2006/main">
               <a:ext uri="{FF2B5EF4-FFF2-40B4-BE49-F238E27FC236}">
-                <a16:creationId xmlns:a16="http://schemas.microsoft.com/office/drawing/2014/main" id="{F70DB476-D6E2-4202-B870-2DD07B7189E3}"/>
+                <a16:creationId xmlns:a16="http://schemas.microsoft.com/office/drawing/2014/main" id="{BCCFC769-B1D5-4690-B28D-E0E8388C9AA0}"/>
               </a:ext>
             </a:extLst>
           </p:cNvPr>
@@ -8032,8 +6747,8 @@
         </p:nvSpPr>
         <p:spPr>
           <a:xfrm xmlns:a="http://schemas.openxmlformats.org/drawingml/2006/main">
-            <a:off x="1809750" y="3790950"/>
-            <a:ext cx="8572500" cy="457200"/>
+            <a:off x="742950" y="5905500"/>
+            <a:ext cx="10477500" cy="400050"/>
           </a:xfrm>
           <a:prstGeom xmlns:a="http://schemas.openxmlformats.org/drawingml/2006/main" prst="rect">
             <a:avLst/>
@@ -8045,147 +6760,31 @@
           </a:ln>
         </p:spPr>
         <p:txBody>
-          <a:bodyPr xmlns:a="http://schemas.openxmlformats.org/drawingml/2006/main" anchor="t"/>
+          <a:bodyPr xmlns:a="http://schemas.openxmlformats.org/drawingml/2006/main" anchor="ctr"/>
           <a:lstStyle xmlns:a="http://schemas.openxmlformats.org/drawingml/2006/main">
             <a:defPPr>
-              <a:defRPr sz="1800" b="0">
-                <a:solidFill>
-                  <a:srgbClr val="DCE9E3"/>
+              <a:defRPr sz="1575" b="0">
+                <a:solidFill>
+                  <a:srgbClr val="CEFF75"/>
                 </a:solidFill>
               </a:defRPr>
             </a:defPPr>
           </a:lstStyle>
           <a:p xmlns:a="http://schemas.openxmlformats.org/drawingml/2006/main">
             <a:pPr>
-              <a:defRPr sz="1800" b="0">
-                <a:solidFill>
-                  <a:srgbClr val="DCE9E3"/>
+              <a:defRPr sz="1575" b="0">
+                <a:solidFill>
+                  <a:srgbClr val="CEFF75"/>
                 </a:solidFill>
               </a:defRPr>
             </a:pPr>
             <a:r>
-              <a:rPr sz="1800" b="0">
-                <a:solidFill>
-                  <a:srgbClr val="DCE9E3"/>
+              <a:rPr sz="1575" b="0">
+                <a:solidFill>
+                  <a:srgbClr val="CEFF75"/>
                 </a:solidFill>
               </a:rPr>
-              <a:t>A worker-controlled check-in. A visible request. A human response.</a:t>
-            </a:r>
-          </a:p>
-        </p:txBody>
-      </p:sp>
-      <p:sp>
-        <p:nvSpPr>
-          <p:cNvPr id="5" name="">
-            <a:extLst xmlns:a="http://schemas.openxmlformats.org/drawingml/2006/main">
-              <a:ext uri="{FF2B5EF4-FFF2-40B4-BE49-F238E27FC236}">
-                <a16:creationId xmlns:a16="http://schemas.microsoft.com/office/drawing/2014/main" id="{DDFF35CA-C32A-4B71-B3FD-B7D7EFC84B2F}"/>
-              </a:ext>
-            </a:extLst>
-          </p:cNvPr>
-          <p:cNvSpPr>
-            <a:spLocks xmlns:a="http://schemas.openxmlformats.org/drawingml/2006/main" noGrp="1"/>
-          </p:cNvSpPr>
-          <p:nvPr/>
-        </p:nvSpPr>
-        <p:spPr>
-          <a:xfrm xmlns:a="http://schemas.openxmlformats.org/drawingml/2006/main">
-            <a:off x="1619250" y="5143500"/>
-            <a:ext cx="8953500" cy="285750"/>
-          </a:xfrm>
-          <a:prstGeom xmlns:a="http://schemas.openxmlformats.org/drawingml/2006/main" prst="rect">
-            <a:avLst/>
-          </a:prstGeom>
-          <a:noFill xmlns:a="http://schemas.openxmlformats.org/drawingml/2006/main"/>
-          <a:ln xmlns:a="http://schemas.openxmlformats.org/drawingml/2006/main" w="0">
-            <a:noFill/>
-            <a:prstDash val="solid"/>
-          </a:ln>
-        </p:spPr>
-        <p:txBody>
-          <a:bodyPr xmlns:a="http://schemas.openxmlformats.org/drawingml/2006/main" anchor="t"/>
-          <a:lstStyle xmlns:a="http://schemas.openxmlformats.org/drawingml/2006/main">
-            <a:defPPr>
-              <a:defRPr sz="1125" b="1">
-                <a:solidFill>
-                  <a:srgbClr val="C8FF63"/>
-                </a:solidFill>
-              </a:defRPr>
-            </a:defPPr>
-          </a:lstStyle>
-          <a:p xmlns:a="http://schemas.openxmlformats.org/drawingml/2006/main">
-            <a:pPr>
-              <a:defRPr sz="1125" b="1">
-                <a:solidFill>
-                  <a:srgbClr val="C8FF63"/>
-                </a:solidFill>
-              </a:defRPr>
-            </a:pPr>
-            <a:r>
-              <a:rPr sz="1125" b="1">
-                <a:solidFill>
-                  <a:srgbClr val="C8FF63"/>
-                </a:solidFill>
-              </a:rPr>
-              <a:t>BEST USE OF PRESAGE     BEST USE OF GEMINI API     BEST USE OF TIGER DATA</a:t>
-            </a:r>
-          </a:p>
-        </p:txBody>
-      </p:sp>
-      <p:sp>
-        <p:nvSpPr>
-          <p:cNvPr id="6" name="">
-            <a:extLst xmlns:a="http://schemas.openxmlformats.org/drawingml/2006/main">
-              <a:ext uri="{FF2B5EF4-FFF2-40B4-BE49-F238E27FC236}">
-                <a16:creationId xmlns:a16="http://schemas.microsoft.com/office/drawing/2014/main" id="{36471AD7-9225-465D-A8C7-8604629D0885}"/>
-              </a:ext>
-            </a:extLst>
-          </p:cNvPr>
-          <p:cNvSpPr>
-            <a:spLocks xmlns:a="http://schemas.openxmlformats.org/drawingml/2006/main" noGrp="1"/>
-          </p:cNvSpPr>
-          <p:nvPr/>
-        </p:nvSpPr>
-        <p:spPr>
-          <a:xfrm xmlns:a="http://schemas.openxmlformats.org/drawingml/2006/main">
-            <a:off x="3714750" y="6057900"/>
-            <a:ext cx="4762500" cy="247650"/>
-          </a:xfrm>
-          <a:prstGeom xmlns:a="http://schemas.openxmlformats.org/drawingml/2006/main" prst="rect">
-            <a:avLst/>
-          </a:prstGeom>
-          <a:noFill xmlns:a="http://schemas.openxmlformats.org/drawingml/2006/main"/>
-          <a:ln xmlns:a="http://schemas.openxmlformats.org/drawingml/2006/main" w="0">
-            <a:noFill/>
-            <a:prstDash val="solid"/>
-          </a:ln>
-        </p:spPr>
-        <p:txBody>
-          <a:bodyPr xmlns:a="http://schemas.openxmlformats.org/drawingml/2006/main" anchor="t"/>
-          <a:lstStyle xmlns:a="http://schemas.openxmlformats.org/drawingml/2006/main">
-            <a:defPPr>
-              <a:defRPr sz="1050" b="1">
-                <a:solidFill>
-                  <a:srgbClr val="FFD278"/>
-                </a:solidFill>
-              </a:defRPr>
-            </a:defPPr>
-          </a:lstStyle>
-          <a:p xmlns:a="http://schemas.openxmlformats.org/drawingml/2006/main">
-            <a:pPr>
-              <a:defRPr sz="1050" b="1">
-                <a:solidFill>
-                  <a:srgbClr val="FFD278"/>
-                </a:solidFill>
-              </a:defRPr>
-            </a:pPr>
-            <a:r>
-              <a:rPr sz="1050" b="1">
-                <a:solidFill>
-                  <a:srgbClr val="FFD278"/>
-                </a:solidFill>
-              </a:rPr>
-              <a:t>youtube.com/watch?v=CzoFM4OR6TA</a:t>
+              <a:t>Watch the demo: youtube.com/watch?v=CzoFM4OR6TA</a:t>
             </a:r>
           </a:p>
         </p:txBody>
@@ -8193,7 +6792,7 @@
     </p:spTree>
     <p:extLst>
       <p:ext uri="{BB962C8B-B14F-4D97-AF65-F5344CB8AC3E}">
-        <p14:creationId xmlns:p14="http://schemas.microsoft.com/office/powerpoint/2010/main" val="203436338"/>
+        <p14:creationId xmlns:p14="http://schemas.microsoft.com/office/powerpoint/2010/main" val="1339338293"/>
       </p:ext>
     </p:extLst>
   </p:cSld>
